--- a/lessons/lesson-08/slides.pptx
+++ b/lessons/lesson-08/slides.pptx
@@ -2,27 +2,27 @@
 <file path=ppt/presentation.xml><?xml version="1.0" encoding="utf-8"?>
 <p:presentation xmlns:p="http://schemas.openxmlformats.org/presentationml/2006/main">
   <p:sldMasterIdLst>
-    <p:sldMasterId xmlns:r="http://schemas.openxmlformats.org/officeDocument/2006/relationships" id="2147483648" r:id="R24c1d734e6b94e68"/>
+    <p:sldMasterId xmlns:r="http://schemas.openxmlformats.org/officeDocument/2006/relationships" id="2147483648" r:id="Re673566cd5e542df"/>
   </p:sldMasterIdLst>
   <p:notesMasterIdLst>
-    <p:notesMasterId xmlns:r="http://schemas.openxmlformats.org/officeDocument/2006/relationships" r:id="Rfabb6c7e112c498b"/>
+    <p:notesMasterId xmlns:r="http://schemas.openxmlformats.org/officeDocument/2006/relationships" r:id="R9cf92a57e821417d"/>
   </p:notesMasterIdLst>
   <p:sldIdLst>
-    <p:sldId xmlns:r="http://schemas.openxmlformats.org/officeDocument/2006/relationships" id="256" r:id="Rc466c93416ce4aa0"/>
-    <p:sldId xmlns:r="http://schemas.openxmlformats.org/officeDocument/2006/relationships" id="257" r:id="Rf02f196f769b4766"/>
-    <p:sldId xmlns:r="http://schemas.openxmlformats.org/officeDocument/2006/relationships" id="258" r:id="R0f4d2c5620af413d"/>
-    <p:sldId xmlns:r="http://schemas.openxmlformats.org/officeDocument/2006/relationships" id="259" r:id="R4a84aab6f22b4424"/>
-    <p:sldId xmlns:r="http://schemas.openxmlformats.org/officeDocument/2006/relationships" id="260" r:id="R4cb8b004bde04ae7"/>
-    <p:sldId xmlns:r="http://schemas.openxmlformats.org/officeDocument/2006/relationships" id="261" r:id="R71ace3eb18b94d97"/>
-    <p:sldId xmlns:r="http://schemas.openxmlformats.org/officeDocument/2006/relationships" id="262" r:id="R9f9807cd631a46d9"/>
-    <p:sldId xmlns:r="http://schemas.openxmlformats.org/officeDocument/2006/relationships" id="263" r:id="R1c2f41e0a2b341e8"/>
-    <p:sldId xmlns:r="http://schemas.openxmlformats.org/officeDocument/2006/relationships" id="264" r:id="Rea84901e97db44ae"/>
-    <p:sldId xmlns:r="http://schemas.openxmlformats.org/officeDocument/2006/relationships" id="265" r:id="R2b7726cce5e445e9"/>
-    <p:sldId xmlns:r="http://schemas.openxmlformats.org/officeDocument/2006/relationships" id="266" r:id="Raa9862b1d30c4a52"/>
-    <p:sldId xmlns:r="http://schemas.openxmlformats.org/officeDocument/2006/relationships" id="267" r:id="R8974a9c7fb8d4f18"/>
-    <p:sldId xmlns:r="http://schemas.openxmlformats.org/officeDocument/2006/relationships" id="268" r:id="Ra532425910a443e8"/>
-    <p:sldId xmlns:r="http://schemas.openxmlformats.org/officeDocument/2006/relationships" id="269" r:id="Rf04daa5418e8465b"/>
-    <p:sldId xmlns:r="http://schemas.openxmlformats.org/officeDocument/2006/relationships" id="270" r:id="Rf2eb164de5ad483e"/>
+    <p:sldId xmlns:r="http://schemas.openxmlformats.org/officeDocument/2006/relationships" id="256" r:id="Rded756f138bb4efd"/>
+    <p:sldId xmlns:r="http://schemas.openxmlformats.org/officeDocument/2006/relationships" id="257" r:id="Re67a8ee2b4e84683"/>
+    <p:sldId xmlns:r="http://schemas.openxmlformats.org/officeDocument/2006/relationships" id="258" r:id="Rc8284ee455294038"/>
+    <p:sldId xmlns:r="http://schemas.openxmlformats.org/officeDocument/2006/relationships" id="259" r:id="R10fcd6604d0e4d9f"/>
+    <p:sldId xmlns:r="http://schemas.openxmlformats.org/officeDocument/2006/relationships" id="260" r:id="Racaa492a50b84de8"/>
+    <p:sldId xmlns:r="http://schemas.openxmlformats.org/officeDocument/2006/relationships" id="261" r:id="R7db762c9085d4be2"/>
+    <p:sldId xmlns:r="http://schemas.openxmlformats.org/officeDocument/2006/relationships" id="262" r:id="Rf1f54520c13e44dd"/>
+    <p:sldId xmlns:r="http://schemas.openxmlformats.org/officeDocument/2006/relationships" id="263" r:id="Re44871c56ec64a26"/>
+    <p:sldId xmlns:r="http://schemas.openxmlformats.org/officeDocument/2006/relationships" id="264" r:id="R4277d420941447ff"/>
+    <p:sldId xmlns:r="http://schemas.openxmlformats.org/officeDocument/2006/relationships" id="265" r:id="Rd540743bf7484e86"/>
+    <p:sldId xmlns:r="http://schemas.openxmlformats.org/officeDocument/2006/relationships" id="266" r:id="Rc1f74b485e714a5d"/>
+    <p:sldId xmlns:r="http://schemas.openxmlformats.org/officeDocument/2006/relationships" id="267" r:id="Rb9cce60a900a4e78"/>
+    <p:sldId xmlns:r="http://schemas.openxmlformats.org/officeDocument/2006/relationships" id="268" r:id="R2a84817469e44501"/>
+    <p:sldId xmlns:r="http://schemas.openxmlformats.org/officeDocument/2006/relationships" id="269" r:id="R6e7d8dc496604dbb"/>
+    <p:sldId xmlns:r="http://schemas.openxmlformats.org/officeDocument/2006/relationships" id="270" r:id="R922b553689274f0b"/>
   </p:sldIdLst>
   <p:sldSz cx="12192000" cy="6858000"/>
   <p:notesSz cx="6858000" cy="9144000"/>
@@ -402,17 +402,87 @@
           <a:lstStyle xmlns:a="http://schemas.openxmlformats.org/drawingml/2006/main"/>
           <a:p xmlns:a="http://schemas.openxmlformats.org/drawingml/2006/main">
             <a:r>
+              <a:t>页面：P01 第8讲 学生研究方案分享与设计诊所</a:t>
+            </a:r>
+          </a:p>
+          <a:p xmlns:a="http://schemas.openxmlformats.org/drawingml/2006/main">
+            <a:r>
+              <a:t/>
+            </a:r>
+          </a:p>
+          <a:p xmlns:a="http://schemas.openxmlformats.org/drawingml/2006/main">
+            <a:r>
+              <a:t>讲义位置：本课讲义；见逐页母稿映射表</a:t>
+            </a:r>
+          </a:p>
+          <a:p xmlns:a="http://schemas.openxmlformats.org/drawingml/2006/main">
+            <a:r>
+              <a:t/>
+            </a:r>
+          </a:p>
+          <a:p xmlns:a="http://schemas.openxmlformats.org/drawingml/2006/main">
+            <a:r>
+              <a:t>屏显核对：</a:t>
+            </a:r>
+          </a:p>
+          <a:p xmlns:a="http://schemas.openxmlformats.org/drawingml/2006/main">
+            <a:r>
+              <a:t>第8讲 学生研究方案分享与设计诊所</a:t>
+            </a:r>
+          </a:p>
+          <a:p xmlns:a="http://schemas.openxmlformats.org/drawingml/2006/main">
+            <a:r>
+              <a:t/>
+            </a:r>
+          </a:p>
+          <a:p xmlns:a="http://schemas.openxmlformats.org/drawingml/2006/main">
+            <a:r>
+              <a:t>教师讲述：</a:t>
+            </a:r>
+          </a:p>
+          <a:p xmlns:a="http://schemas.openxmlformats.org/drawingml/2006/main">
+            <a:r>
               <a:t>开场放下第 7 课的成果。第 7 课建立了机制假设、研究判断初版和实验规格草图，但都是内部工件。本课把这些工件暴露给同伴质询，让范围、证据、baseline、停止条件和替代假设区分性在反馈下显式化。本课是形成性活动，不新增正式提交。</a:t>
             </a:r>
           </a:p>
           <a:p xmlns:a="http://schemas.openxmlformats.org/drawingml/2006/main">
             <a:r>
-              <a:t>屏显母稿细节备查：</a:t>
-            </a:r>
-          </a:p>
-          <a:p xmlns:a="http://schemas.openxmlformats.org/drawingml/2006/main">
-            <a:r>
-              <a:t>第8讲 学生研究方案分享与设计诊所</a:t>
+              <a:t/>
+            </a:r>
+          </a:p>
+          <a:p xmlns:a="http://schemas.openxmlformats.org/drawingml/2006/main">
+            <a:r>
+              <a:t>学生动作：</a:t>
+            </a:r>
+          </a:p>
+          <a:p xmlns:a="http://schemas.openxmlformats.org/drawingml/2006/main">
+            <a:r>
+              <a:t>不展开课程行政信息，直接进入下一页回扣。</a:t>
+            </a:r>
+          </a:p>
+          <a:p xmlns:a="http://schemas.openxmlformats.org/drawingml/2006/main">
+            <a:r>
+              <a:t/>
+            </a:r>
+          </a:p>
+          <a:p xmlns:a="http://schemas.openxmlformats.org/drawingml/2006/main">
+            <a:r>
+              <a:t>来源与边界：</a:t>
+            </a:r>
+          </a:p>
+          <a:p xmlns:a="http://schemas.openxmlformats.org/drawingml/2006/main">
+            <a:r>
+              <a:t>课程定位以 [syllabus.md](../../course/syllabus.md) 与 [备课规划.md](../备课规划.md) 第 8 课段为准；[assignments.md](../../course/assignments.md) "第 8 课：研究方案分享与设计诊所"段明确不正式提交。</a:t>
+            </a:r>
+          </a:p>
+          <a:p xmlns:a="http://schemas.openxmlformats.org/drawingml/2006/main">
+            <a:r>
+              <a:t/>
+            </a:r>
+          </a:p>
+          <a:p xmlns:a="http://schemas.openxmlformats.org/drawingml/2006/main">
+            <a:r>
+              <a:t>---</a:t>
             </a:r>
           </a:p>
           <a:p xmlns:a="http://schemas.openxmlformats.org/drawingml/2006/main">
@@ -427,17 +497,27 @@
           </a:p>
           <a:p xmlns:a="http://schemas.openxmlformats.org/drawingml/2006/main">
             <a:r>
-              <a:t>- /Users/bright/Projects/courses/graduate/lessons/lesson-08/slides.md</a:t>
-            </a:r>
-          </a:p>
-          <a:p xmlns:a="http://schemas.openxmlformats.org/drawingml/2006/main">
-            <a:r>
-              <a:t>- /Users/bright/Projects/courses/graduate/lessons/lesson-08/handout.md</a:t>
-            </a:r>
-          </a:p>
-          <a:p xmlns:a="http://schemas.openxmlformats.org/drawingml/2006/main">
-            <a:r>
-              <a:t>- 课程定位以 [syllabus.md](../../course/syllabus.md) 与 [备课规划.md](../备课规划.md) 第 8 课段为准；[assignments.md](../../course/assignments.md) "第 8 课：研究方案分享与设计诊所"段明确不正式提交。</a:t>
+              <a:t/>
+            </a:r>
+          </a:p>
+          <a:p xmlns:a="http://schemas.openxmlformats.org/drawingml/2006/main">
+            <a:r>
+              <a:t>- 本课 handout.md 与 slides.md</a:t>
+            </a:r>
+          </a:p>
+          <a:p xmlns:a="http://schemas.openxmlformats.org/drawingml/2006/main">
+            <a:r>
+              <a:t/>
+            </a:r>
+          </a:p>
+          <a:p xmlns:a="http://schemas.openxmlformats.org/drawingml/2006/main">
+            <a:r>
+              <a:t>- ../../course/reading-card-case.md</a:t>
+            </a:r>
+          </a:p>
+          <a:p xmlns:a="http://schemas.openxmlformats.org/drawingml/2006/main">
+            <a:r>
+              <a:t/>
             </a:r>
           </a:p>
           <a:p xmlns:a="http://schemas.openxmlformats.org/drawingml/2006/main">
@@ -512,62 +592,97 @@
           <a:lstStyle xmlns:a="http://schemas.openxmlformats.org/drawingml/2006/main"/>
           <a:p xmlns:a="http://schemas.openxmlformats.org/drawingml/2006/main">
             <a:r>
-              <a:t>演示如何只用公开论文摘要中可核验的内容重构五段，不自造实验数字。这是一个真实方案对象，不表示课程已复现其结果。</a:t>
-            </a:r>
-          </a:p>
-          <a:p xmlns:a="http://schemas.openxmlformats.org/drawingml/2006/main">
-            <a:r>
-              <a:t>屏显母稿细节备查：</a:t>
-            </a:r>
-          </a:p>
-          <a:p xmlns:a="http://schemas.openxmlformats.org/drawingml/2006/main">
-            <a:r>
-              <a:t>真实公开方案对象：Bouthillier et al. 2021，机器学习 benchmark 方差</a:t>
-            </a:r>
-          </a:p>
-          <a:p xmlns:a="http://schemas.openxmlformats.org/drawingml/2006/main">
-            <a:r>
-              <a:t/>
-            </a:r>
-          </a:p>
-          <a:p xmlns:a="http://schemas.openxmlformats.org/drawingml/2006/main">
-            <a:r>
-              <a:t>从论文可核验内容重构五段：</a:t>
-            </a:r>
-          </a:p>
-          <a:p xmlns:a="http://schemas.openxmlformats.org/drawingml/2006/main">
-            <a:r>
-              <a:t>- 问题：benchmark 比较容易把多个方差来源忽略掉</a:t>
-            </a:r>
-          </a:p>
-          <a:p xmlns:a="http://schemas.openxmlformats.org/drawingml/2006/main">
-            <a:r>
-              <a:t>- 关键证据：作者对整个 benchmarking 过程建模，并评估检测改进的错误率</a:t>
-            </a:r>
-          </a:p>
-          <a:p xmlns:a="http://schemas.openxmlformats.org/drawingml/2006/main">
-            <a:r>
-              <a:t>- 机制假设：数据抽样、初始化和超参数选择方差会改变比较结论</a:t>
-            </a:r>
-          </a:p>
-          <a:p xmlns:a="http://schemas.openxmlformats.org/drawingml/2006/main">
-            <a:r>
-              <a:t>- 最小验证：在五个深度学习任务/架构上评估比较方法</a:t>
-            </a:r>
-          </a:p>
-          <a:p xmlns:a="http://schemas.openxmlformats.org/drawingml/2006/main">
-            <a:r>
-              <a:t>- 最大风险：计算代价使全量覆盖所有方差来源不现实</a:t>
-            </a:r>
-          </a:p>
-          <a:p xmlns:a="http://schemas.openxmlformats.org/drawingml/2006/main">
-            <a:r>
-              <a:t/>
-            </a:r>
-          </a:p>
-          <a:p xmlns:a="http://schemas.openxmlformats.org/drawingml/2006/main">
-            <a:r>
-              <a:t>限时陈述按 P04 五段结构压缩。</a:t>
+              <a:t>页面：P10 完整示范：同一问题的五段分享</a:t>
+            </a:r>
+          </a:p>
+          <a:p xmlns:a="http://schemas.openxmlformats.org/drawingml/2006/main">
+            <a:r>
+              <a:t/>
+            </a:r>
+          </a:p>
+          <a:p xmlns:a="http://schemas.openxmlformats.org/drawingml/2006/main">
+            <a:r>
+              <a:t>讲义位置：handout.md §七、贯穿案例：从第 7 课输出到限时陈述</a:t>
+            </a:r>
+          </a:p>
+          <a:p xmlns:a="http://schemas.openxmlformats.org/drawingml/2006/main">
+            <a:r>
+              <a:t/>
+            </a:r>
+          </a:p>
+          <a:p xmlns:a="http://schemas.openxmlformats.org/drawingml/2006/main">
+            <a:r>
+              <a:t>屏显核对：</a:t>
+            </a:r>
+          </a:p>
+          <a:p xmlns:a="http://schemas.openxmlformats.org/drawingml/2006/main">
+            <a:r>
+              <a:t>问题：阅读卡是否降低限定条件遗漏？</a:t>
+            </a:r>
+          </a:p>
+          <a:p xmlns:a="http://schemas.openxmlformats.org/drawingml/2006/main">
+            <a:r>
+              <a:t>证据：逐条条件保留记录；当前没有真实效果结论。</a:t>
+            </a:r>
+          </a:p>
+          <a:p xmlns:a="http://schemas.openxmlformats.org/drawingml/2006/main">
+            <a:r>
+              <a:t>解释：Q1 结果与 H1/A2 机制、测量解释分开。</a:t>
+            </a:r>
+          </a:p>
+          <a:p xmlns:a="http://schemas.openxmlformats.org/drawingml/2006/main">
+            <a:r>
+              <a:t>方案：同一材料两种输出，统一标注口径。</a:t>
+            </a:r>
+          </a:p>
+          <a:p xmlns:a="http://schemas.openxmlformats.org/drawingml/2006/main">
+            <a:r>
+              <a:t>风险：材料范围窄，其他质量代价尚未测量。</a:t>
+            </a:r>
+          </a:p>
+          <a:p xmlns:a="http://schemas.openxmlformats.org/drawingml/2006/main">
+            <a:r>
+              <a:t/>
+            </a:r>
+          </a:p>
+          <a:p xmlns:a="http://schemas.openxmlformats.org/drawingml/2006/main">
+            <a:r>
+              <a:t>教师讲述：</a:t>
+            </a:r>
+          </a:p>
+          <a:p xmlns:a="http://schemas.openxmlformats.org/drawingml/2006/main">
+            <a:r>
+              <a:t>依讲义§七读一次完整短讲，不再跳到benchmark迁移案例。五段围绕同一个问题；本例为教学构造，不能说已经得到真实研究证据。学生听完只定位最影响判断的一处缺口。</a:t>
+            </a:r>
+          </a:p>
+          <a:p xmlns:a="http://schemas.openxmlformats.org/drawingml/2006/main">
+            <a:r>
+              <a:t/>
+            </a:r>
+          </a:p>
+          <a:p xmlns:a="http://schemas.openxmlformats.org/drawingml/2006/main">
+            <a:r>
+              <a:t>学生动作：</a:t>
+            </a:r>
+          </a:p>
+          <a:p xmlns:a="http://schemas.openxmlformats.org/drawingml/2006/main">
+            <a:r>
+              <a:t>标记一个会改变实验设计的问题。</a:t>
+            </a:r>
+          </a:p>
+          <a:p xmlns:a="http://schemas.openxmlformats.org/drawingml/2006/main">
+            <a:r>
+              <a:t/>
+            </a:r>
+          </a:p>
+          <a:p xmlns:a="http://schemas.openxmlformats.org/drawingml/2006/main">
+            <a:r>
+              <a:t>来源与边界：</a:t>
+            </a:r>
+          </a:p>
+          <a:p xmlns:a="http://schemas.openxmlformats.org/drawingml/2006/main">
+            <a:r>
+              <a:t>./handout.md；课堂示例与构造数据见 ../../course/reading-card-case.md</a:t>
             </a:r>
           </a:p>
           <a:p xmlns:a="http://schemas.openxmlformats.org/drawingml/2006/main">
@@ -582,17 +697,27 @@
           </a:p>
           <a:p xmlns:a="http://schemas.openxmlformats.org/drawingml/2006/main">
             <a:r>
-              <a:t>- /Users/bright/Projects/courses/graduate/lessons/lesson-08/slides.md</a:t>
-            </a:r>
-          </a:p>
-          <a:p xmlns:a="http://schemas.openxmlformats.org/drawingml/2006/main">
-            <a:r>
-              <a:t>- /Users/bright/Projects/courses/graduate/lessons/lesson-08/handout.md</a:t>
-            </a:r>
-          </a:p>
-          <a:p xmlns:a="http://schemas.openxmlformats.org/drawingml/2006/main">
-            <a:r>
-              <a:t>- Bouthillier, X. et al. "Accounting for Variance in Machine Learning Benchmarks." MLSys 2021，官方论文与摘要；本页仅重构公开可核验内容，不宣称课程已复现结果。</a:t>
+              <a:t/>
+            </a:r>
+          </a:p>
+          <a:p xmlns:a="http://schemas.openxmlformats.org/drawingml/2006/main">
+            <a:r>
+              <a:t>- 本课 handout.md 与 slides.md</a:t>
+            </a:r>
+          </a:p>
+          <a:p xmlns:a="http://schemas.openxmlformats.org/drawingml/2006/main">
+            <a:r>
+              <a:t/>
+            </a:r>
+          </a:p>
+          <a:p xmlns:a="http://schemas.openxmlformats.org/drawingml/2006/main">
+            <a:r>
+              <a:t>- ../../course/reading-card-case.md</a:t>
+            </a:r>
+          </a:p>
+          <a:p xmlns:a="http://schemas.openxmlformats.org/drawingml/2006/main">
+            <a:r>
+              <a:t/>
             </a:r>
           </a:p>
           <a:p xmlns:a="http://schemas.openxmlformats.org/drawingml/2006/main">
@@ -667,82 +792,97 @@
           <a:lstStyle xmlns:a="http://schemas.openxmlformats.org/drawingml/2006/main"/>
           <a:p xmlns:a="http://schemas.openxmlformats.org/drawingml/2006/main">
             <a:r>
-              <a:t>演示让学生区分对齐 rubric 的具体反馈与泛化判断。泛化反馈先澄清；重要性不清时可暂缓结论，并写明下一步触发条件。</a:t>
-            </a:r>
-          </a:p>
-          <a:p xmlns:a="http://schemas.openxmlformats.org/drawingml/2006/main">
-            <a:r>
-              <a:t>屏显母稿细节备查：</a:t>
-            </a:r>
-          </a:p>
-          <a:p xmlns:a="http://schemas.openxmlformats.org/drawingml/2006/main">
-            <a:r>
-              <a:t>**虚构教学反馈｜基于 P10 公开论文重构，仅演示决策记录**</a:t>
-            </a:r>
-          </a:p>
-          <a:p xmlns:a="http://schemas.openxmlformats.org/drawingml/2006/main">
-            <a:r>
-              <a:t/>
-            </a:r>
-          </a:p>
-          <a:p xmlns:a="http://schemas.openxmlformats.org/drawingml/2006/main">
-            <a:r>
-              <a:t>教师扮演同伴，给出三条反馈：</a:t>
-            </a:r>
-          </a:p>
-          <a:p xmlns:a="http://schemas.openxmlformats.org/drawingml/2006/main">
-            <a:r>
-              <a:t/>
-            </a:r>
-          </a:p>
-          <a:p xmlns:a="http://schemas.openxmlformats.org/drawingml/2006/main">
-            <a:r>
-              <a:t>1. 对齐 rubric："数据抽样与初始化方差的区分设计未写清"（可检验性）</a:t>
-            </a:r>
-          </a:p>
-          <a:p xmlns:a="http://schemas.openxmlformats.org/drawingml/2006/main">
-            <a:r>
-              <a:t>2. 泛化判断："比较不公平"（未指明何种差异）</a:t>
-            </a:r>
-          </a:p>
-          <a:p xmlns:a="http://schemas.openxmlformats.org/drawingml/2006/main">
-            <a:r>
-              <a:t>3. 对齐 rubric："没说清误判改进会改变哪项 benchmark 决策"（问题重要性）</a:t>
-            </a:r>
-          </a:p>
-          <a:p xmlns:a="http://schemas.openxmlformats.org/drawingml/2006/main">
-            <a:r>
-              <a:t/>
-            </a:r>
-          </a:p>
-          <a:p xmlns:a="http://schemas.openxmlformats.org/drawingml/2006/main">
-            <a:r>
-              <a:t>反馈处理当场写：</a:t>
-            </a:r>
-          </a:p>
-          <a:p xmlns:a="http://schemas.openxmlformats.org/drawingml/2006/main">
-            <a:r>
-              <a:t>- 反馈 1 → 采纳，影响=实验规格 §假设对应/变量</a:t>
-            </a:r>
-          </a:p>
-          <a:p xmlns:a="http://schemas.openxmlformats.org/drawingml/2006/main">
-            <a:r>
-              <a:t>- 反馈 2 → 澄清，请反馈者指明不公平的变量或比较环节</a:t>
-            </a:r>
-          </a:p>
-          <a:p xmlns:a="http://schemas.openxmlformats.org/drawingml/2006/main">
-            <a:r>
-              <a:t>- 反馈 3 → 暂缓，影响=问题定义与研究判断；先写明哪种误判率会改变比较决策</a:t>
-            </a:r>
-          </a:p>
-          <a:p xmlns:a="http://schemas.openxmlformats.org/drawingml/2006/main">
-            <a:r>
-              <a:t/>
-            </a:r>
-          </a:p>
-          <a:p xmlns:a="http://schemas.openxmlformats.org/drawingml/2006/main">
-            <a:r>
-              <a:t>&gt; 处理动作由真实反馈决定，不强制出现拒绝。</a:t>
+              <a:t>页面：P11 好反馈要改变一个具体设计</a:t>
+            </a:r>
+          </a:p>
+          <a:p xmlns:a="http://schemas.openxmlformats.org/drawingml/2006/main">
+            <a:r>
+              <a:t/>
+            </a:r>
+          </a:p>
+          <a:p xmlns:a="http://schemas.openxmlformats.org/drawingml/2006/main">
+            <a:r>
+              <a:t>讲义位置：handout.md §七、贯穿案例：从第 7 课输出到限时陈述</a:t>
+            </a:r>
+          </a:p>
+          <a:p xmlns:a="http://schemas.openxmlformats.org/drawingml/2006/main">
+            <a:r>
+              <a:t/>
+            </a:r>
+          </a:p>
+          <a:p xmlns:a="http://schemas.openxmlformats.org/drawingml/2006/main">
+            <a:r>
+              <a:t>屏显核对：</a:t>
+            </a:r>
+          </a:p>
+          <a:p xmlns:a="http://schemas.openxmlformats.org/drawingml/2006/main">
+            <a:r>
+              <a:t>泛泛意见：“再严谨一点。”</a:t>
+            </a:r>
+          </a:p>
+          <a:p xmlns:a="http://schemas.openxmlformats.org/drawingml/2006/main">
+            <a:r>
+              <a:t>可执行意见：“评分者能否看见组别？请补盲化办法。”</a:t>
+            </a:r>
+          </a:p>
+          <a:p xmlns:a="http://schemas.openxmlformats.org/drawingml/2006/main">
+            <a:r>
+              <a:t>作者处理：“接受；在评价协议补入匿名顺序与统一规则。”</a:t>
+            </a:r>
+          </a:p>
+          <a:p xmlns:a="http://schemas.openxmlformats.org/drawingml/2006/main">
+            <a:r>
+              <a:t/>
+            </a:r>
+          </a:p>
+          <a:p xmlns:a="http://schemas.openxmlformats.org/drawingml/2006/main">
+            <a:r>
+              <a:t>反馈 → 理由 → 文件中的实际修改</a:t>
+            </a:r>
+          </a:p>
+          <a:p xmlns:a="http://schemas.openxmlformats.org/drawingml/2006/main">
+            <a:r>
+              <a:t/>
+            </a:r>
+          </a:p>
+          <a:p xmlns:a="http://schemas.openxmlformats.org/drawingml/2006/main">
+            <a:r>
+              <a:t>教师讲述：</a:t>
+            </a:r>
+          </a:p>
+          <a:p xmlns:a="http://schemas.openxmlformats.org/drawingml/2006/main">
+            <a:r>
+              <a:t>演示从意见定位到实验草图修改；不强迫出现接受、拒绝每一种状态。主例继续用阅读卡。其他题目只用于学生自己的迁移。</a:t>
+            </a:r>
+          </a:p>
+          <a:p xmlns:a="http://schemas.openxmlformats.org/drawingml/2006/main">
+            <a:r>
+              <a:t/>
+            </a:r>
+          </a:p>
+          <a:p xmlns:a="http://schemas.openxmlformats.org/drawingml/2006/main">
+            <a:r>
+              <a:t>学生动作：</a:t>
+            </a:r>
+          </a:p>
+          <a:p xmlns:a="http://schemas.openxmlformats.org/drawingml/2006/main">
+            <a:r>
+              <a:t>两人交换一条意见，作者写处理理由及修改位置。</a:t>
+            </a:r>
+          </a:p>
+          <a:p xmlns:a="http://schemas.openxmlformats.org/drawingml/2006/main">
+            <a:r>
+              <a:t/>
+            </a:r>
+          </a:p>
+          <a:p xmlns:a="http://schemas.openxmlformats.org/drawingml/2006/main">
+            <a:r>
+              <a:t>来源与边界：</a:t>
+            </a:r>
+          </a:p>
+          <a:p xmlns:a="http://schemas.openxmlformats.org/drawingml/2006/main">
+            <a:r>
+              <a:t>./handout.md；课堂示例与构造数据见 ../../course/reading-card-case.md</a:t>
             </a:r>
           </a:p>
           <a:p xmlns:a="http://schemas.openxmlformats.org/drawingml/2006/main">
@@ -757,17 +897,27 @@
           </a:p>
           <a:p xmlns:a="http://schemas.openxmlformats.org/drawingml/2006/main">
             <a:r>
-              <a:t>- /Users/bright/Projects/courses/graduate/lessons/lesson-08/slides.md</a:t>
-            </a:r>
-          </a:p>
-          <a:p xmlns:a="http://schemas.openxmlformats.org/drawingml/2006/main">
-            <a:r>
-              <a:t>- /Users/bright/Projects/courses/graduate/lessons/lesson-08/handout.md</a:t>
-            </a:r>
-          </a:p>
-          <a:p xmlns:a="http://schemas.openxmlformats.org/drawingml/2006/main">
-            <a:r>
-              <a:t>- 虚构教学反馈，只演示“反馈 → 处理动作 → 理由与回写位置”；不是 Bouthillier et al. 的真实评审意见。</a:t>
+              <a:t/>
+            </a:r>
+          </a:p>
+          <a:p xmlns:a="http://schemas.openxmlformats.org/drawingml/2006/main">
+            <a:r>
+              <a:t>- 本课 handout.md 与 slides.md</a:t>
+            </a:r>
+          </a:p>
+          <a:p xmlns:a="http://schemas.openxmlformats.org/drawingml/2006/main">
+            <a:r>
+              <a:t/>
+            </a:r>
+          </a:p>
+          <a:p xmlns:a="http://schemas.openxmlformats.org/drawingml/2006/main">
+            <a:r>
+              <a:t>- ../../course/reading-card-case.md</a:t>
+            </a:r>
+          </a:p>
+          <a:p xmlns:a="http://schemas.openxmlformats.org/drawingml/2006/main">
+            <a:r>
+              <a:t/>
             </a:r>
           </a:p>
           <a:p xmlns:a="http://schemas.openxmlformats.org/drawingml/2006/main">
@@ -842,67 +992,137 @@
           <a:lstStyle xmlns:a="http://schemas.openxmlformats.org/drawingml/2006/main"/>
           <a:p xmlns:a="http://schemas.openxmlformats.org/drawingml/2006/main">
             <a:r>
+              <a:t>页面：P12 第 8 课只补两项判断门材料，其余缺口留到第 9 课</a:t>
+            </a:r>
+          </a:p>
+          <a:p xmlns:a="http://schemas.openxmlformats.org/drawingml/2006/main">
+            <a:r>
+              <a:t/>
+            </a:r>
+          </a:p>
+          <a:p xmlns:a="http://schemas.openxmlformats.org/drawingml/2006/main">
+            <a:r>
+              <a:t>讲义位置：本课讲义；见逐页母稿映射表</a:t>
+            </a:r>
+          </a:p>
+          <a:p xmlns:a="http://schemas.openxmlformats.org/drawingml/2006/main">
+            <a:r>
+              <a:t/>
+            </a:r>
+          </a:p>
+          <a:p xmlns:a="http://schemas.openxmlformats.org/drawingml/2006/main">
+            <a:r>
+              <a:t>屏显核对：</a:t>
+            </a:r>
+          </a:p>
+          <a:p xmlns:a="http://schemas.openxmlformats.org/drawingml/2006/main">
+            <a:r>
+              <a:t>| 判断门条件 | 第 8 课预检 | 缺口 |</a:t>
+            </a:r>
+          </a:p>
+          <a:p xmlns:a="http://schemas.openxmlformats.org/drawingml/2006/main">
+            <a:r>
+              <a:t>| --- | --- | --- |</a:t>
+            </a:r>
+          </a:p>
+          <a:p xmlns:a="http://schemas.openxmlformats.org/drawingml/2006/main">
+            <a:r>
+              <a:t>| 可执行 baseline | 部分 | 第 9 课跑通 |</a:t>
+            </a:r>
+          </a:p>
+          <a:p xmlns:a="http://schemas.openxmlformats.org/drawingml/2006/main">
+            <a:r>
+              <a:t>| 数据/材料/指标/限制 | 部分 | 第 9 课补 |</a:t>
+            </a:r>
+          </a:p>
+          <a:p xmlns:a="http://schemas.openxmlformats.org/drawingml/2006/main">
+            <a:r>
+              <a:t>| 环境/配置/随机种子 | 未覆盖 | 第 9 课 |</a:t>
+            </a:r>
+          </a:p>
+          <a:p xmlns:a="http://schemas.openxmlformats.org/drawingml/2006/main">
+            <a:r>
+              <a:t>| 至少 2 条研究判断 | 本课决策表补入 | — |</a:t>
+            </a:r>
+          </a:p>
+          <a:p xmlns:a="http://schemas.openxmlformats.org/drawingml/2006/main">
+            <a:r>
+              <a:t>| 实验规格完整 | 第 7 课草图 + 本课反馈 | 本课反馈补全 |</a:t>
+            </a:r>
+          </a:p>
+          <a:p xmlns:a="http://schemas.openxmlformats.org/drawingml/2006/main">
+            <a:r>
+              <a:t>| 第 8 课同伴反馈处理记录 | 本课产出 | — |</a:t>
+            </a:r>
+          </a:p>
+          <a:p xmlns:a="http://schemas.openxmlformats.org/drawingml/2006/main">
+            <a:r>
+              <a:t>| 最大风险和失败预案 | 本课陈述 + 反馈 | — |</a:t>
+            </a:r>
+          </a:p>
+          <a:p xmlns:a="http://schemas.openxmlformats.org/drawingml/2006/main">
+            <a:r>
+              <a:t>| 一条已遇失败或放弃备选记录 | 可先登记 | 第 9 课补足处理理由 |</a:t>
+            </a:r>
+          </a:p>
+          <a:p xmlns:a="http://schemas.openxmlformats.org/drawingml/2006/main">
+            <a:r>
+              <a:t>| 迁移到 project-template | 未覆盖 | 第 9 课 |</a:t>
+            </a:r>
+          </a:p>
+          <a:p xmlns:a="http://schemas.openxmlformats.org/drawingml/2006/main">
+            <a:r>
+              <a:t/>
+            </a:r>
+          </a:p>
+          <a:p xmlns:a="http://schemas.openxmlformats.org/drawingml/2006/main">
+            <a:r>
+              <a:t>教师讲述：</a:t>
+            </a:r>
+          </a:p>
+          <a:p xmlns:a="http://schemas.openxmlformats.org/drawingml/2006/main">
+            <a:r>
               <a:t>本课直接产出"第 8 课同伴反馈处理记录"和"至少 2 条研究判断"两项判断门材料。其余条件第 9 课内补齐。预检让学生看到第 9 课前还要补什么。</a:t>
             </a:r>
           </a:p>
           <a:p xmlns:a="http://schemas.openxmlformats.org/drawingml/2006/main">
             <a:r>
-              <a:t>屏显母稿细节备查：</a:t>
-            </a:r>
-          </a:p>
-          <a:p xmlns:a="http://schemas.openxmlformats.org/drawingml/2006/main">
-            <a:r>
-              <a:t>| 判断门条件 | 第 8 课预检 | 缺口 |</a:t>
-            </a:r>
-          </a:p>
-          <a:p xmlns:a="http://schemas.openxmlformats.org/drawingml/2006/main">
-            <a:r>
-              <a:t>| --- | --- | --- |</a:t>
-            </a:r>
-          </a:p>
-          <a:p xmlns:a="http://schemas.openxmlformats.org/drawingml/2006/main">
-            <a:r>
-              <a:t>| 可执行 baseline | 部分 | 第 9 课跑通 |</a:t>
-            </a:r>
-          </a:p>
-          <a:p xmlns:a="http://schemas.openxmlformats.org/drawingml/2006/main">
-            <a:r>
-              <a:t>| 数据/材料/指标/限制 | 部分 | 第 9 课补 |</a:t>
-            </a:r>
-          </a:p>
-          <a:p xmlns:a="http://schemas.openxmlformats.org/drawingml/2006/main">
-            <a:r>
-              <a:t>| 环境/配置/随机种子 | 未覆盖 | 第 9 课 |</a:t>
-            </a:r>
-          </a:p>
-          <a:p xmlns:a="http://schemas.openxmlformats.org/drawingml/2006/main">
-            <a:r>
-              <a:t>| 至少 2 条研究判断 | 本课决策表补入 | — |</a:t>
-            </a:r>
-          </a:p>
-          <a:p xmlns:a="http://schemas.openxmlformats.org/drawingml/2006/main">
-            <a:r>
-              <a:t>| 实验规格完整 | 第 7 课草图 + 本课反馈 | 本课反馈补全 |</a:t>
-            </a:r>
-          </a:p>
-          <a:p xmlns:a="http://schemas.openxmlformats.org/drawingml/2006/main">
-            <a:r>
-              <a:t>| 第 8 课同伴反馈处理记录 | 本课产出 | — |</a:t>
-            </a:r>
-          </a:p>
-          <a:p xmlns:a="http://schemas.openxmlformats.org/drawingml/2006/main">
-            <a:r>
-              <a:t>| 最大风险和失败预案 | 本课陈述 + 反馈 | — |</a:t>
-            </a:r>
-          </a:p>
-          <a:p xmlns:a="http://schemas.openxmlformats.org/drawingml/2006/main">
-            <a:r>
-              <a:t>| 一条已遇失败或放弃备选记录 | 可先登记 | 第 9 课补足处理理由 |</a:t>
-            </a:r>
-          </a:p>
-          <a:p xmlns:a="http://schemas.openxmlformats.org/drawingml/2006/main">
-            <a:r>
-              <a:t>| 迁移到 project-template | 未覆盖 | 第 9 课 |</a:t>
+              <a:t/>
+            </a:r>
+          </a:p>
+          <a:p xmlns:a="http://schemas.openxmlformats.org/drawingml/2006/main">
+            <a:r>
+              <a:t>学生动作：</a:t>
+            </a:r>
+          </a:p>
+          <a:p xmlns:a="http://schemas.openxmlformats.org/drawingml/2006/main">
+            <a:r>
+              <a:t>让学生用自己的方案标出当前已满足、部分满足和未覆盖项。</a:t>
+            </a:r>
+          </a:p>
+          <a:p xmlns:a="http://schemas.openxmlformats.org/drawingml/2006/main">
+            <a:r>
+              <a:t/>
+            </a:r>
+          </a:p>
+          <a:p xmlns:a="http://schemas.openxmlformats.org/drawingml/2006/main">
+            <a:r>
+              <a:t>来源与边界：</a:t>
+            </a:r>
+          </a:p>
+          <a:p xmlns:a="http://schemas.openxmlformats.org/drawingml/2006/main">
+            <a:r>
+              <a:t>讲义 §六·1；[assignments.md](../../course/assignments.md) Checkpoint 2 判断门条件——权威来源。</a:t>
+            </a:r>
+          </a:p>
+          <a:p xmlns:a="http://schemas.openxmlformats.org/drawingml/2006/main">
+            <a:r>
+              <a:t/>
+            </a:r>
+          </a:p>
+          <a:p xmlns:a="http://schemas.openxmlformats.org/drawingml/2006/main">
+            <a:r>
+              <a:t>---</a:t>
             </a:r>
           </a:p>
           <a:p xmlns:a="http://schemas.openxmlformats.org/drawingml/2006/main">
@@ -917,17 +1137,27 @@
           </a:p>
           <a:p xmlns:a="http://schemas.openxmlformats.org/drawingml/2006/main">
             <a:r>
-              <a:t>- /Users/bright/Projects/courses/graduate/lessons/lesson-08/slides.md</a:t>
-            </a:r>
-          </a:p>
-          <a:p xmlns:a="http://schemas.openxmlformats.org/drawingml/2006/main">
-            <a:r>
-              <a:t>- /Users/bright/Projects/courses/graduate/lessons/lesson-08/handout.md</a:t>
-            </a:r>
-          </a:p>
-          <a:p xmlns:a="http://schemas.openxmlformats.org/drawingml/2006/main">
-            <a:r>
-              <a:t>- 讲义 §六·1；[assignments.md](../../course/assignments.md) Checkpoint 2 判断门条件——权威来源。</a:t>
+              <a:t/>
+            </a:r>
+          </a:p>
+          <a:p xmlns:a="http://schemas.openxmlformats.org/drawingml/2006/main">
+            <a:r>
+              <a:t>- 本课 handout.md 与 slides.md</a:t>
+            </a:r>
+          </a:p>
+          <a:p xmlns:a="http://schemas.openxmlformats.org/drawingml/2006/main">
+            <a:r>
+              <a:t/>
+            </a:r>
+          </a:p>
+          <a:p xmlns:a="http://schemas.openxmlformats.org/drawingml/2006/main">
+            <a:r>
+              <a:t>- ../../course/reading-card-case.md</a:t>
+            </a:r>
+          </a:p>
+          <a:p xmlns:a="http://schemas.openxmlformats.org/drawingml/2006/main">
+            <a:r>
+              <a:t/>
             </a:r>
           </a:p>
           <a:p xmlns:a="http://schemas.openxmlformats.org/drawingml/2006/main">
@@ -1002,52 +1232,122 @@
           <a:lstStyle xmlns:a="http://schemas.openxmlformats.org/drawingml/2006/main"/>
           <a:p xmlns:a="http://schemas.openxmlformats.org/drawingml/2006/main">
             <a:r>
+              <a:t>页面：P13 实践：完成陈述、互查、决策与判断门预检</a:t>
+            </a:r>
+          </a:p>
+          <a:p xmlns:a="http://schemas.openxmlformats.org/drawingml/2006/main">
+            <a:r>
+              <a:t/>
+            </a:r>
+          </a:p>
+          <a:p xmlns:a="http://schemas.openxmlformats.org/drawingml/2006/main">
+            <a:r>
+              <a:t>讲义位置：本课讲义；见逐页母稿映射表</a:t>
+            </a:r>
+          </a:p>
+          <a:p xmlns:a="http://schemas.openxmlformats.org/drawingml/2006/main">
+            <a:r>
+              <a:t/>
+            </a:r>
+          </a:p>
+          <a:p xmlns:a="http://schemas.openxmlformats.org/drawingml/2006/main">
+            <a:r>
+              <a:t>屏显核对：</a:t>
+            </a:r>
+          </a:p>
+          <a:p xmlns:a="http://schemas.openxmlformats.org/drawingml/2006/main">
+            <a:r>
+              <a:t>实践任务：</a:t>
+            </a:r>
+          </a:p>
+          <a:p xmlns:a="http://schemas.openxmlformats.org/drawingml/2006/main">
+            <a:r>
+              <a:t>1. 补全限时陈述稿五段</a:t>
+            </a:r>
+          </a:p>
+          <a:p xmlns:a="http://schemas.openxmlformats.org/drawingml/2006/main">
+            <a:r>
+              <a:t>2. 同伴互查：每人一次限时陈述与反馈</a:t>
+            </a:r>
+          </a:p>
+          <a:p xmlns:a="http://schemas.openxmlformats.org/drawingml/2006/main">
+            <a:r>
+              <a:t>3. 根据真实反馈选择处理动作，处理至少 2 条</a:t>
+            </a:r>
+          </a:p>
+          <a:p xmlns:a="http://schemas.openxmlformats.org/drawingml/2006/main">
+            <a:r>
+              <a:t>4. 现场修订 1 处，并记录理由与位置</a:t>
+            </a:r>
+          </a:p>
+          <a:p xmlns:a="http://schemas.openxmlformats.org/drawingml/2006/main">
+            <a:r>
+              <a:t/>
+            </a:r>
+          </a:p>
+          <a:p xmlns:a="http://schemas.openxmlformats.org/drawingml/2006/main">
+            <a:r>
+              <a:t>互查分组与轮次表见投屏。</a:t>
+            </a:r>
+          </a:p>
+          <a:p xmlns:a="http://schemas.openxmlformats.org/drawingml/2006/main">
+            <a:r>
+              <a:t>分组与轮次见教师口头指令；本页只保留学生动作。</a:t>
+            </a:r>
+          </a:p>
+          <a:p xmlns:a="http://schemas.openxmlformats.org/drawingml/2006/main">
+            <a:r>
+              <a:t/>
+            </a:r>
+          </a:p>
+          <a:p xmlns:a="http://schemas.openxmlformats.org/drawingml/2006/main">
+            <a:r>
+              <a:t>教师讲述：</a:t>
+            </a:r>
+          </a:p>
+          <a:p xmlns:a="http://schemas.openxmlformats.org/drawingml/2006/main">
+            <a:r>
               <a:t>教师内部执行：15 人分 5 个三人组，每人 3 分钟陈述 + 2 分钟合并反馈，基础轮次 15 分钟；40 分钟分组块足以完成轮次、追问、转换与补记。随后做全班诊断，再进入作者处理与现场修订。</a:t>
             </a:r>
           </a:p>
           <a:p xmlns:a="http://schemas.openxmlformats.org/drawingml/2006/main">
             <a:r>
-              <a:t>屏显母稿细节备查：</a:t>
-            </a:r>
-          </a:p>
-          <a:p xmlns:a="http://schemas.openxmlformats.org/drawingml/2006/main">
-            <a:r>
-              <a:t>实践任务：</a:t>
-            </a:r>
-          </a:p>
-          <a:p xmlns:a="http://schemas.openxmlformats.org/drawingml/2006/main">
-            <a:r>
-              <a:t>1. 补全限时陈述稿五段</a:t>
-            </a:r>
-          </a:p>
-          <a:p xmlns:a="http://schemas.openxmlformats.org/drawingml/2006/main">
-            <a:r>
-              <a:t>2. 同伴互查：每人一次限时陈述与反馈</a:t>
-            </a:r>
-          </a:p>
-          <a:p xmlns:a="http://schemas.openxmlformats.org/drawingml/2006/main">
-            <a:r>
-              <a:t>3. 根据真实反馈选择处理动作，处理至少 2 条</a:t>
-            </a:r>
-          </a:p>
-          <a:p xmlns:a="http://schemas.openxmlformats.org/drawingml/2006/main">
-            <a:r>
-              <a:t>4. 现场修订 1 处，并记录理由与位置</a:t>
-            </a:r>
-          </a:p>
-          <a:p xmlns:a="http://schemas.openxmlformats.org/drawingml/2006/main">
-            <a:r>
-              <a:t/>
-            </a:r>
-          </a:p>
-          <a:p xmlns:a="http://schemas.openxmlformats.org/drawingml/2006/main">
-            <a:r>
-              <a:t>互查分组与轮次表见投屏。</a:t>
-            </a:r>
-          </a:p>
-          <a:p xmlns:a="http://schemas.openxmlformats.org/drawingml/2006/main">
-            <a:r>
-              <a:t>分组与轮次见教师口头指令；本页只保留学生动作。</a:t>
+              <a:t/>
+            </a:r>
+          </a:p>
+          <a:p xmlns:a="http://schemas.openxmlformats.org/drawingml/2006/main">
+            <a:r>
+              <a:t>学生动作：</a:t>
+            </a:r>
+          </a:p>
+          <a:p xmlns:a="http://schemas.openxmlformats.org/drawingml/2006/main">
+            <a:r>
+              <a:t>学生补全陈述稿，进入互查。</a:t>
+            </a:r>
+          </a:p>
+          <a:p xmlns:a="http://schemas.openxmlformats.org/drawingml/2006/main">
+            <a:r>
+              <a:t/>
+            </a:r>
+          </a:p>
+          <a:p xmlns:a="http://schemas.openxmlformats.org/drawingml/2006/main">
+            <a:r>
+              <a:t>来源与边界：</a:t>
+            </a:r>
+          </a:p>
+          <a:p xmlns:a="http://schemas.openxmlformats.org/drawingml/2006/main">
+            <a:r>
+              <a:t>讲义 §八 练习 1-6；[assignments.md](../../course/assignments.md) 第 8 课段。</a:t>
+            </a:r>
+          </a:p>
+          <a:p xmlns:a="http://schemas.openxmlformats.org/drawingml/2006/main">
+            <a:r>
+              <a:t/>
+            </a:r>
+          </a:p>
+          <a:p xmlns:a="http://schemas.openxmlformats.org/drawingml/2006/main">
+            <a:r>
+              <a:t>---</a:t>
             </a:r>
           </a:p>
           <a:p xmlns:a="http://schemas.openxmlformats.org/drawingml/2006/main">
@@ -1062,17 +1362,27 @@
           </a:p>
           <a:p xmlns:a="http://schemas.openxmlformats.org/drawingml/2006/main">
             <a:r>
-              <a:t>- /Users/bright/Projects/courses/graduate/lessons/lesson-08/slides.md</a:t>
-            </a:r>
-          </a:p>
-          <a:p xmlns:a="http://schemas.openxmlformats.org/drawingml/2006/main">
-            <a:r>
-              <a:t>- /Users/bright/Projects/courses/graduate/lessons/lesson-08/handout.md</a:t>
-            </a:r>
-          </a:p>
-          <a:p xmlns:a="http://schemas.openxmlformats.org/drawingml/2006/main">
-            <a:r>
-              <a:t>- 讲义 §八 练习 1-6；[assignments.md](../../course/assignments.md) 第 8 课段。</a:t>
+              <a:t/>
+            </a:r>
+          </a:p>
+          <a:p xmlns:a="http://schemas.openxmlformats.org/drawingml/2006/main">
+            <a:r>
+              <a:t>- 本课 handout.md 与 slides.md</a:t>
+            </a:r>
+          </a:p>
+          <a:p xmlns:a="http://schemas.openxmlformats.org/drawingml/2006/main">
+            <a:r>
+              <a:t/>
+            </a:r>
+          </a:p>
+          <a:p xmlns:a="http://schemas.openxmlformats.org/drawingml/2006/main">
+            <a:r>
+              <a:t>- ../../course/reading-card-case.md</a:t>
+            </a:r>
+          </a:p>
+          <a:p xmlns:a="http://schemas.openxmlformats.org/drawingml/2006/main">
+            <a:r>
+              <a:t/>
             </a:r>
           </a:p>
           <a:p xmlns:a="http://schemas.openxmlformats.org/drawingml/2006/main">
@@ -1147,52 +1457,122 @@
           <a:lstStyle xmlns:a="http://schemas.openxmlformats.org/drawingml/2006/main"/>
           <a:p xmlns:a="http://schemas.openxmlformats.org/drawingml/2006/main">
             <a:r>
+              <a:t>页面：P14 本讲知识点总结</a:t>
+            </a:r>
+          </a:p>
+          <a:p xmlns:a="http://schemas.openxmlformats.org/drawingml/2006/main">
+            <a:r>
+              <a:t/>
+            </a:r>
+          </a:p>
+          <a:p xmlns:a="http://schemas.openxmlformats.org/drawingml/2006/main">
+            <a:r>
+              <a:t>讲义位置：本课讲义；见逐页母稿映射表</a:t>
+            </a:r>
+          </a:p>
+          <a:p xmlns:a="http://schemas.openxmlformats.org/drawingml/2006/main">
+            <a:r>
+              <a:t/>
+            </a:r>
+          </a:p>
+          <a:p xmlns:a="http://schemas.openxmlformats.org/drawingml/2006/main">
+            <a:r>
+              <a:t>屏显核对：</a:t>
+            </a:r>
+          </a:p>
+          <a:p xmlns:a="http://schemas.openxmlformats.org/drawingml/2006/main">
+            <a:r>
+              <a:t>方案陈述 → 同伴质询 → 作者决策 → 下一步行动</a:t>
+            </a:r>
+          </a:p>
+          <a:p xmlns:a="http://schemas.openxmlformats.org/drawingml/2006/main">
+            <a:r>
+              <a:t/>
+            </a:r>
+          </a:p>
+          <a:p xmlns:a="http://schemas.openxmlformats.org/drawingml/2006/main">
+            <a:r>
+              <a:t>- 用最小结构暴露问题、证据、机制与实验；</a:t>
+            </a:r>
+          </a:p>
+          <a:p xmlns:a="http://schemas.openxmlformats.org/drawingml/2006/main">
+            <a:r>
+              <a:t>- 同伴按诊断维度提问，不替作者决定；</a:t>
+            </a:r>
+          </a:p>
+          <a:p xmlns:a="http://schemas.openxmlformats.org/drawingml/2006/main">
+            <a:r>
+              <a:t>- 作者逐条选择采纳、澄清、补证、暂缓或保留异议，并记理由与位置；</a:t>
+            </a:r>
+          </a:p>
+          <a:p xmlns:a="http://schemas.openxmlformats.org/drawingml/2006/main">
+            <a:r>
+              <a:t>- 把反馈落到判断门工件和实验计划。</a:t>
+            </a:r>
+          </a:p>
+          <a:p xmlns:a="http://schemas.openxmlformats.org/drawingml/2006/main">
+            <a:r>
+              <a:t/>
+            </a:r>
+          </a:p>
+          <a:p xmlns:a="http://schemas.openxmlformats.org/drawingml/2006/main">
+            <a:r>
+              <a:t>&gt; 反馈是诊断输入；是否采纳以及如何修改，必须由作者记录并承担。</a:t>
+            </a:r>
+          </a:p>
+          <a:p xmlns:a="http://schemas.openxmlformats.org/drawingml/2006/main">
+            <a:r>
+              <a:t/>
+            </a:r>
+          </a:p>
+          <a:p xmlns:a="http://schemas.openxmlformats.org/drawingml/2006/main">
+            <a:r>
+              <a:t>教师讲述：</a:t>
+            </a:r>
+          </a:p>
+          <a:p xmlns:a="http://schemas.openxmlformats.org/drawingml/2006/main">
+            <a:r>
               <a:t>回收陈述、质询、决策和行动回写，不新增正式提交。</a:t>
             </a:r>
           </a:p>
           <a:p xmlns:a="http://schemas.openxmlformats.org/drawingml/2006/main">
             <a:r>
-              <a:t>屏显母稿细节备查：</a:t>
-            </a:r>
-          </a:p>
-          <a:p xmlns:a="http://schemas.openxmlformats.org/drawingml/2006/main">
-            <a:r>
-              <a:t>方案陈述 → 同伴质询 → 作者决策 → 下一步行动</a:t>
-            </a:r>
-          </a:p>
-          <a:p xmlns:a="http://schemas.openxmlformats.org/drawingml/2006/main">
-            <a:r>
-              <a:t/>
-            </a:r>
-          </a:p>
-          <a:p xmlns:a="http://schemas.openxmlformats.org/drawingml/2006/main">
-            <a:r>
-              <a:t>- 用最小结构暴露问题、证据、机制与实验；</a:t>
-            </a:r>
-          </a:p>
-          <a:p xmlns:a="http://schemas.openxmlformats.org/drawingml/2006/main">
-            <a:r>
-              <a:t>- 同伴按诊断维度提问，不替作者决定；</a:t>
-            </a:r>
-          </a:p>
-          <a:p xmlns:a="http://schemas.openxmlformats.org/drawingml/2006/main">
-            <a:r>
-              <a:t>- 作者逐条选择采纳、澄清、补证、暂缓或保留异议，并记理由与位置；</a:t>
-            </a:r>
-          </a:p>
-          <a:p xmlns:a="http://schemas.openxmlformats.org/drawingml/2006/main">
-            <a:r>
-              <a:t>- 把反馈落到判断门工件和实验计划。</a:t>
-            </a:r>
-          </a:p>
-          <a:p xmlns:a="http://schemas.openxmlformats.org/drawingml/2006/main">
-            <a:r>
-              <a:t/>
-            </a:r>
-          </a:p>
-          <a:p xmlns:a="http://schemas.openxmlformats.org/drawingml/2006/main">
-            <a:r>
-              <a:t>&gt; 反馈是诊断输入；是否采纳以及如何修改，必须由作者记录并承担。</a:t>
+              <a:t/>
+            </a:r>
+          </a:p>
+          <a:p xmlns:a="http://schemas.openxmlformats.org/drawingml/2006/main">
+            <a:r>
+              <a:t>学生动作：</a:t>
+            </a:r>
+          </a:p>
+          <a:p xmlns:a="http://schemas.openxmlformats.org/drawingml/2006/main">
+            <a:r>
+              <a:t>学生说出一条已决定采纳或暂缓的反馈。</a:t>
+            </a:r>
+          </a:p>
+          <a:p xmlns:a="http://schemas.openxmlformats.org/drawingml/2006/main">
+            <a:r>
+              <a:t/>
+            </a:r>
+          </a:p>
+          <a:p xmlns:a="http://schemas.openxmlformats.org/drawingml/2006/main">
+            <a:r>
+              <a:t>来源与边界：</a:t>
+            </a:r>
+          </a:p>
+          <a:p xmlns:a="http://schemas.openxmlformats.org/drawingml/2006/main">
+            <a:r>
+              <a:t>讲义 §二-§五；[assignments.md](../../course/assignments.md) 形成性反馈边界。</a:t>
+            </a:r>
+          </a:p>
+          <a:p xmlns:a="http://schemas.openxmlformats.org/drawingml/2006/main">
+            <a:r>
+              <a:t/>
+            </a:r>
+          </a:p>
+          <a:p xmlns:a="http://schemas.openxmlformats.org/drawingml/2006/main">
+            <a:r>
+              <a:t>---</a:t>
             </a:r>
           </a:p>
           <a:p xmlns:a="http://schemas.openxmlformats.org/drawingml/2006/main">
@@ -1207,17 +1587,27 @@
           </a:p>
           <a:p xmlns:a="http://schemas.openxmlformats.org/drawingml/2006/main">
             <a:r>
-              <a:t>- /Users/bright/Projects/courses/graduate/lessons/lesson-08/slides.md</a:t>
-            </a:r>
-          </a:p>
-          <a:p xmlns:a="http://schemas.openxmlformats.org/drawingml/2006/main">
-            <a:r>
-              <a:t>- /Users/bright/Projects/courses/graduate/lessons/lesson-08/handout.md</a:t>
-            </a:r>
-          </a:p>
-          <a:p xmlns:a="http://schemas.openxmlformats.org/drawingml/2006/main">
-            <a:r>
-              <a:t>- 讲义 §二-§五；[assignments.md](../../course/assignments.md) 形成性反馈边界。</a:t>
+              <a:t/>
+            </a:r>
+          </a:p>
+          <a:p xmlns:a="http://schemas.openxmlformats.org/drawingml/2006/main">
+            <a:r>
+              <a:t>- 本课 handout.md 与 slides.md</a:t>
+            </a:r>
+          </a:p>
+          <a:p xmlns:a="http://schemas.openxmlformats.org/drawingml/2006/main">
+            <a:r>
+              <a:t/>
+            </a:r>
+          </a:p>
+          <a:p xmlns:a="http://schemas.openxmlformats.org/drawingml/2006/main">
+            <a:r>
+              <a:t>- ../../course/reading-card-case.md</a:t>
+            </a:r>
+          </a:p>
+          <a:p xmlns:a="http://schemas.openxmlformats.org/drawingml/2006/main">
+            <a:r>
+              <a:t/>
             </a:r>
           </a:p>
           <a:p xmlns:a="http://schemas.openxmlformats.org/drawingml/2006/main">
@@ -1292,77 +1682,137 @@
           <a:lstStyle xmlns:a="http://schemas.openxmlformats.org/drawingml/2006/main"/>
           <a:p xmlns:a="http://schemas.openxmlformats.org/drawingml/2006/main">
             <a:r>
+              <a:t>页面：P15 退出卡：把今天的反馈变成第 9 课的最小行动</a:t>
+            </a:r>
+          </a:p>
+          <a:p xmlns:a="http://schemas.openxmlformats.org/drawingml/2006/main">
+            <a:r>
+              <a:t/>
+            </a:r>
+          </a:p>
+          <a:p xmlns:a="http://schemas.openxmlformats.org/drawingml/2006/main">
+            <a:r>
+              <a:t>讲义位置：本课讲义；见逐页母稿映射表</a:t>
+            </a:r>
+          </a:p>
+          <a:p xmlns:a="http://schemas.openxmlformats.org/drawingml/2006/main">
+            <a:r>
+              <a:t/>
+            </a:r>
+          </a:p>
+          <a:p xmlns:a="http://schemas.openxmlformats.org/drawingml/2006/main">
+            <a:r>
+              <a:t>屏显核对：</a:t>
+            </a:r>
+          </a:p>
+          <a:p xmlns:a="http://schemas.openxmlformats.org/drawingml/2006/main">
+            <a:r>
+              <a:t>退出卡：</a:t>
+            </a:r>
+          </a:p>
+          <a:p xmlns:a="http://schemas.openxmlformats.org/drawingml/2006/main">
+            <a:r>
+              <a:t>- 我的方案在 rubric 哪一维度最薄弱？边界限定是否仍清楚？</a:t>
+            </a:r>
+          </a:p>
+          <a:p xmlns:a="http://schemas.openxmlformats.org/drawingml/2006/main">
+            <a:r>
+              <a:t>- 我收到的一条最可执行的反馈是什么？</a:t>
+            </a:r>
+          </a:p>
+          <a:p xmlns:a="http://schemas.openxmlformats.org/drawingml/2006/main">
+            <a:r>
+              <a:t>- 我对这条反馈采取了什么处理动作？理由与回写位置是什么？</a:t>
+            </a:r>
+          </a:p>
+          <a:p xmlns:a="http://schemas.openxmlformats.org/drawingml/2006/main">
+            <a:r>
+              <a:t>- 第 9 课判断门前我要补的最小集合是什么？</a:t>
+            </a:r>
+          </a:p>
+          <a:p xmlns:a="http://schemas.openxmlformats.org/drawingml/2006/main">
+            <a:r>
+              <a:t/>
+            </a:r>
+          </a:p>
+          <a:p xmlns:a="http://schemas.openxmlformats.org/drawingml/2006/main">
+            <a:r>
+              <a:t>第 9 课预告：</a:t>
+            </a:r>
+          </a:p>
+          <a:p xmlns:a="http://schemas.openxmlformats.org/drawingml/2006/main">
+            <a:r>
+              <a:t>- 运行 baseline，完善实验规格</a:t>
+            </a:r>
+          </a:p>
+          <a:p xmlns:a="http://schemas.openxmlformats.org/drawingml/2006/main">
+            <a:r>
+              <a:t>- 完成复现说明与环境记录</a:t>
+            </a:r>
+          </a:p>
+          <a:p xmlns:a="http://schemas.openxmlformats.org/drawingml/2006/main">
+            <a:r>
+              <a:t>- 把研究判断追溯到机制假设和证据地图</a:t>
+            </a:r>
+          </a:p>
+          <a:p xmlns:a="http://schemas.openxmlformats.org/drawingml/2006/main">
+            <a:r>
+              <a:t>- 提交判断门材料包</a:t>
+            </a:r>
+          </a:p>
+          <a:p xmlns:a="http://schemas.openxmlformats.org/drawingml/2006/main">
+            <a:r>
+              <a:t/>
+            </a:r>
+          </a:p>
+          <a:p xmlns:a="http://schemas.openxmlformats.org/drawingml/2006/main">
+            <a:r>
+              <a:t>&gt; 本课不新增课后正式作业。产出在第 9 课随判断门统一检查。</a:t>
+            </a:r>
+          </a:p>
+          <a:p xmlns:a="http://schemas.openxmlformats.org/drawingml/2006/main">
+            <a:r>
+              <a:t/>
+            </a:r>
+          </a:p>
+          <a:p xmlns:a="http://schemas.openxmlformats.org/drawingml/2006/main">
+            <a:r>
+              <a:t>教师讲述：</a:t>
+            </a:r>
+          </a:p>
+          <a:p xmlns:a="http://schemas.openxmlformats.org/drawingml/2006/main">
+            <a:r>
               <a:t>退出卡让学生把今天的反馈和第 9 课判断门的缺口对接。第 9 课预告强调判断门材料包的迁移路径：从轻量脚手架迁移到 project-template.md，且不丢失 AI 使用记录和伦理说明。</a:t>
             </a:r>
           </a:p>
           <a:p xmlns:a="http://schemas.openxmlformats.org/drawingml/2006/main">
             <a:r>
-              <a:t>屏显母稿细节备查：</a:t>
-            </a:r>
-          </a:p>
-          <a:p xmlns:a="http://schemas.openxmlformats.org/drawingml/2006/main">
-            <a:r>
-              <a:t>退出卡：</a:t>
-            </a:r>
-          </a:p>
-          <a:p xmlns:a="http://schemas.openxmlformats.org/drawingml/2006/main">
-            <a:r>
-              <a:t>- 我的方案在 rubric 哪一维度最薄弱？边界限定是否仍清楚？</a:t>
-            </a:r>
-          </a:p>
-          <a:p xmlns:a="http://schemas.openxmlformats.org/drawingml/2006/main">
-            <a:r>
-              <a:t>- 我收到的一条最可执行的反馈是什么？</a:t>
-            </a:r>
-          </a:p>
-          <a:p xmlns:a="http://schemas.openxmlformats.org/drawingml/2006/main">
-            <a:r>
-              <a:t>- 我对这条反馈采取了什么处理动作？理由与回写位置是什么？</a:t>
-            </a:r>
-          </a:p>
-          <a:p xmlns:a="http://schemas.openxmlformats.org/drawingml/2006/main">
-            <a:r>
-              <a:t>- 第 9 课判断门前我要补的最小集合是什么？</a:t>
-            </a:r>
-          </a:p>
-          <a:p xmlns:a="http://schemas.openxmlformats.org/drawingml/2006/main">
-            <a:r>
-              <a:t/>
-            </a:r>
-          </a:p>
-          <a:p xmlns:a="http://schemas.openxmlformats.org/drawingml/2006/main">
-            <a:r>
-              <a:t>第 9 课预告：</a:t>
-            </a:r>
-          </a:p>
-          <a:p xmlns:a="http://schemas.openxmlformats.org/drawingml/2006/main">
-            <a:r>
-              <a:t>- 运行 baseline，完善实验规格</a:t>
-            </a:r>
-          </a:p>
-          <a:p xmlns:a="http://schemas.openxmlformats.org/drawingml/2006/main">
-            <a:r>
-              <a:t>- 完成复现说明与环境记录</a:t>
-            </a:r>
-          </a:p>
-          <a:p xmlns:a="http://schemas.openxmlformats.org/drawingml/2006/main">
-            <a:r>
-              <a:t>- 把研究判断追溯到机制假设和证据地图</a:t>
-            </a:r>
-          </a:p>
-          <a:p xmlns:a="http://schemas.openxmlformats.org/drawingml/2006/main">
-            <a:r>
-              <a:t>- 提交判断门材料包</a:t>
-            </a:r>
-          </a:p>
-          <a:p xmlns:a="http://schemas.openxmlformats.org/drawingml/2006/main">
-            <a:r>
-              <a:t/>
-            </a:r>
-          </a:p>
-          <a:p xmlns:a="http://schemas.openxmlformats.org/drawingml/2006/main">
-            <a:r>
-              <a:t>&gt; 本课不新增课后正式作业。产出在第 9 课随判断门统一检查。</a:t>
+              <a:t/>
+            </a:r>
+          </a:p>
+          <a:p xmlns:a="http://schemas.openxmlformats.org/drawingml/2006/main">
+            <a:r>
+              <a:t>学生动作：</a:t>
+            </a:r>
+          </a:p>
+          <a:p xmlns:a="http://schemas.openxmlformats.org/drawingml/2006/main">
+            <a:r>
+              <a:t>学生填写退出卡。</a:t>
+            </a:r>
+          </a:p>
+          <a:p xmlns:a="http://schemas.openxmlformats.org/drawingml/2006/main">
+            <a:r>
+              <a:t/>
+            </a:r>
+          </a:p>
+          <a:p xmlns:a="http://schemas.openxmlformats.org/drawingml/2006/main">
+            <a:r>
+              <a:t>来源与边界：</a:t>
+            </a:r>
+          </a:p>
+          <a:p xmlns:a="http://schemas.openxmlformats.org/drawingml/2006/main">
+            <a:r>
+              <a:t>讲义 §学习目标；[assignments.md](../../course/assignments.md) Checkpoint 2 与"第 8 课"段；第 9 课见 [备课规划.md](../备课规划.md) 第 9 课段。</a:t>
             </a:r>
           </a:p>
           <a:p xmlns:a="http://schemas.openxmlformats.org/drawingml/2006/main">
@@ -1377,17 +1827,27 @@
           </a:p>
           <a:p xmlns:a="http://schemas.openxmlformats.org/drawingml/2006/main">
             <a:r>
-              <a:t>- /Users/bright/Projects/courses/graduate/lessons/lesson-08/slides.md</a:t>
-            </a:r>
-          </a:p>
-          <a:p xmlns:a="http://schemas.openxmlformats.org/drawingml/2006/main">
-            <a:r>
-              <a:t>- /Users/bright/Projects/courses/graduate/lessons/lesson-08/handout.md</a:t>
-            </a:r>
-          </a:p>
-          <a:p xmlns:a="http://schemas.openxmlformats.org/drawingml/2006/main">
-            <a:r>
-              <a:t>- 讲义 §学习目标；[assignments.md](../../course/assignments.md) Checkpoint 2 与"第 8 课"段；第 9 课见 [备课规划.md](../备课规划.md) 第 9 课段。</a:t>
+              <a:t/>
+            </a:r>
+          </a:p>
+          <a:p xmlns:a="http://schemas.openxmlformats.org/drawingml/2006/main">
+            <a:r>
+              <a:t>- 本课 handout.md 与 slides.md</a:t>
+            </a:r>
+          </a:p>
+          <a:p xmlns:a="http://schemas.openxmlformats.org/drawingml/2006/main">
+            <a:r>
+              <a:t/>
+            </a:r>
+          </a:p>
+          <a:p xmlns:a="http://schemas.openxmlformats.org/drawingml/2006/main">
+            <a:r>
+              <a:t>- ../../course/reading-card-case.md</a:t>
+            </a:r>
+          </a:p>
+          <a:p xmlns:a="http://schemas.openxmlformats.org/drawingml/2006/main">
+            <a:r>
+              <a:t/>
             </a:r>
           </a:p>
           <a:p xmlns:a="http://schemas.openxmlformats.org/drawingml/2006/main">
@@ -1462,67 +1922,192 @@
           <a:lstStyle xmlns:a="http://schemas.openxmlformats.org/drawingml/2006/main"/>
           <a:p xmlns:a="http://schemas.openxmlformats.org/drawingml/2006/main">
             <a:r>
+              <a:t>页面：P02 第 7 课之后，内部工件还没有经受外部质询</a:t>
+            </a:r>
+          </a:p>
+          <a:p xmlns:a="http://schemas.openxmlformats.org/drawingml/2006/main">
+            <a:r>
+              <a:t/>
+            </a:r>
+          </a:p>
+          <a:p xmlns:a="http://schemas.openxmlformats.org/drawingml/2006/main">
+            <a:r>
+              <a:t>讲义位置：本课讲义；见逐页母稿映射表</a:t>
+            </a:r>
+          </a:p>
+          <a:p xmlns:a="http://schemas.openxmlformats.org/drawingml/2006/main">
+            <a:r>
+              <a:t/>
+            </a:r>
+          </a:p>
+          <a:p xmlns:a="http://schemas.openxmlformats.org/drawingml/2006/main">
+            <a:r>
+              <a:t>屏显核对：</a:t>
+            </a:r>
+          </a:p>
+          <a:p xmlns:a="http://schemas.openxmlformats.org/drawingml/2006/main">
+            <a:r>
+              <a:t>第 7 课已建立：</a:t>
+            </a:r>
+          </a:p>
+          <a:p xmlns:a="http://schemas.openxmlformats.org/drawingml/2006/main">
+            <a:r>
+              <a:t>- 机制假设列表（含淘汰理由）</a:t>
+            </a:r>
+          </a:p>
+          <a:p xmlns:a="http://schemas.openxmlformats.org/drawingml/2006/main">
+            <a:r>
+              <a:t>- 研究判断记录初版</a:t>
+            </a:r>
+          </a:p>
+          <a:p xmlns:a="http://schemas.openxmlformats.org/drawingml/2006/main">
+            <a:r>
+              <a:t>- 实验规格草图（变量、baseline、停止条件、失败预案）</a:t>
+            </a:r>
+          </a:p>
+          <a:p xmlns:a="http://schemas.openxmlformats.org/drawingml/2006/main">
+            <a:r>
+              <a:t/>
+            </a:r>
+          </a:p>
+          <a:p xmlns:a="http://schemas.openxmlformats.org/drawingml/2006/main">
+            <a:r>
+              <a:t>仍未做：</a:t>
+            </a:r>
+          </a:p>
+          <a:p xmlns:a="http://schemas.openxmlformats.org/drawingml/2006/main">
+            <a:r>
+              <a:t>- 让方案经受外部质询</a:t>
+            </a:r>
+          </a:p>
+          <a:p xmlns:a="http://schemas.openxmlformats.org/drawingml/2006/main">
+            <a:r>
+              <a:t>- 把反馈转为可追溯的采纳决策</a:t>
+            </a:r>
+          </a:p>
+          <a:p xmlns:a="http://schemas.openxmlformats.org/drawingml/2006/main">
+            <a:r>
+              <a:t>- 对照第 9 课判断门条件预检</a:t>
+            </a:r>
+          </a:p>
+          <a:p xmlns:a="http://schemas.openxmlformats.org/drawingml/2006/main">
+            <a:r>
+              <a:t/>
+            </a:r>
+          </a:p>
+          <a:p xmlns:a="http://schemas.openxmlformats.org/drawingml/2006/main">
+            <a:r>
+              <a:t>&gt; 内部工件成立 ≠ 经外部质询仍成立。</a:t>
+            </a:r>
+          </a:p>
+          <a:p xmlns:a="http://schemas.openxmlformats.org/drawingml/2006/main">
+            <a:r>
+              <a:t/>
+            </a:r>
+          </a:p>
+          <a:p xmlns:a="http://schemas.openxmlformats.org/drawingml/2006/main">
+            <a:r>
+              <a:t>教师讲述：</a:t>
+            </a:r>
+          </a:p>
+          <a:p xmlns:a="http://schemas.openxmlformats.org/drawingml/2006/main">
+            <a:r>
               <a:t>回扣第 7 课：机制假设和实验规格草图都是自己写的，自己看着成立。本课让同伴按 rubric 检查问题重要性、证据充分性、可检验性和课程周期可行性，把反馈转为采纳决策。范围、非例和适用边界仍在陈述与决策中横切检查。</a:t>
             </a:r>
           </a:p>
           <a:p xmlns:a="http://schemas.openxmlformats.org/drawingml/2006/main">
             <a:r>
-              <a:t>屏显母稿细节备查：</a:t>
-            </a:r>
-          </a:p>
-          <a:p xmlns:a="http://schemas.openxmlformats.org/drawingml/2006/main">
-            <a:r>
-              <a:t>第 7 课已建立：</a:t>
-            </a:r>
-          </a:p>
-          <a:p xmlns:a="http://schemas.openxmlformats.org/drawingml/2006/main">
-            <a:r>
-              <a:t>- 机制假设列表（含淘汰理由）</a:t>
-            </a:r>
-          </a:p>
-          <a:p xmlns:a="http://schemas.openxmlformats.org/drawingml/2006/main">
-            <a:r>
-              <a:t>- 研究判断记录初版</a:t>
-            </a:r>
-          </a:p>
-          <a:p xmlns:a="http://schemas.openxmlformats.org/drawingml/2006/main">
-            <a:r>
-              <a:t>- 实验规格草图（变量、baseline、停止条件、失败预案）</a:t>
-            </a:r>
-          </a:p>
-          <a:p xmlns:a="http://schemas.openxmlformats.org/drawingml/2006/main">
-            <a:r>
-              <a:t/>
-            </a:r>
-          </a:p>
-          <a:p xmlns:a="http://schemas.openxmlformats.org/drawingml/2006/main">
-            <a:r>
-              <a:t>仍未做：</a:t>
-            </a:r>
-          </a:p>
-          <a:p xmlns:a="http://schemas.openxmlformats.org/drawingml/2006/main">
-            <a:r>
-              <a:t>- 让方案经受外部质询</a:t>
-            </a:r>
-          </a:p>
-          <a:p xmlns:a="http://schemas.openxmlformats.org/drawingml/2006/main">
-            <a:r>
-              <a:t>- 把反馈转为可追溯的采纳决策</a:t>
-            </a:r>
-          </a:p>
-          <a:p xmlns:a="http://schemas.openxmlformats.org/drawingml/2006/main">
-            <a:r>
-              <a:t>- 对照第 9 课判断门条件预检</a:t>
-            </a:r>
-          </a:p>
-          <a:p xmlns:a="http://schemas.openxmlformats.org/drawingml/2006/main">
-            <a:r>
-              <a:t/>
-            </a:r>
-          </a:p>
-          <a:p xmlns:a="http://schemas.openxmlformats.org/drawingml/2006/main">
-            <a:r>
-              <a:t>&gt; 内部工件成立 ≠ 经外部质询仍成立。</a:t>
+              <a:t/>
+            </a:r>
+          </a:p>
+          <a:p xmlns:a="http://schemas.openxmlformats.org/drawingml/2006/main">
+            <a:r>
+              <a:t>学生动作：</a:t>
+            </a:r>
+          </a:p>
+          <a:p xmlns:a="http://schemas.openxmlformats.org/drawingml/2006/main">
+            <a:r>
+              <a:t>快问：你第 7 课的实验规格草图中，baseline 的控制变量清单列全了吗？只听回答，不评价。</a:t>
+            </a:r>
+          </a:p>
+          <a:p xmlns:a="http://schemas.openxmlformats.org/drawingml/2006/main">
+            <a:r>
+              <a:t/>
+            </a:r>
+          </a:p>
+          <a:p xmlns:a="http://schemas.openxmlformats.org/drawingml/2006/main">
+            <a:r>
+              <a:t>本课板书、诊断与串词：</a:t>
+            </a:r>
+          </a:p>
+          <a:p xmlns:a="http://schemas.openxmlformats.org/drawingml/2006/main">
+            <a:r>
+              <a:t>本节替换同类口头提示，不增加既有时段。开场诊断嵌入现有开场/回顾，后续再沿原实践时段操作。</a:t>
+            </a:r>
+          </a:p>
+          <a:p xmlns:a="http://schemas.openxmlformats.org/drawingml/2006/main">
+            <a:r>
+              <a:t/>
+            </a:r>
+          </a:p>
+          <a:p xmlns:a="http://schemas.openxmlformats.org/drawingml/2006/main">
+            <a:r>
+              <a:t>- **板书主线**：定位 → 问题 → 影响 → 动作 → 作者决定。</a:t>
+            </a:r>
+          </a:p>
+          <a:p xmlns:a="http://schemas.openxmlformats.org/drawingml/2006/main">
+            <a:r>
+              <a:t>- **诊断问题**：“再严谨一点”具体改变什么？</a:t>
+            </a:r>
+          </a:p>
+          <a:p xmlns:a="http://schemas.openxmlformats.org/drawingml/2006/main">
+            <a:r>
+              <a:t>- **预期回答**：需指出位置和缺口，如评分者可见组别，再给修订动作。</a:t>
+            </a:r>
+          </a:p>
+          <a:p xmlns:a="http://schemas.openxmlformats.org/drawingml/2006/main">
+            <a:r>
+              <a:t>- **常见误答后的追问**：若反馈不可执行，追问作者将修改哪个字段。</a:t>
+            </a:r>
+          </a:p>
+          <a:p xmlns:a="http://schemas.openxmlformats.org/drawingml/2006/main">
+            <a:r>
+              <a:t>- **过渡串词**：“反馈落到文件后，第9课再补完整规格与公平baseline。”</a:t>
+            </a:r>
+          </a:p>
+          <a:p xmlns:a="http://schemas.openxmlformats.org/drawingml/2006/main">
+            <a:r>
+              <a:t>- **当堂最小产出**：一条实际反馈、作者处理理由和一处修改。</a:t>
+            </a:r>
+          </a:p>
+          <a:p xmlns:a="http://schemas.openxmlformats.org/drawingml/2006/main">
+            <a:r>
+              <a:t>- **退出记录**：写“已完成的动作、本人项目仍缺的证据/工件、下次补齐位置”。使用教师包时标明课堂方法练习，不能据此宣称本人研究门通过；正式提交课次仍为第 6、9、13、16 课。</a:t>
+            </a:r>
+          </a:p>
+          <a:p xmlns:a="http://schemas.openxmlformats.org/drawingml/2006/main">
+            <a:r>
+              <a:t/>
+            </a:r>
+          </a:p>
+          <a:p xmlns:a="http://schemas.openxmlformats.org/drawingml/2006/main">
+            <a:r>
+              <a:t>来源与边界：</a:t>
+            </a:r>
+          </a:p>
+          <a:p xmlns:a="http://schemas.openxmlformats.org/drawingml/2006/main">
+            <a:r>
+              <a:t>回扣第 7 课讲义与 [assignments.md](../../course/assignments.md) 第 9 课判断门条件。</a:t>
+            </a:r>
+          </a:p>
+          <a:p xmlns:a="http://schemas.openxmlformats.org/drawingml/2006/main">
+            <a:r>
+              <a:t/>
+            </a:r>
+          </a:p>
+          <a:p xmlns:a="http://schemas.openxmlformats.org/drawingml/2006/main">
+            <a:r>
+              <a:t>---</a:t>
             </a:r>
           </a:p>
           <a:p xmlns:a="http://schemas.openxmlformats.org/drawingml/2006/main">
@@ -1537,17 +2122,27 @@
           </a:p>
           <a:p xmlns:a="http://schemas.openxmlformats.org/drawingml/2006/main">
             <a:r>
-              <a:t>- /Users/bright/Projects/courses/graduate/lessons/lesson-08/slides.md</a:t>
-            </a:r>
-          </a:p>
-          <a:p xmlns:a="http://schemas.openxmlformats.org/drawingml/2006/main">
-            <a:r>
-              <a:t>- /Users/bright/Projects/courses/graduate/lessons/lesson-08/handout.md</a:t>
-            </a:r>
-          </a:p>
-          <a:p xmlns:a="http://schemas.openxmlformats.org/drawingml/2006/main">
-            <a:r>
-              <a:t>- 回扣第 7 课讲义与 [assignments.md](../../course/assignments.md) 第 9 课判断门条件。</a:t>
+              <a:t/>
+            </a:r>
+          </a:p>
+          <a:p xmlns:a="http://schemas.openxmlformats.org/drawingml/2006/main">
+            <a:r>
+              <a:t>- 本课 handout.md 与 slides.md</a:t>
+            </a:r>
+          </a:p>
+          <a:p xmlns:a="http://schemas.openxmlformats.org/drawingml/2006/main">
+            <a:r>
+              <a:t/>
+            </a:r>
+          </a:p>
+          <a:p xmlns:a="http://schemas.openxmlformats.org/drawingml/2006/main">
+            <a:r>
+              <a:t>- ../../course/reading-card-case.md</a:t>
+            </a:r>
+          </a:p>
+          <a:p xmlns:a="http://schemas.openxmlformats.org/drawingml/2006/main">
+            <a:r>
+              <a:t/>
             </a:r>
           </a:p>
           <a:p xmlns:a="http://schemas.openxmlformats.org/drawingml/2006/main">
@@ -1622,72 +2217,142 @@
           <a:lstStyle xmlns:a="http://schemas.openxmlformats.org/drawingml/2006/main"/>
           <a:p xmlns:a="http://schemas.openxmlformats.org/drawingml/2006/main">
             <a:r>
+              <a:t>页面：P03 本课跑通陈述—反馈—决策—预检链路</a:t>
+            </a:r>
+          </a:p>
+          <a:p xmlns:a="http://schemas.openxmlformats.org/drawingml/2006/main">
+            <a:r>
+              <a:t/>
+            </a:r>
+          </a:p>
+          <a:p xmlns:a="http://schemas.openxmlformats.org/drawingml/2006/main">
+            <a:r>
+              <a:t>讲义位置：本课讲义；见逐页母稿映射表</a:t>
+            </a:r>
+          </a:p>
+          <a:p xmlns:a="http://schemas.openxmlformats.org/drawingml/2006/main">
+            <a:r>
+              <a:t/>
+            </a:r>
+          </a:p>
+          <a:p xmlns:a="http://schemas.openxmlformats.org/drawingml/2006/main">
+            <a:r>
+              <a:t>屏显核对：</a:t>
+            </a:r>
+          </a:p>
+          <a:p xmlns:a="http://schemas.openxmlformats.org/drawingml/2006/main">
+            <a:r>
+              <a:t>完成本课后，你能：</a:t>
+            </a:r>
+          </a:p>
+          <a:p xmlns:a="http://schemas.openxmlformats.org/drawingml/2006/main">
+            <a:r>
+              <a:t/>
+            </a:r>
+          </a:p>
+          <a:p xmlns:a="http://schemas.openxmlformats.org/drawingml/2006/main">
+            <a:r>
+              <a:t>1. 用限时五段结构表达研究方案；</a:t>
+            </a:r>
+          </a:p>
+          <a:p xmlns:a="http://schemas.openxmlformats.org/drawingml/2006/main">
+            <a:r>
+              <a:t>2. 用“四个诊断维度 + 一个行动性检查”和三问格式给出结构化反馈；</a:t>
+            </a:r>
+          </a:p>
+          <a:p xmlns:a="http://schemas.openxmlformats.org/drawingml/2006/main">
+            <a:r>
+              <a:t>3. 区分设计诊所与评分打分；</a:t>
+            </a:r>
+          </a:p>
+          <a:p xmlns:a="http://schemas.openxmlformats.org/drawingml/2006/main">
+            <a:r>
+              <a:t>4. 根据真实反馈选择采纳、澄清、补证、暂缓或保留异议；</a:t>
+            </a:r>
+          </a:p>
+          <a:p xmlns:a="http://schemas.openxmlformats.org/drawingml/2006/main">
+            <a:r>
+              <a:t>5. 对照第 9 课判断门条件预检；</a:t>
+            </a:r>
+          </a:p>
+          <a:p xmlns:a="http://schemas.openxmlformats.org/drawingml/2006/main">
+            <a:r>
+              <a:t>6. 说明 AI 只作反馈线索，不作决策。</a:t>
+            </a:r>
+          </a:p>
+          <a:p xmlns:a="http://schemas.openxmlformats.org/drawingml/2006/main">
+            <a:r>
+              <a:t/>
+            </a:r>
+          </a:p>
+          <a:p xmlns:a="http://schemas.openxmlformats.org/drawingml/2006/main">
+            <a:r>
+              <a:t>课堂最低产出：每人陈述一次、获得至少两条同伴反馈、处理至少两条反馈，并完成一处现场修订。</a:t>
+            </a:r>
+          </a:p>
+          <a:p xmlns:a="http://schemas.openxmlformats.org/drawingml/2006/main">
+            <a:r>
+              <a:t/>
+            </a:r>
+          </a:p>
+          <a:p xmlns:a="http://schemas.openxmlformats.org/drawingml/2006/main">
+            <a:r>
+              <a:t>&gt; 本课不正式提交，产出是第 9 课判断门直接输入。</a:t>
+            </a:r>
+          </a:p>
+          <a:p xmlns:a="http://schemas.openxmlformats.org/drawingml/2006/main">
+            <a:r>
+              <a:t/>
+            </a:r>
+          </a:p>
+          <a:p xmlns:a="http://schemas.openxmlformats.org/drawingml/2006/main">
+            <a:r>
+              <a:t>教师讲述：</a:t>
+            </a:r>
+          </a:p>
+          <a:p xmlns:a="http://schemas.openxmlformats.org/drawingml/2006/main">
+            <a:r>
               <a:t>明确边界：本课建立可复盘的"陈述—反馈—决策—预检"链路，不是完成研究提案。采纳决策当场写，不课后补。本课产出在第 9 课判断门作为"第 8 课同伴反馈处理记录"和"至少 2 条研究判断"两项材料被检查。</a:t>
             </a:r>
           </a:p>
           <a:p xmlns:a="http://schemas.openxmlformats.org/drawingml/2006/main">
             <a:r>
-              <a:t>屏显母稿细节备查：</a:t>
-            </a:r>
-          </a:p>
-          <a:p xmlns:a="http://schemas.openxmlformats.org/drawingml/2006/main">
-            <a:r>
-              <a:t>完成本课后，你能：</a:t>
-            </a:r>
-          </a:p>
-          <a:p xmlns:a="http://schemas.openxmlformats.org/drawingml/2006/main">
-            <a:r>
-              <a:t/>
-            </a:r>
-          </a:p>
-          <a:p xmlns:a="http://schemas.openxmlformats.org/drawingml/2006/main">
-            <a:r>
-              <a:t>1. 用限时五段结构表达研究方案；</a:t>
-            </a:r>
-          </a:p>
-          <a:p xmlns:a="http://schemas.openxmlformats.org/drawingml/2006/main">
-            <a:r>
-              <a:t>2. 用“四个诊断维度 + 一个行动性检查”和三问格式给出结构化反馈；</a:t>
-            </a:r>
-          </a:p>
-          <a:p xmlns:a="http://schemas.openxmlformats.org/drawingml/2006/main">
-            <a:r>
-              <a:t>3. 区分设计诊所与评分打分；</a:t>
-            </a:r>
-          </a:p>
-          <a:p xmlns:a="http://schemas.openxmlformats.org/drawingml/2006/main">
-            <a:r>
-              <a:t>4. 根据真实反馈选择采纳、澄清、补证、暂缓或保留异议；</a:t>
-            </a:r>
-          </a:p>
-          <a:p xmlns:a="http://schemas.openxmlformats.org/drawingml/2006/main">
-            <a:r>
-              <a:t>5. 对照第 9 课判断门条件预检；</a:t>
-            </a:r>
-          </a:p>
-          <a:p xmlns:a="http://schemas.openxmlformats.org/drawingml/2006/main">
-            <a:r>
-              <a:t>6. 说明 AI 只作反馈线索，不作决策。</a:t>
-            </a:r>
-          </a:p>
-          <a:p xmlns:a="http://schemas.openxmlformats.org/drawingml/2006/main">
-            <a:r>
-              <a:t/>
-            </a:r>
-          </a:p>
-          <a:p xmlns:a="http://schemas.openxmlformats.org/drawingml/2006/main">
-            <a:r>
-              <a:t>课堂最低产出：每人陈述一次、获得至少两条同伴反馈、处理至少两条反馈，并完成一处现场修订。</a:t>
-            </a:r>
-          </a:p>
-          <a:p xmlns:a="http://schemas.openxmlformats.org/drawingml/2006/main">
-            <a:r>
-              <a:t/>
-            </a:r>
-          </a:p>
-          <a:p xmlns:a="http://schemas.openxmlformats.org/drawingml/2006/main">
-            <a:r>
-              <a:t>&gt; 本课不正式提交，产出是第 9 课判断门直接输入。</a:t>
+              <a:t/>
+            </a:r>
+          </a:p>
+          <a:p xmlns:a="http://schemas.openxmlformats.org/drawingml/2006/main">
+            <a:r>
+              <a:t>学生动作：</a:t>
+            </a:r>
+          </a:p>
+          <a:p xmlns:a="http://schemas.openxmlformats.org/drawingml/2006/main">
+            <a:r>
+              <a:t>无。</a:t>
+            </a:r>
+          </a:p>
+          <a:p xmlns:a="http://schemas.openxmlformats.org/drawingml/2006/main">
+            <a:r>
+              <a:t/>
+            </a:r>
+          </a:p>
+          <a:p xmlns:a="http://schemas.openxmlformats.org/drawingml/2006/main">
+            <a:r>
+              <a:t>来源与边界：</a:t>
+            </a:r>
+          </a:p>
+          <a:p xmlns:a="http://schemas.openxmlformats.org/drawingml/2006/main">
+            <a:r>
+              <a:t>[备课规划.md](../备课规划.md) 第 8 课目标段；[assignments.md](../../course/assignments.md) "第 8 课"段与 Checkpoint 2 判断门条件。</a:t>
+            </a:r>
+          </a:p>
+          <a:p xmlns:a="http://schemas.openxmlformats.org/drawingml/2006/main">
+            <a:r>
+              <a:t/>
+            </a:r>
+          </a:p>
+          <a:p xmlns:a="http://schemas.openxmlformats.org/drawingml/2006/main">
+            <a:r>
+              <a:t>---</a:t>
             </a:r>
           </a:p>
           <a:p xmlns:a="http://schemas.openxmlformats.org/drawingml/2006/main">
@@ -1702,17 +2367,27 @@
           </a:p>
           <a:p xmlns:a="http://schemas.openxmlformats.org/drawingml/2006/main">
             <a:r>
-              <a:t>- /Users/bright/Projects/courses/graduate/lessons/lesson-08/slides.md</a:t>
-            </a:r>
-          </a:p>
-          <a:p xmlns:a="http://schemas.openxmlformats.org/drawingml/2006/main">
-            <a:r>
-              <a:t>- /Users/bright/Projects/courses/graduate/lessons/lesson-08/handout.md</a:t>
-            </a:r>
-          </a:p>
-          <a:p xmlns:a="http://schemas.openxmlformats.org/drawingml/2006/main">
-            <a:r>
-              <a:t>- [备课规划.md](../备课规划.md) 第 8 课目标段；[assignments.md](../../course/assignments.md) "第 8 课"段与 Checkpoint 2 判断门条件。</a:t>
+              <a:t/>
+            </a:r>
+          </a:p>
+          <a:p xmlns:a="http://schemas.openxmlformats.org/drawingml/2006/main">
+            <a:r>
+              <a:t>- 本课 handout.md 与 slides.md</a:t>
+            </a:r>
+          </a:p>
+          <a:p xmlns:a="http://schemas.openxmlformats.org/drawingml/2006/main">
+            <a:r>
+              <a:t/>
+            </a:r>
+          </a:p>
+          <a:p xmlns:a="http://schemas.openxmlformats.org/drawingml/2006/main">
+            <a:r>
+              <a:t>- ../../course/reading-card-case.md</a:t>
+            </a:r>
+          </a:p>
+          <a:p xmlns:a="http://schemas.openxmlformats.org/drawingml/2006/main">
+            <a:r>
+              <a:t/>
             </a:r>
           </a:p>
           <a:p xmlns:a="http://schemas.openxmlformats.org/drawingml/2006/main">
@@ -1787,67 +2462,127 @@
           <a:lstStyle xmlns:a="http://schemas.openxmlformats.org/drawingml/2006/main"/>
           <a:p xmlns:a="http://schemas.openxmlformats.org/drawingml/2006/main">
             <a:r>
-              <a:t>用贯穿案例展示从第 7 课输出到陈述稿的压缩。第 3 段含中间过程（字段约束 → 生成时强制标注 → 错读更易暴露），不是"会降低"。第 5 段风险具体指向 A2（标注假象），不是泛泛的"可能失败"。常见错误：第 1 段写成主题词复述，第 3 段写成结果预测——这两类让同伴无法检查边界和可检验性。完整贯穿案例五段在 P10 教师演示展开。</a:t>
-            </a:r>
-          </a:p>
-          <a:p xmlns:a="http://schemas.openxmlformats.org/drawingml/2006/main">
-            <a:r>
-              <a:t>屏显母稿细节备查：</a:t>
-            </a:r>
-          </a:p>
-          <a:p xmlns:a="http://schemas.openxmlformats.org/drawingml/2006/main">
-            <a:r>
-              <a:t>| 段 | 内容 | 来自第几课 |</a:t>
-            </a:r>
-          </a:p>
-          <a:p xmlns:a="http://schemas.openxmlformats.org/drawingml/2006/main">
-            <a:r>
-              <a:t>| --- | --- | --- |</a:t>
-            </a:r>
-          </a:p>
-          <a:p xmlns:a="http://schemas.openxmlformats.org/drawingml/2006/main">
-            <a:r>
-              <a:t>| 1. 研究问题 | 范围、非例、可证伪命题 | 第 6 课 |</a:t>
-            </a:r>
-          </a:p>
-          <a:p xmlns:a="http://schemas.openxmlformats.org/drawingml/2006/main">
-            <a:r>
-              <a:t>| 2. 关键证据 | 直接证据及其边界 | 第 5/6 课 |</a:t>
-            </a:r>
-          </a:p>
-          <a:p xmlns:a="http://schemas.openxmlformats.org/drawingml/2006/main">
-            <a:r>
-              <a:t>| 3. 机制假设 | 中间过程 + 可区分替代 | 第 7 课 |</a:t>
-            </a:r>
-          </a:p>
-          <a:p xmlns:a="http://schemas.openxmlformats.org/drawingml/2006/main">
-            <a:r>
-              <a:t>| 4. 最小验证 | 支持／反驳／仍不能判断 | 第 7 课 |</a:t>
-            </a:r>
-          </a:p>
-          <a:p xmlns:a="http://schemas.openxmlformats.org/drawingml/2006/main">
-            <a:r>
-              <a:t>| 5. 最大风险 | 最可能不通过的一点 | 第 7 课 |</a:t>
-            </a:r>
-          </a:p>
-          <a:p xmlns:a="http://schemas.openxmlformats.org/drawingml/2006/main">
-            <a:r>
-              <a:t/>
-            </a:r>
-          </a:p>
-          <a:p xmlns:a="http://schemas.openxmlformats.org/drawingml/2006/main">
-            <a:r>
-              <a:t>&gt; 把第 3 段写成"会更好"不算机制假设——没有中间过程。</a:t>
-            </a:r>
-          </a:p>
-          <a:p xmlns:a="http://schemas.openxmlformats.org/drawingml/2006/main">
-            <a:r>
-              <a:t/>
-            </a:r>
-          </a:p>
-          <a:p xmlns:a="http://schemas.openxmlformats.org/drawingml/2006/main">
-            <a:r>
-              <a:t>案例锚点：阅读卡 vs 自由摘要；主机制是“字段约束 → 显式标注 → 错读更易暴露”；A1 任务转移是替代，A2 标注提示效应是最大风险。完整五段见 P10 与 handout §七。</a:t>
+              <a:t>页面：P04 限时陈述要暴露一个可被质询的最小方案</a:t>
+            </a:r>
+          </a:p>
+          <a:p xmlns:a="http://schemas.openxmlformats.org/drawingml/2006/main">
+            <a:r>
+              <a:t/>
+            </a:r>
+          </a:p>
+          <a:p xmlns:a="http://schemas.openxmlformats.org/drawingml/2006/main">
+            <a:r>
+              <a:t>讲义位置：本课讲义；见逐页母稿映射表</a:t>
+            </a:r>
+          </a:p>
+          <a:p xmlns:a="http://schemas.openxmlformats.org/drawingml/2006/main">
+            <a:r>
+              <a:t/>
+            </a:r>
+          </a:p>
+          <a:p xmlns:a="http://schemas.openxmlformats.org/drawingml/2006/main">
+            <a:r>
+              <a:t>屏显核对：</a:t>
+            </a:r>
+          </a:p>
+          <a:p xmlns:a="http://schemas.openxmlformats.org/drawingml/2006/main">
+            <a:r>
+              <a:t>| 分享段落 | 要说清什么 |</a:t>
+            </a:r>
+          </a:p>
+          <a:p xmlns:a="http://schemas.openxmlformats.org/drawingml/2006/main">
+            <a:r>
+              <a:t>| --- | --- |</a:t>
+            </a:r>
+          </a:p>
+          <a:p xmlns:a="http://schemas.openxmlformats.org/drawingml/2006/main">
+            <a:r>
+              <a:t>| 研究问题 | 范围、非例、可证伪命题 |</a:t>
+            </a:r>
+          </a:p>
+          <a:p xmlns:a="http://schemas.openxmlformats.org/drawingml/2006/main">
+            <a:r>
+              <a:t>| 关键证据 | 直接测量了什么，边界在哪里 |</a:t>
+            </a:r>
+          </a:p>
+          <a:p xmlns:a="http://schemas.openxmlformats.org/drawingml/2006/main">
+            <a:r>
+              <a:t>| 机制假设 | H1 生成保留与 A2 评分提示 |</a:t>
+            </a:r>
+          </a:p>
+          <a:p xmlns:a="http://schemas.openxmlformats.org/drawingml/2006/main">
+            <a:r>
+              <a:t>| 最小验证 | 什么观察能区分两种解释 |</a:t>
+            </a:r>
+          </a:p>
+          <a:p xmlns:a="http://schemas.openxmlformats.org/drawingml/2006/main">
+            <a:r>
+              <a:t>| 最大风险 | 当前最可能卡住判断的一项 |</a:t>
+            </a:r>
+          </a:p>
+          <a:p xmlns:a="http://schemas.openxmlformats.org/drawingml/2006/main">
+            <a:r>
+              <a:t/>
+            </a:r>
+          </a:p>
+          <a:p xmlns:a="http://schemas.openxmlformats.org/drawingml/2006/main">
+            <a:r>
+              <a:t>阅读卡案例：质量代价与材料范围另查。</a:t>
+            </a:r>
+          </a:p>
+          <a:p xmlns:a="http://schemas.openxmlformats.org/drawingml/2006/main">
+            <a:r>
+              <a:t/>
+            </a:r>
+          </a:p>
+          <a:p xmlns:a="http://schemas.openxmlformats.org/drawingml/2006/main">
+            <a:r>
+              <a:t>教师讲述：</a:t>
+            </a:r>
+          </a:p>
+          <a:p xmlns:a="http://schemas.openxmlformats.org/drawingml/2006/main">
+            <a:r>
+              <a:t>用贯穿案例展示从第 7 课输出到陈述稿的压缩。第 3 段含中间过程（生成时显式列出限定条件 → 输出保留更多条件），不是"会降低"。第 5 段风险具体指向 A2（标注假象），不是泛泛的"可能失败"。常见错误：第 1 段写成主题词复述，第 3 段写成结果预测——这两类让同伴无法检查边界和可检验性。完整贯穿案例五段在 P10 教师演示展开。</a:t>
+            </a:r>
+          </a:p>
+          <a:p xmlns:a="http://schemas.openxmlformats.org/drawingml/2006/main">
+            <a:r>
+              <a:t/>
+            </a:r>
+          </a:p>
+          <a:p xmlns:a="http://schemas.openxmlformats.org/drawingml/2006/main">
+            <a:r>
+              <a:t>学生动作：</a:t>
+            </a:r>
+          </a:p>
+          <a:p xmlns:a="http://schemas.openxmlformats.org/drawingml/2006/main">
+            <a:r>
+              <a:t>让学生用自己的方案填第 1 段和第 3 段各一句；再对照指出第 5 段最大风险应该写什么。只听一个例子，不展开评价。</a:t>
+            </a:r>
+          </a:p>
+          <a:p xmlns:a="http://schemas.openxmlformats.org/drawingml/2006/main">
+            <a:r>
+              <a:t/>
+            </a:r>
+          </a:p>
+          <a:p xmlns:a="http://schemas.openxmlformats.org/drawingml/2006/main">
+            <a:r>
+              <a:t>来源与边界：</a:t>
+            </a:r>
+          </a:p>
+          <a:p xmlns:a="http://schemas.openxmlformats.org/drawingml/2006/main">
+            <a:r>
+              <a:t>讲义 §二 3 分钟陈述结构、§七 贯穿案例；Booth et al. *The Craft of Research* 5th ed. 5.5 与 10.2（[reading-list.md](../../course/reading-list.md) 第 8 课）；Peyton Jones "Writing a Great Research Proposal"（教学讲义，不作学术证据）。</a:t>
+            </a:r>
+          </a:p>
+          <a:p xmlns:a="http://schemas.openxmlformats.org/drawingml/2006/main">
+            <a:r>
+              <a:t/>
+            </a:r>
+          </a:p>
+          <a:p xmlns:a="http://schemas.openxmlformats.org/drawingml/2006/main">
+            <a:r>
+              <a:t>---</a:t>
             </a:r>
           </a:p>
           <a:p xmlns:a="http://schemas.openxmlformats.org/drawingml/2006/main">
@@ -1862,17 +2597,27 @@
           </a:p>
           <a:p xmlns:a="http://schemas.openxmlformats.org/drawingml/2006/main">
             <a:r>
-              <a:t>- /Users/bright/Projects/courses/graduate/lessons/lesson-08/slides.md</a:t>
-            </a:r>
-          </a:p>
-          <a:p xmlns:a="http://schemas.openxmlformats.org/drawingml/2006/main">
-            <a:r>
-              <a:t>- /Users/bright/Projects/courses/graduate/lessons/lesson-08/handout.md</a:t>
-            </a:r>
-          </a:p>
-          <a:p xmlns:a="http://schemas.openxmlformats.org/drawingml/2006/main">
-            <a:r>
-              <a:t>- 讲义 §二 3 分钟陈述结构、§七 贯穿案例；Booth et al. *The Craft of Research* 5th ed. 5.5 与 10.2（[reading-list.md](../../course/reading-list.md) 第 8 课）；Peyton Jones "Writing a Great Research Proposal"（教学讲义，不作学术证据）。</a:t>
+              <a:t/>
+            </a:r>
+          </a:p>
+          <a:p xmlns:a="http://schemas.openxmlformats.org/drawingml/2006/main">
+            <a:r>
+              <a:t>- 本课 handout.md 与 slides.md</a:t>
+            </a:r>
+          </a:p>
+          <a:p xmlns:a="http://schemas.openxmlformats.org/drawingml/2006/main">
+            <a:r>
+              <a:t/>
+            </a:r>
+          </a:p>
+          <a:p xmlns:a="http://schemas.openxmlformats.org/drawingml/2006/main">
+            <a:r>
+              <a:t>- ../../course/reading-card-case.md</a:t>
+            </a:r>
+          </a:p>
+          <a:p xmlns:a="http://schemas.openxmlformats.org/drawingml/2006/main">
+            <a:r>
+              <a:t/>
             </a:r>
           </a:p>
           <a:p xmlns:a="http://schemas.openxmlformats.org/drawingml/2006/main">
@@ -1947,62 +2692,132 @@
           <a:lstStyle xmlns:a="http://schemas.openxmlformats.org/drawingml/2006/main"/>
           <a:p xmlns:a="http://schemas.openxmlformats.org/drawingml/2006/main">
             <a:r>
+              <a:t>页面：P05 同伴先做四维诊断，再检查实验能否改变判断</a:t>
+            </a:r>
+          </a:p>
+          <a:p xmlns:a="http://schemas.openxmlformats.org/drawingml/2006/main">
+            <a:r>
+              <a:t/>
+            </a:r>
+          </a:p>
+          <a:p xmlns:a="http://schemas.openxmlformats.org/drawingml/2006/main">
+            <a:r>
+              <a:t>讲义位置：本课讲义；见逐页母稿映射表</a:t>
+            </a:r>
+          </a:p>
+          <a:p xmlns:a="http://schemas.openxmlformats.org/drawingml/2006/main">
+            <a:r>
+              <a:t/>
+            </a:r>
+          </a:p>
+          <a:p xmlns:a="http://schemas.openxmlformats.org/drawingml/2006/main">
+            <a:r>
+              <a:t>屏显核对：</a:t>
+            </a:r>
+          </a:p>
+          <a:p xmlns:a="http://schemas.openxmlformats.org/drawingml/2006/main">
+            <a:r>
+              <a:t>| 维度 | 检查问题 | 对应判断门条件 |</a:t>
+            </a:r>
+          </a:p>
+          <a:p xmlns:a="http://schemas.openxmlformats.org/drawingml/2006/main">
+            <a:r>
+              <a:t>| --- | --- | --- |</a:t>
+            </a:r>
+          </a:p>
+          <a:p xmlns:a="http://schemas.openxmlformats.org/drawingml/2006/main">
+            <a:r>
+              <a:t>| 问题重要性 | 会改变什么判断或行动？ | 问题门说明 |</a:t>
+            </a:r>
+          </a:p>
+          <a:p xmlns:a="http://schemas.openxmlformats.org/drawingml/2006/main">
+            <a:r>
+              <a:t>| 证据充分性 | 可核验？强度、冲突、缺口清楚？ | 2 条判断含依据 |</a:t>
+            </a:r>
+          </a:p>
+          <a:p xmlns:a="http://schemas.openxmlformats.org/drawingml/2006/main">
+            <a:r>
+              <a:t>| 可检验性 | 能推翻？主／替代可区分？ | 规格含假设对应 |</a:t>
+            </a:r>
+          </a:p>
+          <a:p xmlns:a="http://schemas.openxmlformats.org/drawingml/2006/main">
+            <a:r>
+              <a:t>| 课程周期可行性 | baseline 公平？周期内能完成？ | 可执行 baseline／原型 |</a:t>
+            </a:r>
+          </a:p>
+          <a:p xmlns:a="http://schemas.openxmlformats.org/drawingml/2006/main">
+            <a:r>
+              <a:t/>
+            </a:r>
+          </a:p>
+          <a:p xmlns:a="http://schemas.openxmlformats.org/drawingml/2006/main">
+            <a:r>
+              <a:t>&gt; 行动性检查：下一步实验能否改变研究判断？</a:t>
+            </a:r>
+          </a:p>
+          <a:p xmlns:a="http://schemas.openxmlformats.org/drawingml/2006/main">
+            <a:r>
+              <a:t/>
+            </a:r>
+          </a:p>
+          <a:p xmlns:a="http://schemas.openxmlformats.org/drawingml/2006/main">
+            <a:r>
+              <a:t>rubric 是诊断工具，不是评分表。边界横切检查，不替代问题重要性。</a:t>
+            </a:r>
+          </a:p>
+          <a:p xmlns:a="http://schemas.openxmlformats.org/drawingml/2006/main">
+            <a:r>
+              <a:t/>
+            </a:r>
+          </a:p>
+          <a:p xmlns:a="http://schemas.openxmlformats.org/drawingml/2006/main">
+            <a:r>
+              <a:t>教师讲述：</a:t>
+            </a:r>
+          </a:p>
+          <a:p xmlns:a="http://schemas.openxmlformats.org/drawingml/2006/main">
+            <a:r>
               <a:t>rubric 先检查问题重要性、证据充分性、可检验性和课程周期可行性四个诊断维度，再检查下一步实验是否能改变研究判断。同伴不给分数、不排名，只指出"看到了什么"和"缺了什么"。适用范围和非例仍在陈述与采纳决策中检查。</a:t>
             </a:r>
           </a:p>
           <a:p xmlns:a="http://schemas.openxmlformats.org/drawingml/2006/main">
             <a:r>
-              <a:t>屏显母稿细节备查：</a:t>
-            </a:r>
-          </a:p>
-          <a:p xmlns:a="http://schemas.openxmlformats.org/drawingml/2006/main">
-            <a:r>
-              <a:t>| 维度 | 检查问题 | 对应判断门条件 |</a:t>
-            </a:r>
-          </a:p>
-          <a:p xmlns:a="http://schemas.openxmlformats.org/drawingml/2006/main">
-            <a:r>
-              <a:t>| --- | --- | --- |</a:t>
-            </a:r>
-          </a:p>
-          <a:p xmlns:a="http://schemas.openxmlformats.org/drawingml/2006/main">
-            <a:r>
-              <a:t>| 问题重要性 | 会改变什么判断或行动？ | 问题门说明 |</a:t>
-            </a:r>
-          </a:p>
-          <a:p xmlns:a="http://schemas.openxmlformats.org/drawingml/2006/main">
-            <a:r>
-              <a:t>| 证据充分性 | 可核验？强度、冲突、缺口清楚？ | 2 条判断含依据 |</a:t>
-            </a:r>
-          </a:p>
-          <a:p xmlns:a="http://schemas.openxmlformats.org/drawingml/2006/main">
-            <a:r>
-              <a:t>| 可检验性 | 能推翻？主／替代可区分？ | 规格含假设对应 |</a:t>
-            </a:r>
-          </a:p>
-          <a:p xmlns:a="http://schemas.openxmlformats.org/drawingml/2006/main">
-            <a:r>
-              <a:t>| 课程周期可行性 | baseline 公平？周期内能完成？ | 可执行 baseline／原型 |</a:t>
-            </a:r>
-          </a:p>
-          <a:p xmlns:a="http://schemas.openxmlformats.org/drawingml/2006/main">
-            <a:r>
-              <a:t/>
-            </a:r>
-          </a:p>
-          <a:p xmlns:a="http://schemas.openxmlformats.org/drawingml/2006/main">
-            <a:r>
-              <a:t>&gt; 行动性检查：下一步实验能否改变研究判断？</a:t>
-            </a:r>
-          </a:p>
-          <a:p xmlns:a="http://schemas.openxmlformats.org/drawingml/2006/main">
-            <a:r>
-              <a:t/>
-            </a:r>
-          </a:p>
-          <a:p xmlns:a="http://schemas.openxmlformats.org/drawingml/2006/main">
-            <a:r>
-              <a:t>rubric 是诊断工具，不是评分表。边界横切检查，不替代问题重要性。</a:t>
+              <a:t/>
+            </a:r>
+          </a:p>
+          <a:p xmlns:a="http://schemas.openxmlformats.org/drawingml/2006/main">
+            <a:r>
+              <a:t>学生动作：</a:t>
+            </a:r>
+          </a:p>
+          <a:p xmlns:a="http://schemas.openxmlformats.org/drawingml/2006/main">
+            <a:r>
+              <a:t>学生做 90 秒前置短写入：写下自己方案当前最弱的一个 rubric 维度，并用一句话说明理由。保存到分享页备忘或纸面上，后面与同伴反馈对照。</a:t>
+            </a:r>
+          </a:p>
+          <a:p xmlns:a="http://schemas.openxmlformats.org/drawingml/2006/main">
+            <a:r>
+              <a:t/>
+            </a:r>
+          </a:p>
+          <a:p xmlns:a="http://schemas.openxmlformats.org/drawingml/2006/main">
+            <a:r>
+              <a:t>来源与边界：</a:t>
+            </a:r>
+          </a:p>
+          <a:p xmlns:a="http://schemas.openxmlformats.org/drawingml/2006/main">
+            <a:r>
+              <a:t>讲义 §三·1 与 §六·1；[assignments.md](../../course/assignments.md) Checkpoint 2 判断门条件。</a:t>
+            </a:r>
+          </a:p>
+          <a:p xmlns:a="http://schemas.openxmlformats.org/drawingml/2006/main">
+            <a:r>
+              <a:t/>
+            </a:r>
+          </a:p>
+          <a:p xmlns:a="http://schemas.openxmlformats.org/drawingml/2006/main">
+            <a:r>
+              <a:t>---</a:t>
             </a:r>
           </a:p>
           <a:p xmlns:a="http://schemas.openxmlformats.org/drawingml/2006/main">
@@ -2017,17 +2832,27 @@
           </a:p>
           <a:p xmlns:a="http://schemas.openxmlformats.org/drawingml/2006/main">
             <a:r>
-              <a:t>- /Users/bright/Projects/courses/graduate/lessons/lesson-08/slides.md</a:t>
-            </a:r>
-          </a:p>
-          <a:p xmlns:a="http://schemas.openxmlformats.org/drawingml/2006/main">
-            <a:r>
-              <a:t>- /Users/bright/Projects/courses/graduate/lessons/lesson-08/handout.md</a:t>
-            </a:r>
-          </a:p>
-          <a:p xmlns:a="http://schemas.openxmlformats.org/drawingml/2006/main">
-            <a:r>
-              <a:t>- 讲义 §三·1 与 §六·1；[assignments.md](../../course/assignments.md) Checkpoint 2 判断门条件。</a:t>
+              <a:t/>
+            </a:r>
+          </a:p>
+          <a:p xmlns:a="http://schemas.openxmlformats.org/drawingml/2006/main">
+            <a:r>
+              <a:t>- 本课 handout.md 与 slides.md</a:t>
+            </a:r>
+          </a:p>
+          <a:p xmlns:a="http://schemas.openxmlformats.org/drawingml/2006/main">
+            <a:r>
+              <a:t/>
+            </a:r>
+          </a:p>
+          <a:p xmlns:a="http://schemas.openxmlformats.org/drawingml/2006/main">
+            <a:r>
+              <a:t>- ../../course/reading-card-case.md</a:t>
+            </a:r>
+          </a:p>
+          <a:p xmlns:a="http://schemas.openxmlformats.org/drawingml/2006/main">
+            <a:r>
+              <a:t/>
             </a:r>
           </a:p>
           <a:p xmlns:a="http://schemas.openxmlformats.org/drawingml/2006/main">
@@ -2102,47 +2927,117 @@
           <a:lstStyle xmlns:a="http://schemas.openxmlformats.org/drawingml/2006/main"/>
           <a:p xmlns:a="http://schemas.openxmlformats.org/drawingml/2006/main">
             <a:r>
+              <a:t>页面：P06 三问把分散意见压缩成可行动反馈</a:t>
+            </a:r>
+          </a:p>
+          <a:p xmlns:a="http://schemas.openxmlformats.org/drawingml/2006/main">
+            <a:r>
+              <a:t/>
+            </a:r>
+          </a:p>
+          <a:p xmlns:a="http://schemas.openxmlformats.org/drawingml/2006/main">
+            <a:r>
+              <a:t>讲义位置：本课讲义；见逐页母稿映射表</a:t>
+            </a:r>
+          </a:p>
+          <a:p xmlns:a="http://schemas.openxmlformats.org/drawingml/2006/main">
+            <a:r>
+              <a:t/>
+            </a:r>
+          </a:p>
+          <a:p xmlns:a="http://schemas.openxmlformats.org/drawingml/2006/main">
+            <a:r>
+              <a:t>屏显核对：</a:t>
+            </a:r>
+          </a:p>
+          <a:p xmlns:a="http://schemas.openxmlformats.org/drawingml/2006/main">
+            <a:r>
+              <a:t>每位同伴对每位陈述者只用三问：</a:t>
+            </a:r>
+          </a:p>
+          <a:p xmlns:a="http://schemas.openxmlformats.org/drawingml/2006/main">
+            <a:r>
+              <a:t/>
+            </a:r>
+          </a:p>
+          <a:p xmlns:a="http://schemas.openxmlformats.org/drawingml/2006/main">
+            <a:r>
+              <a:t>1. **一项最强处**：方案在四维度上当前最扎实的一点（重要性不等于题目有趣）</a:t>
+            </a:r>
+          </a:p>
+          <a:p xmlns:a="http://schemas.openxmlformats.org/drawingml/2006/main">
+            <a:r>
+              <a:t>2. **一项最大风险**：方案在四维度上当前最可能不通过判断门的一点</a:t>
+            </a:r>
+          </a:p>
+          <a:p xmlns:a="http://schemas.openxmlformats.org/drawingml/2006/main">
+            <a:r>
+              <a:t>3. **一条可执行建议**：针对最大风险，下周能做的最小改进</a:t>
+            </a:r>
+          </a:p>
+          <a:p xmlns:a="http://schemas.openxmlformats.org/drawingml/2006/main">
+            <a:r>
+              <a:t/>
+            </a:r>
+          </a:p>
+          <a:p xmlns:a="http://schemas.openxmlformats.org/drawingml/2006/main">
+            <a:r>
+              <a:t>&gt; 最强处和最大风险必须落在 rubric 四维度上，不能落在"题目时髦度"或"陈述流畅度"；建议要说明下一步实验如何改变研究判断。</a:t>
+            </a:r>
+          </a:p>
+          <a:p xmlns:a="http://schemas.openxmlformats.org/drawingml/2006/main">
+            <a:r>
+              <a:t/>
+            </a:r>
+          </a:p>
+          <a:p xmlns:a="http://schemas.openxmlformats.org/drawingml/2006/main">
+            <a:r>
+              <a:t>教师讲述：</a:t>
+            </a:r>
+          </a:p>
+          <a:p xmlns:a="http://schemas.openxmlformats.org/drawingml/2006/main">
+            <a:r>
               <a:t>三问强制防止反馈发散成"我觉得都挺好的"。最强处和最大风险必须落到问题重要性、证据充分性、可检验性或课程周期可行性上。"建议"必须针对"最大风险"，并能说明它如何可能改变研究判断。</a:t>
             </a:r>
           </a:p>
           <a:p xmlns:a="http://schemas.openxmlformats.org/drawingml/2006/main">
             <a:r>
-              <a:t>屏显母稿细节备查：</a:t>
-            </a:r>
-          </a:p>
-          <a:p xmlns:a="http://schemas.openxmlformats.org/drawingml/2006/main">
-            <a:r>
-              <a:t>每位同伴对每位陈述者只用三问：</a:t>
-            </a:r>
-          </a:p>
-          <a:p xmlns:a="http://schemas.openxmlformats.org/drawingml/2006/main">
-            <a:r>
-              <a:t/>
-            </a:r>
-          </a:p>
-          <a:p xmlns:a="http://schemas.openxmlformats.org/drawingml/2006/main">
-            <a:r>
-              <a:t>1. **一项最强处**：方案在四维度上当前最扎实的一点（重要性不等于题目有趣）</a:t>
-            </a:r>
-          </a:p>
-          <a:p xmlns:a="http://schemas.openxmlformats.org/drawingml/2006/main">
-            <a:r>
-              <a:t>2. **一项最大风险**：方案在四维度上当前最可能不通过判断门的一点</a:t>
-            </a:r>
-          </a:p>
-          <a:p xmlns:a="http://schemas.openxmlformats.org/drawingml/2006/main">
-            <a:r>
-              <a:t>3. **一条可执行建议**：针对最大风险，下周能做的最小改进</a:t>
-            </a:r>
-          </a:p>
-          <a:p xmlns:a="http://schemas.openxmlformats.org/drawingml/2006/main">
-            <a:r>
-              <a:t/>
-            </a:r>
-          </a:p>
-          <a:p xmlns:a="http://schemas.openxmlformats.org/drawingml/2006/main">
-            <a:r>
-              <a:t>&gt; 最强处和最大风险必须落在 rubric 四维度上，不能落在"题目时髦度"或"陈述流畅度"；建议要说明下一步实验如何改变研究判断。</a:t>
+              <a:t/>
+            </a:r>
+          </a:p>
+          <a:p xmlns:a="http://schemas.openxmlformats.org/drawingml/2006/main">
+            <a:r>
+              <a:t>学生动作：</a:t>
+            </a:r>
+          </a:p>
+          <a:p xmlns:a="http://schemas.openxmlformats.org/drawingml/2006/main">
+            <a:r>
+              <a:t>让学生写一条"最大风险"，提示必须指向 rubric 维度。</a:t>
+            </a:r>
+          </a:p>
+          <a:p xmlns:a="http://schemas.openxmlformats.org/drawingml/2006/main">
+            <a:r>
+              <a:t/>
+            </a:r>
+          </a:p>
+          <a:p xmlns:a="http://schemas.openxmlformats.org/drawingml/2006/main">
+            <a:r>
+              <a:t>来源与边界：</a:t>
+            </a:r>
+          </a:p>
+          <a:p xmlns:a="http://schemas.openxmlformats.org/drawingml/2006/main">
+            <a:r>
+              <a:t>讲义 §三·2。</a:t>
+            </a:r>
+          </a:p>
+          <a:p xmlns:a="http://schemas.openxmlformats.org/drawingml/2006/main">
+            <a:r>
+              <a:t/>
+            </a:r>
+          </a:p>
+          <a:p xmlns:a="http://schemas.openxmlformats.org/drawingml/2006/main">
+            <a:r>
+              <a:t>---</a:t>
             </a:r>
           </a:p>
           <a:p xmlns:a="http://schemas.openxmlformats.org/drawingml/2006/main">
@@ -2157,17 +3052,27 @@
           </a:p>
           <a:p xmlns:a="http://schemas.openxmlformats.org/drawingml/2006/main">
             <a:r>
-              <a:t>- /Users/bright/Projects/courses/graduate/lessons/lesson-08/slides.md</a:t>
-            </a:r>
-          </a:p>
-          <a:p xmlns:a="http://schemas.openxmlformats.org/drawingml/2006/main">
-            <a:r>
-              <a:t>- /Users/bright/Projects/courses/graduate/lessons/lesson-08/handout.md</a:t>
-            </a:r>
-          </a:p>
-          <a:p xmlns:a="http://schemas.openxmlformats.org/drawingml/2006/main">
-            <a:r>
-              <a:t>- 讲义 §三·2。</a:t>
+              <a:t/>
+            </a:r>
+          </a:p>
+          <a:p xmlns:a="http://schemas.openxmlformats.org/drawingml/2006/main">
+            <a:r>
+              <a:t>- 本课 handout.md 与 slides.md</a:t>
+            </a:r>
+          </a:p>
+          <a:p xmlns:a="http://schemas.openxmlformats.org/drawingml/2006/main">
+            <a:r>
+              <a:t/>
+            </a:r>
+          </a:p>
+          <a:p xmlns:a="http://schemas.openxmlformats.org/drawingml/2006/main">
+            <a:r>
+              <a:t>- ../../course/reading-card-case.md</a:t>
+            </a:r>
+          </a:p>
+          <a:p xmlns:a="http://schemas.openxmlformats.org/drawingml/2006/main">
+            <a:r>
+              <a:t/>
             </a:r>
           </a:p>
           <a:p xmlns:a="http://schemas.openxmlformats.org/drawingml/2006/main">
@@ -2242,117 +3147,187 @@
           <a:lstStyle xmlns:a="http://schemas.openxmlformats.org/drawingml/2006/main"/>
           <a:p xmlns:a="http://schemas.openxmlformats.org/drawingml/2006/main">
             <a:r>
+              <a:t>页面：P07 设计诊所诊断方案，不评价人、不替作者决定</a:t>
+            </a:r>
+          </a:p>
+          <a:p xmlns:a="http://schemas.openxmlformats.org/drawingml/2006/main">
+            <a:r>
+              <a:t/>
+            </a:r>
+          </a:p>
+          <a:p xmlns:a="http://schemas.openxmlformats.org/drawingml/2006/main">
+            <a:r>
+              <a:t>讲义位置：本课讲义；见逐页母稿映射表</a:t>
+            </a:r>
+          </a:p>
+          <a:p xmlns:a="http://schemas.openxmlformats.org/drawingml/2006/main">
+            <a:r>
+              <a:t/>
+            </a:r>
+          </a:p>
+          <a:p xmlns:a="http://schemas.openxmlformats.org/drawingml/2006/main">
+            <a:r>
+              <a:t>屏显核对：</a:t>
+            </a:r>
+          </a:p>
+          <a:p xmlns:a="http://schemas.openxmlformats.org/drawingml/2006/main">
+            <a:r>
+              <a:t>反馈者责任：</a:t>
+            </a:r>
+          </a:p>
+          <a:p xmlns:a="http://schemas.openxmlformats.org/drawingml/2006/main">
+            <a:r>
+              <a:t>- 指向方案，不指向人</a:t>
+            </a:r>
+          </a:p>
+          <a:p xmlns:a="http://schemas.openxmlformats.org/drawingml/2006/main">
+            <a:r>
+              <a:t>- 引用陈述中具体内容，不用泛化判断</a:t>
+            </a:r>
+          </a:p>
+          <a:p xmlns:a="http://schemas.openxmlformats.org/drawingml/2006/main">
+            <a:r>
+              <a:t>- 区分"我看到的缺陷"和"我会怎么改"</a:t>
+            </a:r>
+          </a:p>
+          <a:p xmlns:a="http://schemas.openxmlformats.org/drawingml/2006/main">
+            <a:r>
+              <a:t>- 不替作者决定采纳什么</a:t>
+            </a:r>
+          </a:p>
+          <a:p xmlns:a="http://schemas.openxmlformats.org/drawingml/2006/main">
+            <a:r>
+              <a:t/>
+            </a:r>
+          </a:p>
+          <a:p xmlns:a="http://schemas.openxmlformats.org/drawingml/2006/main">
+            <a:r>
+              <a:t>设计诊所三纪律：</a:t>
+            </a:r>
+          </a:p>
+          <a:p xmlns:a="http://schemas.openxmlformats.org/drawingml/2006/main">
+            <a:r>
+              <a:t>1. 诊断对象是方案，不是陈述者</a:t>
+            </a:r>
+          </a:p>
+          <a:p xmlns:a="http://schemas.openxmlformats.org/drawingml/2006/main">
+            <a:r>
+              <a:t>2. 不作共同决策</a:t>
+            </a:r>
+          </a:p>
+          <a:p xmlns:a="http://schemas.openxmlformats.org/drawingml/2006/main">
+            <a:r>
+              <a:t>3. 失败暴露优先</a:t>
+            </a:r>
+          </a:p>
+          <a:p xmlns:a="http://schemas.openxmlformats.org/drawingml/2006/main">
+            <a:r>
+              <a:t/>
+            </a:r>
+          </a:p>
+          <a:p xmlns:a="http://schemas.openxmlformats.org/drawingml/2006/main">
+            <a:r>
+              <a:t>一次诊所轮次：</a:t>
+            </a:r>
+          </a:p>
+          <a:p xmlns:a="http://schemas.openxmlformats.org/drawingml/2006/main">
+            <a:r>
+              <a:t/>
+            </a:r>
+          </a:p>
+          <a:p xmlns:a="http://schemas.openxmlformats.org/drawingml/2006/main">
+            <a:r>
+              <a:t>| 阶段 | 动作 |</a:t>
+            </a:r>
+          </a:p>
+          <a:p xmlns:a="http://schemas.openxmlformats.org/drawingml/2006/main">
+            <a:r>
+              <a:t>| --- | --- |</a:t>
+            </a:r>
+          </a:p>
+          <a:p xmlns:a="http://schemas.openxmlformats.org/drawingml/2006/main">
+            <a:r>
+              <a:t>| 限时陈述 | 陈述者按五段结构陈述，同伴只听不插话 |</a:t>
+            </a:r>
+          </a:p>
+          <a:p xmlns:a="http://schemas.openxmlformats.org/drawingml/2006/main">
+            <a:r>
+              <a:t>| 限时反馈 | 每位同伴给出三问；陈述者只记录 |</a:t>
+            </a:r>
+          </a:p>
+          <a:p xmlns:a="http://schemas.openxmlformats.org/drawingml/2006/main">
+            <a:r>
+              <a:t/>
+            </a:r>
+          </a:p>
+          <a:p xmlns:a="http://schemas.openxmlformats.org/drawingml/2006/main">
+            <a:r>
+              <a:t>&gt; "baseline 不公平"未指明具体条目，不算合格反馈。</a:t>
+            </a:r>
+          </a:p>
+          <a:p xmlns:a="http://schemas.openxmlformats.org/drawingml/2006/main">
+            <a:r>
+              <a:t/>
+            </a:r>
+          </a:p>
+          <a:p xmlns:a="http://schemas.openxmlformats.org/drawingml/2006/main">
+            <a:r>
+              <a:t>反馈记录表字段：反馈来源 / 维度 / 最强处·最大风险·建议 / 处理动作 / 理由 / 回写位置。</a:t>
+            </a:r>
+          </a:p>
+          <a:p xmlns:a="http://schemas.openxmlformats.org/drawingml/2006/main">
+            <a:r>
+              <a:t/>
+            </a:r>
+          </a:p>
+          <a:p xmlns:a="http://schemas.openxmlformats.org/drawingml/2006/main">
+            <a:r>
+              <a:t>教师讲述：</a:t>
+            </a:r>
+          </a:p>
+          <a:p xmlns:a="http://schemas.openxmlformats.org/drawingml/2006/main">
+            <a:r>
               <a:t>反馈者不是评委，是合作诊断者。陈述者先完整记录，再按真实需要选择采纳、澄清、补证、暂缓或保留异议；每条都记理由与回写位置，不要求出现“拒绝”。</a:t>
             </a:r>
           </a:p>
           <a:p xmlns:a="http://schemas.openxmlformats.org/drawingml/2006/main">
             <a:r>
-              <a:t>屏显母稿细节备查：</a:t>
-            </a:r>
-          </a:p>
-          <a:p xmlns:a="http://schemas.openxmlformats.org/drawingml/2006/main">
-            <a:r>
-              <a:t>反馈者责任：</a:t>
-            </a:r>
-          </a:p>
-          <a:p xmlns:a="http://schemas.openxmlformats.org/drawingml/2006/main">
-            <a:r>
-              <a:t>- 指向方案，不指向人</a:t>
-            </a:r>
-          </a:p>
-          <a:p xmlns:a="http://schemas.openxmlformats.org/drawingml/2006/main">
-            <a:r>
-              <a:t>- 引用陈述中具体内容，不用泛化判断</a:t>
-            </a:r>
-          </a:p>
-          <a:p xmlns:a="http://schemas.openxmlformats.org/drawingml/2006/main">
-            <a:r>
-              <a:t>- 区分"我看到的缺陷"和"我会怎么改"</a:t>
-            </a:r>
-          </a:p>
-          <a:p xmlns:a="http://schemas.openxmlformats.org/drawingml/2006/main">
-            <a:r>
-              <a:t>- 不替作者决定采纳什么</a:t>
-            </a:r>
-          </a:p>
-          <a:p xmlns:a="http://schemas.openxmlformats.org/drawingml/2006/main">
-            <a:r>
-              <a:t/>
-            </a:r>
-          </a:p>
-          <a:p xmlns:a="http://schemas.openxmlformats.org/drawingml/2006/main">
-            <a:r>
-              <a:t>设计诊所三纪律：</a:t>
-            </a:r>
-          </a:p>
-          <a:p xmlns:a="http://schemas.openxmlformats.org/drawingml/2006/main">
-            <a:r>
-              <a:t>1. 诊断对象是方案，不是陈述者</a:t>
-            </a:r>
-          </a:p>
-          <a:p xmlns:a="http://schemas.openxmlformats.org/drawingml/2006/main">
-            <a:r>
-              <a:t>2. 不作共同决策</a:t>
-            </a:r>
-          </a:p>
-          <a:p xmlns:a="http://schemas.openxmlformats.org/drawingml/2006/main">
-            <a:r>
-              <a:t>3. 失败暴露优先</a:t>
-            </a:r>
-          </a:p>
-          <a:p xmlns:a="http://schemas.openxmlformats.org/drawingml/2006/main">
-            <a:r>
-              <a:t/>
-            </a:r>
-          </a:p>
-          <a:p xmlns:a="http://schemas.openxmlformats.org/drawingml/2006/main">
-            <a:r>
-              <a:t>一次诊所轮次：</a:t>
-            </a:r>
-          </a:p>
-          <a:p xmlns:a="http://schemas.openxmlformats.org/drawingml/2006/main">
-            <a:r>
-              <a:t/>
-            </a:r>
-          </a:p>
-          <a:p xmlns:a="http://schemas.openxmlformats.org/drawingml/2006/main">
-            <a:r>
-              <a:t>| 阶段 | 动作 |</a:t>
-            </a:r>
-          </a:p>
-          <a:p xmlns:a="http://schemas.openxmlformats.org/drawingml/2006/main">
-            <a:r>
-              <a:t>| --- | --- |</a:t>
-            </a:r>
-          </a:p>
-          <a:p xmlns:a="http://schemas.openxmlformats.org/drawingml/2006/main">
-            <a:r>
-              <a:t>| 限时陈述 | 陈述者按五段结构陈述，同伴只听不插话 |</a:t>
-            </a:r>
-          </a:p>
-          <a:p xmlns:a="http://schemas.openxmlformats.org/drawingml/2006/main">
-            <a:r>
-              <a:t>| 限时反馈 | 每位同伴给出三问；陈述者只记录 |</a:t>
-            </a:r>
-          </a:p>
-          <a:p xmlns:a="http://schemas.openxmlformats.org/drawingml/2006/main">
-            <a:r>
-              <a:t/>
-            </a:r>
-          </a:p>
-          <a:p xmlns:a="http://schemas.openxmlformats.org/drawingml/2006/main">
-            <a:r>
-              <a:t>&gt; "baseline 不公平"未指明具体条目，不算合格反馈。</a:t>
-            </a:r>
-          </a:p>
-          <a:p xmlns:a="http://schemas.openxmlformats.org/drawingml/2006/main">
-            <a:r>
-              <a:t/>
-            </a:r>
-          </a:p>
-          <a:p xmlns:a="http://schemas.openxmlformats.org/drawingml/2006/main">
-            <a:r>
-              <a:t>反馈记录表字段：反馈来源 / 维度 / 最强处·最大风险·建议 / 处理动作 / 理由 / 回写位置。</a:t>
+              <a:t/>
+            </a:r>
+          </a:p>
+          <a:p xmlns:a="http://schemas.openxmlformats.org/drawingml/2006/main">
+            <a:r>
+              <a:t>学生动作：</a:t>
+            </a:r>
+          </a:p>
+          <a:p xmlns:a="http://schemas.openxmlformats.org/drawingml/2006/main">
+            <a:r>
+              <a:t>确认同伴组分组与轮次；让学生判断：如果同伴只说"听起来挺好"，缺了三问中的哪几问？</a:t>
+            </a:r>
+          </a:p>
+          <a:p xmlns:a="http://schemas.openxmlformats.org/drawingml/2006/main">
+            <a:r>
+              <a:t/>
+            </a:r>
+          </a:p>
+          <a:p xmlns:a="http://schemas.openxmlformats.org/drawingml/2006/main">
+            <a:r>
+              <a:t>来源与边界：</a:t>
+            </a:r>
+          </a:p>
+          <a:p xmlns:a="http://schemas.openxmlformats.org/drawingml/2006/main">
+            <a:r>
+              <a:t>讲义 §三·3、§四·1、§四·2、§四·3。</a:t>
+            </a:r>
+          </a:p>
+          <a:p xmlns:a="http://schemas.openxmlformats.org/drawingml/2006/main">
+            <a:r>
+              <a:t/>
+            </a:r>
+          </a:p>
+          <a:p xmlns:a="http://schemas.openxmlformats.org/drawingml/2006/main">
+            <a:r>
+              <a:t>---</a:t>
             </a:r>
           </a:p>
           <a:p xmlns:a="http://schemas.openxmlformats.org/drawingml/2006/main">
@@ -2367,17 +3342,27 @@
           </a:p>
           <a:p xmlns:a="http://schemas.openxmlformats.org/drawingml/2006/main">
             <a:r>
-              <a:t>- /Users/bright/Projects/courses/graduate/lessons/lesson-08/slides.md</a:t>
-            </a:r>
-          </a:p>
-          <a:p xmlns:a="http://schemas.openxmlformats.org/drawingml/2006/main">
-            <a:r>
-              <a:t>- /Users/bright/Projects/courses/graduate/lessons/lesson-08/handout.md</a:t>
-            </a:r>
-          </a:p>
-          <a:p xmlns:a="http://schemas.openxmlformats.org/drawingml/2006/main">
-            <a:r>
-              <a:t>- 讲义 §三·3、§四·1、§四·2、§四·3。</a:t>
+              <a:t/>
+            </a:r>
+          </a:p>
+          <a:p xmlns:a="http://schemas.openxmlformats.org/drawingml/2006/main">
+            <a:r>
+              <a:t>- 本课 handout.md 与 slides.md</a:t>
+            </a:r>
+          </a:p>
+          <a:p xmlns:a="http://schemas.openxmlformats.org/drawingml/2006/main">
+            <a:r>
+              <a:t/>
+            </a:r>
+          </a:p>
+          <a:p xmlns:a="http://schemas.openxmlformats.org/drawingml/2006/main">
+            <a:r>
+              <a:t>- ../../course/reading-card-case.md</a:t>
+            </a:r>
+          </a:p>
+          <a:p xmlns:a="http://schemas.openxmlformats.org/drawingml/2006/main">
+            <a:r>
+              <a:t/>
             </a:r>
           </a:p>
           <a:p xmlns:a="http://schemas.openxmlformats.org/drawingml/2006/main">
@@ -2452,102 +3437,127 @@
           <a:lstStyle xmlns:a="http://schemas.openxmlformats.org/drawingml/2006/main"/>
           <a:p xmlns:a="http://schemas.openxmlformats.org/drawingml/2006/main">
             <a:r>
+              <a:t>页面：P08 每条反馈都要有真实处理动作</a:t>
+            </a:r>
+          </a:p>
+          <a:p xmlns:a="http://schemas.openxmlformats.org/drawingml/2006/main">
+            <a:r>
+              <a:t/>
+            </a:r>
+          </a:p>
+          <a:p xmlns:a="http://schemas.openxmlformats.org/drawingml/2006/main">
+            <a:r>
+              <a:t>讲义位置：本课讲义；见逐页母稿映射表</a:t>
+            </a:r>
+          </a:p>
+          <a:p xmlns:a="http://schemas.openxmlformats.org/drawingml/2006/main">
+            <a:r>
+              <a:t/>
+            </a:r>
+          </a:p>
+          <a:p xmlns:a="http://schemas.openxmlformats.org/drawingml/2006/main">
+            <a:r>
+              <a:t>屏显核对：</a:t>
+            </a:r>
+          </a:p>
+          <a:p xmlns:a="http://schemas.openxmlformats.org/drawingml/2006/main">
+            <a:r>
+              <a:t>处理动作：采纳、澄清、补证、暂缓、保留异议。</a:t>
+            </a:r>
+          </a:p>
+          <a:p xmlns:a="http://schemas.openxmlformats.org/drawingml/2006/main">
+            <a:r>
+              <a:t/>
+            </a:r>
+          </a:p>
+          <a:p xmlns:a="http://schemas.openxmlformats.org/drawingml/2006/main">
+            <a:r>
+              <a:t>示例回应：</a:t>
+            </a:r>
+          </a:p>
+          <a:p xmlns:a="http://schemas.openxmlformats.org/drawingml/2006/main">
+            <a:r>
+              <a:t>补证：H1 与 A2 仍不能区分。</a:t>
+            </a:r>
+          </a:p>
+          <a:p xmlns:a="http://schemas.openxmlformats.org/drawingml/2006/main">
+            <a:r>
+              <a:t>理由与依据：同伴指出评分者可见组别，见方案评价协议。</a:t>
+            </a:r>
+          </a:p>
+          <a:p xmlns:a="http://schemas.openxmlformats.org/drawingml/2006/main">
+            <a:r>
+              <a:t>边界与状态：当前构造包；盲化效果待验证。</a:t>
+            </a:r>
+          </a:p>
+          <a:p xmlns:a="http://schemas.openxmlformats.org/drawingml/2006/main">
+            <a:r>
+              <a:t>实际修改：第 9 课规格补入匿名顺序、统一规则与复核办法。</a:t>
+            </a:r>
+          </a:p>
+          <a:p xmlns:a="http://schemas.openxmlformats.org/drawingml/2006/main">
+            <a:r>
+              <a:t/>
+            </a:r>
+          </a:p>
+          <a:p xmlns:a="http://schemas.openxmlformats.org/drawingml/2006/main">
+            <a:r>
+              <a:t>每条回应都写明影响工件与回写位置。</a:t>
+            </a:r>
+          </a:p>
+          <a:p xmlns:a="http://schemas.openxmlformats.org/drawingml/2006/main">
+            <a:r>
+              <a:t/>
+            </a:r>
+          </a:p>
+          <a:p xmlns:a="http://schemas.openxmlformats.org/drawingml/2006/main">
+            <a:r>
+              <a:t>教师讲述：</a:t>
+            </a:r>
+          </a:p>
+          <a:p xmlns:a="http://schemas.openxmlformats.org/drawingml/2006/main">
+            <a:r>
               <a:t>本课要求处理至少两条真实反馈，动作可相同，不强制覆盖类别。暂缓必须写明后续触发条件，保留异议必须写明证据或约束依据。</a:t>
             </a:r>
           </a:p>
           <a:p xmlns:a="http://schemas.openxmlformats.org/drawingml/2006/main">
             <a:r>
-              <a:t>屏显母稿细节备查：</a:t>
-            </a:r>
-          </a:p>
-          <a:p xmlns:a="http://schemas.openxmlformats.org/drawingml/2006/main">
-            <a:r>
-              <a:t>| 处理动作 | 何时使用 |</a:t>
-            </a:r>
-          </a:p>
-          <a:p xmlns:a="http://schemas.openxmlformats.org/drawingml/2006/main">
-            <a:r>
-              <a:t>| --- | --- |</a:t>
-            </a:r>
-          </a:p>
-          <a:p xmlns:a="http://schemas.openxmlformats.org/drawingml/2006/main">
-            <a:r>
-              <a:t>| 采纳 | 意见成立，直接修改工件 |</a:t>
-            </a:r>
-          </a:p>
-          <a:p xmlns:a="http://schemas.openxmlformats.org/drawingml/2006/main">
-            <a:r>
-              <a:t>| 澄清 | 反馈来自表达含混，先补边界或定义 |</a:t>
-            </a:r>
-          </a:p>
-          <a:p xmlns:a="http://schemas.openxmlformats.org/drawingml/2006/main">
-            <a:r>
-              <a:t>| 补证 | 需要新证据或检查才能判断 |</a:t>
-            </a:r>
-          </a:p>
-          <a:p xmlns:a="http://schemas.openxmlformats.org/drawingml/2006/main">
-            <a:r>
-              <a:t>| 暂缓 | 当前无法完成，写明后续触发条件 |</a:t>
-            </a:r>
-          </a:p>
-          <a:p xmlns:a="http://schemas.openxmlformats.org/drawingml/2006/main">
-            <a:r>
-              <a:t>| 保留异议 | 意见与已有证据或约束冲突，保留分歧与理由 |</a:t>
-            </a:r>
-          </a:p>
-          <a:p xmlns:a="http://schemas.openxmlformats.org/drawingml/2006/main">
-            <a:r>
-              <a:t/>
-            </a:r>
-          </a:p>
-          <a:p xmlns:a="http://schemas.openxmlformats.org/drawingml/2006/main">
-            <a:r>
-              <a:t>| 字段 | 说明 | 样例 |</a:t>
-            </a:r>
-          </a:p>
-          <a:p xmlns:a="http://schemas.openxmlformats.org/drawingml/2006/main">
-            <a:r>
-              <a:t>| --- | --- | --- |</a:t>
-            </a:r>
-          </a:p>
-          <a:p xmlns:a="http://schemas.openxmlformats.org/drawingml/2006/main">
-            <a:r>
-              <a:t>| 决策内容 | 选择什么处理动作 | 补证“H1 与 A1 映射尚不可区分” |</a:t>
-            </a:r>
-          </a:p>
-          <a:p xmlns:a="http://schemas.openxmlformats.org/drawingml/2006/main">
-            <a:r>
-              <a:t>| 取舍理由 | 为什么这样取 | 区分实验是判断门条件 |</a:t>
-            </a:r>
-          </a:p>
-          <a:p xmlns:a="http://schemas.openxmlformats.org/drawingml/2006/main">
-            <a:r>
-              <a:t>| 适用边界 | 在什么条件下成立 | 当前 20 篇样本；外推需重验 |</a:t>
-            </a:r>
-          </a:p>
-          <a:p xmlns:a="http://schemas.openxmlformats.org/drawingml/2006/main">
-            <a:r>
-              <a:t>| 依据 | 反馈来源 + 方案条目 | 同伴 A + 第 7 课 A1 + 实验 §假设对应 |</a:t>
-            </a:r>
-          </a:p>
-          <a:p xmlns:a="http://schemas.openxmlformats.org/drawingml/2006/main">
-            <a:r>
-              <a:t>| 待验证状态 | 哪些仍未确认 | 分层后是否能产生差异待第 9 课确认 |</a:t>
-            </a:r>
-          </a:p>
-          <a:p xmlns:a="http://schemas.openxmlformats.org/drawingml/2006/main">
-            <a:r>
-              <a:t>| 影响工件 | 决策改变后影响什么 | 实验规格 §假设对应、研究判断初版 |</a:t>
-            </a:r>
-          </a:p>
-          <a:p xmlns:a="http://schemas.openxmlformats.org/drawingml/2006/main">
-            <a:r>
-              <a:t/>
-            </a:r>
-          </a:p>
-          <a:p xmlns:a="http://schemas.openxmlformats.org/drawingml/2006/main">
-            <a:r>
-              <a:t>&gt; 处理动作必须对应方案具体条目，并记录理由与回写位置；不为凑类别制造“拒绝”。</a:t>
+              <a:t/>
+            </a:r>
+          </a:p>
+          <a:p xmlns:a="http://schemas.openxmlformats.org/drawingml/2006/main">
+            <a:r>
+              <a:t>学生动作：</a:t>
+            </a:r>
+          </a:p>
+          <a:p xmlns:a="http://schemas.openxmlformats.org/drawingml/2006/main">
+            <a:r>
+              <a:t>让学生用自己的反馈草写一行决策表；想：如果同伴说"baseline 不公平"但没指明，应该归入哪类？</a:t>
+            </a:r>
+          </a:p>
+          <a:p xmlns:a="http://schemas.openxmlformats.org/drawingml/2006/main">
+            <a:r>
+              <a:t/>
+            </a:r>
+          </a:p>
+          <a:p xmlns:a="http://schemas.openxmlformats.org/drawingml/2006/main">
+            <a:r>
+              <a:t>来源与边界：</a:t>
+            </a:r>
+          </a:p>
+          <a:p xmlns:a="http://schemas.openxmlformats.org/drawingml/2006/main">
+            <a:r>
+              <a:t>讲义 §五·1、§五·2；第 1 课 §2.6 与第 7 课 §三·2 研究判断六字段。</a:t>
+            </a:r>
+          </a:p>
+          <a:p xmlns:a="http://schemas.openxmlformats.org/drawingml/2006/main">
+            <a:r>
+              <a:t/>
+            </a:r>
+          </a:p>
+          <a:p xmlns:a="http://schemas.openxmlformats.org/drawingml/2006/main">
+            <a:r>
+              <a:t>---</a:t>
             </a:r>
           </a:p>
           <a:p xmlns:a="http://schemas.openxmlformats.org/drawingml/2006/main">
@@ -2562,17 +3572,27 @@
           </a:p>
           <a:p xmlns:a="http://schemas.openxmlformats.org/drawingml/2006/main">
             <a:r>
-              <a:t>- /Users/bright/Projects/courses/graduate/lessons/lesson-08/slides.md</a:t>
-            </a:r>
-          </a:p>
-          <a:p xmlns:a="http://schemas.openxmlformats.org/drawingml/2006/main">
-            <a:r>
-              <a:t>- /Users/bright/Projects/courses/graduate/lessons/lesson-08/handout.md</a:t>
-            </a:r>
-          </a:p>
-          <a:p xmlns:a="http://schemas.openxmlformats.org/drawingml/2006/main">
-            <a:r>
-              <a:t>- 讲义 §五·1、§五·2；第 1 课 §2.6 与第 7 课 §三·2 研究判断六字段。</a:t>
+              <a:t/>
+            </a:r>
+          </a:p>
+          <a:p xmlns:a="http://schemas.openxmlformats.org/drawingml/2006/main">
+            <a:r>
+              <a:t>- 本课 handout.md 与 slides.md</a:t>
+            </a:r>
+          </a:p>
+          <a:p xmlns:a="http://schemas.openxmlformats.org/drawingml/2006/main">
+            <a:r>
+              <a:t/>
+            </a:r>
+          </a:p>
+          <a:p xmlns:a="http://schemas.openxmlformats.org/drawingml/2006/main">
+            <a:r>
+              <a:t>- ../../course/reading-card-case.md</a:t>
+            </a:r>
+          </a:p>
+          <a:p xmlns:a="http://schemas.openxmlformats.org/drawingml/2006/main">
+            <a:r>
+              <a:t/>
             </a:r>
           </a:p>
           <a:p xmlns:a="http://schemas.openxmlformats.org/drawingml/2006/main">
@@ -2647,67 +3667,137 @@
           <a:lstStyle xmlns:a="http://schemas.openxmlformats.org/drawingml/2006/main"/>
           <a:p xmlns:a="http://schemas.openxmlformats.org/drawingml/2006/main">
             <a:r>
+              <a:t>页面：P09 AI 可以整理线索，但不能替你作研究判断</a:t>
+            </a:r>
+          </a:p>
+          <a:p xmlns:a="http://schemas.openxmlformats.org/drawingml/2006/main">
+            <a:r>
+              <a:t/>
+            </a:r>
+          </a:p>
+          <a:p xmlns:a="http://schemas.openxmlformats.org/drawingml/2006/main">
+            <a:r>
+              <a:t>讲义位置：本课讲义；见逐页母稿映射表</a:t>
+            </a:r>
+          </a:p>
+          <a:p xmlns:a="http://schemas.openxmlformats.org/drawingml/2006/main">
+            <a:r>
+              <a:t/>
+            </a:r>
+          </a:p>
+          <a:p xmlns:a="http://schemas.openxmlformats.org/drawingml/2006/main">
+            <a:r>
+              <a:t>屏显核对：</a:t>
+            </a:r>
+          </a:p>
+          <a:p xmlns:a="http://schemas.openxmlformats.org/drawingml/2006/main">
+            <a:r>
+              <a:t>AI 可以：</a:t>
+            </a:r>
+          </a:p>
+          <a:p xmlns:a="http://schemas.openxmlformats.org/drawingml/2006/main">
+            <a:r>
+              <a:t>- 把同伴口述反馈转写为结构化条目</a:t>
+            </a:r>
+          </a:p>
+          <a:p xmlns:a="http://schemas.openxmlformats.org/drawingml/2006/main">
+            <a:r>
+              <a:t>- 提示反馈可能对应的 rubric 维度</a:t>
+            </a:r>
+          </a:p>
+          <a:p xmlns:a="http://schemas.openxmlformats.org/drawingml/2006/main">
+            <a:r>
+              <a:t>- 草拟可能的处理理由或修改方向</a:t>
+            </a:r>
+          </a:p>
+          <a:p xmlns:a="http://schemas.openxmlformats.org/drawingml/2006/main">
+            <a:r>
+              <a:t/>
+            </a:r>
+          </a:p>
+          <a:p xmlns:a="http://schemas.openxmlformats.org/drawingml/2006/main">
+            <a:r>
+              <a:t>AI 不可以：</a:t>
+            </a:r>
+          </a:p>
+          <a:p xmlns:a="http://schemas.openxmlformats.org/drawingml/2006/main">
+            <a:r>
+              <a:t>- 判断反馈是否成立</a:t>
+            </a:r>
+          </a:p>
+          <a:p xmlns:a="http://schemas.openxmlformats.org/drawingml/2006/main">
+            <a:r>
+              <a:t>- 决定采纳、澄清、补证、暂缓或保留异议</a:t>
+            </a:r>
+          </a:p>
+          <a:p xmlns:a="http://schemas.openxmlformats.org/drawingml/2006/main">
+            <a:r>
+              <a:t>- 写出取舍理由、适用边界和影响工件</a:t>
+            </a:r>
+          </a:p>
+          <a:p xmlns:a="http://schemas.openxmlformats.org/drawingml/2006/main">
+            <a:r>
+              <a:t/>
+            </a:r>
+          </a:p>
+          <a:p xmlns:a="http://schemas.openxmlformats.org/drawingml/2006/main">
+            <a:r>
+              <a:t>&gt; 未完成核验前，AI 草拟决策表只能保留在探索线索区。</a:t>
+            </a:r>
+          </a:p>
+          <a:p xmlns:a="http://schemas.openxmlformats.org/drawingml/2006/main">
+            <a:r>
+              <a:t/>
+            </a:r>
+          </a:p>
+          <a:p xmlns:a="http://schemas.openxmlformats.org/drawingml/2006/main">
+            <a:r>
+              <a:t>教师讲述：</a:t>
+            </a:r>
+          </a:p>
+          <a:p xmlns:a="http://schemas.openxmlformats.org/drawingml/2006/main">
+            <a:r>
               <a:t>AI 可以在反馈处理阶段辅助，但反馈是否成立、采纳什么、写出取舍理由，必须学生本人完成。AI 没有对方案证据、机制和约束的整体上下文。把 AI 草拟决策直接搬入研究判断主格，等于把研究判断外包给模型。</a:t>
             </a:r>
           </a:p>
           <a:p xmlns:a="http://schemas.openxmlformats.org/drawingml/2006/main">
             <a:r>
-              <a:t>屏显母稿细节备查：</a:t>
-            </a:r>
-          </a:p>
-          <a:p xmlns:a="http://schemas.openxmlformats.org/drawingml/2006/main">
-            <a:r>
-              <a:t>AI 可以：</a:t>
-            </a:r>
-          </a:p>
-          <a:p xmlns:a="http://schemas.openxmlformats.org/drawingml/2006/main">
-            <a:r>
-              <a:t>- 把同伴口述反馈转写为结构化条目</a:t>
-            </a:r>
-          </a:p>
-          <a:p xmlns:a="http://schemas.openxmlformats.org/drawingml/2006/main">
-            <a:r>
-              <a:t>- 提示反馈可能对应的 rubric 维度</a:t>
-            </a:r>
-          </a:p>
-          <a:p xmlns:a="http://schemas.openxmlformats.org/drawingml/2006/main">
-            <a:r>
-              <a:t>- 草拟可能的处理理由或修改方向</a:t>
-            </a:r>
-          </a:p>
-          <a:p xmlns:a="http://schemas.openxmlformats.org/drawingml/2006/main">
-            <a:r>
-              <a:t/>
-            </a:r>
-          </a:p>
-          <a:p xmlns:a="http://schemas.openxmlformats.org/drawingml/2006/main">
-            <a:r>
-              <a:t>AI 不可以：</a:t>
-            </a:r>
-          </a:p>
-          <a:p xmlns:a="http://schemas.openxmlformats.org/drawingml/2006/main">
-            <a:r>
-              <a:t>- 判断反馈是否成立</a:t>
-            </a:r>
-          </a:p>
-          <a:p xmlns:a="http://schemas.openxmlformats.org/drawingml/2006/main">
-            <a:r>
-              <a:t>- 决定采纳、澄清、补证、暂缓或保留异议</a:t>
-            </a:r>
-          </a:p>
-          <a:p xmlns:a="http://schemas.openxmlformats.org/drawingml/2006/main">
-            <a:r>
-              <a:t>- 写出取舍理由、适用边界和影响工件</a:t>
-            </a:r>
-          </a:p>
-          <a:p xmlns:a="http://schemas.openxmlformats.org/drawingml/2006/main">
-            <a:r>
-              <a:t/>
-            </a:r>
-          </a:p>
-          <a:p xmlns:a="http://schemas.openxmlformats.org/drawingml/2006/main">
-            <a:r>
-              <a:t>&gt; 未完成核验前，AI 草拟决策表只能保留在探索线索区。</a:t>
+              <a:t/>
+            </a:r>
+          </a:p>
+          <a:p xmlns:a="http://schemas.openxmlformats.org/drawingml/2006/main">
+            <a:r>
+              <a:t>学生动作：</a:t>
+            </a:r>
+          </a:p>
+          <a:p xmlns:a="http://schemas.openxmlformats.org/drawingml/2006/main">
+            <a:r>
+              <a:t>让学生说出一条 AI 可以做、一条 AI 不可以做的反馈处理动作。</a:t>
+            </a:r>
+          </a:p>
+          <a:p xmlns:a="http://schemas.openxmlformats.org/drawingml/2006/main">
+            <a:r>
+              <a:t/>
+            </a:r>
+          </a:p>
+          <a:p xmlns:a="http://schemas.openxmlformats.org/drawingml/2006/main">
+            <a:r>
+              <a:t>来源与边界：</a:t>
+            </a:r>
+          </a:p>
+          <a:p xmlns:a="http://schemas.openxmlformats.org/drawingml/2006/main">
+            <a:r>
+              <a:t>讲义 §五·3；[AGENTS.md](../../AGENTS.md) 证据标准。</a:t>
+            </a:r>
+          </a:p>
+          <a:p xmlns:a="http://schemas.openxmlformats.org/drawingml/2006/main">
+            <a:r>
+              <a:t/>
+            </a:r>
+          </a:p>
+          <a:p xmlns:a="http://schemas.openxmlformats.org/drawingml/2006/main">
+            <a:r>
+              <a:t>---</a:t>
             </a:r>
           </a:p>
           <a:p xmlns:a="http://schemas.openxmlformats.org/drawingml/2006/main">
@@ -2722,17 +3812,27 @@
           </a:p>
           <a:p xmlns:a="http://schemas.openxmlformats.org/drawingml/2006/main">
             <a:r>
-              <a:t>- /Users/bright/Projects/courses/graduate/lessons/lesson-08/slides.md</a:t>
-            </a:r>
-          </a:p>
-          <a:p xmlns:a="http://schemas.openxmlformats.org/drawingml/2006/main">
-            <a:r>
-              <a:t>- /Users/bright/Projects/courses/graduate/lessons/lesson-08/handout.md</a:t>
-            </a:r>
-          </a:p>
-          <a:p xmlns:a="http://schemas.openxmlformats.org/drawingml/2006/main">
-            <a:r>
-              <a:t>- 讲义 §五·3；[AGENTS.md](../../AGENTS.md) 证据标准。</a:t>
+              <a:t/>
+            </a:r>
+          </a:p>
+          <a:p xmlns:a="http://schemas.openxmlformats.org/drawingml/2006/main">
+            <a:r>
+              <a:t>- 本课 handout.md 与 slides.md</a:t>
+            </a:r>
+          </a:p>
+          <a:p xmlns:a="http://schemas.openxmlformats.org/drawingml/2006/main">
+            <a:r>
+              <a:t/>
+            </a:r>
+          </a:p>
+          <a:p xmlns:a="http://schemas.openxmlformats.org/drawingml/2006/main">
+            <a:r>
+              <a:t>- ../../course/reading-card-case.md</a:t>
+            </a:r>
+          </a:p>
+          <a:p xmlns:a="http://schemas.openxmlformats.org/drawingml/2006/main">
+            <a:r>
+              <a:t/>
             </a:r>
           </a:p>
           <a:p xmlns:a="http://schemas.openxmlformats.org/drawingml/2006/main">
@@ -2788,7 +3888,7 @@
           <p:nvPr/>
         </p:nvPicPr>
         <p:blipFill>
-          <a:blip xmlns:r="http://schemas.openxmlformats.org/officeDocument/2006/relationships" xmlns:a="http://schemas.openxmlformats.org/drawingml/2006/main" r:embed="R0903cbc1a27c4086">
+          <a:blip xmlns:r="http://schemas.openxmlformats.org/officeDocument/2006/relationships" xmlns:a="http://schemas.openxmlformats.org/drawingml/2006/main" r:embed="Rcaea2a40fbf54287">
             <a:duotone>
               <a:prstClr val="black"/>
               <a:schemeClr val="accent1">
@@ -2966,7 +4066,7 @@
           <p:nvPr/>
         </p:nvPicPr>
         <p:blipFill rotWithShape="1">
-          <a:blip xmlns:r="http://schemas.openxmlformats.org/officeDocument/2006/relationships" xmlns:a="http://schemas.openxmlformats.org/drawingml/2006/main" r:embed="Ra7f79d1fd2e144e3"/>
+          <a:blip xmlns:r="http://schemas.openxmlformats.org/officeDocument/2006/relationships" xmlns:a="http://schemas.openxmlformats.org/drawingml/2006/main" r:embed="R6bded9eb95f0484d"/>
           <a:srcRect xmlns:a="http://schemas.openxmlformats.org/drawingml/2006/main" l="74359" t="0" r="1346" b="0"/>
           <a:stretch xmlns:a="http://schemas.openxmlformats.org/drawingml/2006/main"/>
         </p:blipFill>
@@ -2989,7 +4089,7 @@
           <p:nvPr/>
         </p:nvPicPr>
         <p:blipFill rotWithShape="1">
-          <a:blip xmlns:r="http://schemas.openxmlformats.org/officeDocument/2006/relationships" xmlns:a="http://schemas.openxmlformats.org/drawingml/2006/main" r:embed="R3648ef54f05740a2">
+          <a:blip xmlns:r="http://schemas.openxmlformats.org/officeDocument/2006/relationships" xmlns:a="http://schemas.openxmlformats.org/drawingml/2006/main" r:embed="Rd5a3779c95bb40d1">
             <a:alphaModFix amt="35000"/>
           </a:blip>
           <a:srcRect xmlns:a="http://schemas.openxmlformats.org/drawingml/2006/main" l="0" t="9831" r="0" b="36385"/>
@@ -3251,7 +4351,7 @@
           <p:nvPr/>
         </p:nvPicPr>
         <p:blipFill>
-          <a:blip xmlns:r="http://schemas.openxmlformats.org/officeDocument/2006/relationships" xmlns:a="http://schemas.openxmlformats.org/drawingml/2006/main" r:embed="R6777560ac5f24ceb"/>
+          <a:blip xmlns:r="http://schemas.openxmlformats.org/officeDocument/2006/relationships" xmlns:a="http://schemas.openxmlformats.org/drawingml/2006/main" r:embed="R681082071d3744e3"/>
           <a:srcRect xmlns:a="http://schemas.openxmlformats.org/drawingml/2006/main" l="0" t="0" r="54251" b="0"/>
           <a:stretch xmlns:a="http://schemas.openxmlformats.org/drawingml/2006/main"/>
         </p:blipFill>
@@ -3508,7 +4608,7 @@
           <p:nvPr/>
         </p:nvPicPr>
         <p:blipFill rotWithShape="1">
-          <a:blip xmlns:r="http://schemas.openxmlformats.org/officeDocument/2006/relationships" xmlns:a="http://schemas.openxmlformats.org/drawingml/2006/main" r:embed="R0f1a08a383e74317"/>
+          <a:blip xmlns:r="http://schemas.openxmlformats.org/officeDocument/2006/relationships" xmlns:a="http://schemas.openxmlformats.org/drawingml/2006/main" r:embed="Raf11bbef3ccb4f55"/>
           <a:srcRect xmlns:a="http://schemas.openxmlformats.org/drawingml/2006/main" l="0" t="0" r="1346" b="0"/>
           <a:stretch xmlns:a="http://schemas.openxmlformats.org/drawingml/2006/main"/>
         </p:blipFill>
@@ -3691,7 +4791,7 @@
           <p:nvPr/>
         </p:nvPicPr>
         <p:blipFill>
-          <a:blip xmlns:r="http://schemas.openxmlformats.org/officeDocument/2006/relationships" xmlns:a="http://schemas.openxmlformats.org/drawingml/2006/main" r:embed="R38daf394c54f424b"/>
+          <a:blip xmlns:r="http://schemas.openxmlformats.org/officeDocument/2006/relationships" xmlns:a="http://schemas.openxmlformats.org/drawingml/2006/main" r:embed="Rc925377a33be43ca"/>
           <a:stretch xmlns:a="http://schemas.openxmlformats.org/drawingml/2006/main">
             <a:fillRect l="0" t="0" r="0" b="0"/>
           </a:stretch>
@@ -3787,7 +4887,7 @@
           <p:nvPr/>
         </p:nvPicPr>
         <p:blipFill>
-          <a:blip xmlns:r="http://schemas.openxmlformats.org/officeDocument/2006/relationships" xmlns:a="http://schemas.openxmlformats.org/drawingml/2006/main" r:embed="R5dc4d9a4df464524">
+          <a:blip xmlns:r="http://schemas.openxmlformats.org/officeDocument/2006/relationships" xmlns:a="http://schemas.openxmlformats.org/drawingml/2006/main" r:embed="Rc4f507fadee145d5">
             <a:duotone>
               <a:prstClr val="black"/>
               <a:schemeClr val="accent1">
@@ -3954,7 +5054,7 @@
           <p:nvPr/>
         </p:nvPicPr>
         <p:blipFill rotWithShape="1">
-          <a:blip xmlns:r="http://schemas.openxmlformats.org/officeDocument/2006/relationships" xmlns:a="http://schemas.openxmlformats.org/drawingml/2006/main" r:embed="R5468326b14164591">
+          <a:blip xmlns:r="http://schemas.openxmlformats.org/officeDocument/2006/relationships" xmlns:a="http://schemas.openxmlformats.org/drawingml/2006/main" r:embed="Rdf5bbd9764014136">
             <a:alphaModFix amt="20000"/>
             <a:duotone>
               <a:schemeClr val="accent4">
@@ -4052,10 +5152,10 @@
   </p:cSld>
   <p:clrMap bg1="lt1" tx1="dk1" bg2="lt2" tx2="dk2" accent1="accent1" accent2="accent2" accent3="accent3" accent4="accent4" accent5="accent5" accent6="accent6" hlink="hlink" folHlink="folHlink"/>
   <p:sldLayoutIdLst>
-    <p:sldLayoutId xmlns:r="http://schemas.openxmlformats.org/officeDocument/2006/relationships" id="2147483649" r:id="Re999d2a998344deb"/>
-    <p:sldLayoutId xmlns:r="http://schemas.openxmlformats.org/officeDocument/2006/relationships" id="2147483650" r:id="Rcafe03ab985c40d4"/>
-    <p:sldLayoutId xmlns:r="http://schemas.openxmlformats.org/officeDocument/2006/relationships" id="2147483651" r:id="R89a350215a0c4a8c"/>
-    <p:sldLayoutId xmlns:r="http://schemas.openxmlformats.org/officeDocument/2006/relationships" id="2147483652" r:id="Rae86330603b54416"/>
+    <p:sldLayoutId xmlns:r="http://schemas.openxmlformats.org/officeDocument/2006/relationships" id="2147483649" r:id="Rdcd9b10c6281407a"/>
+    <p:sldLayoutId xmlns:r="http://schemas.openxmlformats.org/officeDocument/2006/relationships" id="2147483650" r:id="R94da9d26acc64021"/>
+    <p:sldLayoutId xmlns:r="http://schemas.openxmlformats.org/officeDocument/2006/relationships" id="2147483651" r:id="R214830c801534232"/>
+    <p:sldLayoutId xmlns:r="http://schemas.openxmlformats.org/officeDocument/2006/relationships" id="2147483652" r:id="R7ef5d6b06df146b7"/>
   </p:sldLayoutIdLst>
   <p:hf hdr="0" ftr="0" dt="0"/>
   <p:txStyles>
@@ -4708,7 +5808,7 @@
                 <a:ea typeface="微软雅黑"/>
                 <a:cs typeface="微软雅黑"/>
               </a:rPr>
-              <a:t>演示上半程：第 7 课输出如何压缩成五段陈述</a:t>
+              <a:t>完整示范：同一问题的五段分享</a:t>
             </a:r>
             <a:endParaRPr/>
           </a:p>
@@ -4744,22 +5844,22 @@
       </p:sp>
       <p:sp>
         <p:nvSpPr>
-          <p:cNvPr id="6" name="paper">
-            <a:extLst xmlns:a="http://schemas.openxmlformats.org/drawingml/2006/main">
-              <a:ext uri="{FF2B5EF4-FFF2-40B4-BE49-F238E27FC236}">
-                <a16:creationId xmlns:a16="http://schemas.microsoft.com/office/drawing/2014/main" id="{CE1FFA31-D1DE-43FF-9024-ACC42E9617BA}"/>
-              </a:ext>
-            </a:extLst>
-          </p:cNvPr>
-          <p:cNvSpPr>
-            <a:spLocks xmlns:a="http://schemas.openxmlformats.org/drawingml/2006/main" noGrp="1"/>
-          </p:cNvSpPr>
-          <p:nvPr/>
-        </p:nvSpPr>
-        <p:spPr>
-          <a:xfrm xmlns:a="http://schemas.openxmlformats.org/drawingml/2006/main">
-            <a:off x="609600" y="971550"/>
-            <a:ext cx="10858500" cy="361950"/>
+          <p:cNvPr id="6" name="content-229">
+            <a:extLst xmlns:a="http://schemas.openxmlformats.org/drawingml/2006/main">
+              <a:ext uri="{FF2B5EF4-FFF2-40B4-BE49-F238E27FC236}">
+                <a16:creationId xmlns:a16="http://schemas.microsoft.com/office/drawing/2014/main" id="{4C65E4CA-3EFC-4691-85FB-1E8803FE4A28}"/>
+              </a:ext>
+            </a:extLst>
+          </p:cNvPr>
+          <p:cNvSpPr>
+            <a:spLocks xmlns:a="http://schemas.openxmlformats.org/drawingml/2006/main" noGrp="1"/>
+          </p:cNvSpPr>
+          <p:nvPr/>
+        </p:nvSpPr>
+        <p:spPr>
+          <a:xfrm xmlns:a="http://schemas.openxmlformats.org/drawingml/2006/main">
+            <a:off x="609600" y="1571625"/>
+            <a:ext cx="10972800" cy="432435"/>
           </a:xfrm>
           <a:prstGeom xmlns:a="http://schemas.openxmlformats.org/drawingml/2006/main" prst="rect">
             <a:avLst/>
@@ -4778,9 +5878,9 @@
                 <a:spcPct val="118000"/>
               </a:lnSpc>
               <a:buNone/>
-              <a:defRPr sz="1800" b="0">
-                <a:solidFill>
-                  <a:srgbClr val="66727D"/>
+              <a:defRPr sz="2400" b="0">
+                <a:solidFill>
+                  <a:srgbClr val="27333D"/>
                 </a:solidFill>
                 <a:latin typeface="微软雅黑"/>
                 <a:ea typeface="微软雅黑"/>
@@ -4788,67 +5888,37 @@
               </a:defRPr>
             </a:pPr>
             <a:r>
-              <a:rPr sz="1800" b="0">
-                <a:solidFill>
-                  <a:srgbClr val="66727D"/>
+              <a:rPr sz="2400" b="0">
+                <a:solidFill>
+                  <a:srgbClr val="27333D"/>
                 </a:solidFill>
                 <a:latin typeface="微软雅黑"/>
                 <a:ea typeface="微软雅黑"/>
                 <a:cs typeface="微软雅黑"/>
               </a:rPr>
-              <a:t>Bouthillier et al. 2021 · 机器学习 benchmark 方差</a:t>
-            </a:r>
-          </a:p>
-        </p:txBody>
-      </p:sp>
-      <p:sp>
-        <p:nvSpPr>
-          <p:cNvPr id="7" name="speech-shade0">
-            <a:extLst xmlns:a="http://schemas.openxmlformats.org/drawingml/2006/main">
-              <a:ext uri="{FF2B5EF4-FFF2-40B4-BE49-F238E27FC236}">
-                <a16:creationId xmlns:a16="http://schemas.microsoft.com/office/drawing/2014/main" id="{C2CF3285-FF73-4CC2-9D8A-03404D2DEA8A}"/>
-              </a:ext>
-            </a:extLst>
-          </p:cNvPr>
-          <p:cNvSpPr>
-            <a:spLocks xmlns:a="http://schemas.openxmlformats.org/drawingml/2006/main" noGrp="1"/>
-          </p:cNvSpPr>
-          <p:nvPr/>
-        </p:nvSpPr>
-        <p:spPr>
-          <a:xfrm xmlns:a="http://schemas.openxmlformats.org/drawingml/2006/main">
-            <a:off x="609600" y="1476375"/>
-            <a:ext cx="10858500" cy="781050"/>
-          </a:xfrm>
-          <a:prstGeom xmlns:a="http://schemas.openxmlformats.org/drawingml/2006/main" prst="rect">
-            <a:avLst/>
-          </a:prstGeom>
-          <a:solidFill xmlns:a="http://schemas.openxmlformats.org/drawingml/2006/main">
-            <a:srgbClr val="F4F6F8"/>
-          </a:solidFill>
-          <a:ln xmlns:a="http://schemas.openxmlformats.org/drawingml/2006/main" w="0">
-            <a:noFill/>
-          </a:ln>
-        </p:spPr>
-      </p:sp>
-      <p:sp>
-        <p:nvSpPr>
-          <p:cNvPr id="8" name="speech-l0">
-            <a:extLst xmlns:a="http://schemas.openxmlformats.org/drawingml/2006/main">
-              <a:ext uri="{FF2B5EF4-FFF2-40B4-BE49-F238E27FC236}">
-                <a16:creationId xmlns:a16="http://schemas.microsoft.com/office/drawing/2014/main" id="{316EDD95-18B3-4355-9AA2-F114D25A431D}"/>
-              </a:ext>
-            </a:extLst>
-          </p:cNvPr>
-          <p:cNvSpPr>
-            <a:spLocks xmlns:a="http://schemas.openxmlformats.org/drawingml/2006/main" noGrp="1"/>
-          </p:cNvSpPr>
-          <p:nvPr/>
-        </p:nvSpPr>
-        <p:spPr>
-          <a:xfrm xmlns:a="http://schemas.openxmlformats.org/drawingml/2006/main">
-            <a:off x="704850" y="1552575"/>
-            <a:ext cx="1428750" cy="628650"/>
+              <a:t>问题：阅读卡是否降低限定条件遗漏？</a:t>
+            </a:r>
+          </a:p>
+        </p:txBody>
+      </p:sp>
+      <p:sp>
+        <p:nvSpPr>
+          <p:cNvPr id="7" name="content-230">
+            <a:extLst xmlns:a="http://schemas.openxmlformats.org/drawingml/2006/main">
+              <a:ext uri="{FF2B5EF4-FFF2-40B4-BE49-F238E27FC236}">
+                <a16:creationId xmlns:a16="http://schemas.microsoft.com/office/drawing/2014/main" id="{6041676A-318D-4E76-81EB-7B73084FF483}"/>
+              </a:ext>
+            </a:extLst>
+          </p:cNvPr>
+          <p:cNvSpPr>
+            <a:spLocks xmlns:a="http://schemas.openxmlformats.org/drawingml/2006/main" noGrp="1"/>
+          </p:cNvSpPr>
+          <p:nvPr/>
+        </p:nvSpPr>
+        <p:spPr>
+          <a:xfrm xmlns:a="http://schemas.openxmlformats.org/drawingml/2006/main">
+            <a:off x="609600" y="2261235"/>
+            <a:ext cx="10972800" cy="432435"/>
           </a:xfrm>
           <a:prstGeom xmlns:a="http://schemas.openxmlformats.org/drawingml/2006/main" prst="rect">
             <a:avLst/>
@@ -4859,7 +5929,7 @@
           </a:ln>
         </p:spPr>
         <p:txBody>
-          <a:bodyPr xmlns:a="http://schemas.openxmlformats.org/drawingml/2006/main" lIns="0" tIns="0" rIns="0" bIns="0" anchor="ctr"/>
+          <a:bodyPr xmlns:a="http://schemas.openxmlformats.org/drawingml/2006/main" lIns="0" tIns="0" rIns="0" bIns="0" anchor="t"/>
           <a:lstStyle xmlns:a="http://schemas.openxmlformats.org/drawingml/2006/main"/>
           <a:p xmlns:a="http://schemas.openxmlformats.org/drawingml/2006/main">
             <a:pPr algn="l">
@@ -4867,9 +5937,9 @@
                 <a:spcPct val="118000"/>
               </a:lnSpc>
               <a:buNone/>
-              <a:defRPr sz="2200" b="1">
-                <a:solidFill>
-                  <a:srgbClr val="1F4D78"/>
+              <a:defRPr sz="2400" b="0">
+                <a:solidFill>
+                  <a:srgbClr val="27333D"/>
                 </a:solidFill>
                 <a:latin typeface="微软雅黑"/>
                 <a:ea typeface="微软雅黑"/>
@@ -4877,37 +5947,37 @@
               </a:defRPr>
             </a:pPr>
             <a:r>
-              <a:rPr sz="2200" b="1">
-                <a:solidFill>
-                  <a:srgbClr val="1F4D78"/>
+              <a:rPr sz="2400" b="0">
+                <a:solidFill>
+                  <a:srgbClr val="27333D"/>
                 </a:solidFill>
                 <a:latin typeface="微软雅黑"/>
                 <a:ea typeface="微软雅黑"/>
                 <a:cs typeface="微软雅黑"/>
               </a:rPr>
-              <a:t>问题</a:t>
-            </a:r>
-          </a:p>
-        </p:txBody>
-      </p:sp>
-      <p:sp>
-        <p:nvSpPr>
-          <p:cNvPr id="9" name="speech-v0">
-            <a:extLst xmlns:a="http://schemas.openxmlformats.org/drawingml/2006/main">
-              <a:ext uri="{FF2B5EF4-FFF2-40B4-BE49-F238E27FC236}">
-                <a16:creationId xmlns:a16="http://schemas.microsoft.com/office/drawing/2014/main" id="{AFCE5F18-AE89-4205-89CE-551ECED496B9}"/>
-              </a:ext>
-            </a:extLst>
-          </p:cNvPr>
-          <p:cNvSpPr>
-            <a:spLocks xmlns:a="http://schemas.openxmlformats.org/drawingml/2006/main" noGrp="1"/>
-          </p:cNvSpPr>
-          <p:nvPr/>
-        </p:nvSpPr>
-        <p:spPr>
-          <a:xfrm xmlns:a="http://schemas.openxmlformats.org/drawingml/2006/main">
-            <a:off x="2228850" y="1552575"/>
-            <a:ext cx="9144000" cy="628650"/>
+              <a:t>证据：逐条条件保留记录；当前没有真实效果结论。</a:t>
+            </a:r>
+          </a:p>
+        </p:txBody>
+      </p:sp>
+      <p:sp>
+        <p:nvSpPr>
+          <p:cNvPr id="8" name="content-231">
+            <a:extLst xmlns:a="http://schemas.openxmlformats.org/drawingml/2006/main">
+              <a:ext uri="{FF2B5EF4-FFF2-40B4-BE49-F238E27FC236}">
+                <a16:creationId xmlns:a16="http://schemas.microsoft.com/office/drawing/2014/main" id="{AA932E6A-BEE5-4DED-BB95-214727012BB7}"/>
+              </a:ext>
+            </a:extLst>
+          </p:cNvPr>
+          <p:cNvSpPr>
+            <a:spLocks xmlns:a="http://schemas.openxmlformats.org/drawingml/2006/main" noGrp="1"/>
+          </p:cNvSpPr>
+          <p:nvPr/>
+        </p:nvSpPr>
+        <p:spPr>
+          <a:xfrm xmlns:a="http://schemas.openxmlformats.org/drawingml/2006/main">
+            <a:off x="609600" y="2950845"/>
+            <a:ext cx="10972800" cy="432435"/>
           </a:xfrm>
           <a:prstGeom xmlns:a="http://schemas.openxmlformats.org/drawingml/2006/main" prst="rect">
             <a:avLst/>
@@ -4918,7 +5988,7 @@
           </a:ln>
         </p:spPr>
         <p:txBody>
-          <a:bodyPr xmlns:a="http://schemas.openxmlformats.org/drawingml/2006/main" lIns="0" tIns="0" rIns="0" bIns="0" anchor="ctr"/>
+          <a:bodyPr xmlns:a="http://schemas.openxmlformats.org/drawingml/2006/main" lIns="0" tIns="0" rIns="0" bIns="0" anchor="t"/>
           <a:lstStyle xmlns:a="http://schemas.openxmlformats.org/drawingml/2006/main"/>
           <a:p xmlns:a="http://schemas.openxmlformats.org/drawingml/2006/main">
             <a:pPr algn="l">
@@ -4926,7 +5996,7 @@
                 <a:spcPct val="118000"/>
               </a:lnSpc>
               <a:buNone/>
-              <a:defRPr sz="2200" b="0">
+              <a:defRPr sz="2400" b="0">
                 <a:solidFill>
                   <a:srgbClr val="27333D"/>
                 </a:solidFill>
@@ -4936,7 +6006,7 @@
               </a:defRPr>
             </a:pPr>
             <a:r>
-              <a:rPr sz="2200" b="0">
+              <a:rPr sz="2400" b="0">
                 <a:solidFill>
                   <a:srgbClr val="27333D"/>
                 </a:solidFill>
@@ -4944,59 +6014,29 @@
                 <a:ea typeface="微软雅黑"/>
                 <a:cs typeface="微软雅黑"/>
               </a:rPr>
-              <a:t>benchmark 比较忽略多种方差来源</a:t>
-            </a:r>
-          </a:p>
-        </p:txBody>
-      </p:sp>
-      <p:sp>
-        <p:nvSpPr>
-          <p:cNvPr id="10" name="speech-r0">
-            <a:extLst xmlns:a="http://schemas.openxmlformats.org/drawingml/2006/main">
-              <a:ext uri="{FF2B5EF4-FFF2-40B4-BE49-F238E27FC236}">
-                <a16:creationId xmlns:a16="http://schemas.microsoft.com/office/drawing/2014/main" id="{5B5C2151-9E90-4F4B-B843-02EAAC66D0A3}"/>
-              </a:ext>
-            </a:extLst>
-          </p:cNvPr>
-          <p:cNvSpPr>
-            <a:spLocks xmlns:a="http://schemas.openxmlformats.org/drawingml/2006/main" noGrp="1"/>
-          </p:cNvSpPr>
-          <p:nvPr/>
-        </p:nvSpPr>
-        <p:spPr>
-          <a:xfrm xmlns:a="http://schemas.openxmlformats.org/drawingml/2006/main">
-            <a:off x="609600" y="2257425"/>
-            <a:ext cx="10858500" cy="14288"/>
-          </a:xfrm>
-          <a:prstGeom xmlns:a="http://schemas.openxmlformats.org/drawingml/2006/main" prst="rect">
-            <a:avLst/>
-          </a:prstGeom>
-          <a:solidFill xmlns:a="http://schemas.openxmlformats.org/drawingml/2006/main">
-            <a:srgbClr val="CDD5DB"/>
-          </a:solidFill>
-          <a:ln xmlns:a="http://schemas.openxmlformats.org/drawingml/2006/main" w="0">
-            <a:noFill/>
-          </a:ln>
-        </p:spPr>
-      </p:sp>
-      <p:sp>
-        <p:nvSpPr>
-          <p:cNvPr id="11" name="speech-l1">
-            <a:extLst xmlns:a="http://schemas.openxmlformats.org/drawingml/2006/main">
-              <a:ext uri="{FF2B5EF4-FFF2-40B4-BE49-F238E27FC236}">
-                <a16:creationId xmlns:a16="http://schemas.microsoft.com/office/drawing/2014/main" id="{E41319C1-6C40-4E55-BDEC-6713F3833E59}"/>
-              </a:ext>
-            </a:extLst>
-          </p:cNvPr>
-          <p:cNvSpPr>
-            <a:spLocks xmlns:a="http://schemas.openxmlformats.org/drawingml/2006/main" noGrp="1"/>
-          </p:cNvSpPr>
-          <p:nvPr/>
-        </p:nvSpPr>
-        <p:spPr>
-          <a:xfrm xmlns:a="http://schemas.openxmlformats.org/drawingml/2006/main">
-            <a:off x="704850" y="2333625"/>
-            <a:ext cx="1428750" cy="628650"/>
+              <a:t>解释：Q1 结果与 H1/A2 机制、测量解释分开。</a:t>
+            </a:r>
+          </a:p>
+        </p:txBody>
+      </p:sp>
+      <p:sp>
+        <p:nvSpPr>
+          <p:cNvPr id="9" name="content-232">
+            <a:extLst xmlns:a="http://schemas.openxmlformats.org/drawingml/2006/main">
+              <a:ext uri="{FF2B5EF4-FFF2-40B4-BE49-F238E27FC236}">
+                <a16:creationId xmlns:a16="http://schemas.microsoft.com/office/drawing/2014/main" id="{2524C1D6-8A95-4693-877C-78B01B4D90C7}"/>
+              </a:ext>
+            </a:extLst>
+          </p:cNvPr>
+          <p:cNvSpPr>
+            <a:spLocks xmlns:a="http://schemas.openxmlformats.org/drawingml/2006/main" noGrp="1"/>
+          </p:cNvSpPr>
+          <p:nvPr/>
+        </p:nvSpPr>
+        <p:spPr>
+          <a:xfrm xmlns:a="http://schemas.openxmlformats.org/drawingml/2006/main">
+            <a:off x="609600" y="3640455"/>
+            <a:ext cx="10972800" cy="432435"/>
           </a:xfrm>
           <a:prstGeom xmlns:a="http://schemas.openxmlformats.org/drawingml/2006/main" prst="rect">
             <a:avLst/>
@@ -5007,7 +6047,7 @@
           </a:ln>
         </p:spPr>
         <p:txBody>
-          <a:bodyPr xmlns:a="http://schemas.openxmlformats.org/drawingml/2006/main" lIns="0" tIns="0" rIns="0" bIns="0" anchor="ctr"/>
+          <a:bodyPr xmlns:a="http://schemas.openxmlformats.org/drawingml/2006/main" lIns="0" tIns="0" rIns="0" bIns="0" anchor="t"/>
           <a:lstStyle xmlns:a="http://schemas.openxmlformats.org/drawingml/2006/main"/>
           <a:p xmlns:a="http://schemas.openxmlformats.org/drawingml/2006/main">
             <a:pPr algn="l">
@@ -5015,9 +6055,9 @@
                 <a:spcPct val="118000"/>
               </a:lnSpc>
               <a:buNone/>
-              <a:defRPr sz="2200" b="1">
-                <a:solidFill>
-                  <a:srgbClr val="1F4D78"/>
+              <a:defRPr sz="2400" b="0">
+                <a:solidFill>
+                  <a:srgbClr val="27333D"/>
                 </a:solidFill>
                 <a:latin typeface="微软雅黑"/>
                 <a:ea typeface="微软雅黑"/>
@@ -5025,37 +6065,37 @@
               </a:defRPr>
             </a:pPr>
             <a:r>
-              <a:rPr sz="2200" b="1">
-                <a:solidFill>
-                  <a:srgbClr val="1F4D78"/>
+              <a:rPr sz="2400" b="0">
+                <a:solidFill>
+                  <a:srgbClr val="27333D"/>
                 </a:solidFill>
                 <a:latin typeface="微软雅黑"/>
                 <a:ea typeface="微软雅黑"/>
                 <a:cs typeface="微软雅黑"/>
               </a:rPr>
-              <a:t>证据</a:t>
-            </a:r>
-          </a:p>
-        </p:txBody>
-      </p:sp>
-      <p:sp>
-        <p:nvSpPr>
-          <p:cNvPr id="12" name="speech-v1">
-            <a:extLst xmlns:a="http://schemas.openxmlformats.org/drawingml/2006/main">
-              <a:ext uri="{FF2B5EF4-FFF2-40B4-BE49-F238E27FC236}">
-                <a16:creationId xmlns:a16="http://schemas.microsoft.com/office/drawing/2014/main" id="{5CA38E3B-EADB-47D7-9E86-7FB33A24DFAE}"/>
-              </a:ext>
-            </a:extLst>
-          </p:cNvPr>
-          <p:cNvSpPr>
-            <a:spLocks xmlns:a="http://schemas.openxmlformats.org/drawingml/2006/main" noGrp="1"/>
-          </p:cNvSpPr>
-          <p:nvPr/>
-        </p:nvSpPr>
-        <p:spPr>
-          <a:xfrm xmlns:a="http://schemas.openxmlformats.org/drawingml/2006/main">
-            <a:off x="2228850" y="2333625"/>
-            <a:ext cx="9144000" cy="628650"/>
+              <a:t>方案：同一材料两种输出，统一标注口径。</a:t>
+            </a:r>
+          </a:p>
+        </p:txBody>
+      </p:sp>
+      <p:sp>
+        <p:nvSpPr>
+          <p:cNvPr id="10" name="content-233">
+            <a:extLst xmlns:a="http://schemas.openxmlformats.org/drawingml/2006/main">
+              <a:ext uri="{FF2B5EF4-FFF2-40B4-BE49-F238E27FC236}">
+                <a16:creationId xmlns:a16="http://schemas.microsoft.com/office/drawing/2014/main" id="{530848CA-8516-465F-99EA-2C6227A78B74}"/>
+              </a:ext>
+            </a:extLst>
+          </p:cNvPr>
+          <p:cNvSpPr>
+            <a:spLocks xmlns:a="http://schemas.openxmlformats.org/drawingml/2006/main" noGrp="1"/>
+          </p:cNvSpPr>
+          <p:nvPr/>
+        </p:nvSpPr>
+        <p:spPr>
+          <a:xfrm xmlns:a="http://schemas.openxmlformats.org/drawingml/2006/main">
+            <a:off x="609600" y="4330065"/>
+            <a:ext cx="10972800" cy="432435"/>
           </a:xfrm>
           <a:prstGeom xmlns:a="http://schemas.openxmlformats.org/drawingml/2006/main" prst="rect">
             <a:avLst/>
@@ -5066,7 +6106,7 @@
           </a:ln>
         </p:spPr>
         <p:txBody>
-          <a:bodyPr xmlns:a="http://schemas.openxmlformats.org/drawingml/2006/main" lIns="0" tIns="0" rIns="0" bIns="0" anchor="ctr"/>
+          <a:bodyPr xmlns:a="http://schemas.openxmlformats.org/drawingml/2006/main" lIns="0" tIns="0" rIns="0" bIns="0" anchor="t"/>
           <a:lstStyle xmlns:a="http://schemas.openxmlformats.org/drawingml/2006/main"/>
           <a:p xmlns:a="http://schemas.openxmlformats.org/drawingml/2006/main">
             <a:pPr algn="l">
@@ -5074,9 +6114,9 @@
                 <a:spcPct val="118000"/>
               </a:lnSpc>
               <a:buNone/>
-              <a:defRPr sz="2200" b="0">
-                <a:solidFill>
-                  <a:srgbClr val="27333D"/>
+              <a:defRPr sz="2400" b="0">
+                <a:solidFill>
+                  <a:srgbClr val="1F4D78"/>
                 </a:solidFill>
                 <a:latin typeface="微软雅黑"/>
                 <a:ea typeface="微软雅黑"/>
@@ -5084,519 +6124,15 @@
               </a:defRPr>
             </a:pPr>
             <a:r>
-              <a:rPr sz="2200" b="0">
-                <a:solidFill>
-                  <a:srgbClr val="27333D"/>
+              <a:rPr sz="2400" b="0">
+                <a:solidFill>
+                  <a:srgbClr val="1F4D78"/>
                 </a:solidFill>
                 <a:latin typeface="微软雅黑"/>
                 <a:ea typeface="微软雅黑"/>
                 <a:cs typeface="微软雅黑"/>
               </a:rPr>
-              <a:t>作者建模完整 benchmarking 过程</a:t>
-            </a:r>
-          </a:p>
-        </p:txBody>
-      </p:sp>
-      <p:sp>
-        <p:nvSpPr>
-          <p:cNvPr id="13" name="speech-r1">
-            <a:extLst xmlns:a="http://schemas.openxmlformats.org/drawingml/2006/main">
-              <a:ext uri="{FF2B5EF4-FFF2-40B4-BE49-F238E27FC236}">
-                <a16:creationId xmlns:a16="http://schemas.microsoft.com/office/drawing/2014/main" id="{0AB79ED6-3880-4B6C-A045-9B1BB964EA48}"/>
-              </a:ext>
-            </a:extLst>
-          </p:cNvPr>
-          <p:cNvSpPr>
-            <a:spLocks xmlns:a="http://schemas.openxmlformats.org/drawingml/2006/main" noGrp="1"/>
-          </p:cNvSpPr>
-          <p:nvPr/>
-        </p:nvSpPr>
-        <p:spPr>
-          <a:xfrm xmlns:a="http://schemas.openxmlformats.org/drawingml/2006/main">
-            <a:off x="609600" y="3038475"/>
-            <a:ext cx="10858500" cy="14288"/>
-          </a:xfrm>
-          <a:prstGeom xmlns:a="http://schemas.openxmlformats.org/drawingml/2006/main" prst="rect">
-            <a:avLst/>
-          </a:prstGeom>
-          <a:solidFill xmlns:a="http://schemas.openxmlformats.org/drawingml/2006/main">
-            <a:srgbClr val="CDD5DB"/>
-          </a:solidFill>
-          <a:ln xmlns:a="http://schemas.openxmlformats.org/drawingml/2006/main" w="0">
-            <a:noFill/>
-          </a:ln>
-        </p:spPr>
-      </p:sp>
-      <p:sp>
-        <p:nvSpPr>
-          <p:cNvPr id="14" name="speech-shade2">
-            <a:extLst xmlns:a="http://schemas.openxmlformats.org/drawingml/2006/main">
-              <a:ext uri="{FF2B5EF4-FFF2-40B4-BE49-F238E27FC236}">
-                <a16:creationId xmlns:a16="http://schemas.microsoft.com/office/drawing/2014/main" id="{91C073D4-3A47-41CE-9AF6-DF3BBD287C75}"/>
-              </a:ext>
-            </a:extLst>
-          </p:cNvPr>
-          <p:cNvSpPr>
-            <a:spLocks xmlns:a="http://schemas.openxmlformats.org/drawingml/2006/main" noGrp="1"/>
-          </p:cNvSpPr>
-          <p:nvPr/>
-        </p:nvSpPr>
-        <p:spPr>
-          <a:xfrm xmlns:a="http://schemas.openxmlformats.org/drawingml/2006/main">
-            <a:off x="609600" y="3038475"/>
-            <a:ext cx="10858500" cy="781050"/>
-          </a:xfrm>
-          <a:prstGeom xmlns:a="http://schemas.openxmlformats.org/drawingml/2006/main" prst="rect">
-            <a:avLst/>
-          </a:prstGeom>
-          <a:solidFill xmlns:a="http://schemas.openxmlformats.org/drawingml/2006/main">
-            <a:srgbClr val="F4F6F8"/>
-          </a:solidFill>
-          <a:ln xmlns:a="http://schemas.openxmlformats.org/drawingml/2006/main" w="0">
-            <a:noFill/>
-          </a:ln>
-        </p:spPr>
-      </p:sp>
-      <p:sp>
-        <p:nvSpPr>
-          <p:cNvPr id="15" name="speech-l2">
-            <a:extLst xmlns:a="http://schemas.openxmlformats.org/drawingml/2006/main">
-              <a:ext uri="{FF2B5EF4-FFF2-40B4-BE49-F238E27FC236}">
-                <a16:creationId xmlns:a16="http://schemas.microsoft.com/office/drawing/2014/main" id="{9FC7EBAA-8C4F-4C08-B516-8B6EBDCAA18C}"/>
-              </a:ext>
-            </a:extLst>
-          </p:cNvPr>
-          <p:cNvSpPr>
-            <a:spLocks xmlns:a="http://schemas.openxmlformats.org/drawingml/2006/main" noGrp="1"/>
-          </p:cNvSpPr>
-          <p:nvPr/>
-        </p:nvSpPr>
-        <p:spPr>
-          <a:xfrm xmlns:a="http://schemas.openxmlformats.org/drawingml/2006/main">
-            <a:off x="704850" y="3114675"/>
-            <a:ext cx="1428750" cy="628650"/>
-          </a:xfrm>
-          <a:prstGeom xmlns:a="http://schemas.openxmlformats.org/drawingml/2006/main" prst="rect">
-            <a:avLst/>
-          </a:prstGeom>
-          <a:noFill xmlns:a="http://schemas.openxmlformats.org/drawingml/2006/main"/>
-          <a:ln xmlns:a="http://schemas.openxmlformats.org/drawingml/2006/main" w="0">
-            <a:noFill/>
-          </a:ln>
-        </p:spPr>
-        <p:txBody>
-          <a:bodyPr xmlns:a="http://schemas.openxmlformats.org/drawingml/2006/main" lIns="0" tIns="0" rIns="0" bIns="0" anchor="ctr"/>
-          <a:lstStyle xmlns:a="http://schemas.openxmlformats.org/drawingml/2006/main"/>
-          <a:p xmlns:a="http://schemas.openxmlformats.org/drawingml/2006/main">
-            <a:pPr algn="l">
-              <a:lnSpc>
-                <a:spcPct val="118000"/>
-              </a:lnSpc>
-              <a:buNone/>
-              <a:defRPr sz="2200" b="1">
-                <a:solidFill>
-                  <a:srgbClr val="1F4D78"/>
-                </a:solidFill>
-                <a:latin typeface="微软雅黑"/>
-                <a:ea typeface="微软雅黑"/>
-                <a:cs typeface="微软雅黑"/>
-              </a:defRPr>
-            </a:pPr>
-            <a:r>
-              <a:rPr sz="2200" b="1">
-                <a:solidFill>
-                  <a:srgbClr val="1F4D78"/>
-                </a:solidFill>
-                <a:latin typeface="微软雅黑"/>
-                <a:ea typeface="微软雅黑"/>
-                <a:cs typeface="微软雅黑"/>
-              </a:rPr>
-              <a:t>机制</a:t>
-            </a:r>
-          </a:p>
-        </p:txBody>
-      </p:sp>
-      <p:sp>
-        <p:nvSpPr>
-          <p:cNvPr id="16" name="speech-v2">
-            <a:extLst xmlns:a="http://schemas.openxmlformats.org/drawingml/2006/main">
-              <a:ext uri="{FF2B5EF4-FFF2-40B4-BE49-F238E27FC236}">
-                <a16:creationId xmlns:a16="http://schemas.microsoft.com/office/drawing/2014/main" id="{E8DAEA84-B8A7-47C9-B26D-9A57891E9C13}"/>
-              </a:ext>
-            </a:extLst>
-          </p:cNvPr>
-          <p:cNvSpPr>
-            <a:spLocks xmlns:a="http://schemas.openxmlformats.org/drawingml/2006/main" noGrp="1"/>
-          </p:cNvSpPr>
-          <p:nvPr/>
-        </p:nvSpPr>
-        <p:spPr>
-          <a:xfrm xmlns:a="http://schemas.openxmlformats.org/drawingml/2006/main">
-            <a:off x="2228850" y="3114675"/>
-            <a:ext cx="9144000" cy="628650"/>
-          </a:xfrm>
-          <a:prstGeom xmlns:a="http://schemas.openxmlformats.org/drawingml/2006/main" prst="rect">
-            <a:avLst/>
-          </a:prstGeom>
-          <a:noFill xmlns:a="http://schemas.openxmlformats.org/drawingml/2006/main"/>
-          <a:ln xmlns:a="http://schemas.openxmlformats.org/drawingml/2006/main" w="0">
-            <a:noFill/>
-          </a:ln>
-        </p:spPr>
-        <p:txBody>
-          <a:bodyPr xmlns:a="http://schemas.openxmlformats.org/drawingml/2006/main" lIns="0" tIns="0" rIns="0" bIns="0" anchor="ctr"/>
-          <a:lstStyle xmlns:a="http://schemas.openxmlformats.org/drawingml/2006/main"/>
-          <a:p xmlns:a="http://schemas.openxmlformats.org/drawingml/2006/main">
-            <a:pPr algn="l">
-              <a:lnSpc>
-                <a:spcPct val="118000"/>
-              </a:lnSpc>
-              <a:buNone/>
-              <a:defRPr sz="2200" b="0">
-                <a:solidFill>
-                  <a:srgbClr val="27333D"/>
-                </a:solidFill>
-                <a:latin typeface="微软雅黑"/>
-                <a:ea typeface="微软雅黑"/>
-                <a:cs typeface="微软雅黑"/>
-              </a:defRPr>
-            </a:pPr>
-            <a:r>
-              <a:rPr sz="2200" b="0">
-                <a:solidFill>
-                  <a:srgbClr val="27333D"/>
-                </a:solidFill>
-                <a:latin typeface="微软雅黑"/>
-                <a:ea typeface="微软雅黑"/>
-                <a:cs typeface="微软雅黑"/>
-              </a:rPr>
-              <a:t>抽样、初始化与超参方差改变比较结论</a:t>
-            </a:r>
-          </a:p>
-        </p:txBody>
-      </p:sp>
-      <p:sp>
-        <p:nvSpPr>
-          <p:cNvPr id="17" name="speech-r2">
-            <a:extLst xmlns:a="http://schemas.openxmlformats.org/drawingml/2006/main">
-              <a:ext uri="{FF2B5EF4-FFF2-40B4-BE49-F238E27FC236}">
-                <a16:creationId xmlns:a16="http://schemas.microsoft.com/office/drawing/2014/main" id="{93DA46B2-B74C-444F-A04B-B82DFF9036FC}"/>
-              </a:ext>
-            </a:extLst>
-          </p:cNvPr>
-          <p:cNvSpPr>
-            <a:spLocks xmlns:a="http://schemas.openxmlformats.org/drawingml/2006/main" noGrp="1"/>
-          </p:cNvSpPr>
-          <p:nvPr/>
-        </p:nvSpPr>
-        <p:spPr>
-          <a:xfrm xmlns:a="http://schemas.openxmlformats.org/drawingml/2006/main">
-            <a:off x="609600" y="3819525"/>
-            <a:ext cx="10858500" cy="14288"/>
-          </a:xfrm>
-          <a:prstGeom xmlns:a="http://schemas.openxmlformats.org/drawingml/2006/main" prst="rect">
-            <a:avLst/>
-          </a:prstGeom>
-          <a:solidFill xmlns:a="http://schemas.openxmlformats.org/drawingml/2006/main">
-            <a:srgbClr val="CDD5DB"/>
-          </a:solidFill>
-          <a:ln xmlns:a="http://schemas.openxmlformats.org/drawingml/2006/main" w="0">
-            <a:noFill/>
-          </a:ln>
-        </p:spPr>
-      </p:sp>
-      <p:sp>
-        <p:nvSpPr>
-          <p:cNvPr id="18" name="speech-l3">
-            <a:extLst xmlns:a="http://schemas.openxmlformats.org/drawingml/2006/main">
-              <a:ext uri="{FF2B5EF4-FFF2-40B4-BE49-F238E27FC236}">
-                <a16:creationId xmlns:a16="http://schemas.microsoft.com/office/drawing/2014/main" id="{31ED6A79-326D-437A-92BA-18E0DC7BB828}"/>
-              </a:ext>
-            </a:extLst>
-          </p:cNvPr>
-          <p:cNvSpPr>
-            <a:spLocks xmlns:a="http://schemas.openxmlformats.org/drawingml/2006/main" noGrp="1"/>
-          </p:cNvSpPr>
-          <p:nvPr/>
-        </p:nvSpPr>
-        <p:spPr>
-          <a:xfrm xmlns:a="http://schemas.openxmlformats.org/drawingml/2006/main">
-            <a:off x="704850" y="3895725"/>
-            <a:ext cx="1428750" cy="628650"/>
-          </a:xfrm>
-          <a:prstGeom xmlns:a="http://schemas.openxmlformats.org/drawingml/2006/main" prst="rect">
-            <a:avLst/>
-          </a:prstGeom>
-          <a:noFill xmlns:a="http://schemas.openxmlformats.org/drawingml/2006/main"/>
-          <a:ln xmlns:a="http://schemas.openxmlformats.org/drawingml/2006/main" w="0">
-            <a:noFill/>
-          </a:ln>
-        </p:spPr>
-        <p:txBody>
-          <a:bodyPr xmlns:a="http://schemas.openxmlformats.org/drawingml/2006/main" lIns="0" tIns="0" rIns="0" bIns="0" anchor="ctr"/>
-          <a:lstStyle xmlns:a="http://schemas.openxmlformats.org/drawingml/2006/main"/>
-          <a:p xmlns:a="http://schemas.openxmlformats.org/drawingml/2006/main">
-            <a:pPr algn="l">
-              <a:lnSpc>
-                <a:spcPct val="118000"/>
-              </a:lnSpc>
-              <a:buNone/>
-              <a:defRPr sz="2200" b="1">
-                <a:solidFill>
-                  <a:srgbClr val="1F4D78"/>
-                </a:solidFill>
-                <a:latin typeface="微软雅黑"/>
-                <a:ea typeface="微软雅黑"/>
-                <a:cs typeface="微软雅黑"/>
-              </a:defRPr>
-            </a:pPr>
-            <a:r>
-              <a:rPr sz="2200" b="1">
-                <a:solidFill>
-                  <a:srgbClr val="1F4D78"/>
-                </a:solidFill>
-                <a:latin typeface="微软雅黑"/>
-                <a:ea typeface="微软雅黑"/>
-                <a:cs typeface="微软雅黑"/>
-              </a:rPr>
-              <a:t>验证</a:t>
-            </a:r>
-          </a:p>
-        </p:txBody>
-      </p:sp>
-      <p:sp>
-        <p:nvSpPr>
-          <p:cNvPr id="19" name="speech-v3">
-            <a:extLst xmlns:a="http://schemas.openxmlformats.org/drawingml/2006/main">
-              <a:ext uri="{FF2B5EF4-FFF2-40B4-BE49-F238E27FC236}">
-                <a16:creationId xmlns:a16="http://schemas.microsoft.com/office/drawing/2014/main" id="{DCB19BA6-CCBF-46EA-B2D0-1622E59B9ACA}"/>
-              </a:ext>
-            </a:extLst>
-          </p:cNvPr>
-          <p:cNvSpPr>
-            <a:spLocks xmlns:a="http://schemas.openxmlformats.org/drawingml/2006/main" noGrp="1"/>
-          </p:cNvSpPr>
-          <p:nvPr/>
-        </p:nvSpPr>
-        <p:spPr>
-          <a:xfrm xmlns:a="http://schemas.openxmlformats.org/drawingml/2006/main">
-            <a:off x="2228850" y="3895725"/>
-            <a:ext cx="9144000" cy="628650"/>
-          </a:xfrm>
-          <a:prstGeom xmlns:a="http://schemas.openxmlformats.org/drawingml/2006/main" prst="rect">
-            <a:avLst/>
-          </a:prstGeom>
-          <a:noFill xmlns:a="http://schemas.openxmlformats.org/drawingml/2006/main"/>
-          <a:ln xmlns:a="http://schemas.openxmlformats.org/drawingml/2006/main" w="0">
-            <a:noFill/>
-          </a:ln>
-        </p:spPr>
-        <p:txBody>
-          <a:bodyPr xmlns:a="http://schemas.openxmlformats.org/drawingml/2006/main" lIns="0" tIns="0" rIns="0" bIns="0" anchor="ctr"/>
-          <a:lstStyle xmlns:a="http://schemas.openxmlformats.org/drawingml/2006/main"/>
-          <a:p xmlns:a="http://schemas.openxmlformats.org/drawingml/2006/main">
-            <a:pPr algn="l">
-              <a:lnSpc>
-                <a:spcPct val="118000"/>
-              </a:lnSpc>
-              <a:buNone/>
-              <a:defRPr sz="2200" b="0">
-                <a:solidFill>
-                  <a:srgbClr val="27333D"/>
-                </a:solidFill>
-                <a:latin typeface="微软雅黑"/>
-                <a:ea typeface="微软雅黑"/>
-                <a:cs typeface="微软雅黑"/>
-              </a:defRPr>
-            </a:pPr>
-            <a:r>
-              <a:rPr sz="2200" b="0">
-                <a:solidFill>
-                  <a:srgbClr val="27333D"/>
-                </a:solidFill>
-                <a:latin typeface="微软雅黑"/>
-                <a:ea typeface="微软雅黑"/>
-                <a:cs typeface="微软雅黑"/>
-              </a:rPr>
-              <a:t>在 5 个任务／架构上评价比较方法</a:t>
-            </a:r>
-          </a:p>
-        </p:txBody>
-      </p:sp>
-      <p:sp>
-        <p:nvSpPr>
-          <p:cNvPr id="20" name="speech-r3">
-            <a:extLst xmlns:a="http://schemas.openxmlformats.org/drawingml/2006/main">
-              <a:ext uri="{FF2B5EF4-FFF2-40B4-BE49-F238E27FC236}">
-                <a16:creationId xmlns:a16="http://schemas.microsoft.com/office/drawing/2014/main" id="{4443A330-3879-42CE-BD9E-C6B9C7403AE2}"/>
-              </a:ext>
-            </a:extLst>
-          </p:cNvPr>
-          <p:cNvSpPr>
-            <a:spLocks xmlns:a="http://schemas.openxmlformats.org/drawingml/2006/main" noGrp="1"/>
-          </p:cNvSpPr>
-          <p:nvPr/>
-        </p:nvSpPr>
-        <p:spPr>
-          <a:xfrm xmlns:a="http://schemas.openxmlformats.org/drawingml/2006/main">
-            <a:off x="609600" y="4600575"/>
-            <a:ext cx="10858500" cy="14288"/>
-          </a:xfrm>
-          <a:prstGeom xmlns:a="http://schemas.openxmlformats.org/drawingml/2006/main" prst="rect">
-            <a:avLst/>
-          </a:prstGeom>
-          <a:solidFill xmlns:a="http://schemas.openxmlformats.org/drawingml/2006/main">
-            <a:srgbClr val="CDD5DB"/>
-          </a:solidFill>
-          <a:ln xmlns:a="http://schemas.openxmlformats.org/drawingml/2006/main" w="0">
-            <a:noFill/>
-          </a:ln>
-        </p:spPr>
-      </p:sp>
-      <p:sp>
-        <p:nvSpPr>
-          <p:cNvPr id="21" name="speech-shade4">
-            <a:extLst xmlns:a="http://schemas.openxmlformats.org/drawingml/2006/main">
-              <a:ext uri="{FF2B5EF4-FFF2-40B4-BE49-F238E27FC236}">
-                <a16:creationId xmlns:a16="http://schemas.microsoft.com/office/drawing/2014/main" id="{4CF99BAA-5CAC-4674-AE7C-0F5A561CCEA3}"/>
-              </a:ext>
-            </a:extLst>
-          </p:cNvPr>
-          <p:cNvSpPr>
-            <a:spLocks xmlns:a="http://schemas.openxmlformats.org/drawingml/2006/main" noGrp="1"/>
-          </p:cNvSpPr>
-          <p:nvPr/>
-        </p:nvSpPr>
-        <p:spPr>
-          <a:xfrm xmlns:a="http://schemas.openxmlformats.org/drawingml/2006/main">
-            <a:off x="609600" y="4600575"/>
-            <a:ext cx="10858500" cy="781050"/>
-          </a:xfrm>
-          <a:prstGeom xmlns:a="http://schemas.openxmlformats.org/drawingml/2006/main" prst="rect">
-            <a:avLst/>
-          </a:prstGeom>
-          <a:solidFill xmlns:a="http://schemas.openxmlformats.org/drawingml/2006/main">
-            <a:srgbClr val="F4F6F8"/>
-          </a:solidFill>
-          <a:ln xmlns:a="http://schemas.openxmlformats.org/drawingml/2006/main" w="0">
-            <a:noFill/>
-          </a:ln>
-        </p:spPr>
-      </p:sp>
-      <p:sp>
-        <p:nvSpPr>
-          <p:cNvPr id="22" name="speech-l4">
-            <a:extLst xmlns:a="http://schemas.openxmlformats.org/drawingml/2006/main">
-              <a:ext uri="{FF2B5EF4-FFF2-40B4-BE49-F238E27FC236}">
-                <a16:creationId xmlns:a16="http://schemas.microsoft.com/office/drawing/2014/main" id="{88F0325A-13B3-4B90-B23A-8E0D23BDD592}"/>
-              </a:ext>
-            </a:extLst>
-          </p:cNvPr>
-          <p:cNvSpPr>
-            <a:spLocks xmlns:a="http://schemas.openxmlformats.org/drawingml/2006/main" noGrp="1"/>
-          </p:cNvSpPr>
-          <p:nvPr/>
-        </p:nvSpPr>
-        <p:spPr>
-          <a:xfrm xmlns:a="http://schemas.openxmlformats.org/drawingml/2006/main">
-            <a:off x="704850" y="4676775"/>
-            <a:ext cx="1428750" cy="628650"/>
-          </a:xfrm>
-          <a:prstGeom xmlns:a="http://schemas.openxmlformats.org/drawingml/2006/main" prst="rect">
-            <a:avLst/>
-          </a:prstGeom>
-          <a:noFill xmlns:a="http://schemas.openxmlformats.org/drawingml/2006/main"/>
-          <a:ln xmlns:a="http://schemas.openxmlformats.org/drawingml/2006/main" w="0">
-            <a:noFill/>
-          </a:ln>
-        </p:spPr>
-        <p:txBody>
-          <a:bodyPr xmlns:a="http://schemas.openxmlformats.org/drawingml/2006/main" lIns="0" tIns="0" rIns="0" bIns="0" anchor="ctr"/>
-          <a:lstStyle xmlns:a="http://schemas.openxmlformats.org/drawingml/2006/main"/>
-          <a:p xmlns:a="http://schemas.openxmlformats.org/drawingml/2006/main">
-            <a:pPr algn="l">
-              <a:lnSpc>
-                <a:spcPct val="118000"/>
-              </a:lnSpc>
-              <a:buNone/>
-              <a:defRPr sz="2200" b="1">
-                <a:solidFill>
-                  <a:srgbClr val="1F4D78"/>
-                </a:solidFill>
-                <a:latin typeface="微软雅黑"/>
-                <a:ea typeface="微软雅黑"/>
-                <a:cs typeface="微软雅黑"/>
-              </a:defRPr>
-            </a:pPr>
-            <a:r>
-              <a:rPr sz="2200" b="1">
-                <a:solidFill>
-                  <a:srgbClr val="1F4D78"/>
-                </a:solidFill>
-                <a:latin typeface="微软雅黑"/>
-                <a:ea typeface="微软雅黑"/>
-                <a:cs typeface="微软雅黑"/>
-              </a:rPr>
-              <a:t>风险</a:t>
-            </a:r>
-          </a:p>
-        </p:txBody>
-      </p:sp>
-      <p:sp>
-        <p:nvSpPr>
-          <p:cNvPr id="23" name="speech-v4">
-            <a:extLst xmlns:a="http://schemas.openxmlformats.org/drawingml/2006/main">
-              <a:ext uri="{FF2B5EF4-FFF2-40B4-BE49-F238E27FC236}">
-                <a16:creationId xmlns:a16="http://schemas.microsoft.com/office/drawing/2014/main" id="{F01554AD-3478-4757-838E-2FB7493AE540}"/>
-              </a:ext>
-            </a:extLst>
-          </p:cNvPr>
-          <p:cNvSpPr>
-            <a:spLocks xmlns:a="http://schemas.openxmlformats.org/drawingml/2006/main" noGrp="1"/>
-          </p:cNvSpPr>
-          <p:nvPr/>
-        </p:nvSpPr>
-        <p:spPr>
-          <a:xfrm xmlns:a="http://schemas.openxmlformats.org/drawingml/2006/main">
-            <a:off x="2228850" y="4676775"/>
-            <a:ext cx="9144000" cy="628650"/>
-          </a:xfrm>
-          <a:prstGeom xmlns:a="http://schemas.openxmlformats.org/drawingml/2006/main" prst="rect">
-            <a:avLst/>
-          </a:prstGeom>
-          <a:noFill xmlns:a="http://schemas.openxmlformats.org/drawingml/2006/main"/>
-          <a:ln xmlns:a="http://schemas.openxmlformats.org/drawingml/2006/main" w="0">
-            <a:noFill/>
-          </a:ln>
-        </p:spPr>
-        <p:txBody>
-          <a:bodyPr xmlns:a="http://schemas.openxmlformats.org/drawingml/2006/main" lIns="0" tIns="0" rIns="0" bIns="0" anchor="ctr"/>
-          <a:lstStyle xmlns:a="http://schemas.openxmlformats.org/drawingml/2006/main"/>
-          <a:p xmlns:a="http://schemas.openxmlformats.org/drawingml/2006/main">
-            <a:pPr algn="l">
-              <a:lnSpc>
-                <a:spcPct val="118000"/>
-              </a:lnSpc>
-              <a:buNone/>
-              <a:defRPr sz="2200" b="0">
-                <a:solidFill>
-                  <a:srgbClr val="27333D"/>
-                </a:solidFill>
-                <a:latin typeface="微软雅黑"/>
-                <a:ea typeface="微软雅黑"/>
-                <a:cs typeface="微软雅黑"/>
-              </a:defRPr>
-            </a:pPr>
-            <a:r>
-              <a:rPr sz="2200" b="0">
-                <a:solidFill>
-                  <a:srgbClr val="27333D"/>
-                </a:solidFill>
-                <a:latin typeface="微软雅黑"/>
-                <a:ea typeface="微软雅黑"/>
-                <a:cs typeface="微软雅黑"/>
-              </a:rPr>
-              <a:t>全量覆盖的计算代价过高</a:t>
+              <a:t>风险：材料范围窄，其他质量代价尚未测量。</a:t>
             </a:r>
           </a:p>
         </p:txBody>
@@ -5664,7 +6200,7 @@
                 <a:ea typeface="微软雅黑"/>
                 <a:cs typeface="微软雅黑"/>
               </a:rPr>
-              <a:t>演示下半程：反馈如何转成有理由的处理动作</a:t>
+              <a:t>好反馈要改变一个具体设计</a:t>
             </a:r>
             <a:endParaRPr/>
           </a:p>
@@ -5700,22 +6236,407 @@
       </p:sp>
       <p:sp>
         <p:nvSpPr>
-          <p:cNvPr id="6" name="fiction">
-            <a:extLst xmlns:a="http://schemas.openxmlformats.org/drawingml/2006/main">
-              <a:ext uri="{FF2B5EF4-FFF2-40B4-BE49-F238E27FC236}">
-                <a16:creationId xmlns:a16="http://schemas.microsoft.com/office/drawing/2014/main" id="{931FE194-71EE-4E16-9343-2422D877C4FA}"/>
-              </a:ext>
-            </a:extLst>
-          </p:cNvPr>
-          <p:cNvSpPr>
-            <a:spLocks xmlns:a="http://schemas.openxmlformats.org/drawingml/2006/main" noGrp="1"/>
-          </p:cNvSpPr>
-          <p:nvPr/>
-        </p:nvSpPr>
-        <p:spPr>
-          <a:xfrm xmlns:a="http://schemas.openxmlformats.org/drawingml/2006/main">
-            <a:off x="609600" y="885825"/>
-            <a:ext cx="10572750" cy="314325"/>
+          <p:cNvPr id="6" name="process-234">
+            <a:extLst xmlns:a="http://schemas.openxmlformats.org/drawingml/2006/main">
+              <a:ext uri="{FF2B5EF4-FFF2-40B4-BE49-F238E27FC236}">
+                <a16:creationId xmlns:a16="http://schemas.microsoft.com/office/drawing/2014/main" id="{D692EAE4-E74A-4913-8AB1-2A2D485B0031}"/>
+              </a:ext>
+            </a:extLst>
+          </p:cNvPr>
+          <p:cNvSpPr>
+            <a:spLocks xmlns:a="http://schemas.openxmlformats.org/drawingml/2006/main" noGrp="1"/>
+          </p:cNvSpPr>
+          <p:nvPr/>
+        </p:nvSpPr>
+        <p:spPr>
+          <a:xfrm xmlns:a="http://schemas.openxmlformats.org/drawingml/2006/main">
+            <a:off x="609600" y="2000250"/>
+            <a:ext cx="3448050" cy="819150"/>
+          </a:xfrm>
+          <a:prstGeom xmlns:a="http://schemas.openxmlformats.org/drawingml/2006/main" prst="rect">
+            <a:avLst/>
+          </a:prstGeom>
+          <a:solidFill xmlns:a="http://schemas.openxmlformats.org/drawingml/2006/main">
+            <a:srgbClr val="EDF5F0"/>
+          </a:solidFill>
+          <a:ln xmlns:a="http://schemas.openxmlformats.org/drawingml/2006/main" w="0">
+            <a:noFill/>
+          </a:ln>
+        </p:spPr>
+      </p:sp>
+      <p:sp>
+        <p:nvSpPr>
+          <p:cNvPr id="7" name="content-235">
+            <a:extLst xmlns:a="http://schemas.openxmlformats.org/drawingml/2006/main">
+              <a:ext uri="{FF2B5EF4-FFF2-40B4-BE49-F238E27FC236}">
+                <a16:creationId xmlns:a16="http://schemas.microsoft.com/office/drawing/2014/main" id="{56638EE1-9CB1-4336-9D1B-4E90203E7AE8}"/>
+              </a:ext>
+            </a:extLst>
+          </p:cNvPr>
+          <p:cNvSpPr>
+            <a:spLocks xmlns:a="http://schemas.openxmlformats.org/drawingml/2006/main" noGrp="1"/>
+          </p:cNvSpPr>
+          <p:nvPr/>
+        </p:nvSpPr>
+        <p:spPr>
+          <a:xfrm xmlns:a="http://schemas.openxmlformats.org/drawingml/2006/main">
+            <a:off x="714375" y="2085975"/>
+            <a:ext cx="3238500" cy="647700"/>
+          </a:xfrm>
+          <a:prstGeom xmlns:a="http://schemas.openxmlformats.org/drawingml/2006/main" prst="rect">
+            <a:avLst/>
+          </a:prstGeom>
+          <a:noFill xmlns:a="http://schemas.openxmlformats.org/drawingml/2006/main"/>
+          <a:ln xmlns:a="http://schemas.openxmlformats.org/drawingml/2006/main" w="0">
+            <a:noFill/>
+          </a:ln>
+        </p:spPr>
+        <p:txBody>
+          <a:bodyPr xmlns:a="http://schemas.openxmlformats.org/drawingml/2006/main" lIns="0" tIns="0" rIns="0" bIns="0" anchor="ctr"/>
+          <a:lstStyle xmlns:a="http://schemas.openxmlformats.org/drawingml/2006/main"/>
+          <a:p xmlns:a="http://schemas.openxmlformats.org/drawingml/2006/main">
+            <a:pPr algn="ctr">
+              <a:lnSpc>
+                <a:spcPct val="118000"/>
+              </a:lnSpc>
+              <a:buNone/>
+              <a:defRPr sz="2200" b="0">
+                <a:solidFill>
+                  <a:srgbClr val="1F4D78"/>
+                </a:solidFill>
+                <a:latin typeface="微软雅黑"/>
+                <a:ea typeface="微软雅黑"/>
+                <a:cs typeface="微软雅黑"/>
+              </a:defRPr>
+            </a:pPr>
+            <a:r>
+              <a:rPr sz="2200" b="0">
+                <a:solidFill>
+                  <a:srgbClr val="1F4D78"/>
+                </a:solidFill>
+                <a:latin typeface="微软雅黑"/>
+                <a:ea typeface="微软雅黑"/>
+                <a:cs typeface="微软雅黑"/>
+              </a:rPr>
+              <a:t>反馈</a:t>
+            </a:r>
+          </a:p>
+        </p:txBody>
+      </p:sp>
+      <p:sp>
+        <p:nvSpPr>
+          <p:cNvPr id="8" name="content-236">
+            <a:extLst xmlns:a="http://schemas.openxmlformats.org/drawingml/2006/main">
+              <a:ext uri="{FF2B5EF4-FFF2-40B4-BE49-F238E27FC236}">
+                <a16:creationId xmlns:a16="http://schemas.microsoft.com/office/drawing/2014/main" id="{13B72E82-BC1C-41B8-96C2-2B3F00027851}"/>
+              </a:ext>
+            </a:extLst>
+          </p:cNvPr>
+          <p:cNvSpPr>
+            <a:spLocks xmlns:a="http://schemas.openxmlformats.org/drawingml/2006/main" noGrp="1"/>
+          </p:cNvSpPr>
+          <p:nvPr/>
+        </p:nvSpPr>
+        <p:spPr>
+          <a:xfrm xmlns:a="http://schemas.openxmlformats.org/drawingml/2006/main">
+            <a:off x="4057650" y="2200275"/>
+            <a:ext cx="314325" cy="533400"/>
+          </a:xfrm>
+          <a:prstGeom xmlns:a="http://schemas.openxmlformats.org/drawingml/2006/main" prst="rect">
+            <a:avLst/>
+          </a:prstGeom>
+          <a:noFill xmlns:a="http://schemas.openxmlformats.org/drawingml/2006/main"/>
+          <a:ln xmlns:a="http://schemas.openxmlformats.org/drawingml/2006/main" w="0">
+            <a:noFill/>
+          </a:ln>
+        </p:spPr>
+        <p:txBody>
+          <a:bodyPr xmlns:a="http://schemas.openxmlformats.org/drawingml/2006/main" lIns="0" tIns="0" rIns="0" bIns="0" anchor="t"/>
+          <a:lstStyle xmlns:a="http://schemas.openxmlformats.org/drawingml/2006/main"/>
+          <a:p xmlns:a="http://schemas.openxmlformats.org/drawingml/2006/main">
+            <a:pPr algn="ctr">
+              <a:lnSpc>
+                <a:spcPct val="118000"/>
+              </a:lnSpc>
+              <a:buNone/>
+              <a:defRPr sz="2500" b="0">
+                <a:solidFill>
+                  <a:srgbClr val="1F4D78"/>
+                </a:solidFill>
+                <a:latin typeface="微软雅黑"/>
+                <a:ea typeface="微软雅黑"/>
+                <a:cs typeface="微软雅黑"/>
+              </a:defRPr>
+            </a:pPr>
+            <a:r>
+              <a:rPr sz="2500" b="0">
+                <a:solidFill>
+                  <a:srgbClr val="1F4D78"/>
+                </a:solidFill>
+                <a:latin typeface="微软雅黑"/>
+                <a:ea typeface="微软雅黑"/>
+                <a:cs typeface="微软雅黑"/>
+              </a:rPr>
+              <a:t>→</a:t>
+            </a:r>
+          </a:p>
+        </p:txBody>
+      </p:sp>
+      <p:sp>
+        <p:nvSpPr>
+          <p:cNvPr id="9" name="process-237">
+            <a:extLst xmlns:a="http://schemas.openxmlformats.org/drawingml/2006/main">
+              <a:ext uri="{FF2B5EF4-FFF2-40B4-BE49-F238E27FC236}">
+                <a16:creationId xmlns:a16="http://schemas.microsoft.com/office/drawing/2014/main" id="{111B1214-2730-4952-B24B-EF7156BE271B}"/>
+              </a:ext>
+            </a:extLst>
+          </p:cNvPr>
+          <p:cNvSpPr>
+            <a:spLocks xmlns:a="http://schemas.openxmlformats.org/drawingml/2006/main" noGrp="1"/>
+          </p:cNvSpPr>
+          <p:nvPr/>
+        </p:nvSpPr>
+        <p:spPr>
+          <a:xfrm xmlns:a="http://schemas.openxmlformats.org/drawingml/2006/main">
+            <a:off x="4371975" y="2000250"/>
+            <a:ext cx="3448050" cy="819150"/>
+          </a:xfrm>
+          <a:prstGeom xmlns:a="http://schemas.openxmlformats.org/drawingml/2006/main" prst="rect">
+            <a:avLst/>
+          </a:prstGeom>
+          <a:solidFill xmlns:a="http://schemas.openxmlformats.org/drawingml/2006/main">
+            <a:srgbClr val="F4F6F8"/>
+          </a:solidFill>
+          <a:ln xmlns:a="http://schemas.openxmlformats.org/drawingml/2006/main" w="0">
+            <a:noFill/>
+          </a:ln>
+        </p:spPr>
+      </p:sp>
+      <p:sp>
+        <p:nvSpPr>
+          <p:cNvPr id="10" name="content-238">
+            <a:extLst xmlns:a="http://schemas.openxmlformats.org/drawingml/2006/main">
+              <a:ext uri="{FF2B5EF4-FFF2-40B4-BE49-F238E27FC236}">
+                <a16:creationId xmlns:a16="http://schemas.microsoft.com/office/drawing/2014/main" id="{1FD91BC4-D74D-45B1-94FD-0C2C3D40A9CF}"/>
+              </a:ext>
+            </a:extLst>
+          </p:cNvPr>
+          <p:cNvSpPr>
+            <a:spLocks xmlns:a="http://schemas.openxmlformats.org/drawingml/2006/main" noGrp="1"/>
+          </p:cNvSpPr>
+          <p:nvPr/>
+        </p:nvSpPr>
+        <p:spPr>
+          <a:xfrm xmlns:a="http://schemas.openxmlformats.org/drawingml/2006/main">
+            <a:off x="4476750" y="2085975"/>
+            <a:ext cx="3238500" cy="647700"/>
+          </a:xfrm>
+          <a:prstGeom xmlns:a="http://schemas.openxmlformats.org/drawingml/2006/main" prst="rect">
+            <a:avLst/>
+          </a:prstGeom>
+          <a:noFill xmlns:a="http://schemas.openxmlformats.org/drawingml/2006/main"/>
+          <a:ln xmlns:a="http://schemas.openxmlformats.org/drawingml/2006/main" w="0">
+            <a:noFill/>
+          </a:ln>
+        </p:spPr>
+        <p:txBody>
+          <a:bodyPr xmlns:a="http://schemas.openxmlformats.org/drawingml/2006/main" lIns="0" tIns="0" rIns="0" bIns="0" anchor="ctr"/>
+          <a:lstStyle xmlns:a="http://schemas.openxmlformats.org/drawingml/2006/main"/>
+          <a:p xmlns:a="http://schemas.openxmlformats.org/drawingml/2006/main">
+            <a:pPr algn="ctr">
+              <a:lnSpc>
+                <a:spcPct val="118000"/>
+              </a:lnSpc>
+              <a:buNone/>
+              <a:defRPr sz="2200" b="0">
+                <a:solidFill>
+                  <a:srgbClr val="1F4D78"/>
+                </a:solidFill>
+                <a:latin typeface="微软雅黑"/>
+                <a:ea typeface="微软雅黑"/>
+                <a:cs typeface="微软雅黑"/>
+              </a:defRPr>
+            </a:pPr>
+            <a:r>
+              <a:rPr sz="2200" b="0">
+                <a:solidFill>
+                  <a:srgbClr val="1F4D78"/>
+                </a:solidFill>
+                <a:latin typeface="微软雅黑"/>
+                <a:ea typeface="微软雅黑"/>
+                <a:cs typeface="微软雅黑"/>
+              </a:rPr>
+              <a:t>理由</a:t>
+            </a:r>
+          </a:p>
+        </p:txBody>
+      </p:sp>
+      <p:sp>
+        <p:nvSpPr>
+          <p:cNvPr id="11" name="content-239">
+            <a:extLst xmlns:a="http://schemas.openxmlformats.org/drawingml/2006/main">
+              <a:ext uri="{FF2B5EF4-FFF2-40B4-BE49-F238E27FC236}">
+                <a16:creationId xmlns:a16="http://schemas.microsoft.com/office/drawing/2014/main" id="{0979DB31-FC7B-44F4-92D0-64E079E2CA30}"/>
+              </a:ext>
+            </a:extLst>
+          </p:cNvPr>
+          <p:cNvSpPr>
+            <a:spLocks xmlns:a="http://schemas.openxmlformats.org/drawingml/2006/main" noGrp="1"/>
+          </p:cNvSpPr>
+          <p:nvPr/>
+        </p:nvSpPr>
+        <p:spPr>
+          <a:xfrm xmlns:a="http://schemas.openxmlformats.org/drawingml/2006/main">
+            <a:off x="7820025" y="2200275"/>
+            <a:ext cx="314325" cy="533400"/>
+          </a:xfrm>
+          <a:prstGeom xmlns:a="http://schemas.openxmlformats.org/drawingml/2006/main" prst="rect">
+            <a:avLst/>
+          </a:prstGeom>
+          <a:noFill xmlns:a="http://schemas.openxmlformats.org/drawingml/2006/main"/>
+          <a:ln xmlns:a="http://schemas.openxmlformats.org/drawingml/2006/main" w="0">
+            <a:noFill/>
+          </a:ln>
+        </p:spPr>
+        <p:txBody>
+          <a:bodyPr xmlns:a="http://schemas.openxmlformats.org/drawingml/2006/main" lIns="0" tIns="0" rIns="0" bIns="0" anchor="t"/>
+          <a:lstStyle xmlns:a="http://schemas.openxmlformats.org/drawingml/2006/main"/>
+          <a:p xmlns:a="http://schemas.openxmlformats.org/drawingml/2006/main">
+            <a:pPr algn="ctr">
+              <a:lnSpc>
+                <a:spcPct val="118000"/>
+              </a:lnSpc>
+              <a:buNone/>
+              <a:defRPr sz="2500" b="0">
+                <a:solidFill>
+                  <a:srgbClr val="1F4D78"/>
+                </a:solidFill>
+                <a:latin typeface="微软雅黑"/>
+                <a:ea typeface="微软雅黑"/>
+                <a:cs typeface="微软雅黑"/>
+              </a:defRPr>
+            </a:pPr>
+            <a:r>
+              <a:rPr sz="2500" b="0">
+                <a:solidFill>
+                  <a:srgbClr val="1F4D78"/>
+                </a:solidFill>
+                <a:latin typeface="微软雅黑"/>
+                <a:ea typeface="微软雅黑"/>
+                <a:cs typeface="微软雅黑"/>
+              </a:rPr>
+              <a:t>→</a:t>
+            </a:r>
+          </a:p>
+        </p:txBody>
+      </p:sp>
+      <p:sp>
+        <p:nvSpPr>
+          <p:cNvPr id="12" name="process-240">
+            <a:extLst xmlns:a="http://schemas.openxmlformats.org/drawingml/2006/main">
+              <a:ext uri="{FF2B5EF4-FFF2-40B4-BE49-F238E27FC236}">
+                <a16:creationId xmlns:a16="http://schemas.microsoft.com/office/drawing/2014/main" id="{785FCC36-4D72-45A9-BA32-29852B2B5DA2}"/>
+              </a:ext>
+            </a:extLst>
+          </p:cNvPr>
+          <p:cNvSpPr>
+            <a:spLocks xmlns:a="http://schemas.openxmlformats.org/drawingml/2006/main" noGrp="1"/>
+          </p:cNvSpPr>
+          <p:nvPr/>
+        </p:nvSpPr>
+        <p:spPr>
+          <a:xfrm xmlns:a="http://schemas.openxmlformats.org/drawingml/2006/main">
+            <a:off x="8134350" y="2000250"/>
+            <a:ext cx="3448050" cy="819150"/>
+          </a:xfrm>
+          <a:prstGeom xmlns:a="http://schemas.openxmlformats.org/drawingml/2006/main" prst="rect">
+            <a:avLst/>
+          </a:prstGeom>
+          <a:solidFill xmlns:a="http://schemas.openxmlformats.org/drawingml/2006/main">
+            <a:srgbClr val="F4F6F8"/>
+          </a:solidFill>
+          <a:ln xmlns:a="http://schemas.openxmlformats.org/drawingml/2006/main" w="0">
+            <a:noFill/>
+          </a:ln>
+        </p:spPr>
+      </p:sp>
+      <p:sp>
+        <p:nvSpPr>
+          <p:cNvPr id="13" name="content-241">
+            <a:extLst xmlns:a="http://schemas.openxmlformats.org/drawingml/2006/main">
+              <a:ext uri="{FF2B5EF4-FFF2-40B4-BE49-F238E27FC236}">
+                <a16:creationId xmlns:a16="http://schemas.microsoft.com/office/drawing/2014/main" id="{998622E2-E477-44E1-8CC1-C0D64023EFA1}"/>
+              </a:ext>
+            </a:extLst>
+          </p:cNvPr>
+          <p:cNvSpPr>
+            <a:spLocks xmlns:a="http://schemas.openxmlformats.org/drawingml/2006/main" noGrp="1"/>
+          </p:cNvSpPr>
+          <p:nvPr/>
+        </p:nvSpPr>
+        <p:spPr>
+          <a:xfrm xmlns:a="http://schemas.openxmlformats.org/drawingml/2006/main">
+            <a:off x="8239125" y="2085975"/>
+            <a:ext cx="3238500" cy="647700"/>
+          </a:xfrm>
+          <a:prstGeom xmlns:a="http://schemas.openxmlformats.org/drawingml/2006/main" prst="rect">
+            <a:avLst/>
+          </a:prstGeom>
+          <a:noFill xmlns:a="http://schemas.openxmlformats.org/drawingml/2006/main"/>
+          <a:ln xmlns:a="http://schemas.openxmlformats.org/drawingml/2006/main" w="0">
+            <a:noFill/>
+          </a:ln>
+        </p:spPr>
+        <p:txBody>
+          <a:bodyPr xmlns:a="http://schemas.openxmlformats.org/drawingml/2006/main" lIns="0" tIns="0" rIns="0" bIns="0" anchor="ctr"/>
+          <a:lstStyle xmlns:a="http://schemas.openxmlformats.org/drawingml/2006/main"/>
+          <a:p xmlns:a="http://schemas.openxmlformats.org/drawingml/2006/main">
+            <a:pPr algn="ctr">
+              <a:lnSpc>
+                <a:spcPct val="118000"/>
+              </a:lnSpc>
+              <a:buNone/>
+              <a:defRPr sz="2200" b="0">
+                <a:solidFill>
+                  <a:srgbClr val="1F4D78"/>
+                </a:solidFill>
+                <a:latin typeface="微软雅黑"/>
+                <a:ea typeface="微软雅黑"/>
+                <a:cs typeface="微软雅黑"/>
+              </a:defRPr>
+            </a:pPr>
+            <a:r>
+              <a:rPr sz="2200" b="0">
+                <a:solidFill>
+                  <a:srgbClr val="1F4D78"/>
+                </a:solidFill>
+                <a:latin typeface="微软雅黑"/>
+                <a:ea typeface="微软雅黑"/>
+                <a:cs typeface="微软雅黑"/>
+              </a:rPr>
+              <a:t>文件中的实际修改</a:t>
+            </a:r>
+          </a:p>
+        </p:txBody>
+      </p:sp>
+      <p:sp>
+        <p:nvSpPr>
+          <p:cNvPr id="14" name="content-242">
+            <a:extLst xmlns:a="http://schemas.openxmlformats.org/drawingml/2006/main">
+              <a:ext uri="{FF2B5EF4-FFF2-40B4-BE49-F238E27FC236}">
+                <a16:creationId xmlns:a16="http://schemas.microsoft.com/office/drawing/2014/main" id="{44554D5C-4B8A-4B81-8801-1FAD8D31D3BE}"/>
+              </a:ext>
+            </a:extLst>
+          </p:cNvPr>
+          <p:cNvSpPr>
+            <a:spLocks xmlns:a="http://schemas.openxmlformats.org/drawingml/2006/main" noGrp="1"/>
+          </p:cNvSpPr>
+          <p:nvPr/>
+        </p:nvSpPr>
+        <p:spPr>
+          <a:xfrm xmlns:a="http://schemas.openxmlformats.org/drawingml/2006/main">
+            <a:off x="609600" y="3286125"/>
+            <a:ext cx="10972800" cy="417195"/>
           </a:xfrm>
           <a:prstGeom xmlns:a="http://schemas.openxmlformats.org/drawingml/2006/main" prst="rect">
             <a:avLst/>
@@ -5734,9 +6655,9 @@
                 <a:spcPct val="118000"/>
               </a:lnSpc>
               <a:buNone/>
-              <a:defRPr sz="1800" b="0">
-                <a:solidFill>
-                  <a:srgbClr val="A96510"/>
+              <a:defRPr sz="2300" b="0">
+                <a:solidFill>
+                  <a:srgbClr val="27333D"/>
                 </a:solidFill>
                 <a:latin typeface="微软雅黑"/>
                 <a:ea typeface="微软雅黑"/>
@@ -5744,37 +6665,37 @@
               </a:defRPr>
             </a:pPr>
             <a:r>
-              <a:rPr sz="1800" b="0">
-                <a:solidFill>
-                  <a:srgbClr val="A96510"/>
+              <a:rPr sz="2300" b="0">
+                <a:solidFill>
+                  <a:srgbClr val="27333D"/>
                 </a:solidFill>
                 <a:latin typeface="微软雅黑"/>
                 <a:ea typeface="微软雅黑"/>
                 <a:cs typeface="微软雅黑"/>
               </a:rPr>
-              <a:t>虚构教学反馈｜基于公开论文重构</a:t>
-            </a:r>
-          </a:p>
-        </p:txBody>
-      </p:sp>
-      <p:sp>
-        <p:nvSpPr>
-          <p:cNvPr id="7" name="f-h0">
-            <a:extLst xmlns:a="http://schemas.openxmlformats.org/drawingml/2006/main">
-              <a:ext uri="{FF2B5EF4-FFF2-40B4-BE49-F238E27FC236}">
-                <a16:creationId xmlns:a16="http://schemas.microsoft.com/office/drawing/2014/main" id="{8A81450E-93ED-4FB3-B82F-8EBCAE9AC033}"/>
-              </a:ext>
-            </a:extLst>
-          </p:cNvPr>
-          <p:cNvSpPr>
-            <a:spLocks xmlns:a="http://schemas.openxmlformats.org/drawingml/2006/main" noGrp="1"/>
-          </p:cNvSpPr>
-          <p:nvPr/>
-        </p:nvSpPr>
-        <p:spPr>
-          <a:xfrm xmlns:a="http://schemas.openxmlformats.org/drawingml/2006/main">
-            <a:off x="609600" y="1571625"/>
-            <a:ext cx="2381250" cy="323850"/>
+              <a:t>泛泛意见：“再严谨一点。”</a:t>
+            </a:r>
+          </a:p>
+        </p:txBody>
+      </p:sp>
+      <p:sp>
+        <p:nvSpPr>
+          <p:cNvPr id="15" name="content-243">
+            <a:extLst xmlns:a="http://schemas.openxmlformats.org/drawingml/2006/main">
+              <a:ext uri="{FF2B5EF4-FFF2-40B4-BE49-F238E27FC236}">
+                <a16:creationId xmlns:a16="http://schemas.microsoft.com/office/drawing/2014/main" id="{9DB9CFAF-165F-4950-973D-0F49BE5AB312}"/>
+              </a:ext>
+            </a:extLst>
+          </p:cNvPr>
+          <p:cNvSpPr>
+            <a:spLocks xmlns:a="http://schemas.openxmlformats.org/drawingml/2006/main" noGrp="1"/>
+          </p:cNvSpPr>
+          <p:nvPr/>
+        </p:nvSpPr>
+        <p:spPr>
+          <a:xfrm xmlns:a="http://schemas.openxmlformats.org/drawingml/2006/main">
+            <a:off x="609600" y="3865245"/>
+            <a:ext cx="10972800" cy="417195"/>
           </a:xfrm>
           <a:prstGeom xmlns:a="http://schemas.openxmlformats.org/drawingml/2006/main" prst="rect">
             <a:avLst/>
@@ -5793,9 +6714,9 @@
                 <a:spcPct val="118000"/>
               </a:lnSpc>
               <a:buNone/>
-              <a:defRPr sz="1900" b="1">
-                <a:solidFill>
-                  <a:srgbClr val="1F4D78"/>
+              <a:defRPr sz="2300" b="0">
+                <a:solidFill>
+                  <a:srgbClr val="27333D"/>
                 </a:solidFill>
                 <a:latin typeface="微软雅黑"/>
                 <a:ea typeface="微软雅黑"/>
@@ -5803,37 +6724,37 @@
               </a:defRPr>
             </a:pPr>
             <a:r>
-              <a:rPr sz="1900" b="1">
-                <a:solidFill>
-                  <a:srgbClr val="1F4D78"/>
+              <a:rPr sz="2300" b="0">
+                <a:solidFill>
+                  <a:srgbClr val="27333D"/>
                 </a:solidFill>
                 <a:latin typeface="微软雅黑"/>
                 <a:ea typeface="微软雅黑"/>
                 <a:cs typeface="微软雅黑"/>
               </a:rPr>
-              <a:t>反馈 1 · 可检验性</a:t>
-            </a:r>
-          </a:p>
-        </p:txBody>
-      </p:sp>
-      <p:sp>
-        <p:nvSpPr>
-          <p:cNvPr id="8" name="f-q0">
-            <a:extLst xmlns:a="http://schemas.openxmlformats.org/drawingml/2006/main">
-              <a:ext uri="{FF2B5EF4-FFF2-40B4-BE49-F238E27FC236}">
-                <a16:creationId xmlns:a16="http://schemas.microsoft.com/office/drawing/2014/main" id="{0A63EAFE-AF33-425E-BF29-8C01BD9F5FD3}"/>
-              </a:ext>
-            </a:extLst>
-          </p:cNvPr>
-          <p:cNvSpPr>
-            <a:spLocks xmlns:a="http://schemas.openxmlformats.org/drawingml/2006/main" noGrp="1"/>
-          </p:cNvSpPr>
-          <p:nvPr/>
-        </p:nvSpPr>
-        <p:spPr>
-          <a:xfrm xmlns:a="http://schemas.openxmlformats.org/drawingml/2006/main">
-            <a:off x="3143250" y="1571625"/>
-            <a:ext cx="3619500" cy="514350"/>
+              <a:t>可执行意见：“评分者能否看见组别？请补盲化办法。”</a:t>
+            </a:r>
+          </a:p>
+        </p:txBody>
+      </p:sp>
+      <p:sp>
+        <p:nvSpPr>
+          <p:cNvPr id="16" name="content-244">
+            <a:extLst xmlns:a="http://schemas.openxmlformats.org/drawingml/2006/main">
+              <a:ext uri="{FF2B5EF4-FFF2-40B4-BE49-F238E27FC236}">
+                <a16:creationId xmlns:a16="http://schemas.microsoft.com/office/drawing/2014/main" id="{E28C62FB-08EC-4CB5-B605-6FF25BC23D43}"/>
+              </a:ext>
+            </a:extLst>
+          </p:cNvPr>
+          <p:cNvSpPr>
+            <a:spLocks xmlns:a="http://schemas.openxmlformats.org/drawingml/2006/main" noGrp="1"/>
+          </p:cNvSpPr>
+          <p:nvPr/>
+        </p:nvSpPr>
+        <p:spPr>
+          <a:xfrm xmlns:a="http://schemas.openxmlformats.org/drawingml/2006/main">
+            <a:off x="609600" y="4444365"/>
+            <a:ext cx="10972800" cy="417195"/>
           </a:xfrm>
           <a:prstGeom xmlns:a="http://schemas.openxmlformats.org/drawingml/2006/main" prst="rect">
             <a:avLst/>
@@ -5852,9 +6773,9 @@
                 <a:spcPct val="118000"/>
               </a:lnSpc>
               <a:buNone/>
-              <a:defRPr sz="2200" b="0">
-                <a:solidFill>
-                  <a:srgbClr val="27333D"/>
+              <a:defRPr sz="2300" b="0">
+                <a:solidFill>
+                  <a:srgbClr val="1F4D78"/>
                 </a:solidFill>
                 <a:latin typeface="微软雅黑"/>
                 <a:ea typeface="微软雅黑"/>
@@ -5862,754 +6783,15 @@
               </a:defRPr>
             </a:pPr>
             <a:r>
-              <a:rPr sz="2200" b="0">
-                <a:solidFill>
-                  <a:srgbClr val="27333D"/>
+              <a:rPr sz="2300" b="0">
+                <a:solidFill>
+                  <a:srgbClr val="1F4D78"/>
                 </a:solidFill>
                 <a:latin typeface="微软雅黑"/>
                 <a:ea typeface="微软雅黑"/>
                 <a:cs typeface="微软雅黑"/>
               </a:rPr>
-              <a:t>区分设计未写清</a:t>
-            </a:r>
-          </a:p>
-        </p:txBody>
-      </p:sp>
-      <p:sp>
-        <p:nvSpPr>
-          <p:cNvPr id="9" name="f-a0">
-            <a:extLst xmlns:a="http://schemas.openxmlformats.org/drawingml/2006/main">
-              <a:ext uri="{FF2B5EF4-FFF2-40B4-BE49-F238E27FC236}">
-                <a16:creationId xmlns:a16="http://schemas.microsoft.com/office/drawing/2014/main" id="{2CACEE51-4D99-4940-A486-BAC9BFDD92B1}"/>
-              </a:ext>
-            </a:extLst>
-          </p:cNvPr>
-          <p:cNvSpPr>
-            <a:spLocks xmlns:a="http://schemas.openxmlformats.org/drawingml/2006/main" noGrp="1"/>
-          </p:cNvSpPr>
-          <p:nvPr/>
-        </p:nvSpPr>
-        <p:spPr>
-          <a:xfrm xmlns:a="http://schemas.openxmlformats.org/drawingml/2006/main">
-            <a:off x="6905625" y="1600200"/>
-            <a:ext cx="523875" cy="438150"/>
-          </a:xfrm>
-          <a:prstGeom xmlns:a="http://schemas.openxmlformats.org/drawingml/2006/main" prst="rect">
-            <a:avLst/>
-          </a:prstGeom>
-          <a:noFill xmlns:a="http://schemas.openxmlformats.org/drawingml/2006/main"/>
-          <a:ln xmlns:a="http://schemas.openxmlformats.org/drawingml/2006/main" w="0">
-            <a:noFill/>
-          </a:ln>
-        </p:spPr>
-        <p:txBody>
-          <a:bodyPr xmlns:a="http://schemas.openxmlformats.org/drawingml/2006/main" lIns="0" tIns="0" rIns="0" bIns="0" anchor="ctr"/>
-          <a:lstStyle xmlns:a="http://schemas.openxmlformats.org/drawingml/2006/main"/>
-          <a:p xmlns:a="http://schemas.openxmlformats.org/drawingml/2006/main">
-            <a:pPr algn="ctr">
-              <a:lnSpc>
-                <a:spcPct val="118000"/>
-              </a:lnSpc>
-              <a:buNone/>
-              <a:defRPr sz="2800" b="0">
-                <a:solidFill>
-                  <a:srgbClr val="1F4D78"/>
-                </a:solidFill>
-                <a:latin typeface="微软雅黑"/>
-                <a:ea typeface="微软雅黑"/>
-                <a:cs typeface="微软雅黑"/>
-              </a:defRPr>
-            </a:pPr>
-            <a:r>
-              <a:rPr sz="2800" b="0">
-                <a:solidFill>
-                  <a:srgbClr val="1F4D78"/>
-                </a:solidFill>
-                <a:latin typeface="微软雅黑"/>
-                <a:ea typeface="微软雅黑"/>
-                <a:cs typeface="微软雅黑"/>
-              </a:rPr>
-              <a:t>→</a:t>
-            </a:r>
-          </a:p>
-        </p:txBody>
-      </p:sp>
-      <p:sp>
-        <p:nvSpPr>
-          <p:cNvPr id="10" name="f-d0">
-            <a:extLst xmlns:a="http://schemas.openxmlformats.org/drawingml/2006/main">
-              <a:ext uri="{FF2B5EF4-FFF2-40B4-BE49-F238E27FC236}">
-                <a16:creationId xmlns:a16="http://schemas.microsoft.com/office/drawing/2014/main" id="{F3D1A14D-CB13-4557-96EF-19FDA8D58C3E}"/>
-              </a:ext>
-            </a:extLst>
-          </p:cNvPr>
-          <p:cNvSpPr>
-            <a:spLocks xmlns:a="http://schemas.openxmlformats.org/drawingml/2006/main" noGrp="1"/>
-          </p:cNvSpPr>
-          <p:nvPr/>
-        </p:nvSpPr>
-        <p:spPr>
-          <a:xfrm xmlns:a="http://schemas.openxmlformats.org/drawingml/2006/main">
-            <a:off x="7620000" y="1571625"/>
-            <a:ext cx="3619500" cy="514350"/>
-          </a:xfrm>
-          <a:prstGeom xmlns:a="http://schemas.openxmlformats.org/drawingml/2006/main" prst="rect">
-            <a:avLst/>
-          </a:prstGeom>
-          <a:noFill xmlns:a="http://schemas.openxmlformats.org/drawingml/2006/main"/>
-          <a:ln xmlns:a="http://schemas.openxmlformats.org/drawingml/2006/main" w="0">
-            <a:noFill/>
-          </a:ln>
-        </p:spPr>
-        <p:txBody>
-          <a:bodyPr xmlns:a="http://schemas.openxmlformats.org/drawingml/2006/main" lIns="0" tIns="0" rIns="0" bIns="0" anchor="t"/>
-          <a:lstStyle xmlns:a="http://schemas.openxmlformats.org/drawingml/2006/main"/>
-          <a:p xmlns:a="http://schemas.openxmlformats.org/drawingml/2006/main">
-            <a:pPr algn="l">
-              <a:lnSpc>
-                <a:spcPct val="118000"/>
-              </a:lnSpc>
-              <a:buNone/>
-              <a:defRPr sz="2200" b="1">
-                <a:solidFill>
-                  <a:srgbClr val="2E7D5B"/>
-                </a:solidFill>
-                <a:latin typeface="微软雅黑"/>
-                <a:ea typeface="微软雅黑"/>
-                <a:cs typeface="微软雅黑"/>
-              </a:defRPr>
-            </a:pPr>
-            <a:r>
-              <a:rPr sz="2200" b="1">
-                <a:solidFill>
-                  <a:srgbClr val="2E7D5B"/>
-                </a:solidFill>
-                <a:latin typeface="微软雅黑"/>
-                <a:ea typeface="微软雅黑"/>
-                <a:cs typeface="微软雅黑"/>
-              </a:rPr>
-              <a:t>采纳：回写假设与变量</a:t>
-            </a:r>
-          </a:p>
-        </p:txBody>
-      </p:sp>
-      <p:sp>
-        <p:nvSpPr>
-          <p:cNvPr id="11" name="f-r0">
-            <a:extLst xmlns:a="http://schemas.openxmlformats.org/drawingml/2006/main">
-              <a:ext uri="{FF2B5EF4-FFF2-40B4-BE49-F238E27FC236}">
-                <a16:creationId xmlns:a16="http://schemas.microsoft.com/office/drawing/2014/main" id="{FF50B54C-1F92-403C-A2EB-0AF27DDC2A4F}"/>
-              </a:ext>
-            </a:extLst>
-          </p:cNvPr>
-          <p:cNvSpPr>
-            <a:spLocks xmlns:a="http://schemas.openxmlformats.org/drawingml/2006/main" noGrp="1"/>
-          </p:cNvSpPr>
-          <p:nvPr/>
-        </p:nvSpPr>
-        <p:spPr>
-          <a:xfrm xmlns:a="http://schemas.openxmlformats.org/drawingml/2006/main">
-            <a:off x="609600" y="2305050"/>
-            <a:ext cx="10858500" cy="14288"/>
-          </a:xfrm>
-          <a:prstGeom xmlns:a="http://schemas.openxmlformats.org/drawingml/2006/main" prst="rect">
-            <a:avLst/>
-          </a:prstGeom>
-          <a:solidFill xmlns:a="http://schemas.openxmlformats.org/drawingml/2006/main">
-            <a:srgbClr val="CDD5DB"/>
-          </a:solidFill>
-          <a:ln xmlns:a="http://schemas.openxmlformats.org/drawingml/2006/main" w="0">
-            <a:noFill/>
-          </a:ln>
-        </p:spPr>
-      </p:sp>
-      <p:sp>
-        <p:nvSpPr>
-          <p:cNvPr id="12" name="f-h1">
-            <a:extLst xmlns:a="http://schemas.openxmlformats.org/drawingml/2006/main">
-              <a:ext uri="{FF2B5EF4-FFF2-40B4-BE49-F238E27FC236}">
-                <a16:creationId xmlns:a16="http://schemas.microsoft.com/office/drawing/2014/main" id="{6851C989-52B5-4FE8-951F-09AB4FC8A5E8}"/>
-              </a:ext>
-            </a:extLst>
-          </p:cNvPr>
-          <p:cNvSpPr>
-            <a:spLocks xmlns:a="http://schemas.openxmlformats.org/drawingml/2006/main" noGrp="1"/>
-          </p:cNvSpPr>
-          <p:nvPr/>
-        </p:nvSpPr>
-        <p:spPr>
-          <a:xfrm xmlns:a="http://schemas.openxmlformats.org/drawingml/2006/main">
-            <a:off x="609600" y="2762250"/>
-            <a:ext cx="2381250" cy="323850"/>
-          </a:xfrm>
-          <a:prstGeom xmlns:a="http://schemas.openxmlformats.org/drawingml/2006/main" prst="rect">
-            <a:avLst/>
-          </a:prstGeom>
-          <a:noFill xmlns:a="http://schemas.openxmlformats.org/drawingml/2006/main"/>
-          <a:ln xmlns:a="http://schemas.openxmlformats.org/drawingml/2006/main" w="0">
-            <a:noFill/>
-          </a:ln>
-        </p:spPr>
-        <p:txBody>
-          <a:bodyPr xmlns:a="http://schemas.openxmlformats.org/drawingml/2006/main" lIns="0" tIns="0" rIns="0" bIns="0" anchor="t"/>
-          <a:lstStyle xmlns:a="http://schemas.openxmlformats.org/drawingml/2006/main"/>
-          <a:p xmlns:a="http://schemas.openxmlformats.org/drawingml/2006/main">
-            <a:pPr algn="l">
-              <a:lnSpc>
-                <a:spcPct val="118000"/>
-              </a:lnSpc>
-              <a:buNone/>
-              <a:defRPr sz="1900" b="1">
-                <a:solidFill>
-                  <a:srgbClr val="1F4D78"/>
-                </a:solidFill>
-                <a:latin typeface="微软雅黑"/>
-                <a:ea typeface="微软雅黑"/>
-                <a:cs typeface="微软雅黑"/>
-              </a:defRPr>
-            </a:pPr>
-            <a:r>
-              <a:rPr sz="1900" b="1">
-                <a:solidFill>
-                  <a:srgbClr val="1F4D78"/>
-                </a:solidFill>
-                <a:latin typeface="微软雅黑"/>
-                <a:ea typeface="微软雅黑"/>
-                <a:cs typeface="微软雅黑"/>
-              </a:rPr>
-              <a:t>反馈 2 · 泛化</a:t>
-            </a:r>
-          </a:p>
-        </p:txBody>
-      </p:sp>
-      <p:sp>
-        <p:nvSpPr>
-          <p:cNvPr id="13" name="f-q1">
-            <a:extLst xmlns:a="http://schemas.openxmlformats.org/drawingml/2006/main">
-              <a:ext uri="{FF2B5EF4-FFF2-40B4-BE49-F238E27FC236}">
-                <a16:creationId xmlns:a16="http://schemas.microsoft.com/office/drawing/2014/main" id="{9DE737F0-61A9-4073-AEBB-EAE26C22518A}"/>
-              </a:ext>
-            </a:extLst>
-          </p:cNvPr>
-          <p:cNvSpPr>
-            <a:spLocks xmlns:a="http://schemas.openxmlformats.org/drawingml/2006/main" noGrp="1"/>
-          </p:cNvSpPr>
-          <p:nvPr/>
-        </p:nvSpPr>
-        <p:spPr>
-          <a:xfrm xmlns:a="http://schemas.openxmlformats.org/drawingml/2006/main">
-            <a:off x="3143250" y="2762250"/>
-            <a:ext cx="3619500" cy="514350"/>
-          </a:xfrm>
-          <a:prstGeom xmlns:a="http://schemas.openxmlformats.org/drawingml/2006/main" prst="rect">
-            <a:avLst/>
-          </a:prstGeom>
-          <a:noFill xmlns:a="http://schemas.openxmlformats.org/drawingml/2006/main"/>
-          <a:ln xmlns:a="http://schemas.openxmlformats.org/drawingml/2006/main" w="0">
-            <a:noFill/>
-          </a:ln>
-        </p:spPr>
-        <p:txBody>
-          <a:bodyPr xmlns:a="http://schemas.openxmlformats.org/drawingml/2006/main" lIns="0" tIns="0" rIns="0" bIns="0" anchor="t"/>
-          <a:lstStyle xmlns:a="http://schemas.openxmlformats.org/drawingml/2006/main"/>
-          <a:p xmlns:a="http://schemas.openxmlformats.org/drawingml/2006/main">
-            <a:pPr algn="l">
-              <a:lnSpc>
-                <a:spcPct val="118000"/>
-              </a:lnSpc>
-              <a:buNone/>
-              <a:defRPr sz="2200" b="0">
-                <a:solidFill>
-                  <a:srgbClr val="27333D"/>
-                </a:solidFill>
-                <a:latin typeface="微软雅黑"/>
-                <a:ea typeface="微软雅黑"/>
-                <a:cs typeface="微软雅黑"/>
-              </a:defRPr>
-            </a:pPr>
-            <a:r>
-              <a:rPr sz="2200" b="0">
-                <a:solidFill>
-                  <a:srgbClr val="27333D"/>
-                </a:solidFill>
-                <a:latin typeface="微软雅黑"/>
-                <a:ea typeface="微软雅黑"/>
-                <a:cs typeface="微软雅黑"/>
-              </a:rPr>
-              <a:t>“比较不公平”过于含混</a:t>
-            </a:r>
-          </a:p>
-        </p:txBody>
-      </p:sp>
-      <p:sp>
-        <p:nvSpPr>
-          <p:cNvPr id="14" name="f-a1">
-            <a:extLst xmlns:a="http://schemas.openxmlformats.org/drawingml/2006/main">
-              <a:ext uri="{FF2B5EF4-FFF2-40B4-BE49-F238E27FC236}">
-                <a16:creationId xmlns:a16="http://schemas.microsoft.com/office/drawing/2014/main" id="{586FA12C-8333-4AF0-99F3-3E401BB6821A}"/>
-              </a:ext>
-            </a:extLst>
-          </p:cNvPr>
-          <p:cNvSpPr>
-            <a:spLocks xmlns:a="http://schemas.openxmlformats.org/drawingml/2006/main" noGrp="1"/>
-          </p:cNvSpPr>
-          <p:nvPr/>
-        </p:nvSpPr>
-        <p:spPr>
-          <a:xfrm xmlns:a="http://schemas.openxmlformats.org/drawingml/2006/main">
-            <a:off x="6905625" y="2790825"/>
-            <a:ext cx="523875" cy="438150"/>
-          </a:xfrm>
-          <a:prstGeom xmlns:a="http://schemas.openxmlformats.org/drawingml/2006/main" prst="rect">
-            <a:avLst/>
-          </a:prstGeom>
-          <a:noFill xmlns:a="http://schemas.openxmlformats.org/drawingml/2006/main"/>
-          <a:ln xmlns:a="http://schemas.openxmlformats.org/drawingml/2006/main" w="0">
-            <a:noFill/>
-          </a:ln>
-        </p:spPr>
-        <p:txBody>
-          <a:bodyPr xmlns:a="http://schemas.openxmlformats.org/drawingml/2006/main" lIns="0" tIns="0" rIns="0" bIns="0" anchor="ctr"/>
-          <a:lstStyle xmlns:a="http://schemas.openxmlformats.org/drawingml/2006/main"/>
-          <a:p xmlns:a="http://schemas.openxmlformats.org/drawingml/2006/main">
-            <a:pPr algn="ctr">
-              <a:lnSpc>
-                <a:spcPct val="118000"/>
-              </a:lnSpc>
-              <a:buNone/>
-              <a:defRPr sz="2800" b="0">
-                <a:solidFill>
-                  <a:srgbClr val="1F4D78"/>
-                </a:solidFill>
-                <a:latin typeface="微软雅黑"/>
-                <a:ea typeface="微软雅黑"/>
-                <a:cs typeface="微软雅黑"/>
-              </a:defRPr>
-            </a:pPr>
-            <a:r>
-              <a:rPr sz="2800" b="0">
-                <a:solidFill>
-                  <a:srgbClr val="1F4D78"/>
-                </a:solidFill>
-                <a:latin typeface="微软雅黑"/>
-                <a:ea typeface="微软雅黑"/>
-                <a:cs typeface="微软雅黑"/>
-              </a:rPr>
-              <a:t>→</a:t>
-            </a:r>
-          </a:p>
-        </p:txBody>
-      </p:sp>
-      <p:sp>
-        <p:nvSpPr>
-          <p:cNvPr id="15" name="f-d1">
-            <a:extLst xmlns:a="http://schemas.openxmlformats.org/drawingml/2006/main">
-              <a:ext uri="{FF2B5EF4-FFF2-40B4-BE49-F238E27FC236}">
-                <a16:creationId xmlns:a16="http://schemas.microsoft.com/office/drawing/2014/main" id="{ACF47880-B87B-4ECF-BCD4-B7DE493E13E9}"/>
-              </a:ext>
-            </a:extLst>
-          </p:cNvPr>
-          <p:cNvSpPr>
-            <a:spLocks xmlns:a="http://schemas.openxmlformats.org/drawingml/2006/main" noGrp="1"/>
-          </p:cNvSpPr>
-          <p:nvPr/>
-        </p:nvSpPr>
-        <p:spPr>
-          <a:xfrm xmlns:a="http://schemas.openxmlformats.org/drawingml/2006/main">
-            <a:off x="7620000" y="2762250"/>
-            <a:ext cx="3619500" cy="514350"/>
-          </a:xfrm>
-          <a:prstGeom xmlns:a="http://schemas.openxmlformats.org/drawingml/2006/main" prst="rect">
-            <a:avLst/>
-          </a:prstGeom>
-          <a:noFill xmlns:a="http://schemas.openxmlformats.org/drawingml/2006/main"/>
-          <a:ln xmlns:a="http://schemas.openxmlformats.org/drawingml/2006/main" w="0">
-            <a:noFill/>
-          </a:ln>
-        </p:spPr>
-        <p:txBody>
-          <a:bodyPr xmlns:a="http://schemas.openxmlformats.org/drawingml/2006/main" lIns="0" tIns="0" rIns="0" bIns="0" anchor="t"/>
-          <a:lstStyle xmlns:a="http://schemas.openxmlformats.org/drawingml/2006/main"/>
-          <a:p xmlns:a="http://schemas.openxmlformats.org/drawingml/2006/main">
-            <a:pPr algn="l">
-              <a:lnSpc>
-                <a:spcPct val="118000"/>
-              </a:lnSpc>
-              <a:buNone/>
-              <a:defRPr sz="2200" b="0">
-                <a:solidFill>
-                  <a:srgbClr val="27333D"/>
-                </a:solidFill>
-                <a:latin typeface="微软雅黑"/>
-                <a:ea typeface="微软雅黑"/>
-                <a:cs typeface="微软雅黑"/>
-              </a:defRPr>
-            </a:pPr>
-            <a:r>
-              <a:rPr sz="2200" b="0">
-                <a:solidFill>
-                  <a:srgbClr val="27333D"/>
-                </a:solidFill>
-                <a:latin typeface="微软雅黑"/>
-                <a:ea typeface="微软雅黑"/>
-                <a:cs typeface="微软雅黑"/>
-              </a:rPr>
-              <a:t>澄清：指出具体变量</a:t>
-            </a:r>
-          </a:p>
-        </p:txBody>
-      </p:sp>
-      <p:sp>
-        <p:nvSpPr>
-          <p:cNvPr id="16" name="f-r1">
-            <a:extLst xmlns:a="http://schemas.openxmlformats.org/drawingml/2006/main">
-              <a:ext uri="{FF2B5EF4-FFF2-40B4-BE49-F238E27FC236}">
-                <a16:creationId xmlns:a16="http://schemas.microsoft.com/office/drawing/2014/main" id="{7DF1499E-0636-42AD-A176-16384A93DE60}"/>
-              </a:ext>
-            </a:extLst>
-          </p:cNvPr>
-          <p:cNvSpPr>
-            <a:spLocks xmlns:a="http://schemas.openxmlformats.org/drawingml/2006/main" noGrp="1"/>
-          </p:cNvSpPr>
-          <p:nvPr/>
-        </p:nvSpPr>
-        <p:spPr>
-          <a:xfrm xmlns:a="http://schemas.openxmlformats.org/drawingml/2006/main">
-            <a:off x="609600" y="3495675"/>
-            <a:ext cx="10858500" cy="14288"/>
-          </a:xfrm>
-          <a:prstGeom xmlns:a="http://schemas.openxmlformats.org/drawingml/2006/main" prst="rect">
-            <a:avLst/>
-          </a:prstGeom>
-          <a:solidFill xmlns:a="http://schemas.openxmlformats.org/drawingml/2006/main">
-            <a:srgbClr val="CDD5DB"/>
-          </a:solidFill>
-          <a:ln xmlns:a="http://schemas.openxmlformats.org/drawingml/2006/main" w="0">
-            <a:noFill/>
-          </a:ln>
-        </p:spPr>
-      </p:sp>
-      <p:sp>
-        <p:nvSpPr>
-          <p:cNvPr id="17" name="f-h2">
-            <a:extLst xmlns:a="http://schemas.openxmlformats.org/drawingml/2006/main">
-              <a:ext uri="{FF2B5EF4-FFF2-40B4-BE49-F238E27FC236}">
-                <a16:creationId xmlns:a16="http://schemas.microsoft.com/office/drawing/2014/main" id="{1DB26D5C-B4A1-409B-82BB-D98B111AD726}"/>
-              </a:ext>
-            </a:extLst>
-          </p:cNvPr>
-          <p:cNvSpPr>
-            <a:spLocks xmlns:a="http://schemas.openxmlformats.org/drawingml/2006/main" noGrp="1"/>
-          </p:cNvSpPr>
-          <p:nvPr/>
-        </p:nvSpPr>
-        <p:spPr>
-          <a:xfrm xmlns:a="http://schemas.openxmlformats.org/drawingml/2006/main">
-            <a:off x="609600" y="3952875"/>
-            <a:ext cx="2381250" cy="323850"/>
-          </a:xfrm>
-          <a:prstGeom xmlns:a="http://schemas.openxmlformats.org/drawingml/2006/main" prst="rect">
-            <a:avLst/>
-          </a:prstGeom>
-          <a:noFill xmlns:a="http://schemas.openxmlformats.org/drawingml/2006/main"/>
-          <a:ln xmlns:a="http://schemas.openxmlformats.org/drawingml/2006/main" w="0">
-            <a:noFill/>
-          </a:ln>
-        </p:spPr>
-        <p:txBody>
-          <a:bodyPr xmlns:a="http://schemas.openxmlformats.org/drawingml/2006/main" lIns="0" tIns="0" rIns="0" bIns="0" anchor="t"/>
-          <a:lstStyle xmlns:a="http://schemas.openxmlformats.org/drawingml/2006/main"/>
-          <a:p xmlns:a="http://schemas.openxmlformats.org/drawingml/2006/main">
-            <a:pPr algn="l">
-              <a:lnSpc>
-                <a:spcPct val="118000"/>
-              </a:lnSpc>
-              <a:buNone/>
-              <a:defRPr sz="1900" b="1">
-                <a:solidFill>
-                  <a:srgbClr val="1F4D78"/>
-                </a:solidFill>
-                <a:latin typeface="微软雅黑"/>
-                <a:ea typeface="微软雅黑"/>
-                <a:cs typeface="微软雅黑"/>
-              </a:defRPr>
-            </a:pPr>
-            <a:r>
-              <a:rPr sz="1900" b="1">
-                <a:solidFill>
-                  <a:srgbClr val="1F4D78"/>
-                </a:solidFill>
-                <a:latin typeface="微软雅黑"/>
-                <a:ea typeface="微软雅黑"/>
-                <a:cs typeface="微软雅黑"/>
-              </a:rPr>
-              <a:t>反馈 3 · 重要性</a:t>
-            </a:r>
-          </a:p>
-        </p:txBody>
-      </p:sp>
-      <p:sp>
-        <p:nvSpPr>
-          <p:cNvPr id="18" name="f-q2">
-            <a:extLst xmlns:a="http://schemas.openxmlformats.org/drawingml/2006/main">
-              <a:ext uri="{FF2B5EF4-FFF2-40B4-BE49-F238E27FC236}">
-                <a16:creationId xmlns:a16="http://schemas.microsoft.com/office/drawing/2014/main" id="{359E8059-65F0-4600-A124-A49FB5DE2DA9}"/>
-              </a:ext>
-            </a:extLst>
-          </p:cNvPr>
-          <p:cNvSpPr>
-            <a:spLocks xmlns:a="http://schemas.openxmlformats.org/drawingml/2006/main" noGrp="1"/>
-          </p:cNvSpPr>
-          <p:nvPr/>
-        </p:nvSpPr>
-        <p:spPr>
-          <a:xfrm xmlns:a="http://schemas.openxmlformats.org/drawingml/2006/main">
-            <a:off x="3143250" y="3952875"/>
-            <a:ext cx="3619500" cy="514350"/>
-          </a:xfrm>
-          <a:prstGeom xmlns:a="http://schemas.openxmlformats.org/drawingml/2006/main" prst="rect">
-            <a:avLst/>
-          </a:prstGeom>
-          <a:noFill xmlns:a="http://schemas.openxmlformats.org/drawingml/2006/main"/>
-          <a:ln xmlns:a="http://schemas.openxmlformats.org/drawingml/2006/main" w="0">
-            <a:noFill/>
-          </a:ln>
-        </p:spPr>
-        <p:txBody>
-          <a:bodyPr xmlns:a="http://schemas.openxmlformats.org/drawingml/2006/main" lIns="0" tIns="0" rIns="0" bIns="0" anchor="t"/>
-          <a:lstStyle xmlns:a="http://schemas.openxmlformats.org/drawingml/2006/main"/>
-          <a:p xmlns:a="http://schemas.openxmlformats.org/drawingml/2006/main">
-            <a:pPr algn="l">
-              <a:lnSpc>
-                <a:spcPct val="118000"/>
-              </a:lnSpc>
-              <a:buNone/>
-              <a:defRPr sz="2200" b="0">
-                <a:solidFill>
-                  <a:srgbClr val="27333D"/>
-                </a:solidFill>
-                <a:latin typeface="微软雅黑"/>
-                <a:ea typeface="微软雅黑"/>
-                <a:cs typeface="微软雅黑"/>
-              </a:defRPr>
-            </a:pPr>
-            <a:r>
-              <a:rPr sz="2200" b="0">
-                <a:solidFill>
-                  <a:srgbClr val="27333D"/>
-                </a:solidFill>
-                <a:latin typeface="微软雅黑"/>
-                <a:ea typeface="微软雅黑"/>
-                <a:cs typeface="微软雅黑"/>
-              </a:rPr>
-              <a:t>没说清何种误判改变决策</a:t>
-            </a:r>
-          </a:p>
-        </p:txBody>
-      </p:sp>
-      <p:sp>
-        <p:nvSpPr>
-          <p:cNvPr id="19" name="f-a2">
-            <a:extLst xmlns:a="http://schemas.openxmlformats.org/drawingml/2006/main">
-              <a:ext uri="{FF2B5EF4-FFF2-40B4-BE49-F238E27FC236}">
-                <a16:creationId xmlns:a16="http://schemas.microsoft.com/office/drawing/2014/main" id="{9B6CA1B3-3122-4593-8B16-C737B0C0C69A}"/>
-              </a:ext>
-            </a:extLst>
-          </p:cNvPr>
-          <p:cNvSpPr>
-            <a:spLocks xmlns:a="http://schemas.openxmlformats.org/drawingml/2006/main" noGrp="1"/>
-          </p:cNvSpPr>
-          <p:nvPr/>
-        </p:nvSpPr>
-        <p:spPr>
-          <a:xfrm xmlns:a="http://schemas.openxmlformats.org/drawingml/2006/main">
-            <a:off x="6905625" y="3981450"/>
-            <a:ext cx="523875" cy="438150"/>
-          </a:xfrm>
-          <a:prstGeom xmlns:a="http://schemas.openxmlformats.org/drawingml/2006/main" prst="rect">
-            <a:avLst/>
-          </a:prstGeom>
-          <a:noFill xmlns:a="http://schemas.openxmlformats.org/drawingml/2006/main"/>
-          <a:ln xmlns:a="http://schemas.openxmlformats.org/drawingml/2006/main" w="0">
-            <a:noFill/>
-          </a:ln>
-        </p:spPr>
-        <p:txBody>
-          <a:bodyPr xmlns:a="http://schemas.openxmlformats.org/drawingml/2006/main" lIns="0" tIns="0" rIns="0" bIns="0" anchor="ctr"/>
-          <a:lstStyle xmlns:a="http://schemas.openxmlformats.org/drawingml/2006/main"/>
-          <a:p xmlns:a="http://schemas.openxmlformats.org/drawingml/2006/main">
-            <a:pPr algn="ctr">
-              <a:lnSpc>
-                <a:spcPct val="118000"/>
-              </a:lnSpc>
-              <a:buNone/>
-              <a:defRPr sz="2800" b="0">
-                <a:solidFill>
-                  <a:srgbClr val="1F4D78"/>
-                </a:solidFill>
-                <a:latin typeface="微软雅黑"/>
-                <a:ea typeface="微软雅黑"/>
-                <a:cs typeface="微软雅黑"/>
-              </a:defRPr>
-            </a:pPr>
-            <a:r>
-              <a:rPr sz="2800" b="0">
-                <a:solidFill>
-                  <a:srgbClr val="1F4D78"/>
-                </a:solidFill>
-                <a:latin typeface="微软雅黑"/>
-                <a:ea typeface="微软雅黑"/>
-                <a:cs typeface="微软雅黑"/>
-              </a:rPr>
-              <a:t>→</a:t>
-            </a:r>
-          </a:p>
-        </p:txBody>
-      </p:sp>
-      <p:sp>
-        <p:nvSpPr>
-          <p:cNvPr id="20" name="f-d2">
-            <a:extLst xmlns:a="http://schemas.openxmlformats.org/drawingml/2006/main">
-              <a:ext uri="{FF2B5EF4-FFF2-40B4-BE49-F238E27FC236}">
-                <a16:creationId xmlns:a16="http://schemas.microsoft.com/office/drawing/2014/main" id="{6ECF8FA0-FEC2-41C4-843C-04F2173EC3F1}"/>
-              </a:ext>
-            </a:extLst>
-          </p:cNvPr>
-          <p:cNvSpPr>
-            <a:spLocks xmlns:a="http://schemas.openxmlformats.org/drawingml/2006/main" noGrp="1"/>
-          </p:cNvSpPr>
-          <p:nvPr/>
-        </p:nvSpPr>
-        <p:spPr>
-          <a:xfrm xmlns:a="http://schemas.openxmlformats.org/drawingml/2006/main">
-            <a:off x="7620000" y="3952875"/>
-            <a:ext cx="3619500" cy="514350"/>
-          </a:xfrm>
-          <a:prstGeom xmlns:a="http://schemas.openxmlformats.org/drawingml/2006/main" prst="rect">
-            <a:avLst/>
-          </a:prstGeom>
-          <a:noFill xmlns:a="http://schemas.openxmlformats.org/drawingml/2006/main"/>
-          <a:ln xmlns:a="http://schemas.openxmlformats.org/drawingml/2006/main" w="0">
-            <a:noFill/>
-          </a:ln>
-        </p:spPr>
-        <p:txBody>
-          <a:bodyPr xmlns:a="http://schemas.openxmlformats.org/drawingml/2006/main" lIns="0" tIns="0" rIns="0" bIns="0" anchor="t"/>
-          <a:lstStyle xmlns:a="http://schemas.openxmlformats.org/drawingml/2006/main"/>
-          <a:p xmlns:a="http://schemas.openxmlformats.org/drawingml/2006/main">
-            <a:pPr algn="l">
-              <a:lnSpc>
-                <a:spcPct val="118000"/>
-              </a:lnSpc>
-              <a:buNone/>
-              <a:defRPr sz="2200" b="0">
-                <a:solidFill>
-                  <a:srgbClr val="27333D"/>
-                </a:solidFill>
-                <a:latin typeface="微软雅黑"/>
-                <a:ea typeface="微软雅黑"/>
-                <a:cs typeface="微软雅黑"/>
-              </a:defRPr>
-            </a:pPr>
-            <a:r>
-              <a:rPr sz="2200" b="0">
-                <a:solidFill>
-                  <a:srgbClr val="27333D"/>
-                </a:solidFill>
-                <a:latin typeface="微软雅黑"/>
-                <a:ea typeface="微软雅黑"/>
-                <a:cs typeface="微软雅黑"/>
-              </a:rPr>
-              <a:t>暂缓：先定义决策阈值</a:t>
-            </a:r>
-          </a:p>
-        </p:txBody>
-      </p:sp>
-      <p:sp>
-        <p:nvSpPr>
-          <p:cNvPr id="21" name="f-r2">
-            <a:extLst xmlns:a="http://schemas.openxmlformats.org/drawingml/2006/main">
-              <a:ext uri="{FF2B5EF4-FFF2-40B4-BE49-F238E27FC236}">
-                <a16:creationId xmlns:a16="http://schemas.microsoft.com/office/drawing/2014/main" id="{0EE6064E-DF7C-4E8B-9843-640DFE8A12F1}"/>
-              </a:ext>
-            </a:extLst>
-          </p:cNvPr>
-          <p:cNvSpPr>
-            <a:spLocks xmlns:a="http://schemas.openxmlformats.org/drawingml/2006/main" noGrp="1"/>
-          </p:cNvSpPr>
-          <p:nvPr/>
-        </p:nvSpPr>
-        <p:spPr>
-          <a:xfrm xmlns:a="http://schemas.openxmlformats.org/drawingml/2006/main">
-            <a:off x="609600" y="4686300"/>
-            <a:ext cx="10858500" cy="14288"/>
-          </a:xfrm>
-          <a:prstGeom xmlns:a="http://schemas.openxmlformats.org/drawingml/2006/main" prst="rect">
-            <a:avLst/>
-          </a:prstGeom>
-          <a:solidFill xmlns:a="http://schemas.openxmlformats.org/drawingml/2006/main">
-            <a:srgbClr val="CDD5DB"/>
-          </a:solidFill>
-          <a:ln xmlns:a="http://schemas.openxmlformats.org/drawingml/2006/main" w="0">
-            <a:noFill/>
-          </a:ln>
-        </p:spPr>
-      </p:sp>
-      <p:sp>
-        <p:nvSpPr>
-          <p:cNvPr id="22" name="decision">
-            <a:extLst xmlns:a="http://schemas.openxmlformats.org/drawingml/2006/main">
-              <a:ext uri="{FF2B5EF4-FFF2-40B4-BE49-F238E27FC236}">
-                <a16:creationId xmlns:a16="http://schemas.microsoft.com/office/drawing/2014/main" id="{9396BAFD-BF07-4276-8767-9F3D8D38D0CE}"/>
-              </a:ext>
-            </a:extLst>
-          </p:cNvPr>
-          <p:cNvSpPr>
-            <a:spLocks xmlns:a="http://schemas.openxmlformats.org/drawingml/2006/main" noGrp="1"/>
-          </p:cNvSpPr>
-          <p:nvPr/>
-        </p:nvSpPr>
-        <p:spPr>
-          <a:xfrm xmlns:a="http://schemas.openxmlformats.org/drawingml/2006/main">
-            <a:off x="3333750" y="5257800"/>
-            <a:ext cx="5524500" cy="361950"/>
-          </a:xfrm>
-          <a:prstGeom xmlns:a="http://schemas.openxmlformats.org/drawingml/2006/main" prst="rect">
-            <a:avLst/>
-          </a:prstGeom>
-          <a:noFill xmlns:a="http://schemas.openxmlformats.org/drawingml/2006/main"/>
-          <a:ln xmlns:a="http://schemas.openxmlformats.org/drawingml/2006/main" w="0">
-            <a:noFill/>
-          </a:ln>
-        </p:spPr>
-        <p:txBody>
-          <a:bodyPr xmlns:a="http://schemas.openxmlformats.org/drawingml/2006/main" lIns="0" tIns="0" rIns="0" bIns="0" anchor="t"/>
-          <a:lstStyle xmlns:a="http://schemas.openxmlformats.org/drawingml/2006/main"/>
-          <a:p xmlns:a="http://schemas.openxmlformats.org/drawingml/2006/main">
-            <a:pPr algn="ctr">
-              <a:lnSpc>
-                <a:spcPct val="118000"/>
-              </a:lnSpc>
-              <a:buNone/>
-              <a:defRPr sz="2200" b="1">
-                <a:solidFill>
-                  <a:srgbClr val="C8161E"/>
-                </a:solidFill>
-                <a:latin typeface="微软雅黑"/>
-                <a:ea typeface="微软雅黑"/>
-                <a:cs typeface="微软雅黑"/>
-              </a:defRPr>
-            </a:pPr>
-            <a:r>
-              <a:rPr sz="2200" b="1">
-                <a:solidFill>
-                  <a:srgbClr val="C8161E"/>
-                </a:solidFill>
-                <a:latin typeface="微软雅黑"/>
-                <a:ea typeface="微软雅黑"/>
-                <a:cs typeface="微软雅黑"/>
-              </a:rPr>
-              <a:t>真实反馈决定处理动作；不要求出现拒绝</a:t>
+              <a:t>作者处理：“接受；在评价协议补入匿名顺序与统一规则。”</a:t>
             </a:r>
           </a:p>
         </p:txBody>
@@ -12050,24 +12232,346 @@
           </a:p>
         </p:txBody>
       </p:sp>
-      <p:sp>
-        <p:nvSpPr>
-          <p:cNvPr id="6" name="fiction">
-            <a:extLst xmlns:a="http://schemas.openxmlformats.org/drawingml/2006/main">
-              <a:ext uri="{FF2B5EF4-FFF2-40B4-BE49-F238E27FC236}">
-                <a16:creationId xmlns:a16="http://schemas.microsoft.com/office/drawing/2014/main" id="{33334E04-7AC2-4DB4-A170-2BC0CC251B9F}"/>
-              </a:ext>
-            </a:extLst>
-          </p:cNvPr>
-          <p:cNvSpPr>
-            <a:spLocks xmlns:a="http://schemas.openxmlformats.org/drawingml/2006/main" noGrp="1"/>
-          </p:cNvSpPr>
-          <p:nvPr/>
-        </p:nvSpPr>
-        <p:spPr>
-          <a:xfrm xmlns:a="http://schemas.openxmlformats.org/drawingml/2006/main">
-            <a:off x="609600" y="885825"/>
-            <a:ext cx="10572750" cy="314325"/>
+      <p:graphicFrame>
+        <p:nvGraphicFramePr>
+          <p:cNvPr id="10" name="native-table-220"/>
+          <p:cNvGraphicFramePr/>
+          <p:nvPr/>
+        </p:nvGraphicFramePr>
+        <p:xfrm>
+          <a:off xmlns:a="http://schemas.openxmlformats.org/drawingml/2006/main" x="609600" y="1476375"/>
+          <a:ext xmlns:a="http://schemas.openxmlformats.org/drawingml/2006/main" cx="10972800" cy="3257550"/>
+        </p:xfrm>
+        <a:graphic xmlns:a="http://schemas.openxmlformats.org/drawingml/2006/main">
+          <a:graphicData uri="http://schemas.openxmlformats.org/drawingml/2006/table">
+            <a:tbl>
+              <a:tblPr/>
+              <a:tblGrid>
+                <a:gridCol w="2781300"/>
+                <a:gridCol w="8191500"/>
+              </a:tblGrid>
+              <a:tr h="542925">
+                <a:tc>
+                  <a:txBody>
+                    <a:bodyPr/>
+                    <a:lstStyle/>
+                    <a:p>
+                      <a:r>
+                        <a:rPr sz="2000" b="1">
+                          <a:solidFill>
+                            <a:srgbClr val="1F4D78"/>
+                          </a:solidFill>
+                          <a:latin typeface="微软雅黑"/>
+                          <a:ea typeface="微软雅黑"/>
+                          <a:cs typeface="微软雅黑"/>
+                        </a:rPr>
+                        <a:t>分享段落</a:t>
+                      </a:r>
+                    </a:p>
+                  </a:txBody>
+                  <a:tcPr marL="123825" marR="123825" marT="85725" marB="85725" anchor="ctr">
+                    <a:solidFill>
+                      <a:srgbClr val="F4F6F8"/>
+                    </a:solidFill>
+                  </a:tcPr>
+                </a:tc>
+                <a:tc>
+                  <a:txBody>
+                    <a:bodyPr/>
+                    <a:lstStyle/>
+                    <a:p>
+                      <a:r>
+                        <a:rPr sz="2000" b="1">
+                          <a:solidFill>
+                            <a:srgbClr val="1F4D78"/>
+                          </a:solidFill>
+                          <a:latin typeface="微软雅黑"/>
+                          <a:ea typeface="微软雅黑"/>
+                          <a:cs typeface="微软雅黑"/>
+                        </a:rPr>
+                        <a:t>要说清什么</a:t>
+                      </a:r>
+                    </a:p>
+                  </a:txBody>
+                  <a:tcPr marL="123825" marR="123825" marT="85725" marB="85725" anchor="ctr">
+                    <a:solidFill>
+                      <a:srgbClr val="F4F6F8"/>
+                    </a:solidFill>
+                  </a:tcPr>
+                </a:tc>
+              </a:tr>
+              <a:tr h="542925">
+                <a:tc>
+                  <a:txBody>
+                    <a:bodyPr/>
+                    <a:lstStyle/>
+                    <a:p>
+                      <a:r>
+                        <a:rPr sz="2000">
+                          <a:solidFill>
+                            <a:srgbClr val="27333D"/>
+                          </a:solidFill>
+                          <a:latin typeface="微软雅黑"/>
+                          <a:ea typeface="微软雅黑"/>
+                          <a:cs typeface="微软雅黑"/>
+                        </a:rPr>
+                        <a:t>研究问题</a:t>
+                      </a:r>
+                    </a:p>
+                  </a:txBody>
+                  <a:tcPr marL="123825" marR="123825" marT="85725" marB="85725" anchor="ctr">
+                    <a:solidFill>
+                      <a:srgbClr val="FFFFFF"/>
+                    </a:solidFill>
+                  </a:tcPr>
+                </a:tc>
+                <a:tc>
+                  <a:txBody>
+                    <a:bodyPr/>
+                    <a:lstStyle/>
+                    <a:p>
+                      <a:r>
+                        <a:rPr sz="2000">
+                          <a:solidFill>
+                            <a:srgbClr val="27333D"/>
+                          </a:solidFill>
+                          <a:latin typeface="微软雅黑"/>
+                          <a:ea typeface="微软雅黑"/>
+                          <a:cs typeface="微软雅黑"/>
+                        </a:rPr>
+                        <a:t>范围、非例、可证伪命题</a:t>
+                      </a:r>
+                    </a:p>
+                  </a:txBody>
+                  <a:tcPr marL="123825" marR="123825" marT="85725" marB="85725" anchor="ctr">
+                    <a:solidFill>
+                      <a:srgbClr val="FFFFFF"/>
+                    </a:solidFill>
+                  </a:tcPr>
+                </a:tc>
+              </a:tr>
+              <a:tr h="542925">
+                <a:tc>
+                  <a:txBody>
+                    <a:bodyPr/>
+                    <a:lstStyle/>
+                    <a:p>
+                      <a:r>
+                        <a:rPr sz="2000">
+                          <a:solidFill>
+                            <a:srgbClr val="27333D"/>
+                          </a:solidFill>
+                          <a:latin typeface="微软雅黑"/>
+                          <a:ea typeface="微软雅黑"/>
+                          <a:cs typeface="微软雅黑"/>
+                        </a:rPr>
+                        <a:t>关键证据</a:t>
+                      </a:r>
+                    </a:p>
+                  </a:txBody>
+                  <a:tcPr marL="123825" marR="123825" marT="85725" marB="85725" anchor="ctr">
+                    <a:solidFill>
+                      <a:srgbClr val="FFFFFF"/>
+                    </a:solidFill>
+                  </a:tcPr>
+                </a:tc>
+                <a:tc>
+                  <a:txBody>
+                    <a:bodyPr/>
+                    <a:lstStyle/>
+                    <a:p>
+                      <a:r>
+                        <a:rPr sz="2000">
+                          <a:solidFill>
+                            <a:srgbClr val="27333D"/>
+                          </a:solidFill>
+                          <a:latin typeface="微软雅黑"/>
+                          <a:ea typeface="微软雅黑"/>
+                          <a:cs typeface="微软雅黑"/>
+                        </a:rPr>
+                        <a:t>直接测量了什么，边界在哪里</a:t>
+                      </a:r>
+                    </a:p>
+                  </a:txBody>
+                  <a:tcPr marL="123825" marR="123825" marT="85725" marB="85725" anchor="ctr">
+                    <a:solidFill>
+                      <a:srgbClr val="FFFFFF"/>
+                    </a:solidFill>
+                  </a:tcPr>
+                </a:tc>
+              </a:tr>
+              <a:tr h="542925">
+                <a:tc>
+                  <a:txBody>
+                    <a:bodyPr/>
+                    <a:lstStyle/>
+                    <a:p>
+                      <a:r>
+                        <a:rPr sz="2000">
+                          <a:solidFill>
+                            <a:srgbClr val="27333D"/>
+                          </a:solidFill>
+                          <a:latin typeface="微软雅黑"/>
+                          <a:ea typeface="微软雅黑"/>
+                          <a:cs typeface="微软雅黑"/>
+                        </a:rPr>
+                        <a:t>机制假设</a:t>
+                      </a:r>
+                    </a:p>
+                  </a:txBody>
+                  <a:tcPr marL="123825" marR="123825" marT="85725" marB="85725" anchor="ctr">
+                    <a:solidFill>
+                      <a:srgbClr val="FFFFFF"/>
+                    </a:solidFill>
+                  </a:tcPr>
+                </a:tc>
+                <a:tc>
+                  <a:txBody>
+                    <a:bodyPr/>
+                    <a:lstStyle/>
+                    <a:p>
+                      <a:r>
+                        <a:rPr sz="2000">
+                          <a:solidFill>
+                            <a:srgbClr val="27333D"/>
+                          </a:solidFill>
+                          <a:latin typeface="微软雅黑"/>
+                          <a:ea typeface="微软雅黑"/>
+                          <a:cs typeface="微软雅黑"/>
+                        </a:rPr>
+                        <a:t>H1 生成保留与 A2 评分提示</a:t>
+                      </a:r>
+                    </a:p>
+                  </a:txBody>
+                  <a:tcPr marL="123825" marR="123825" marT="85725" marB="85725" anchor="ctr">
+                    <a:solidFill>
+                      <a:srgbClr val="FFFFFF"/>
+                    </a:solidFill>
+                  </a:tcPr>
+                </a:tc>
+              </a:tr>
+              <a:tr h="542925">
+                <a:tc>
+                  <a:txBody>
+                    <a:bodyPr/>
+                    <a:lstStyle/>
+                    <a:p>
+                      <a:r>
+                        <a:rPr sz="2000">
+                          <a:solidFill>
+                            <a:srgbClr val="27333D"/>
+                          </a:solidFill>
+                          <a:latin typeface="微软雅黑"/>
+                          <a:ea typeface="微软雅黑"/>
+                          <a:cs typeface="微软雅黑"/>
+                        </a:rPr>
+                        <a:t>最小验证</a:t>
+                      </a:r>
+                    </a:p>
+                  </a:txBody>
+                  <a:tcPr marL="123825" marR="123825" marT="85725" marB="85725" anchor="ctr">
+                    <a:solidFill>
+                      <a:srgbClr val="FFFFFF"/>
+                    </a:solidFill>
+                  </a:tcPr>
+                </a:tc>
+                <a:tc>
+                  <a:txBody>
+                    <a:bodyPr/>
+                    <a:lstStyle/>
+                    <a:p>
+                      <a:r>
+                        <a:rPr sz="2000">
+                          <a:solidFill>
+                            <a:srgbClr val="27333D"/>
+                          </a:solidFill>
+                          <a:latin typeface="微软雅黑"/>
+                          <a:ea typeface="微软雅黑"/>
+                          <a:cs typeface="微软雅黑"/>
+                        </a:rPr>
+                        <a:t>什么观察能区分两种解释</a:t>
+                      </a:r>
+                    </a:p>
+                  </a:txBody>
+                  <a:tcPr marL="123825" marR="123825" marT="85725" marB="85725" anchor="ctr">
+                    <a:solidFill>
+                      <a:srgbClr val="FFFFFF"/>
+                    </a:solidFill>
+                  </a:tcPr>
+                </a:tc>
+              </a:tr>
+              <a:tr h="542925">
+                <a:tc>
+                  <a:txBody>
+                    <a:bodyPr/>
+                    <a:lstStyle/>
+                    <a:p>
+                      <a:r>
+                        <a:rPr sz="2000">
+                          <a:solidFill>
+                            <a:srgbClr val="27333D"/>
+                          </a:solidFill>
+                          <a:latin typeface="微软雅黑"/>
+                          <a:ea typeface="微软雅黑"/>
+                          <a:cs typeface="微软雅黑"/>
+                        </a:rPr>
+                        <a:t>最大风险</a:t>
+                      </a:r>
+                    </a:p>
+                  </a:txBody>
+                  <a:tcPr marL="123825" marR="123825" marT="85725" marB="85725" anchor="ctr">
+                    <a:solidFill>
+                      <a:srgbClr val="FFFFFF"/>
+                    </a:solidFill>
+                  </a:tcPr>
+                </a:tc>
+                <a:tc>
+                  <a:txBody>
+                    <a:bodyPr/>
+                    <a:lstStyle/>
+                    <a:p>
+                      <a:r>
+                        <a:rPr sz="2000">
+                          <a:solidFill>
+                            <a:srgbClr val="27333D"/>
+                          </a:solidFill>
+                          <a:latin typeface="微软雅黑"/>
+                          <a:ea typeface="微软雅黑"/>
+                          <a:cs typeface="微软雅黑"/>
+                        </a:rPr>
+                        <a:t>当前最可能卡住判断的一项</a:t>
+                      </a:r>
+                    </a:p>
+                  </a:txBody>
+                  <a:tcPr marL="123825" marR="123825" marT="85725" marB="85725" anchor="ctr">
+                    <a:solidFill>
+                      <a:srgbClr val="FFFFFF"/>
+                    </a:solidFill>
+                  </a:tcPr>
+                </a:tc>
+              </a:tr>
+            </a:tbl>
+          </a:graphicData>
+        </a:graphic>
+      </p:graphicFrame>
+      <p:sp>
+        <p:nvSpPr>
+          <p:cNvPr id="7" name="content-221">
+            <a:extLst xmlns:a="http://schemas.openxmlformats.org/drawingml/2006/main">
+              <a:ext uri="{FF2B5EF4-FFF2-40B4-BE49-F238E27FC236}">
+                <a16:creationId xmlns:a16="http://schemas.microsoft.com/office/drawing/2014/main" id="{4761A74B-3515-4539-88C8-D6E432A257AF}"/>
+              </a:ext>
+            </a:extLst>
+          </p:cNvPr>
+          <p:cNvSpPr>
+            <a:spLocks xmlns:a="http://schemas.openxmlformats.org/drawingml/2006/main" noGrp="1"/>
+          </p:cNvSpPr>
+          <p:nvPr/>
+        </p:nvSpPr>
+        <p:spPr>
+          <a:xfrm xmlns:a="http://schemas.openxmlformats.org/drawingml/2006/main">
+            <a:off x="609600" y="5019675"/>
+            <a:ext cx="10972800" cy="386715"/>
           </a:xfrm>
           <a:prstGeom xmlns:a="http://schemas.openxmlformats.org/drawingml/2006/main" prst="rect">
             <a:avLst/>
@@ -12086,9 +12590,9 @@
                 <a:spcPct val="118000"/>
               </a:lnSpc>
               <a:buNone/>
-              <a:defRPr sz="1800" b="0">
-                <a:solidFill>
-                  <a:srgbClr val="A96510"/>
+              <a:defRPr sz="2100" b="0">
+                <a:solidFill>
+                  <a:srgbClr val="27333D"/>
                 </a:solidFill>
                 <a:latin typeface="微软雅黑"/>
                 <a:ea typeface="微软雅黑"/>
@@ -12096,930 +12600,15 @@
               </a:defRPr>
             </a:pPr>
             <a:r>
-              <a:rPr sz="1800" b="0">
-                <a:solidFill>
-                  <a:srgbClr val="A96510"/>
+              <a:rPr sz="2100" b="0">
+                <a:solidFill>
+                  <a:srgbClr val="27333D"/>
                 </a:solidFill>
                 <a:latin typeface="微软雅黑"/>
                 <a:ea typeface="微软雅黑"/>
                 <a:cs typeface="微软雅黑"/>
               </a:rPr>
-              <a:t>课程虚构教学案例</a:t>
-            </a:r>
-          </a:p>
-        </p:txBody>
-      </p:sp>
-      <p:sp>
-        <p:nvSpPr>
-          <p:cNvPr id="7" name="seg-a0">
-            <a:extLst xmlns:a="http://schemas.openxmlformats.org/drawingml/2006/main">
-              <a:ext uri="{FF2B5EF4-FFF2-40B4-BE49-F238E27FC236}">
-                <a16:creationId xmlns:a16="http://schemas.microsoft.com/office/drawing/2014/main" id="{B79046E2-3B2F-4AE1-BC37-0B4E800B435F}"/>
-              </a:ext>
-            </a:extLst>
-          </p:cNvPr>
-          <p:cNvSpPr>
-            <a:spLocks xmlns:a="http://schemas.openxmlformats.org/drawingml/2006/main" noGrp="1"/>
-          </p:cNvSpPr>
-          <p:nvPr/>
-        </p:nvSpPr>
-        <p:spPr>
-          <a:xfrm xmlns:a="http://schemas.openxmlformats.org/drawingml/2006/main">
-            <a:off x="723900" y="1476375"/>
-            <a:ext cx="2381250" cy="457200"/>
-          </a:xfrm>
-          <a:prstGeom xmlns:a="http://schemas.openxmlformats.org/drawingml/2006/main" prst="rect">
-            <a:avLst/>
-          </a:prstGeom>
-          <a:noFill xmlns:a="http://schemas.openxmlformats.org/drawingml/2006/main"/>
-          <a:ln xmlns:a="http://schemas.openxmlformats.org/drawingml/2006/main" w="0">
-            <a:noFill/>
-          </a:ln>
-        </p:spPr>
-        <p:txBody>
-          <a:bodyPr xmlns:a="http://schemas.openxmlformats.org/drawingml/2006/main" lIns="0" tIns="0" rIns="0" bIns="0" anchor="ctr"/>
-          <a:lstStyle xmlns:a="http://schemas.openxmlformats.org/drawingml/2006/main"/>
-          <a:p xmlns:a="http://schemas.openxmlformats.org/drawingml/2006/main">
-            <a:pPr algn="l">
-              <a:lnSpc>
-                <a:spcPct val="118000"/>
-              </a:lnSpc>
-              <a:buNone/>
-              <a:defRPr sz="2200" b="1">
-                <a:solidFill>
-                  <a:srgbClr val="1F4D78"/>
-                </a:solidFill>
-                <a:latin typeface="微软雅黑"/>
-                <a:ea typeface="微软雅黑"/>
-                <a:cs typeface="微软雅黑"/>
-              </a:defRPr>
-            </a:pPr>
-            <a:r>
-              <a:rPr sz="2200" b="1">
-                <a:solidFill>
-                  <a:srgbClr val="1F4D78"/>
-                </a:solidFill>
-                <a:latin typeface="微软雅黑"/>
-                <a:ea typeface="微软雅黑"/>
-                <a:cs typeface="微软雅黑"/>
-              </a:rPr>
-              <a:t>01 研究问题</a:t>
-            </a:r>
-          </a:p>
-        </p:txBody>
-      </p:sp>
-      <p:sp>
-        <p:nvSpPr>
-          <p:cNvPr id="8" name="seg-b0">
-            <a:extLst xmlns:a="http://schemas.openxmlformats.org/drawingml/2006/main">
-              <a:ext uri="{FF2B5EF4-FFF2-40B4-BE49-F238E27FC236}">
-                <a16:creationId xmlns:a16="http://schemas.microsoft.com/office/drawing/2014/main" id="{5E45DB89-F2BA-46D9-B695-AB222037E237}"/>
-              </a:ext>
-            </a:extLst>
-          </p:cNvPr>
-          <p:cNvSpPr>
-            <a:spLocks xmlns:a="http://schemas.openxmlformats.org/drawingml/2006/main" noGrp="1"/>
-          </p:cNvSpPr>
-          <p:nvPr/>
-        </p:nvSpPr>
-        <p:spPr>
-          <a:xfrm xmlns:a="http://schemas.openxmlformats.org/drawingml/2006/main">
-            <a:off x="3238500" y="1476375"/>
-            <a:ext cx="6191250" cy="457200"/>
-          </a:xfrm>
-          <a:prstGeom xmlns:a="http://schemas.openxmlformats.org/drawingml/2006/main" prst="rect">
-            <a:avLst/>
-          </a:prstGeom>
-          <a:noFill xmlns:a="http://schemas.openxmlformats.org/drawingml/2006/main"/>
-          <a:ln xmlns:a="http://schemas.openxmlformats.org/drawingml/2006/main" w="0">
-            <a:noFill/>
-          </a:ln>
-        </p:spPr>
-        <p:txBody>
-          <a:bodyPr xmlns:a="http://schemas.openxmlformats.org/drawingml/2006/main" lIns="0" tIns="0" rIns="0" bIns="0" anchor="ctr"/>
-          <a:lstStyle xmlns:a="http://schemas.openxmlformats.org/drawingml/2006/main"/>
-          <a:p xmlns:a="http://schemas.openxmlformats.org/drawingml/2006/main">
-            <a:pPr algn="l">
-              <a:lnSpc>
-                <a:spcPct val="118000"/>
-              </a:lnSpc>
-              <a:buNone/>
-              <a:defRPr sz="2200" b="0">
-                <a:solidFill>
-                  <a:srgbClr val="27333D"/>
-                </a:solidFill>
-                <a:latin typeface="微软雅黑"/>
-                <a:ea typeface="微软雅黑"/>
-                <a:cs typeface="微软雅黑"/>
-              </a:defRPr>
-            </a:pPr>
-            <a:r>
-              <a:rPr sz="2200" b="0">
-                <a:solidFill>
-                  <a:srgbClr val="27333D"/>
-                </a:solidFill>
-                <a:latin typeface="微软雅黑"/>
-                <a:ea typeface="微软雅黑"/>
-                <a:cs typeface="微软雅黑"/>
-              </a:rPr>
-              <a:t>范围、非例、可证伪命题</a:t>
-            </a:r>
-          </a:p>
-        </p:txBody>
-      </p:sp>
-      <p:sp>
-        <p:nvSpPr>
-          <p:cNvPr id="9" name="seg-c0">
-            <a:extLst xmlns:a="http://schemas.openxmlformats.org/drawingml/2006/main">
-              <a:ext uri="{FF2B5EF4-FFF2-40B4-BE49-F238E27FC236}">
-                <a16:creationId xmlns:a16="http://schemas.microsoft.com/office/drawing/2014/main" id="{9DA812FE-B644-472E-90AD-CFEA42109A5B}"/>
-              </a:ext>
-            </a:extLst>
-          </p:cNvPr>
-          <p:cNvSpPr>
-            <a:spLocks xmlns:a="http://schemas.openxmlformats.org/drawingml/2006/main" noGrp="1"/>
-          </p:cNvSpPr>
-          <p:nvPr/>
-        </p:nvSpPr>
-        <p:spPr>
-          <a:xfrm xmlns:a="http://schemas.openxmlformats.org/drawingml/2006/main">
-            <a:off x="9810750" y="1476375"/>
-            <a:ext cx="1524000" cy="457200"/>
-          </a:xfrm>
-          <a:prstGeom xmlns:a="http://schemas.openxmlformats.org/drawingml/2006/main" prst="rect">
-            <a:avLst/>
-          </a:prstGeom>
-          <a:noFill xmlns:a="http://schemas.openxmlformats.org/drawingml/2006/main"/>
-          <a:ln xmlns:a="http://schemas.openxmlformats.org/drawingml/2006/main" w="0">
-            <a:noFill/>
-          </a:ln>
-        </p:spPr>
-        <p:txBody>
-          <a:bodyPr xmlns:a="http://schemas.openxmlformats.org/drawingml/2006/main" lIns="0" tIns="0" rIns="0" bIns="0" anchor="ctr"/>
-          <a:lstStyle xmlns:a="http://schemas.openxmlformats.org/drawingml/2006/main"/>
-          <a:p xmlns:a="http://schemas.openxmlformats.org/drawingml/2006/main">
-            <a:pPr algn="r">
-              <a:lnSpc>
-                <a:spcPct val="118000"/>
-              </a:lnSpc>
-              <a:buNone/>
-              <a:defRPr sz="1800" b="0">
-                <a:solidFill>
-                  <a:srgbClr val="66727D"/>
-                </a:solidFill>
-                <a:latin typeface="微软雅黑"/>
-                <a:ea typeface="微软雅黑"/>
-                <a:cs typeface="微软雅黑"/>
-              </a:defRPr>
-            </a:pPr>
-            <a:r>
-              <a:rPr sz="1800" b="0">
-                <a:solidFill>
-                  <a:srgbClr val="66727D"/>
-                </a:solidFill>
-                <a:latin typeface="微软雅黑"/>
-                <a:ea typeface="微软雅黑"/>
-                <a:cs typeface="微软雅黑"/>
-              </a:rPr>
-              <a:t>第 6 课</a:t>
-            </a:r>
-          </a:p>
-        </p:txBody>
-      </p:sp>
-      <p:sp>
-        <p:nvSpPr>
-          <p:cNvPr id="10" name="seg-a1">
-            <a:extLst xmlns:a="http://schemas.openxmlformats.org/drawingml/2006/main">
-              <a:ext uri="{FF2B5EF4-FFF2-40B4-BE49-F238E27FC236}">
-                <a16:creationId xmlns:a16="http://schemas.microsoft.com/office/drawing/2014/main" id="{4129BFAE-F880-4CAF-9B98-218BF3FB6E11}"/>
-              </a:ext>
-            </a:extLst>
-          </p:cNvPr>
-          <p:cNvSpPr>
-            <a:spLocks xmlns:a="http://schemas.openxmlformats.org/drawingml/2006/main" noGrp="1"/>
-          </p:cNvSpPr>
-          <p:nvPr/>
-        </p:nvSpPr>
-        <p:spPr>
-          <a:xfrm xmlns:a="http://schemas.openxmlformats.org/drawingml/2006/main">
-            <a:off x="723900" y="2219325"/>
-            <a:ext cx="2381250" cy="457200"/>
-          </a:xfrm>
-          <a:prstGeom xmlns:a="http://schemas.openxmlformats.org/drawingml/2006/main" prst="rect">
-            <a:avLst/>
-          </a:prstGeom>
-          <a:noFill xmlns:a="http://schemas.openxmlformats.org/drawingml/2006/main"/>
-          <a:ln xmlns:a="http://schemas.openxmlformats.org/drawingml/2006/main" w="0">
-            <a:noFill/>
-          </a:ln>
-        </p:spPr>
-        <p:txBody>
-          <a:bodyPr xmlns:a="http://schemas.openxmlformats.org/drawingml/2006/main" lIns="0" tIns="0" rIns="0" bIns="0" anchor="ctr"/>
-          <a:lstStyle xmlns:a="http://schemas.openxmlformats.org/drawingml/2006/main"/>
-          <a:p xmlns:a="http://schemas.openxmlformats.org/drawingml/2006/main">
-            <a:pPr algn="l">
-              <a:lnSpc>
-                <a:spcPct val="118000"/>
-              </a:lnSpc>
-              <a:buNone/>
-              <a:defRPr sz="2200" b="1">
-                <a:solidFill>
-                  <a:srgbClr val="1F4D78"/>
-                </a:solidFill>
-                <a:latin typeface="微软雅黑"/>
-                <a:ea typeface="微软雅黑"/>
-                <a:cs typeface="微软雅黑"/>
-              </a:defRPr>
-            </a:pPr>
-            <a:r>
-              <a:rPr sz="2200" b="1">
-                <a:solidFill>
-                  <a:srgbClr val="1F4D78"/>
-                </a:solidFill>
-                <a:latin typeface="微软雅黑"/>
-                <a:ea typeface="微软雅黑"/>
-                <a:cs typeface="微软雅黑"/>
-              </a:rPr>
-              <a:t>02 关键证据</a:t>
-            </a:r>
-          </a:p>
-        </p:txBody>
-      </p:sp>
-      <p:sp>
-        <p:nvSpPr>
-          <p:cNvPr id="11" name="seg-b1">
-            <a:extLst xmlns:a="http://schemas.openxmlformats.org/drawingml/2006/main">
-              <a:ext uri="{FF2B5EF4-FFF2-40B4-BE49-F238E27FC236}">
-                <a16:creationId xmlns:a16="http://schemas.microsoft.com/office/drawing/2014/main" id="{569EF7E3-18FC-40FF-AB52-04CC530AD6B7}"/>
-              </a:ext>
-            </a:extLst>
-          </p:cNvPr>
-          <p:cNvSpPr>
-            <a:spLocks xmlns:a="http://schemas.openxmlformats.org/drawingml/2006/main" noGrp="1"/>
-          </p:cNvSpPr>
-          <p:nvPr/>
-        </p:nvSpPr>
-        <p:spPr>
-          <a:xfrm xmlns:a="http://schemas.openxmlformats.org/drawingml/2006/main">
-            <a:off x="3238500" y="2219325"/>
-            <a:ext cx="6191250" cy="457200"/>
-          </a:xfrm>
-          <a:prstGeom xmlns:a="http://schemas.openxmlformats.org/drawingml/2006/main" prst="rect">
-            <a:avLst/>
-          </a:prstGeom>
-          <a:noFill xmlns:a="http://schemas.openxmlformats.org/drawingml/2006/main"/>
-          <a:ln xmlns:a="http://schemas.openxmlformats.org/drawingml/2006/main" w="0">
-            <a:noFill/>
-          </a:ln>
-        </p:spPr>
-        <p:txBody>
-          <a:bodyPr xmlns:a="http://schemas.openxmlformats.org/drawingml/2006/main" lIns="0" tIns="0" rIns="0" bIns="0" anchor="ctr"/>
-          <a:lstStyle xmlns:a="http://schemas.openxmlformats.org/drawingml/2006/main"/>
-          <a:p xmlns:a="http://schemas.openxmlformats.org/drawingml/2006/main">
-            <a:pPr algn="l">
-              <a:lnSpc>
-                <a:spcPct val="118000"/>
-              </a:lnSpc>
-              <a:buNone/>
-              <a:defRPr sz="2200" b="0">
-                <a:solidFill>
-                  <a:srgbClr val="27333D"/>
-                </a:solidFill>
-                <a:latin typeface="微软雅黑"/>
-                <a:ea typeface="微软雅黑"/>
-                <a:cs typeface="微软雅黑"/>
-              </a:defRPr>
-            </a:pPr>
-            <a:r>
-              <a:rPr sz="2200" b="0">
-                <a:solidFill>
-                  <a:srgbClr val="27333D"/>
-                </a:solidFill>
-                <a:latin typeface="微软雅黑"/>
-                <a:ea typeface="微软雅黑"/>
-                <a:cs typeface="微软雅黑"/>
-              </a:rPr>
-              <a:t>直接证据及边界</a:t>
-            </a:r>
-          </a:p>
-        </p:txBody>
-      </p:sp>
-      <p:sp>
-        <p:nvSpPr>
-          <p:cNvPr id="12" name="seg-c1">
-            <a:extLst xmlns:a="http://schemas.openxmlformats.org/drawingml/2006/main">
-              <a:ext uri="{FF2B5EF4-FFF2-40B4-BE49-F238E27FC236}">
-                <a16:creationId xmlns:a16="http://schemas.microsoft.com/office/drawing/2014/main" id="{CE1996B4-096C-4525-86E4-04ECF87906C3}"/>
-              </a:ext>
-            </a:extLst>
-          </p:cNvPr>
-          <p:cNvSpPr>
-            <a:spLocks xmlns:a="http://schemas.openxmlformats.org/drawingml/2006/main" noGrp="1"/>
-          </p:cNvSpPr>
-          <p:nvPr/>
-        </p:nvSpPr>
-        <p:spPr>
-          <a:xfrm xmlns:a="http://schemas.openxmlformats.org/drawingml/2006/main">
-            <a:off x="9810750" y="2219325"/>
-            <a:ext cx="1524000" cy="457200"/>
-          </a:xfrm>
-          <a:prstGeom xmlns:a="http://schemas.openxmlformats.org/drawingml/2006/main" prst="rect">
-            <a:avLst/>
-          </a:prstGeom>
-          <a:noFill xmlns:a="http://schemas.openxmlformats.org/drawingml/2006/main"/>
-          <a:ln xmlns:a="http://schemas.openxmlformats.org/drawingml/2006/main" w="0">
-            <a:noFill/>
-          </a:ln>
-        </p:spPr>
-        <p:txBody>
-          <a:bodyPr xmlns:a="http://schemas.openxmlformats.org/drawingml/2006/main" lIns="0" tIns="0" rIns="0" bIns="0" anchor="ctr"/>
-          <a:lstStyle xmlns:a="http://schemas.openxmlformats.org/drawingml/2006/main"/>
-          <a:p xmlns:a="http://schemas.openxmlformats.org/drawingml/2006/main">
-            <a:pPr algn="r">
-              <a:lnSpc>
-                <a:spcPct val="118000"/>
-              </a:lnSpc>
-              <a:buNone/>
-              <a:defRPr sz="1800" b="0">
-                <a:solidFill>
-                  <a:srgbClr val="66727D"/>
-                </a:solidFill>
-                <a:latin typeface="微软雅黑"/>
-                <a:ea typeface="微软雅黑"/>
-                <a:cs typeface="微软雅黑"/>
-              </a:defRPr>
-            </a:pPr>
-            <a:r>
-              <a:rPr sz="1800" b="0">
-                <a:solidFill>
-                  <a:srgbClr val="66727D"/>
-                </a:solidFill>
-                <a:latin typeface="微软雅黑"/>
-                <a:ea typeface="微软雅黑"/>
-                <a:cs typeface="微软雅黑"/>
-              </a:rPr>
-              <a:t>第 5/6 课</a:t>
-            </a:r>
-          </a:p>
-        </p:txBody>
-      </p:sp>
-      <p:sp>
-        <p:nvSpPr>
-          <p:cNvPr id="13" name="seg-bg2">
-            <a:extLst xmlns:a="http://schemas.openxmlformats.org/drawingml/2006/main">
-              <a:ext uri="{FF2B5EF4-FFF2-40B4-BE49-F238E27FC236}">
-                <a16:creationId xmlns:a16="http://schemas.microsoft.com/office/drawing/2014/main" id="{3D03921A-8F7D-402D-861D-2386921EFDA7}"/>
-              </a:ext>
-            </a:extLst>
-          </p:cNvPr>
-          <p:cNvSpPr>
-            <a:spLocks xmlns:a="http://schemas.openxmlformats.org/drawingml/2006/main" noGrp="1"/>
-          </p:cNvSpPr>
-          <p:nvPr/>
-        </p:nvSpPr>
-        <p:spPr>
-          <a:xfrm xmlns:a="http://schemas.openxmlformats.org/drawingml/2006/main">
-            <a:off x="609600" y="2867025"/>
-            <a:ext cx="10858500" cy="647700"/>
-          </a:xfrm>
-          <a:prstGeom xmlns:a="http://schemas.openxmlformats.org/drawingml/2006/main" prst="rect">
-            <a:avLst/>
-          </a:prstGeom>
-          <a:solidFill xmlns:a="http://schemas.openxmlformats.org/drawingml/2006/main">
-            <a:srgbClr val="EDF5F0"/>
-          </a:solidFill>
-          <a:ln xmlns:a="http://schemas.openxmlformats.org/drawingml/2006/main" w="0">
-            <a:noFill/>
-          </a:ln>
-        </p:spPr>
-      </p:sp>
-      <p:sp>
-        <p:nvSpPr>
-          <p:cNvPr id="14" name="seg-a2">
-            <a:extLst xmlns:a="http://schemas.openxmlformats.org/drawingml/2006/main">
-              <a:ext uri="{FF2B5EF4-FFF2-40B4-BE49-F238E27FC236}">
-                <a16:creationId xmlns:a16="http://schemas.microsoft.com/office/drawing/2014/main" id="{99E7ABCC-021B-433F-8BFB-4527F351B7AD}"/>
-              </a:ext>
-            </a:extLst>
-          </p:cNvPr>
-          <p:cNvSpPr>
-            <a:spLocks xmlns:a="http://schemas.openxmlformats.org/drawingml/2006/main" noGrp="1"/>
-          </p:cNvSpPr>
-          <p:nvPr/>
-        </p:nvSpPr>
-        <p:spPr>
-          <a:xfrm xmlns:a="http://schemas.openxmlformats.org/drawingml/2006/main">
-            <a:off x="723900" y="2962275"/>
-            <a:ext cx="2381250" cy="457200"/>
-          </a:xfrm>
-          <a:prstGeom xmlns:a="http://schemas.openxmlformats.org/drawingml/2006/main" prst="rect">
-            <a:avLst/>
-          </a:prstGeom>
-          <a:noFill xmlns:a="http://schemas.openxmlformats.org/drawingml/2006/main"/>
-          <a:ln xmlns:a="http://schemas.openxmlformats.org/drawingml/2006/main" w="0">
-            <a:noFill/>
-          </a:ln>
-        </p:spPr>
-        <p:txBody>
-          <a:bodyPr xmlns:a="http://schemas.openxmlformats.org/drawingml/2006/main" lIns="0" tIns="0" rIns="0" bIns="0" anchor="ctr"/>
-          <a:lstStyle xmlns:a="http://schemas.openxmlformats.org/drawingml/2006/main"/>
-          <a:p xmlns:a="http://schemas.openxmlformats.org/drawingml/2006/main">
-            <a:pPr algn="l">
-              <a:lnSpc>
-                <a:spcPct val="118000"/>
-              </a:lnSpc>
-              <a:buNone/>
-              <a:defRPr sz="2200" b="1">
-                <a:solidFill>
-                  <a:srgbClr val="2E7D5B"/>
-                </a:solidFill>
-                <a:latin typeface="微软雅黑"/>
-                <a:ea typeface="微软雅黑"/>
-                <a:cs typeface="微软雅黑"/>
-              </a:defRPr>
-            </a:pPr>
-            <a:r>
-              <a:rPr sz="2200" b="1">
-                <a:solidFill>
-                  <a:srgbClr val="2E7D5B"/>
-                </a:solidFill>
-                <a:latin typeface="微软雅黑"/>
-                <a:ea typeface="微软雅黑"/>
-                <a:cs typeface="微软雅黑"/>
-              </a:rPr>
-              <a:t>03 机制假设</a:t>
-            </a:r>
-          </a:p>
-        </p:txBody>
-      </p:sp>
-      <p:sp>
-        <p:nvSpPr>
-          <p:cNvPr id="15" name="seg-b2">
-            <a:extLst xmlns:a="http://schemas.openxmlformats.org/drawingml/2006/main">
-              <a:ext uri="{FF2B5EF4-FFF2-40B4-BE49-F238E27FC236}">
-                <a16:creationId xmlns:a16="http://schemas.microsoft.com/office/drawing/2014/main" id="{0AA90614-340E-4471-931C-D30A8C3B8E59}"/>
-              </a:ext>
-            </a:extLst>
-          </p:cNvPr>
-          <p:cNvSpPr>
-            <a:spLocks xmlns:a="http://schemas.openxmlformats.org/drawingml/2006/main" noGrp="1"/>
-          </p:cNvSpPr>
-          <p:nvPr/>
-        </p:nvSpPr>
-        <p:spPr>
-          <a:xfrm xmlns:a="http://schemas.openxmlformats.org/drawingml/2006/main">
-            <a:off x="3238500" y="2962275"/>
-            <a:ext cx="6191250" cy="457200"/>
-          </a:xfrm>
-          <a:prstGeom xmlns:a="http://schemas.openxmlformats.org/drawingml/2006/main" prst="rect">
-            <a:avLst/>
-          </a:prstGeom>
-          <a:noFill xmlns:a="http://schemas.openxmlformats.org/drawingml/2006/main"/>
-          <a:ln xmlns:a="http://schemas.openxmlformats.org/drawingml/2006/main" w="0">
-            <a:noFill/>
-          </a:ln>
-        </p:spPr>
-        <p:txBody>
-          <a:bodyPr xmlns:a="http://schemas.openxmlformats.org/drawingml/2006/main" lIns="0" tIns="0" rIns="0" bIns="0" anchor="ctr"/>
-          <a:lstStyle xmlns:a="http://schemas.openxmlformats.org/drawingml/2006/main"/>
-          <a:p xmlns:a="http://schemas.openxmlformats.org/drawingml/2006/main">
-            <a:pPr algn="l">
-              <a:lnSpc>
-                <a:spcPct val="118000"/>
-              </a:lnSpc>
-              <a:buNone/>
-              <a:defRPr sz="2200" b="0">
-                <a:solidFill>
-                  <a:srgbClr val="27333D"/>
-                </a:solidFill>
-                <a:latin typeface="微软雅黑"/>
-                <a:ea typeface="微软雅黑"/>
-                <a:cs typeface="微软雅黑"/>
-              </a:defRPr>
-            </a:pPr>
-            <a:r>
-              <a:rPr sz="2200" b="0">
-                <a:solidFill>
-                  <a:srgbClr val="27333D"/>
-                </a:solidFill>
-                <a:latin typeface="微软雅黑"/>
-                <a:ea typeface="微软雅黑"/>
-                <a:cs typeface="微软雅黑"/>
-              </a:rPr>
-              <a:t>字段约束 → 显式标注 → 错读暴露</a:t>
-            </a:r>
-          </a:p>
-        </p:txBody>
-      </p:sp>
-      <p:sp>
-        <p:nvSpPr>
-          <p:cNvPr id="16" name="seg-c2">
-            <a:extLst xmlns:a="http://schemas.openxmlformats.org/drawingml/2006/main">
-              <a:ext uri="{FF2B5EF4-FFF2-40B4-BE49-F238E27FC236}">
-                <a16:creationId xmlns:a16="http://schemas.microsoft.com/office/drawing/2014/main" id="{7F8E571A-0E7B-4B52-8154-65F077EB0A07}"/>
-              </a:ext>
-            </a:extLst>
-          </p:cNvPr>
-          <p:cNvSpPr>
-            <a:spLocks xmlns:a="http://schemas.openxmlformats.org/drawingml/2006/main" noGrp="1"/>
-          </p:cNvSpPr>
-          <p:nvPr/>
-        </p:nvSpPr>
-        <p:spPr>
-          <a:xfrm xmlns:a="http://schemas.openxmlformats.org/drawingml/2006/main">
-            <a:off x="9810750" y="2962275"/>
-            <a:ext cx="1524000" cy="457200"/>
-          </a:xfrm>
-          <a:prstGeom xmlns:a="http://schemas.openxmlformats.org/drawingml/2006/main" prst="rect">
-            <a:avLst/>
-          </a:prstGeom>
-          <a:noFill xmlns:a="http://schemas.openxmlformats.org/drawingml/2006/main"/>
-          <a:ln xmlns:a="http://schemas.openxmlformats.org/drawingml/2006/main" w="0">
-            <a:noFill/>
-          </a:ln>
-        </p:spPr>
-        <p:txBody>
-          <a:bodyPr xmlns:a="http://schemas.openxmlformats.org/drawingml/2006/main" lIns="0" tIns="0" rIns="0" bIns="0" anchor="ctr"/>
-          <a:lstStyle xmlns:a="http://schemas.openxmlformats.org/drawingml/2006/main"/>
-          <a:p xmlns:a="http://schemas.openxmlformats.org/drawingml/2006/main">
-            <a:pPr algn="r">
-              <a:lnSpc>
-                <a:spcPct val="118000"/>
-              </a:lnSpc>
-              <a:buNone/>
-              <a:defRPr sz="1800" b="0">
-                <a:solidFill>
-                  <a:srgbClr val="66727D"/>
-                </a:solidFill>
-                <a:latin typeface="微软雅黑"/>
-                <a:ea typeface="微软雅黑"/>
-                <a:cs typeface="微软雅黑"/>
-              </a:defRPr>
-            </a:pPr>
-            <a:r>
-              <a:rPr sz="1800" b="0">
-                <a:solidFill>
-                  <a:srgbClr val="66727D"/>
-                </a:solidFill>
-                <a:latin typeface="微软雅黑"/>
-                <a:ea typeface="微软雅黑"/>
-                <a:cs typeface="微软雅黑"/>
-              </a:rPr>
-              <a:t>第 7 课</a:t>
-            </a:r>
-          </a:p>
-        </p:txBody>
-      </p:sp>
-      <p:sp>
-        <p:nvSpPr>
-          <p:cNvPr id="17" name="seg-a3">
-            <a:extLst xmlns:a="http://schemas.openxmlformats.org/drawingml/2006/main">
-              <a:ext uri="{FF2B5EF4-FFF2-40B4-BE49-F238E27FC236}">
-                <a16:creationId xmlns:a16="http://schemas.microsoft.com/office/drawing/2014/main" id="{013DEFA2-A86F-4912-8A75-B682F4C8307B}"/>
-              </a:ext>
-            </a:extLst>
-          </p:cNvPr>
-          <p:cNvSpPr>
-            <a:spLocks xmlns:a="http://schemas.openxmlformats.org/drawingml/2006/main" noGrp="1"/>
-          </p:cNvSpPr>
-          <p:nvPr/>
-        </p:nvSpPr>
-        <p:spPr>
-          <a:xfrm xmlns:a="http://schemas.openxmlformats.org/drawingml/2006/main">
-            <a:off x="723900" y="3705225"/>
-            <a:ext cx="2381250" cy="457200"/>
-          </a:xfrm>
-          <a:prstGeom xmlns:a="http://schemas.openxmlformats.org/drawingml/2006/main" prst="rect">
-            <a:avLst/>
-          </a:prstGeom>
-          <a:noFill xmlns:a="http://schemas.openxmlformats.org/drawingml/2006/main"/>
-          <a:ln xmlns:a="http://schemas.openxmlformats.org/drawingml/2006/main" w="0">
-            <a:noFill/>
-          </a:ln>
-        </p:spPr>
-        <p:txBody>
-          <a:bodyPr xmlns:a="http://schemas.openxmlformats.org/drawingml/2006/main" lIns="0" tIns="0" rIns="0" bIns="0" anchor="ctr"/>
-          <a:lstStyle xmlns:a="http://schemas.openxmlformats.org/drawingml/2006/main"/>
-          <a:p xmlns:a="http://schemas.openxmlformats.org/drawingml/2006/main">
-            <a:pPr algn="l">
-              <a:lnSpc>
-                <a:spcPct val="118000"/>
-              </a:lnSpc>
-              <a:buNone/>
-              <a:defRPr sz="2200" b="1">
-                <a:solidFill>
-                  <a:srgbClr val="1F4D78"/>
-                </a:solidFill>
-                <a:latin typeface="微软雅黑"/>
-                <a:ea typeface="微软雅黑"/>
-                <a:cs typeface="微软雅黑"/>
-              </a:defRPr>
-            </a:pPr>
-            <a:r>
-              <a:rPr sz="2200" b="1">
-                <a:solidFill>
-                  <a:srgbClr val="1F4D78"/>
-                </a:solidFill>
-                <a:latin typeface="微软雅黑"/>
-                <a:ea typeface="微软雅黑"/>
-                <a:cs typeface="微软雅黑"/>
-              </a:rPr>
-              <a:t>04 最小验证</a:t>
-            </a:r>
-          </a:p>
-        </p:txBody>
-      </p:sp>
-      <p:sp>
-        <p:nvSpPr>
-          <p:cNvPr id="18" name="seg-b3">
-            <a:extLst xmlns:a="http://schemas.openxmlformats.org/drawingml/2006/main">
-              <a:ext uri="{FF2B5EF4-FFF2-40B4-BE49-F238E27FC236}">
-                <a16:creationId xmlns:a16="http://schemas.microsoft.com/office/drawing/2014/main" id="{98F57324-361A-412C-BB5F-D4CD3BB43985}"/>
-              </a:ext>
-            </a:extLst>
-          </p:cNvPr>
-          <p:cNvSpPr>
-            <a:spLocks xmlns:a="http://schemas.openxmlformats.org/drawingml/2006/main" noGrp="1"/>
-          </p:cNvSpPr>
-          <p:nvPr/>
-        </p:nvSpPr>
-        <p:spPr>
-          <a:xfrm xmlns:a="http://schemas.openxmlformats.org/drawingml/2006/main">
-            <a:off x="3238500" y="3705225"/>
-            <a:ext cx="6191250" cy="457200"/>
-          </a:xfrm>
-          <a:prstGeom xmlns:a="http://schemas.openxmlformats.org/drawingml/2006/main" prst="rect">
-            <a:avLst/>
-          </a:prstGeom>
-          <a:noFill xmlns:a="http://schemas.openxmlformats.org/drawingml/2006/main"/>
-          <a:ln xmlns:a="http://schemas.openxmlformats.org/drawingml/2006/main" w="0">
-            <a:noFill/>
-          </a:ln>
-        </p:spPr>
-        <p:txBody>
-          <a:bodyPr xmlns:a="http://schemas.openxmlformats.org/drawingml/2006/main" lIns="0" tIns="0" rIns="0" bIns="0" anchor="ctr"/>
-          <a:lstStyle xmlns:a="http://schemas.openxmlformats.org/drawingml/2006/main"/>
-          <a:p xmlns:a="http://schemas.openxmlformats.org/drawingml/2006/main">
-            <a:pPr algn="l">
-              <a:lnSpc>
-                <a:spcPct val="118000"/>
-              </a:lnSpc>
-              <a:buNone/>
-              <a:defRPr sz="2200" b="0">
-                <a:solidFill>
-                  <a:srgbClr val="27333D"/>
-                </a:solidFill>
-                <a:latin typeface="微软雅黑"/>
-                <a:ea typeface="微软雅黑"/>
-                <a:cs typeface="微软雅黑"/>
-              </a:defRPr>
-            </a:pPr>
-            <a:r>
-              <a:rPr sz="2200" b="0">
-                <a:solidFill>
-                  <a:srgbClr val="27333D"/>
-                </a:solidFill>
-                <a:latin typeface="微软雅黑"/>
-                <a:ea typeface="微软雅黑"/>
-                <a:cs typeface="微软雅黑"/>
-              </a:rPr>
-              <a:t>支持／反驳／仍不能判断</a:t>
-            </a:r>
-          </a:p>
-        </p:txBody>
-      </p:sp>
-      <p:sp>
-        <p:nvSpPr>
-          <p:cNvPr id="19" name="seg-c3">
-            <a:extLst xmlns:a="http://schemas.openxmlformats.org/drawingml/2006/main">
-              <a:ext uri="{FF2B5EF4-FFF2-40B4-BE49-F238E27FC236}">
-                <a16:creationId xmlns:a16="http://schemas.microsoft.com/office/drawing/2014/main" id="{5DAF14E8-394A-476B-B4B1-D995A73515CF}"/>
-              </a:ext>
-            </a:extLst>
-          </p:cNvPr>
-          <p:cNvSpPr>
-            <a:spLocks xmlns:a="http://schemas.openxmlformats.org/drawingml/2006/main" noGrp="1"/>
-          </p:cNvSpPr>
-          <p:nvPr/>
-        </p:nvSpPr>
-        <p:spPr>
-          <a:xfrm xmlns:a="http://schemas.openxmlformats.org/drawingml/2006/main">
-            <a:off x="9810750" y="3705225"/>
-            <a:ext cx="1524000" cy="457200"/>
-          </a:xfrm>
-          <a:prstGeom xmlns:a="http://schemas.openxmlformats.org/drawingml/2006/main" prst="rect">
-            <a:avLst/>
-          </a:prstGeom>
-          <a:noFill xmlns:a="http://schemas.openxmlformats.org/drawingml/2006/main"/>
-          <a:ln xmlns:a="http://schemas.openxmlformats.org/drawingml/2006/main" w="0">
-            <a:noFill/>
-          </a:ln>
-        </p:spPr>
-        <p:txBody>
-          <a:bodyPr xmlns:a="http://schemas.openxmlformats.org/drawingml/2006/main" lIns="0" tIns="0" rIns="0" bIns="0" anchor="ctr"/>
-          <a:lstStyle xmlns:a="http://schemas.openxmlformats.org/drawingml/2006/main"/>
-          <a:p xmlns:a="http://schemas.openxmlformats.org/drawingml/2006/main">
-            <a:pPr algn="r">
-              <a:lnSpc>
-                <a:spcPct val="118000"/>
-              </a:lnSpc>
-              <a:buNone/>
-              <a:defRPr sz="1800" b="0">
-                <a:solidFill>
-                  <a:srgbClr val="66727D"/>
-                </a:solidFill>
-                <a:latin typeface="微软雅黑"/>
-                <a:ea typeface="微软雅黑"/>
-                <a:cs typeface="微软雅黑"/>
-              </a:defRPr>
-            </a:pPr>
-            <a:r>
-              <a:rPr sz="1800" b="0">
-                <a:solidFill>
-                  <a:srgbClr val="66727D"/>
-                </a:solidFill>
-                <a:latin typeface="微软雅黑"/>
-                <a:ea typeface="微软雅黑"/>
-                <a:cs typeface="微软雅黑"/>
-              </a:rPr>
-              <a:t>第 7 课</a:t>
-            </a:r>
-          </a:p>
-        </p:txBody>
-      </p:sp>
-      <p:sp>
-        <p:nvSpPr>
-          <p:cNvPr id="20" name="seg-a4">
-            <a:extLst xmlns:a="http://schemas.openxmlformats.org/drawingml/2006/main">
-              <a:ext uri="{FF2B5EF4-FFF2-40B4-BE49-F238E27FC236}">
-                <a16:creationId xmlns:a16="http://schemas.microsoft.com/office/drawing/2014/main" id="{03E68FC5-5109-478D-9861-47E6BE4B2EC5}"/>
-              </a:ext>
-            </a:extLst>
-          </p:cNvPr>
-          <p:cNvSpPr>
-            <a:spLocks xmlns:a="http://schemas.openxmlformats.org/drawingml/2006/main" noGrp="1"/>
-          </p:cNvSpPr>
-          <p:nvPr/>
-        </p:nvSpPr>
-        <p:spPr>
-          <a:xfrm xmlns:a="http://schemas.openxmlformats.org/drawingml/2006/main">
-            <a:off x="723900" y="4448175"/>
-            <a:ext cx="2381250" cy="457200"/>
-          </a:xfrm>
-          <a:prstGeom xmlns:a="http://schemas.openxmlformats.org/drawingml/2006/main" prst="rect">
-            <a:avLst/>
-          </a:prstGeom>
-          <a:noFill xmlns:a="http://schemas.openxmlformats.org/drawingml/2006/main"/>
-          <a:ln xmlns:a="http://schemas.openxmlformats.org/drawingml/2006/main" w="0">
-            <a:noFill/>
-          </a:ln>
-        </p:spPr>
-        <p:txBody>
-          <a:bodyPr xmlns:a="http://schemas.openxmlformats.org/drawingml/2006/main" lIns="0" tIns="0" rIns="0" bIns="0" anchor="ctr"/>
-          <a:lstStyle xmlns:a="http://schemas.openxmlformats.org/drawingml/2006/main"/>
-          <a:p xmlns:a="http://schemas.openxmlformats.org/drawingml/2006/main">
-            <a:pPr algn="l">
-              <a:lnSpc>
-                <a:spcPct val="118000"/>
-              </a:lnSpc>
-              <a:buNone/>
-              <a:defRPr sz="2200" b="1">
-                <a:solidFill>
-                  <a:srgbClr val="1F4D78"/>
-                </a:solidFill>
-                <a:latin typeface="微软雅黑"/>
-                <a:ea typeface="微软雅黑"/>
-                <a:cs typeface="微软雅黑"/>
-              </a:defRPr>
-            </a:pPr>
-            <a:r>
-              <a:rPr sz="2200" b="1">
-                <a:solidFill>
-                  <a:srgbClr val="1F4D78"/>
-                </a:solidFill>
-                <a:latin typeface="微软雅黑"/>
-                <a:ea typeface="微软雅黑"/>
-                <a:cs typeface="微软雅黑"/>
-              </a:rPr>
-              <a:t>05 最大风险</a:t>
-            </a:r>
-          </a:p>
-        </p:txBody>
-      </p:sp>
-      <p:sp>
-        <p:nvSpPr>
-          <p:cNvPr id="21" name="seg-b4">
-            <a:extLst xmlns:a="http://schemas.openxmlformats.org/drawingml/2006/main">
-              <a:ext uri="{FF2B5EF4-FFF2-40B4-BE49-F238E27FC236}">
-                <a16:creationId xmlns:a16="http://schemas.microsoft.com/office/drawing/2014/main" id="{C57856FD-A81A-419C-B2F2-AB4DFACD0BB2}"/>
-              </a:ext>
-            </a:extLst>
-          </p:cNvPr>
-          <p:cNvSpPr>
-            <a:spLocks xmlns:a="http://schemas.openxmlformats.org/drawingml/2006/main" noGrp="1"/>
-          </p:cNvSpPr>
-          <p:nvPr/>
-        </p:nvSpPr>
-        <p:spPr>
-          <a:xfrm xmlns:a="http://schemas.openxmlformats.org/drawingml/2006/main">
-            <a:off x="3238500" y="4448175"/>
-            <a:ext cx="6191250" cy="457200"/>
-          </a:xfrm>
-          <a:prstGeom xmlns:a="http://schemas.openxmlformats.org/drawingml/2006/main" prst="rect">
-            <a:avLst/>
-          </a:prstGeom>
-          <a:noFill xmlns:a="http://schemas.openxmlformats.org/drawingml/2006/main"/>
-          <a:ln xmlns:a="http://schemas.openxmlformats.org/drawingml/2006/main" w="0">
-            <a:noFill/>
-          </a:ln>
-        </p:spPr>
-        <p:txBody>
-          <a:bodyPr xmlns:a="http://schemas.openxmlformats.org/drawingml/2006/main" lIns="0" tIns="0" rIns="0" bIns="0" anchor="ctr"/>
-          <a:lstStyle xmlns:a="http://schemas.openxmlformats.org/drawingml/2006/main"/>
-          <a:p xmlns:a="http://schemas.openxmlformats.org/drawingml/2006/main">
-            <a:pPr algn="l">
-              <a:lnSpc>
-                <a:spcPct val="118000"/>
-              </a:lnSpc>
-              <a:buNone/>
-              <a:defRPr sz="2200" b="0">
-                <a:solidFill>
-                  <a:srgbClr val="27333D"/>
-                </a:solidFill>
-                <a:latin typeface="微软雅黑"/>
-                <a:ea typeface="微软雅黑"/>
-                <a:cs typeface="微软雅黑"/>
-              </a:defRPr>
-            </a:pPr>
-            <a:r>
-              <a:rPr sz="2200" b="0">
-                <a:solidFill>
-                  <a:srgbClr val="27333D"/>
-                </a:solidFill>
-                <a:latin typeface="微软雅黑"/>
-                <a:ea typeface="微软雅黑"/>
-                <a:cs typeface="微软雅黑"/>
-              </a:rPr>
-              <a:t>最可能不通过的一点</a:t>
-            </a:r>
-          </a:p>
-        </p:txBody>
-      </p:sp>
-      <p:sp>
-        <p:nvSpPr>
-          <p:cNvPr id="22" name="seg-c4">
-            <a:extLst xmlns:a="http://schemas.openxmlformats.org/drawingml/2006/main">
-              <a:ext uri="{FF2B5EF4-FFF2-40B4-BE49-F238E27FC236}">
-                <a16:creationId xmlns:a16="http://schemas.microsoft.com/office/drawing/2014/main" id="{46A5791D-EECF-4AB3-B2E4-80F0E8CE38F4}"/>
-              </a:ext>
-            </a:extLst>
-          </p:cNvPr>
-          <p:cNvSpPr>
-            <a:spLocks xmlns:a="http://schemas.openxmlformats.org/drawingml/2006/main" noGrp="1"/>
-          </p:cNvSpPr>
-          <p:nvPr/>
-        </p:nvSpPr>
-        <p:spPr>
-          <a:xfrm xmlns:a="http://schemas.openxmlformats.org/drawingml/2006/main">
-            <a:off x="9810750" y="4448175"/>
-            <a:ext cx="1524000" cy="457200"/>
-          </a:xfrm>
-          <a:prstGeom xmlns:a="http://schemas.openxmlformats.org/drawingml/2006/main" prst="rect">
-            <a:avLst/>
-          </a:prstGeom>
-          <a:noFill xmlns:a="http://schemas.openxmlformats.org/drawingml/2006/main"/>
-          <a:ln xmlns:a="http://schemas.openxmlformats.org/drawingml/2006/main" w="0">
-            <a:noFill/>
-          </a:ln>
-        </p:spPr>
-        <p:txBody>
-          <a:bodyPr xmlns:a="http://schemas.openxmlformats.org/drawingml/2006/main" lIns="0" tIns="0" rIns="0" bIns="0" anchor="ctr"/>
-          <a:lstStyle xmlns:a="http://schemas.openxmlformats.org/drawingml/2006/main"/>
-          <a:p xmlns:a="http://schemas.openxmlformats.org/drawingml/2006/main">
-            <a:pPr algn="r">
-              <a:lnSpc>
-                <a:spcPct val="118000"/>
-              </a:lnSpc>
-              <a:buNone/>
-              <a:defRPr sz="1800" b="0">
-                <a:solidFill>
-                  <a:srgbClr val="66727D"/>
-                </a:solidFill>
-                <a:latin typeface="微软雅黑"/>
-                <a:ea typeface="微软雅黑"/>
-                <a:cs typeface="微软雅黑"/>
-              </a:defRPr>
-            </a:pPr>
-            <a:r>
-              <a:rPr sz="1800" b="0">
-                <a:solidFill>
-                  <a:srgbClr val="66727D"/>
-                </a:solidFill>
-                <a:latin typeface="微软雅黑"/>
-                <a:ea typeface="微软雅黑"/>
-                <a:cs typeface="微软雅黑"/>
-              </a:rPr>
-              <a:t>第 7 课</a:t>
+              <a:t>阅读卡案例：质量代价与材料范围另查。</a:t>
             </a:r>
           </a:p>
         </p:txBody>
@@ -15505,22 +15094,22 @@
       </p:sp>
       <p:sp>
         <p:nvSpPr>
-          <p:cNvPr id="6" name="fiction">
-            <a:extLst xmlns:a="http://schemas.openxmlformats.org/drawingml/2006/main">
-              <a:ext uri="{FF2B5EF4-FFF2-40B4-BE49-F238E27FC236}">
-                <a16:creationId xmlns:a16="http://schemas.microsoft.com/office/drawing/2014/main" id="{A0B3020B-E52A-40E2-A5E2-4B6AB3ECFC48}"/>
-              </a:ext>
-            </a:extLst>
-          </p:cNvPr>
-          <p:cNvSpPr>
-            <a:spLocks xmlns:a="http://schemas.openxmlformats.org/drawingml/2006/main" noGrp="1"/>
-          </p:cNvSpPr>
-          <p:nvPr/>
-        </p:nvSpPr>
-        <p:spPr>
-          <a:xfrm xmlns:a="http://schemas.openxmlformats.org/drawingml/2006/main">
-            <a:off x="609600" y="885825"/>
-            <a:ext cx="10572750" cy="314325"/>
+          <p:cNvPr id="6" name="content-222">
+            <a:extLst xmlns:a="http://schemas.openxmlformats.org/drawingml/2006/main">
+              <a:ext uri="{FF2B5EF4-FFF2-40B4-BE49-F238E27FC236}">
+                <a16:creationId xmlns:a16="http://schemas.microsoft.com/office/drawing/2014/main" id="{1F181BC1-270A-42BB-A42C-EA986EA5946B}"/>
+              </a:ext>
+            </a:extLst>
+          </p:cNvPr>
+          <p:cNvSpPr>
+            <a:spLocks xmlns:a="http://schemas.openxmlformats.org/drawingml/2006/main" noGrp="1"/>
+          </p:cNvSpPr>
+          <p:nvPr/>
+        </p:nvSpPr>
+        <p:spPr>
+          <a:xfrm xmlns:a="http://schemas.openxmlformats.org/drawingml/2006/main">
+            <a:off x="609600" y="1571625"/>
+            <a:ext cx="10972800" cy="371475"/>
           </a:xfrm>
           <a:prstGeom xmlns:a="http://schemas.openxmlformats.org/drawingml/2006/main" prst="rect">
             <a:avLst/>
@@ -15539,9 +15128,9 @@
                 <a:spcPct val="118000"/>
               </a:lnSpc>
               <a:buNone/>
-              <a:defRPr sz="1800" b="0">
-                <a:solidFill>
-                  <a:srgbClr val="A96510"/>
+              <a:defRPr sz="2000" b="0">
+                <a:solidFill>
+                  <a:srgbClr val="27333D"/>
                 </a:solidFill>
                 <a:latin typeface="微软雅黑"/>
                 <a:ea typeface="微软雅黑"/>
@@ -15549,67 +15138,37 @@
               </a:defRPr>
             </a:pPr>
             <a:r>
-              <a:rPr sz="1800" b="0">
-                <a:solidFill>
-                  <a:srgbClr val="A96510"/>
+              <a:rPr sz="2000" b="0">
+                <a:solidFill>
+                  <a:srgbClr val="27333D"/>
                 </a:solidFill>
                 <a:latin typeface="微软雅黑"/>
                 <a:ea typeface="微软雅黑"/>
                 <a:cs typeface="微软雅黑"/>
               </a:rPr>
-              <a:t>课程虚构教学反馈</a:t>
-            </a:r>
-          </a:p>
-        </p:txBody>
-      </p:sp>
-      <p:sp>
-        <p:nvSpPr>
-          <p:cNvPr id="7" name="feedback-bg">
-            <a:extLst xmlns:a="http://schemas.openxmlformats.org/drawingml/2006/main">
-              <a:ext uri="{FF2B5EF4-FFF2-40B4-BE49-F238E27FC236}">
-                <a16:creationId xmlns:a16="http://schemas.microsoft.com/office/drawing/2014/main" id="{6620FF85-B4D6-46A1-913E-158986B1A6F2}"/>
-              </a:ext>
-            </a:extLst>
-          </p:cNvPr>
-          <p:cNvSpPr>
-            <a:spLocks xmlns:a="http://schemas.openxmlformats.org/drawingml/2006/main" noGrp="1"/>
-          </p:cNvSpPr>
-          <p:nvPr/>
-        </p:nvSpPr>
-        <p:spPr>
-          <a:xfrm xmlns:a="http://schemas.openxmlformats.org/drawingml/2006/main">
-            <a:off x="4095750" y="1428750"/>
-            <a:ext cx="4000500" cy="1190625"/>
-          </a:xfrm>
-          <a:prstGeom xmlns:a="http://schemas.openxmlformats.org/drawingml/2006/main" prst="rect">
-            <a:avLst/>
-          </a:prstGeom>
-          <a:solidFill xmlns:a="http://schemas.openxmlformats.org/drawingml/2006/main">
-            <a:srgbClr val="F4F6F8"/>
-          </a:solidFill>
-          <a:ln xmlns:a="http://schemas.openxmlformats.org/drawingml/2006/main" w="0">
-            <a:noFill/>
-          </a:ln>
-        </p:spPr>
-      </p:sp>
-      <p:sp>
-        <p:nvSpPr>
-          <p:cNvPr id="8" name="feedback">
-            <a:extLst xmlns:a="http://schemas.openxmlformats.org/drawingml/2006/main">
-              <a:ext uri="{FF2B5EF4-FFF2-40B4-BE49-F238E27FC236}">
-                <a16:creationId xmlns:a16="http://schemas.microsoft.com/office/drawing/2014/main" id="{F12204D3-6B28-4578-8AE9-1460F83572AD}"/>
-              </a:ext>
-            </a:extLst>
-          </p:cNvPr>
-          <p:cNvSpPr>
-            <a:spLocks xmlns:a="http://schemas.openxmlformats.org/drawingml/2006/main" noGrp="1"/>
-          </p:cNvSpPr>
-          <p:nvPr/>
-        </p:nvSpPr>
-        <p:spPr>
-          <a:xfrm xmlns:a="http://schemas.openxmlformats.org/drawingml/2006/main">
-            <a:off x="4248150" y="1524000"/>
-            <a:ext cx="3695700" cy="1000125"/>
+              <a:t>处理动作：采纳、澄清、补证、暂缓、保留异议。</a:t>
+            </a:r>
+          </a:p>
+        </p:txBody>
+      </p:sp>
+      <p:sp>
+        <p:nvSpPr>
+          <p:cNvPr id="7" name="content-223">
+            <a:extLst xmlns:a="http://schemas.openxmlformats.org/drawingml/2006/main">
+              <a:ext uri="{FF2B5EF4-FFF2-40B4-BE49-F238E27FC236}">
+                <a16:creationId xmlns:a16="http://schemas.microsoft.com/office/drawing/2014/main" id="{1F5B2005-8137-4BCC-BB7E-20088CD6B5BB}"/>
+              </a:ext>
+            </a:extLst>
+          </p:cNvPr>
+          <p:cNvSpPr>
+            <a:spLocks xmlns:a="http://schemas.openxmlformats.org/drawingml/2006/main" noGrp="1"/>
+          </p:cNvSpPr>
+          <p:nvPr/>
+        </p:nvSpPr>
+        <p:spPr>
+          <a:xfrm xmlns:a="http://schemas.openxmlformats.org/drawingml/2006/main">
+            <a:off x="609600" y="2095500"/>
+            <a:ext cx="10972800" cy="371475"/>
           </a:xfrm>
           <a:prstGeom xmlns:a="http://schemas.openxmlformats.org/drawingml/2006/main" prst="rect">
             <a:avLst/>
@@ -15620,17 +15179,17 @@
           </a:ln>
         </p:spPr>
         <p:txBody>
-          <a:bodyPr xmlns:a="http://schemas.openxmlformats.org/drawingml/2006/main" lIns="0" tIns="0" rIns="0" bIns="0" anchor="ctr"/>
-          <a:lstStyle xmlns:a="http://schemas.openxmlformats.org/drawingml/2006/main"/>
-          <a:p xmlns:a="http://schemas.openxmlformats.org/drawingml/2006/main">
-            <a:pPr algn="ctr">
+          <a:bodyPr xmlns:a="http://schemas.openxmlformats.org/drawingml/2006/main" lIns="0" tIns="0" rIns="0" bIns="0" anchor="t"/>
+          <a:lstStyle xmlns:a="http://schemas.openxmlformats.org/drawingml/2006/main"/>
+          <a:p xmlns:a="http://schemas.openxmlformats.org/drawingml/2006/main">
+            <a:pPr algn="l">
               <a:lnSpc>
                 <a:spcPct val="118000"/>
               </a:lnSpc>
               <a:buNone/>
-              <a:defRPr sz="2200" b="0">
-                <a:solidFill>
-                  <a:srgbClr val="1F4D78"/>
+              <a:defRPr sz="2000" b="0">
+                <a:solidFill>
+                  <a:srgbClr val="27333D"/>
                 </a:solidFill>
                 <a:latin typeface="微软雅黑"/>
                 <a:ea typeface="微软雅黑"/>
@@ -15638,26 +15197,58 @@
               </a:defRPr>
             </a:pPr>
             <a:r>
-              <a:rPr sz="2200" b="0">
-                <a:solidFill>
-                  <a:srgbClr val="1F4D78"/>
+              <a:rPr sz="2000" b="0">
+                <a:solidFill>
+                  <a:srgbClr val="27333D"/>
                 </a:solidFill>
                 <a:latin typeface="微软雅黑"/>
                 <a:ea typeface="微软雅黑"/>
                 <a:cs typeface="微软雅黑"/>
               </a:rPr>
-              <a:t>具体反馈</a:t>
-            </a:r>
-          </a:p>
-          <a:p xmlns:a="http://schemas.openxmlformats.org/drawingml/2006/main">
-            <a:pPr algn="ctr">
+              <a:t>示例回应：</a:t>
+            </a:r>
+          </a:p>
+        </p:txBody>
+      </p:sp>
+      <p:sp>
+        <p:nvSpPr>
+          <p:cNvPr id="8" name="content-224">
+            <a:extLst xmlns:a="http://schemas.openxmlformats.org/drawingml/2006/main">
+              <a:ext uri="{FF2B5EF4-FFF2-40B4-BE49-F238E27FC236}">
+                <a16:creationId xmlns:a16="http://schemas.microsoft.com/office/drawing/2014/main" id="{7A4EE086-11C4-4FFF-8CCE-DD382ED0ADA6}"/>
+              </a:ext>
+            </a:extLst>
+          </p:cNvPr>
+          <p:cNvSpPr>
+            <a:spLocks xmlns:a="http://schemas.openxmlformats.org/drawingml/2006/main" noGrp="1"/>
+          </p:cNvSpPr>
+          <p:nvPr/>
+        </p:nvSpPr>
+        <p:spPr>
+          <a:xfrm xmlns:a="http://schemas.openxmlformats.org/drawingml/2006/main">
+            <a:off x="609600" y="2619375"/>
+            <a:ext cx="10972800" cy="371475"/>
+          </a:xfrm>
+          <a:prstGeom xmlns:a="http://schemas.openxmlformats.org/drawingml/2006/main" prst="rect">
+            <a:avLst/>
+          </a:prstGeom>
+          <a:noFill xmlns:a="http://schemas.openxmlformats.org/drawingml/2006/main"/>
+          <a:ln xmlns:a="http://schemas.openxmlformats.org/drawingml/2006/main" w="0">
+            <a:noFill/>
+          </a:ln>
+        </p:spPr>
+        <p:txBody>
+          <a:bodyPr xmlns:a="http://schemas.openxmlformats.org/drawingml/2006/main" lIns="0" tIns="0" rIns="0" bIns="0" anchor="t"/>
+          <a:lstStyle xmlns:a="http://schemas.openxmlformats.org/drawingml/2006/main"/>
+          <a:p xmlns:a="http://schemas.openxmlformats.org/drawingml/2006/main">
+            <a:pPr algn="l">
               <a:lnSpc>
                 <a:spcPct val="118000"/>
               </a:lnSpc>
               <a:buNone/>
-              <a:defRPr sz="2200" b="0">
-                <a:solidFill>
-                  <a:srgbClr val="1F4D78"/>
+              <a:defRPr sz="2000" b="0">
+                <a:solidFill>
+                  <a:srgbClr val="27333D"/>
                 </a:solidFill>
                 <a:latin typeface="微软雅黑"/>
                 <a:ea typeface="微软雅黑"/>
@@ -15665,37 +15256,37 @@
               </a:defRPr>
             </a:pPr>
             <a:r>
-              <a:rPr sz="2200" b="0">
-                <a:solidFill>
-                  <a:srgbClr val="1F4D78"/>
+              <a:rPr sz="2000" b="0">
+                <a:solidFill>
+                  <a:srgbClr val="27333D"/>
                 </a:solidFill>
                 <a:latin typeface="微软雅黑"/>
                 <a:ea typeface="微软雅黑"/>
                 <a:cs typeface="微软雅黑"/>
               </a:rPr>
-              <a:t>“H1 与 A1 的区分设计尚未写清”</a:t>
-            </a:r>
-          </a:p>
-        </p:txBody>
-      </p:sp>
-      <p:sp>
-        <p:nvSpPr>
-          <p:cNvPr id="9" name="act0">
-            <a:extLst xmlns:a="http://schemas.openxmlformats.org/drawingml/2006/main">
-              <a:ext uri="{FF2B5EF4-FFF2-40B4-BE49-F238E27FC236}">
-                <a16:creationId xmlns:a16="http://schemas.microsoft.com/office/drawing/2014/main" id="{2035F1A6-141C-4836-BD2D-3A02F4192493}"/>
-              </a:ext>
-            </a:extLst>
-          </p:cNvPr>
-          <p:cNvSpPr>
-            <a:spLocks xmlns:a="http://schemas.openxmlformats.org/drawingml/2006/main" noGrp="1"/>
-          </p:cNvSpPr>
-          <p:nvPr/>
-        </p:nvSpPr>
-        <p:spPr>
-          <a:xfrm xmlns:a="http://schemas.openxmlformats.org/drawingml/2006/main">
-            <a:off x="857250" y="3143250"/>
-            <a:ext cx="1524000" cy="457200"/>
+              <a:t>补证：H1 与 A2 仍不能区分。</a:t>
+            </a:r>
+          </a:p>
+        </p:txBody>
+      </p:sp>
+      <p:sp>
+        <p:nvSpPr>
+          <p:cNvPr id="9" name="content-225">
+            <a:extLst xmlns:a="http://schemas.openxmlformats.org/drawingml/2006/main">
+              <a:ext uri="{FF2B5EF4-FFF2-40B4-BE49-F238E27FC236}">
+                <a16:creationId xmlns:a16="http://schemas.microsoft.com/office/drawing/2014/main" id="{708323B8-3E7C-4D8C-88A8-47C4213640F2}"/>
+              </a:ext>
+            </a:extLst>
+          </p:cNvPr>
+          <p:cNvSpPr>
+            <a:spLocks xmlns:a="http://schemas.openxmlformats.org/drawingml/2006/main" noGrp="1"/>
+          </p:cNvSpPr>
+          <p:nvPr/>
+        </p:nvSpPr>
+        <p:spPr>
+          <a:xfrm xmlns:a="http://schemas.openxmlformats.org/drawingml/2006/main">
+            <a:off x="609600" y="3143250"/>
+            <a:ext cx="10972800" cy="371475"/>
           </a:xfrm>
           <a:prstGeom xmlns:a="http://schemas.openxmlformats.org/drawingml/2006/main" prst="rect">
             <a:avLst/>
@@ -15709,14 +15300,14 @@
           <a:bodyPr xmlns:a="http://schemas.openxmlformats.org/drawingml/2006/main" lIns="0" tIns="0" rIns="0" bIns="0" anchor="t"/>
           <a:lstStyle xmlns:a="http://schemas.openxmlformats.org/drawingml/2006/main"/>
           <a:p xmlns:a="http://schemas.openxmlformats.org/drawingml/2006/main">
-            <a:pPr algn="ctr">
+            <a:pPr algn="l">
               <a:lnSpc>
                 <a:spcPct val="118000"/>
               </a:lnSpc>
               <a:buNone/>
-              <a:defRPr sz="2200" b="0">
-                <a:solidFill>
-                  <a:srgbClr val="2E7D5B"/>
+              <a:defRPr sz="2000" b="0">
+                <a:solidFill>
+                  <a:srgbClr val="27333D"/>
                 </a:solidFill>
                 <a:latin typeface="微软雅黑"/>
                 <a:ea typeface="微软雅黑"/>
@@ -15724,37 +15315,37 @@
               </a:defRPr>
             </a:pPr>
             <a:r>
-              <a:rPr sz="2200" b="0">
-                <a:solidFill>
-                  <a:srgbClr val="2E7D5B"/>
+              <a:rPr sz="2000" b="0">
+                <a:solidFill>
+                  <a:srgbClr val="27333D"/>
                 </a:solidFill>
                 <a:latin typeface="微软雅黑"/>
                 <a:ea typeface="微软雅黑"/>
                 <a:cs typeface="微软雅黑"/>
               </a:rPr>
-              <a:t>采纳</a:t>
-            </a:r>
-          </a:p>
-        </p:txBody>
-      </p:sp>
-      <p:sp>
-        <p:nvSpPr>
-          <p:cNvPr id="10" name="act1">
-            <a:extLst xmlns:a="http://schemas.openxmlformats.org/drawingml/2006/main">
-              <a:ext uri="{FF2B5EF4-FFF2-40B4-BE49-F238E27FC236}">
-                <a16:creationId xmlns:a16="http://schemas.microsoft.com/office/drawing/2014/main" id="{9D96D436-8A11-4E88-AADD-B8BB3D2DCF36}"/>
-              </a:ext>
-            </a:extLst>
-          </p:cNvPr>
-          <p:cNvSpPr>
-            <a:spLocks xmlns:a="http://schemas.openxmlformats.org/drawingml/2006/main" noGrp="1"/>
-          </p:cNvSpPr>
-          <p:nvPr/>
-        </p:nvSpPr>
-        <p:spPr>
-          <a:xfrm xmlns:a="http://schemas.openxmlformats.org/drawingml/2006/main">
-            <a:off x="2857500" y="4095750"/>
-            <a:ext cx="1524000" cy="457200"/>
+              <a:t>理由与依据：同伴指出评分者可见组别，见方案评价协议。</a:t>
+            </a:r>
+          </a:p>
+        </p:txBody>
+      </p:sp>
+      <p:sp>
+        <p:nvSpPr>
+          <p:cNvPr id="10" name="content-226">
+            <a:extLst xmlns:a="http://schemas.openxmlformats.org/drawingml/2006/main">
+              <a:ext uri="{FF2B5EF4-FFF2-40B4-BE49-F238E27FC236}">
+                <a16:creationId xmlns:a16="http://schemas.microsoft.com/office/drawing/2014/main" id="{631B1AEB-32CA-4514-A771-856B89FF304C}"/>
+              </a:ext>
+            </a:extLst>
+          </p:cNvPr>
+          <p:cNvSpPr>
+            <a:spLocks xmlns:a="http://schemas.openxmlformats.org/drawingml/2006/main" noGrp="1"/>
+          </p:cNvSpPr>
+          <p:nvPr/>
+        </p:nvSpPr>
+        <p:spPr>
+          <a:xfrm xmlns:a="http://schemas.openxmlformats.org/drawingml/2006/main">
+            <a:off x="609600" y="3667125"/>
+            <a:ext cx="10972800" cy="371475"/>
           </a:xfrm>
           <a:prstGeom xmlns:a="http://schemas.openxmlformats.org/drawingml/2006/main" prst="rect">
             <a:avLst/>
@@ -15768,14 +15359,14 @@
           <a:bodyPr xmlns:a="http://schemas.openxmlformats.org/drawingml/2006/main" lIns="0" tIns="0" rIns="0" bIns="0" anchor="t"/>
           <a:lstStyle xmlns:a="http://schemas.openxmlformats.org/drawingml/2006/main"/>
           <a:p xmlns:a="http://schemas.openxmlformats.org/drawingml/2006/main">
-            <a:pPr algn="ctr">
+            <a:pPr algn="l">
               <a:lnSpc>
                 <a:spcPct val="118000"/>
               </a:lnSpc>
               <a:buNone/>
-              <a:defRPr sz="2200" b="0">
-                <a:solidFill>
-                  <a:srgbClr val="1F4D78"/>
+              <a:defRPr sz="2000" b="0">
+                <a:solidFill>
+                  <a:srgbClr val="27333D"/>
                 </a:solidFill>
                 <a:latin typeface="微软雅黑"/>
                 <a:ea typeface="微软雅黑"/>
@@ -15783,37 +15374,37 @@
               </a:defRPr>
             </a:pPr>
             <a:r>
-              <a:rPr sz="2200" b="0">
-                <a:solidFill>
-                  <a:srgbClr val="1F4D78"/>
+              <a:rPr sz="2000" b="0">
+                <a:solidFill>
+                  <a:srgbClr val="27333D"/>
                 </a:solidFill>
                 <a:latin typeface="微软雅黑"/>
                 <a:ea typeface="微软雅黑"/>
                 <a:cs typeface="微软雅黑"/>
               </a:rPr>
-              <a:t>澄清</a:t>
-            </a:r>
-          </a:p>
-        </p:txBody>
-      </p:sp>
-      <p:sp>
-        <p:nvSpPr>
-          <p:cNvPr id="11" name="act2">
-            <a:extLst xmlns:a="http://schemas.openxmlformats.org/drawingml/2006/main">
-              <a:ext uri="{FF2B5EF4-FFF2-40B4-BE49-F238E27FC236}">
-                <a16:creationId xmlns:a16="http://schemas.microsoft.com/office/drawing/2014/main" id="{D687F36C-8ADD-4765-B950-CCE2661D5BE4}"/>
-              </a:ext>
-            </a:extLst>
-          </p:cNvPr>
-          <p:cNvSpPr>
-            <a:spLocks xmlns:a="http://schemas.openxmlformats.org/drawingml/2006/main" noGrp="1"/>
-          </p:cNvSpPr>
-          <p:nvPr/>
-        </p:nvSpPr>
-        <p:spPr>
-          <a:xfrm xmlns:a="http://schemas.openxmlformats.org/drawingml/2006/main">
-            <a:off x="5095875" y="4476750"/>
-            <a:ext cx="1524000" cy="457200"/>
+              <a:t>边界与状态：当前构造包；盲化效果待验证。</a:t>
+            </a:r>
+          </a:p>
+        </p:txBody>
+      </p:sp>
+      <p:sp>
+        <p:nvSpPr>
+          <p:cNvPr id="11" name="content-227">
+            <a:extLst xmlns:a="http://schemas.openxmlformats.org/drawingml/2006/main">
+              <a:ext uri="{FF2B5EF4-FFF2-40B4-BE49-F238E27FC236}">
+                <a16:creationId xmlns:a16="http://schemas.microsoft.com/office/drawing/2014/main" id="{8BE4243C-84CB-41C2-9560-E81BE828C7FB}"/>
+              </a:ext>
+            </a:extLst>
+          </p:cNvPr>
+          <p:cNvSpPr>
+            <a:spLocks xmlns:a="http://schemas.openxmlformats.org/drawingml/2006/main" noGrp="1"/>
+          </p:cNvSpPr>
+          <p:nvPr/>
+        </p:nvSpPr>
+        <p:spPr>
+          <a:xfrm xmlns:a="http://schemas.openxmlformats.org/drawingml/2006/main">
+            <a:off x="609600" y="4191000"/>
+            <a:ext cx="10972800" cy="371475"/>
           </a:xfrm>
           <a:prstGeom xmlns:a="http://schemas.openxmlformats.org/drawingml/2006/main" prst="rect">
             <a:avLst/>
@@ -15827,14 +15418,14 @@
           <a:bodyPr xmlns:a="http://schemas.openxmlformats.org/drawingml/2006/main" lIns="0" tIns="0" rIns="0" bIns="0" anchor="t"/>
           <a:lstStyle xmlns:a="http://schemas.openxmlformats.org/drawingml/2006/main"/>
           <a:p xmlns:a="http://schemas.openxmlformats.org/drawingml/2006/main">
-            <a:pPr algn="ctr">
+            <a:pPr algn="l">
               <a:lnSpc>
                 <a:spcPct val="118000"/>
               </a:lnSpc>
               <a:buNone/>
-              <a:defRPr sz="2200" b="1">
-                <a:solidFill>
-                  <a:srgbClr val="A96510"/>
+              <a:defRPr sz="2000" b="0">
+                <a:solidFill>
+                  <a:srgbClr val="27333D"/>
                 </a:solidFill>
                 <a:latin typeface="微软雅黑"/>
                 <a:ea typeface="微软雅黑"/>
@@ -15842,37 +15433,37 @@
               </a:defRPr>
             </a:pPr>
             <a:r>
-              <a:rPr sz="2200" b="1">
-                <a:solidFill>
-                  <a:srgbClr val="A96510"/>
+              <a:rPr sz="2000" b="0">
+                <a:solidFill>
+                  <a:srgbClr val="27333D"/>
                 </a:solidFill>
                 <a:latin typeface="微软雅黑"/>
                 <a:ea typeface="微软雅黑"/>
                 <a:cs typeface="微软雅黑"/>
               </a:rPr>
-              <a:t>补证</a:t>
-            </a:r>
-          </a:p>
-        </p:txBody>
-      </p:sp>
-      <p:sp>
-        <p:nvSpPr>
-          <p:cNvPr id="12" name="act3">
-            <a:extLst xmlns:a="http://schemas.openxmlformats.org/drawingml/2006/main">
-              <a:ext uri="{FF2B5EF4-FFF2-40B4-BE49-F238E27FC236}">
-                <a16:creationId xmlns:a16="http://schemas.microsoft.com/office/drawing/2014/main" id="{F1B9DB39-F0C0-4FF2-8C51-B30BF276FF63}"/>
-              </a:ext>
-            </a:extLst>
-          </p:cNvPr>
-          <p:cNvSpPr>
-            <a:spLocks xmlns:a="http://schemas.openxmlformats.org/drawingml/2006/main" noGrp="1"/>
-          </p:cNvSpPr>
-          <p:nvPr/>
-        </p:nvSpPr>
-        <p:spPr>
-          <a:xfrm xmlns:a="http://schemas.openxmlformats.org/drawingml/2006/main">
-            <a:off x="7524750" y="4095750"/>
-            <a:ext cx="1524000" cy="457200"/>
+              <a:t>实际修改：第 9 课规格补入匿名顺序、统一规则与复核办法。</a:t>
+            </a:r>
+          </a:p>
+        </p:txBody>
+      </p:sp>
+      <p:sp>
+        <p:nvSpPr>
+          <p:cNvPr id="12" name="content-228">
+            <a:extLst xmlns:a="http://schemas.openxmlformats.org/drawingml/2006/main">
+              <a:ext uri="{FF2B5EF4-FFF2-40B4-BE49-F238E27FC236}">
+                <a16:creationId xmlns:a16="http://schemas.microsoft.com/office/drawing/2014/main" id="{9BD90849-2038-4579-9025-15E2719CF8B1}"/>
+              </a:ext>
+            </a:extLst>
+          </p:cNvPr>
+          <p:cNvSpPr>
+            <a:spLocks xmlns:a="http://schemas.openxmlformats.org/drawingml/2006/main" noGrp="1"/>
+          </p:cNvSpPr>
+          <p:nvPr/>
+        </p:nvSpPr>
+        <p:spPr>
+          <a:xfrm xmlns:a="http://schemas.openxmlformats.org/drawingml/2006/main">
+            <a:off x="609600" y="4714875"/>
+            <a:ext cx="10972800" cy="371475"/>
           </a:xfrm>
           <a:prstGeom xmlns:a="http://schemas.openxmlformats.org/drawingml/2006/main" prst="rect">
             <a:avLst/>
@@ -15886,12 +15477,12 @@
           <a:bodyPr xmlns:a="http://schemas.openxmlformats.org/drawingml/2006/main" lIns="0" tIns="0" rIns="0" bIns="0" anchor="t"/>
           <a:lstStyle xmlns:a="http://schemas.openxmlformats.org/drawingml/2006/main"/>
           <a:p xmlns:a="http://schemas.openxmlformats.org/drawingml/2006/main">
-            <a:pPr algn="ctr">
+            <a:pPr algn="l">
               <a:lnSpc>
                 <a:spcPct val="118000"/>
               </a:lnSpc>
               <a:buNone/>
-              <a:defRPr sz="2200" b="0">
+              <a:defRPr sz="2000" b="0">
                 <a:solidFill>
                   <a:srgbClr val="1F4D78"/>
                 </a:solidFill>
@@ -15901,7 +15492,7 @@
               </a:defRPr>
             </a:pPr>
             <a:r>
-              <a:rPr sz="2200" b="0">
+              <a:rPr sz="2000" b="0">
                 <a:solidFill>
                   <a:srgbClr val="1F4D78"/>
                 </a:solidFill>
@@ -15909,238 +15500,7 @@
                 <a:ea typeface="微软雅黑"/>
                 <a:cs typeface="微软雅黑"/>
               </a:rPr>
-              <a:t>保留异议</a:t>
-            </a:r>
-          </a:p>
-        </p:txBody>
-      </p:sp>
-      <p:sp>
-        <p:nvSpPr>
-          <p:cNvPr id="13" name="act4">
-            <a:extLst xmlns:a="http://schemas.openxmlformats.org/drawingml/2006/main">
-              <a:ext uri="{FF2B5EF4-FFF2-40B4-BE49-F238E27FC236}">
-                <a16:creationId xmlns:a16="http://schemas.microsoft.com/office/drawing/2014/main" id="{A0A66D47-B83E-444E-86E3-164DBE38C8CE}"/>
-              </a:ext>
-            </a:extLst>
-          </p:cNvPr>
-          <p:cNvSpPr>
-            <a:spLocks xmlns:a="http://schemas.openxmlformats.org/drawingml/2006/main" noGrp="1"/>
-          </p:cNvSpPr>
-          <p:nvPr/>
-        </p:nvSpPr>
-        <p:spPr>
-          <a:xfrm xmlns:a="http://schemas.openxmlformats.org/drawingml/2006/main">
-            <a:off x="9810750" y="3143250"/>
-            <a:ext cx="1524000" cy="457200"/>
-          </a:xfrm>
-          <a:prstGeom xmlns:a="http://schemas.openxmlformats.org/drawingml/2006/main" prst="rect">
-            <a:avLst/>
-          </a:prstGeom>
-          <a:noFill xmlns:a="http://schemas.openxmlformats.org/drawingml/2006/main"/>
-          <a:ln xmlns:a="http://schemas.openxmlformats.org/drawingml/2006/main" w="0">
-            <a:noFill/>
-          </a:ln>
-        </p:spPr>
-        <p:txBody>
-          <a:bodyPr xmlns:a="http://schemas.openxmlformats.org/drawingml/2006/main" lIns="0" tIns="0" rIns="0" bIns="0" anchor="t"/>
-          <a:lstStyle xmlns:a="http://schemas.openxmlformats.org/drawingml/2006/main"/>
-          <a:p xmlns:a="http://schemas.openxmlformats.org/drawingml/2006/main">
-            <a:pPr algn="ctr">
-              <a:lnSpc>
-                <a:spcPct val="118000"/>
-              </a:lnSpc>
-              <a:buNone/>
-              <a:defRPr sz="2200" b="0">
-                <a:solidFill>
-                  <a:srgbClr val="A96510"/>
-                </a:solidFill>
-                <a:latin typeface="微软雅黑"/>
-                <a:ea typeface="微软雅黑"/>
-                <a:cs typeface="微软雅黑"/>
-              </a:defRPr>
-            </a:pPr>
-            <a:r>
-              <a:rPr sz="2200" b="0">
-                <a:solidFill>
-                  <a:srgbClr val="A96510"/>
-                </a:solidFill>
-                <a:latin typeface="微软雅黑"/>
-                <a:ea typeface="微软雅黑"/>
-                <a:cs typeface="微软雅黑"/>
-              </a:rPr>
-              <a:t>暂缓</a:t>
-            </a:r>
-          </a:p>
-        </p:txBody>
-      </p:sp>
-      <p:sp>
-        <p:nvSpPr>
-          <p:cNvPr id="14" name="chosen">
-            <a:extLst xmlns:a="http://schemas.openxmlformats.org/drawingml/2006/main">
-              <a:ext uri="{FF2B5EF4-FFF2-40B4-BE49-F238E27FC236}">
-                <a16:creationId xmlns:a16="http://schemas.microsoft.com/office/drawing/2014/main" id="{D64B9441-2AD2-4576-855A-833ACCC824BA}"/>
-              </a:ext>
-            </a:extLst>
-          </p:cNvPr>
-          <p:cNvSpPr>
-            <a:spLocks xmlns:a="http://schemas.openxmlformats.org/drawingml/2006/main" noGrp="1"/>
-          </p:cNvSpPr>
-          <p:nvPr/>
-        </p:nvSpPr>
-        <p:spPr>
-          <a:xfrm xmlns:a="http://schemas.openxmlformats.org/drawingml/2006/main">
-            <a:off x="4095750" y="3095625"/>
-            <a:ext cx="4000500" cy="1066800"/>
-          </a:xfrm>
-          <a:prstGeom xmlns:a="http://schemas.openxmlformats.org/drawingml/2006/main" prst="rect">
-            <a:avLst/>
-          </a:prstGeom>
-          <a:noFill xmlns:a="http://schemas.openxmlformats.org/drawingml/2006/main"/>
-          <a:ln xmlns:a="http://schemas.openxmlformats.org/drawingml/2006/main" w="0">
-            <a:noFill/>
-          </a:ln>
-        </p:spPr>
-        <p:txBody>
-          <a:bodyPr xmlns:a="http://schemas.openxmlformats.org/drawingml/2006/main" lIns="0" tIns="0" rIns="0" bIns="0" anchor="t"/>
-          <a:lstStyle xmlns:a="http://schemas.openxmlformats.org/drawingml/2006/main"/>
-          <a:p xmlns:a="http://schemas.openxmlformats.org/drawingml/2006/main">
-            <a:pPr algn="ctr">
-              <a:lnSpc>
-                <a:spcPct val="118000"/>
-              </a:lnSpc>
-              <a:buNone/>
-              <a:defRPr sz="2200" b="0">
-                <a:solidFill>
-                  <a:srgbClr val="27333D"/>
-                </a:solidFill>
-                <a:latin typeface="微软雅黑"/>
-                <a:ea typeface="微软雅黑"/>
-                <a:cs typeface="微软雅黑"/>
-              </a:defRPr>
-            </a:pPr>
-            <a:r>
-              <a:rPr sz="2200" b="0">
-                <a:solidFill>
-                  <a:srgbClr val="27333D"/>
-                </a:solidFill>
-                <a:latin typeface="微软雅黑"/>
-                <a:ea typeface="微软雅黑"/>
-                <a:cs typeface="微软雅黑"/>
-              </a:rPr>
-              <a:t>本例选择“补证”</a:t>
-            </a:r>
-          </a:p>
-          <a:p xmlns:a="http://schemas.openxmlformats.org/drawingml/2006/main">
-            <a:pPr algn="ctr">
-              <a:lnSpc>
-                <a:spcPct val="118000"/>
-              </a:lnSpc>
-              <a:buNone/>
-              <a:defRPr sz="2200" b="0">
-                <a:solidFill>
-                  <a:srgbClr val="27333D"/>
-                </a:solidFill>
-                <a:latin typeface="微软雅黑"/>
-                <a:ea typeface="微软雅黑"/>
-                <a:cs typeface="微软雅黑"/>
-              </a:defRPr>
-            </a:pPr>
-            <a:r>
-              <a:rPr sz="2200" b="0">
-                <a:solidFill>
-                  <a:srgbClr val="27333D"/>
-                </a:solidFill>
-                <a:latin typeface="微软雅黑"/>
-                <a:ea typeface="微软雅黑"/>
-                <a:cs typeface="微软雅黑"/>
-              </a:rPr>
-              <a:t>理由：需要新的区分证据</a:t>
-            </a:r>
-          </a:p>
-          <a:p xmlns:a="http://schemas.openxmlformats.org/drawingml/2006/main">
-            <a:pPr algn="ctr">
-              <a:lnSpc>
-                <a:spcPct val="118000"/>
-              </a:lnSpc>
-              <a:buNone/>
-              <a:defRPr sz="2200" b="0">
-                <a:solidFill>
-                  <a:srgbClr val="27333D"/>
-                </a:solidFill>
-                <a:latin typeface="微软雅黑"/>
-                <a:ea typeface="微软雅黑"/>
-                <a:cs typeface="微软雅黑"/>
-              </a:defRPr>
-            </a:pPr>
-            <a:r>
-              <a:rPr sz="2200" b="0">
-                <a:solidFill>
-                  <a:srgbClr val="27333D"/>
-                </a:solidFill>
-                <a:latin typeface="微软雅黑"/>
-                <a:ea typeface="微软雅黑"/>
-                <a:cs typeface="微软雅黑"/>
-              </a:rPr>
-              <a:t>回写：实验规格 §假设对应</a:t>
-            </a:r>
-          </a:p>
-        </p:txBody>
-      </p:sp>
-      <p:sp>
-        <p:nvSpPr>
-          <p:cNvPr id="15" name="rule">
-            <a:extLst xmlns:a="http://schemas.openxmlformats.org/drawingml/2006/main">
-              <a:ext uri="{FF2B5EF4-FFF2-40B4-BE49-F238E27FC236}">
-                <a16:creationId xmlns:a16="http://schemas.microsoft.com/office/drawing/2014/main" id="{8E651E4E-6599-4664-A80E-7EFEC0F01190}"/>
-              </a:ext>
-            </a:extLst>
-          </p:cNvPr>
-          <p:cNvSpPr>
-            <a:spLocks xmlns:a="http://schemas.openxmlformats.org/drawingml/2006/main" noGrp="1"/>
-          </p:cNvSpPr>
-          <p:nvPr/>
-        </p:nvSpPr>
-        <p:spPr>
-          <a:xfrm xmlns:a="http://schemas.openxmlformats.org/drawingml/2006/main">
-            <a:off x="2571750" y="5286375"/>
-            <a:ext cx="7048500" cy="361950"/>
-          </a:xfrm>
-          <a:prstGeom xmlns:a="http://schemas.openxmlformats.org/drawingml/2006/main" prst="rect">
-            <a:avLst/>
-          </a:prstGeom>
-          <a:noFill xmlns:a="http://schemas.openxmlformats.org/drawingml/2006/main"/>
-          <a:ln xmlns:a="http://schemas.openxmlformats.org/drawingml/2006/main" w="0">
-            <a:noFill/>
-          </a:ln>
-        </p:spPr>
-        <p:txBody>
-          <a:bodyPr xmlns:a="http://schemas.openxmlformats.org/drawingml/2006/main" lIns="0" tIns="0" rIns="0" bIns="0" anchor="t"/>
-          <a:lstStyle xmlns:a="http://schemas.openxmlformats.org/drawingml/2006/main"/>
-          <a:p xmlns:a="http://schemas.openxmlformats.org/drawingml/2006/main">
-            <a:pPr algn="ctr">
-              <a:lnSpc>
-                <a:spcPct val="118000"/>
-              </a:lnSpc>
-              <a:buNone/>
-              <a:defRPr sz="2200" b="1">
-                <a:solidFill>
-                  <a:srgbClr val="C8161E"/>
-                </a:solidFill>
-                <a:latin typeface="微软雅黑"/>
-                <a:ea typeface="微软雅黑"/>
-                <a:cs typeface="微软雅黑"/>
-              </a:defRPr>
-            </a:pPr>
-            <a:r>
-              <a:rPr sz="2200" b="1">
-                <a:solidFill>
-                  <a:srgbClr val="C8161E"/>
-                </a:solidFill>
-                <a:latin typeface="微软雅黑"/>
-                <a:ea typeface="微软雅黑"/>
-                <a:cs typeface="微软雅黑"/>
-              </a:rPr>
-              <a:t>动作由真实反馈决定；五类不必齐全，也不制造“拒绝”</a:t>
+              <a:t>每条回应都写明影响工件与回写位置。</a:t>
             </a:r>
           </a:p>
         </p:txBody>

--- a/lessons/lesson-08/slides.pptx
+++ b/lessons/lesson-08/slides.pptx
@@ -412,7 +412,12 @@
           </a:p>
           <a:p xmlns:a="http://schemas.openxmlformats.org/drawingml/2006/main">
             <a:r>
-              <a:t>讲义位置：本课讲义；见逐页母稿映射表</a:t>
+              <a:t>讲述与校准：</a:t>
+            </a:r>
+          </a:p>
+          <a:p xmlns:a="http://schemas.openxmlformats.org/drawingml/2006/main">
+            <a:r>
+              <a:t>开场放下第 7 课的成果。第 7 课建立了机制假设、研究判断初版和实验规格草图，但都是内部工件。本课把这些工件暴露给同伴质询，让范围、证据、baseline、停止条件和替代假设区分性在反馈下显式化。本课是形成性活动，不新增正式提交。</a:t>
             </a:r>
           </a:p>
           <a:p xmlns:a="http://schemas.openxmlformats.org/drawingml/2006/main">
@@ -422,12 +427,12 @@
           </a:p>
           <a:p xmlns:a="http://schemas.openxmlformats.org/drawingml/2006/main">
             <a:r>
-              <a:t>屏显核对：</a:t>
-            </a:r>
-          </a:p>
-          <a:p xmlns:a="http://schemas.openxmlformats.org/drawingml/2006/main">
-            <a:r>
-              <a:t>第8讲 学生研究方案分享与设计诊所</a:t>
+              <a:t>学生动作：</a:t>
+            </a:r>
+          </a:p>
+          <a:p xmlns:a="http://schemas.openxmlformats.org/drawingml/2006/main">
+            <a:r>
+              <a:t>不展开课程行政信息，直接进入下一页回扣。</a:t>
             </a:r>
           </a:p>
           <a:p xmlns:a="http://schemas.openxmlformats.org/drawingml/2006/main">
@@ -437,12 +442,7 @@
           </a:p>
           <a:p xmlns:a="http://schemas.openxmlformats.org/drawingml/2006/main">
             <a:r>
-              <a:t>教师讲述：</a:t>
-            </a:r>
-          </a:p>
-          <a:p xmlns:a="http://schemas.openxmlformats.org/drawingml/2006/main">
-            <a:r>
-              <a:t>开场放下第 7 课的成果。第 7 课建立了机制假设、研究判断初版和实验规格草图，但都是内部工件。本课把这些工件暴露给同伴质询，让范围、证据、baseline、停止条件和替代假设区分性在反馈下显式化。本课是形成性活动，不新增正式提交。</a:t>
+              <a:t>课堂安排：按 teaching-plan.md 专用课堂时段安排；换场计入对应时段。</a:t>
             </a:r>
           </a:p>
           <a:p xmlns:a="http://schemas.openxmlformats.org/drawingml/2006/main">
@@ -452,12 +452,12 @@
           </a:p>
           <a:p xmlns:a="http://schemas.openxmlformats.org/drawingml/2006/main">
             <a:r>
-              <a:t>学生动作：</a:t>
-            </a:r>
-          </a:p>
-          <a:p xmlns:a="http://schemas.openxmlformats.org/drawingml/2006/main">
-            <a:r>
-              <a:t>不展开课程行政信息，直接进入下一页回扣。</a:t>
+              <a:t>[Sources]</a:t>
+            </a:r>
+          </a:p>
+          <a:p xmlns:a="http://schemas.openxmlformats.org/drawingml/2006/main">
+            <a:r>
+              <a:t>课程定位以 [syllabus.md](../../course/syllabus.md) 与 [备课规划.md](../备课规划.md) 第 8 课段为准；[assignments.md](../../course/assignments.md) "第 8 课：研究方案分享与设计诊所"段明确不正式提交。</a:t>
             </a:r>
           </a:p>
           <a:p xmlns:a="http://schemas.openxmlformats.org/drawingml/2006/main">
@@ -467,57 +467,7 @@
           </a:p>
           <a:p xmlns:a="http://schemas.openxmlformats.org/drawingml/2006/main">
             <a:r>
-              <a:t>来源与边界：</a:t>
-            </a:r>
-          </a:p>
-          <a:p xmlns:a="http://schemas.openxmlformats.org/drawingml/2006/main">
-            <a:r>
-              <a:t>课程定位以 [syllabus.md](../../course/syllabus.md) 与 [备课规划.md](../备课规划.md) 第 8 课段为准；[assignments.md](../../course/assignments.md) "第 8 课：研究方案分享与设计诊所"段明确不正式提交。</a:t>
-            </a:r>
-          </a:p>
-          <a:p xmlns:a="http://schemas.openxmlformats.org/drawingml/2006/main">
-            <a:r>
-              <a:t/>
-            </a:r>
-          </a:p>
-          <a:p xmlns:a="http://schemas.openxmlformats.org/drawingml/2006/main">
-            <a:r>
-              <a:t>---</a:t>
-            </a:r>
-          </a:p>
-          <a:p xmlns:a="http://schemas.openxmlformats.org/drawingml/2006/main">
-            <a:r>
-              <a:t/>
-            </a:r>
-          </a:p>
-          <a:p xmlns:a="http://schemas.openxmlformats.org/drawingml/2006/main">
-            <a:r>
-              <a:t>[Sources]</a:t>
-            </a:r>
-          </a:p>
-          <a:p xmlns:a="http://schemas.openxmlformats.org/drawingml/2006/main">
-            <a:r>
-              <a:t/>
-            </a:r>
-          </a:p>
-          <a:p xmlns:a="http://schemas.openxmlformats.org/drawingml/2006/main">
-            <a:r>
-              <a:t>- 本课 handout.md 与 slides.md</a:t>
-            </a:r>
-          </a:p>
-          <a:p xmlns:a="http://schemas.openxmlformats.org/drawingml/2006/main">
-            <a:r>
-              <a:t/>
-            </a:r>
-          </a:p>
-          <a:p xmlns:a="http://schemas.openxmlformats.org/drawingml/2006/main">
-            <a:r>
-              <a:t>- ../../course/reading-card-case.md</a:t>
-            </a:r>
-          </a:p>
-          <a:p xmlns:a="http://schemas.openxmlformats.org/drawingml/2006/main">
-            <a:r>
-              <a:t/>
+              <a:t>本课 handout.md、judgment-task.md；../../course/judgment-path.md。</a:t>
             </a:r>
           </a:p>
           <a:p xmlns:a="http://schemas.openxmlformats.org/drawingml/2006/main">
@@ -602,7 +552,12 @@
           </a:p>
           <a:p xmlns:a="http://schemas.openxmlformats.org/drawingml/2006/main">
             <a:r>
-              <a:t>讲义位置：handout.md §七、贯穿案例：从第 7 课输出到限时陈述</a:t>
+              <a:t>讲述与校准：</a:t>
+            </a:r>
+          </a:p>
+          <a:p xmlns:a="http://schemas.openxmlformats.org/drawingml/2006/main">
+            <a:r>
+              <a:t>依讲义§七读一次完整短讲，不再跳到benchmark迁移案例。五段围绕同一个问题；本例为教学构造，不能说已经得到真实研究证据。学生听完只定位最影响判断的一处缺口。</a:t>
             </a:r>
           </a:p>
           <a:p xmlns:a="http://schemas.openxmlformats.org/drawingml/2006/main">
@@ -612,32 +567,12 @@
           </a:p>
           <a:p xmlns:a="http://schemas.openxmlformats.org/drawingml/2006/main">
             <a:r>
-              <a:t>屏显核对：</a:t>
-            </a:r>
-          </a:p>
-          <a:p xmlns:a="http://schemas.openxmlformats.org/drawingml/2006/main">
-            <a:r>
-              <a:t>问题：阅读卡是否降低限定条件遗漏？</a:t>
-            </a:r>
-          </a:p>
-          <a:p xmlns:a="http://schemas.openxmlformats.org/drawingml/2006/main">
-            <a:r>
-              <a:t>证据：逐条条件保留记录；当前没有真实效果结论。</a:t>
-            </a:r>
-          </a:p>
-          <a:p xmlns:a="http://schemas.openxmlformats.org/drawingml/2006/main">
-            <a:r>
-              <a:t>解释：Q1 结果与 H1/A2 机制、测量解释分开。</a:t>
-            </a:r>
-          </a:p>
-          <a:p xmlns:a="http://schemas.openxmlformats.org/drawingml/2006/main">
-            <a:r>
-              <a:t>方案：同一材料两种输出，统一标注口径。</a:t>
-            </a:r>
-          </a:p>
-          <a:p xmlns:a="http://schemas.openxmlformats.org/drawingml/2006/main">
-            <a:r>
-              <a:t>风险：材料范围窄，其他质量代价尚未测量。</a:t>
+              <a:t>学生动作：</a:t>
+            </a:r>
+          </a:p>
+          <a:p xmlns:a="http://schemas.openxmlformats.org/drawingml/2006/main">
+            <a:r>
+              <a:t>标记一个会改变实验设计的问题。</a:t>
             </a:r>
           </a:p>
           <a:p xmlns:a="http://schemas.openxmlformats.org/drawingml/2006/main">
@@ -647,12 +582,7 @@
           </a:p>
           <a:p xmlns:a="http://schemas.openxmlformats.org/drawingml/2006/main">
             <a:r>
-              <a:t>教师讲述：</a:t>
-            </a:r>
-          </a:p>
-          <a:p xmlns:a="http://schemas.openxmlformats.org/drawingml/2006/main">
-            <a:r>
-              <a:t>依讲义§七读一次完整短讲，不再跳到benchmark迁移案例。五段围绕同一个问题；本例为教学构造，不能说已经得到真实研究证据。学生听完只定位最影响判断的一处缺口。</a:t>
+              <a:t>课堂安排：按 teaching-plan.md 专用课堂时段安排；换场计入对应时段。</a:t>
             </a:r>
           </a:p>
           <a:p xmlns:a="http://schemas.openxmlformats.org/drawingml/2006/main">
@@ -662,12 +592,12 @@
           </a:p>
           <a:p xmlns:a="http://schemas.openxmlformats.org/drawingml/2006/main">
             <a:r>
-              <a:t>学生动作：</a:t>
-            </a:r>
-          </a:p>
-          <a:p xmlns:a="http://schemas.openxmlformats.org/drawingml/2006/main">
-            <a:r>
-              <a:t>标记一个会改变实验设计的问题。</a:t>
+              <a:t>[Sources]</a:t>
+            </a:r>
+          </a:p>
+          <a:p xmlns:a="http://schemas.openxmlformats.org/drawingml/2006/main">
+            <a:r>
+              <a:t>./handout.md；课堂示例与构造数据见 ../../course/reading-card-case.md</a:t>
             </a:r>
           </a:p>
           <a:p xmlns:a="http://schemas.openxmlformats.org/drawingml/2006/main">
@@ -677,47 +607,7 @@
           </a:p>
           <a:p xmlns:a="http://schemas.openxmlformats.org/drawingml/2006/main">
             <a:r>
-              <a:t>来源与边界：</a:t>
-            </a:r>
-          </a:p>
-          <a:p xmlns:a="http://schemas.openxmlformats.org/drawingml/2006/main">
-            <a:r>
-              <a:t>./handout.md；课堂示例与构造数据见 ../../course/reading-card-case.md</a:t>
-            </a:r>
-          </a:p>
-          <a:p xmlns:a="http://schemas.openxmlformats.org/drawingml/2006/main">
-            <a:r>
-              <a:t/>
-            </a:r>
-          </a:p>
-          <a:p xmlns:a="http://schemas.openxmlformats.org/drawingml/2006/main">
-            <a:r>
-              <a:t>[Sources]</a:t>
-            </a:r>
-          </a:p>
-          <a:p xmlns:a="http://schemas.openxmlformats.org/drawingml/2006/main">
-            <a:r>
-              <a:t/>
-            </a:r>
-          </a:p>
-          <a:p xmlns:a="http://schemas.openxmlformats.org/drawingml/2006/main">
-            <a:r>
-              <a:t>- 本课 handout.md 与 slides.md</a:t>
-            </a:r>
-          </a:p>
-          <a:p xmlns:a="http://schemas.openxmlformats.org/drawingml/2006/main">
-            <a:r>
-              <a:t/>
-            </a:r>
-          </a:p>
-          <a:p xmlns:a="http://schemas.openxmlformats.org/drawingml/2006/main">
-            <a:r>
-              <a:t>- ../../course/reading-card-case.md</a:t>
-            </a:r>
-          </a:p>
-          <a:p xmlns:a="http://schemas.openxmlformats.org/drawingml/2006/main">
-            <a:r>
-              <a:t/>
+              <a:t>本课 handout.md、judgment-task.md；../../course/judgment-path.md。</a:t>
             </a:r>
           </a:p>
           <a:p xmlns:a="http://schemas.openxmlformats.org/drawingml/2006/main">
@@ -802,7 +692,12 @@
           </a:p>
           <a:p xmlns:a="http://schemas.openxmlformats.org/drawingml/2006/main">
             <a:r>
-              <a:t>讲义位置：handout.md §七、贯穿案例：从第 7 课输出到限时陈述</a:t>
+              <a:t>讲述与校准：</a:t>
+            </a:r>
+          </a:p>
+          <a:p xmlns:a="http://schemas.openxmlformats.org/drawingml/2006/main">
+            <a:r>
+              <a:t>演示从意见定位到实验草图修改；不强迫出现接受、拒绝每一种状态。主例继续用阅读卡。其他题目只用于学生自己的迁移。</a:t>
             </a:r>
           </a:p>
           <a:p xmlns:a="http://schemas.openxmlformats.org/drawingml/2006/main">
@@ -812,22 +707,12 @@
           </a:p>
           <a:p xmlns:a="http://schemas.openxmlformats.org/drawingml/2006/main">
             <a:r>
-              <a:t>屏显核对：</a:t>
-            </a:r>
-          </a:p>
-          <a:p xmlns:a="http://schemas.openxmlformats.org/drawingml/2006/main">
-            <a:r>
-              <a:t>泛泛意见：“再严谨一点。”</a:t>
-            </a:r>
-          </a:p>
-          <a:p xmlns:a="http://schemas.openxmlformats.org/drawingml/2006/main">
-            <a:r>
-              <a:t>可执行意见：“评分者能否看见组别？请补盲化办法。”</a:t>
-            </a:r>
-          </a:p>
-          <a:p xmlns:a="http://schemas.openxmlformats.org/drawingml/2006/main">
-            <a:r>
-              <a:t>作者处理：“接受；在评价协议补入匿名顺序与统一规则。”</a:t>
+              <a:t>学生动作：</a:t>
+            </a:r>
+          </a:p>
+          <a:p xmlns:a="http://schemas.openxmlformats.org/drawingml/2006/main">
+            <a:r>
+              <a:t>两人交换一条意见，作者写处理理由及修改位置。</a:t>
             </a:r>
           </a:p>
           <a:p xmlns:a="http://schemas.openxmlformats.org/drawingml/2006/main">
@@ -837,7 +722,7 @@
           </a:p>
           <a:p xmlns:a="http://schemas.openxmlformats.org/drawingml/2006/main">
             <a:r>
-              <a:t>反馈 → 理由 → 文件中的实际修改</a:t>
+              <a:t>课堂安排：按 teaching-plan.md 专用课堂时段安排；换场计入对应时段。</a:t>
             </a:r>
           </a:p>
           <a:p xmlns:a="http://schemas.openxmlformats.org/drawingml/2006/main">
@@ -847,12 +732,12 @@
           </a:p>
           <a:p xmlns:a="http://schemas.openxmlformats.org/drawingml/2006/main">
             <a:r>
-              <a:t>教师讲述：</a:t>
-            </a:r>
-          </a:p>
-          <a:p xmlns:a="http://schemas.openxmlformats.org/drawingml/2006/main">
-            <a:r>
-              <a:t>演示从意见定位到实验草图修改；不强迫出现接受、拒绝每一种状态。主例继续用阅读卡。其他题目只用于学生自己的迁移。</a:t>
+              <a:t>[Sources]</a:t>
+            </a:r>
+          </a:p>
+          <a:p xmlns:a="http://schemas.openxmlformats.org/drawingml/2006/main">
+            <a:r>
+              <a:t>./handout.md；课堂示例与构造数据见 ../../course/reading-card-case.md</a:t>
             </a:r>
           </a:p>
           <a:p xmlns:a="http://schemas.openxmlformats.org/drawingml/2006/main">
@@ -862,62 +747,7 @@
           </a:p>
           <a:p xmlns:a="http://schemas.openxmlformats.org/drawingml/2006/main">
             <a:r>
-              <a:t>学生动作：</a:t>
-            </a:r>
-          </a:p>
-          <a:p xmlns:a="http://schemas.openxmlformats.org/drawingml/2006/main">
-            <a:r>
-              <a:t>两人交换一条意见，作者写处理理由及修改位置。</a:t>
-            </a:r>
-          </a:p>
-          <a:p xmlns:a="http://schemas.openxmlformats.org/drawingml/2006/main">
-            <a:r>
-              <a:t/>
-            </a:r>
-          </a:p>
-          <a:p xmlns:a="http://schemas.openxmlformats.org/drawingml/2006/main">
-            <a:r>
-              <a:t>来源与边界：</a:t>
-            </a:r>
-          </a:p>
-          <a:p xmlns:a="http://schemas.openxmlformats.org/drawingml/2006/main">
-            <a:r>
-              <a:t>./handout.md；课堂示例与构造数据见 ../../course/reading-card-case.md</a:t>
-            </a:r>
-          </a:p>
-          <a:p xmlns:a="http://schemas.openxmlformats.org/drawingml/2006/main">
-            <a:r>
-              <a:t/>
-            </a:r>
-          </a:p>
-          <a:p xmlns:a="http://schemas.openxmlformats.org/drawingml/2006/main">
-            <a:r>
-              <a:t>[Sources]</a:t>
-            </a:r>
-          </a:p>
-          <a:p xmlns:a="http://schemas.openxmlformats.org/drawingml/2006/main">
-            <a:r>
-              <a:t/>
-            </a:r>
-          </a:p>
-          <a:p xmlns:a="http://schemas.openxmlformats.org/drawingml/2006/main">
-            <a:r>
-              <a:t>- 本课 handout.md 与 slides.md</a:t>
-            </a:r>
-          </a:p>
-          <a:p xmlns:a="http://schemas.openxmlformats.org/drawingml/2006/main">
-            <a:r>
-              <a:t/>
-            </a:r>
-          </a:p>
-          <a:p xmlns:a="http://schemas.openxmlformats.org/drawingml/2006/main">
-            <a:r>
-              <a:t>- ../../course/reading-card-case.md</a:t>
-            </a:r>
-          </a:p>
-          <a:p xmlns:a="http://schemas.openxmlformats.org/drawingml/2006/main">
-            <a:r>
-              <a:t/>
+              <a:t>本课 handout.md、judgment-task.md；../../course/judgment-path.md。</a:t>
             </a:r>
           </a:p>
           <a:p xmlns:a="http://schemas.openxmlformats.org/drawingml/2006/main">
@@ -1002,7 +832,12 @@
           </a:p>
           <a:p xmlns:a="http://schemas.openxmlformats.org/drawingml/2006/main">
             <a:r>
-              <a:t>讲义位置：本课讲义；见逐页母稿映射表</a:t>
+              <a:t>讲述与校准：</a:t>
+            </a:r>
+          </a:p>
+          <a:p xmlns:a="http://schemas.openxmlformats.org/drawingml/2006/main">
+            <a:r>
+              <a:t>本课直接产出"第 8 课同伴反馈处理记录"和"至少 2 条研究判断"两项判断门材料。其余条件第 9 课内补齐。预检让学生看到第 9 课前还要补什么。</a:t>
             </a:r>
           </a:p>
           <a:p xmlns:a="http://schemas.openxmlformats.org/drawingml/2006/main">
@@ -1012,62 +847,12 @@
           </a:p>
           <a:p xmlns:a="http://schemas.openxmlformats.org/drawingml/2006/main">
             <a:r>
-              <a:t>屏显核对：</a:t>
-            </a:r>
-          </a:p>
-          <a:p xmlns:a="http://schemas.openxmlformats.org/drawingml/2006/main">
-            <a:r>
-              <a:t>| 判断门条件 | 第 8 课预检 | 缺口 |</a:t>
-            </a:r>
-          </a:p>
-          <a:p xmlns:a="http://schemas.openxmlformats.org/drawingml/2006/main">
-            <a:r>
-              <a:t>| --- | --- | --- |</a:t>
-            </a:r>
-          </a:p>
-          <a:p xmlns:a="http://schemas.openxmlformats.org/drawingml/2006/main">
-            <a:r>
-              <a:t>| 可执行 baseline | 部分 | 第 9 课跑通 |</a:t>
-            </a:r>
-          </a:p>
-          <a:p xmlns:a="http://schemas.openxmlformats.org/drawingml/2006/main">
-            <a:r>
-              <a:t>| 数据/材料/指标/限制 | 部分 | 第 9 课补 |</a:t>
-            </a:r>
-          </a:p>
-          <a:p xmlns:a="http://schemas.openxmlformats.org/drawingml/2006/main">
-            <a:r>
-              <a:t>| 环境/配置/随机种子 | 未覆盖 | 第 9 课 |</a:t>
-            </a:r>
-          </a:p>
-          <a:p xmlns:a="http://schemas.openxmlformats.org/drawingml/2006/main">
-            <a:r>
-              <a:t>| 至少 2 条研究判断 | 本课决策表补入 | — |</a:t>
-            </a:r>
-          </a:p>
-          <a:p xmlns:a="http://schemas.openxmlformats.org/drawingml/2006/main">
-            <a:r>
-              <a:t>| 实验规格完整 | 第 7 课草图 + 本课反馈 | 本课反馈补全 |</a:t>
-            </a:r>
-          </a:p>
-          <a:p xmlns:a="http://schemas.openxmlformats.org/drawingml/2006/main">
-            <a:r>
-              <a:t>| 第 8 课同伴反馈处理记录 | 本课产出 | — |</a:t>
-            </a:r>
-          </a:p>
-          <a:p xmlns:a="http://schemas.openxmlformats.org/drawingml/2006/main">
-            <a:r>
-              <a:t>| 最大风险和失败预案 | 本课陈述 + 反馈 | — |</a:t>
-            </a:r>
-          </a:p>
-          <a:p xmlns:a="http://schemas.openxmlformats.org/drawingml/2006/main">
-            <a:r>
-              <a:t>| 一条已遇失败或放弃备选记录 | 可先登记 | 第 9 课补足处理理由 |</a:t>
-            </a:r>
-          </a:p>
-          <a:p xmlns:a="http://schemas.openxmlformats.org/drawingml/2006/main">
-            <a:r>
-              <a:t>| 迁移到 project-template | 未覆盖 | 第 9 课 |</a:t>
+              <a:t>学生动作：</a:t>
+            </a:r>
+          </a:p>
+          <a:p xmlns:a="http://schemas.openxmlformats.org/drawingml/2006/main">
+            <a:r>
+              <a:t>让学生用自己的方案标出当前已满足、部分满足和未覆盖项。</a:t>
             </a:r>
           </a:p>
           <a:p xmlns:a="http://schemas.openxmlformats.org/drawingml/2006/main">
@@ -1077,12 +862,7 @@
           </a:p>
           <a:p xmlns:a="http://schemas.openxmlformats.org/drawingml/2006/main">
             <a:r>
-              <a:t>教师讲述：</a:t>
-            </a:r>
-          </a:p>
-          <a:p xmlns:a="http://schemas.openxmlformats.org/drawingml/2006/main">
-            <a:r>
-              <a:t>本课直接产出"第 8 课同伴反馈处理记录"和"至少 2 条研究判断"两项判断门材料。其余条件第 9 课内补齐。预检让学生看到第 9 课前还要补什么。</a:t>
+              <a:t>课堂安排：按 teaching-plan.md 专用课堂时段安排；换场计入对应时段。</a:t>
             </a:r>
           </a:p>
           <a:p xmlns:a="http://schemas.openxmlformats.org/drawingml/2006/main">
@@ -1092,12 +872,12 @@
           </a:p>
           <a:p xmlns:a="http://schemas.openxmlformats.org/drawingml/2006/main">
             <a:r>
-              <a:t>学生动作：</a:t>
-            </a:r>
-          </a:p>
-          <a:p xmlns:a="http://schemas.openxmlformats.org/drawingml/2006/main">
-            <a:r>
-              <a:t>让学生用自己的方案标出当前已满足、部分满足和未覆盖项。</a:t>
+              <a:t>[Sources]</a:t>
+            </a:r>
+          </a:p>
+          <a:p xmlns:a="http://schemas.openxmlformats.org/drawingml/2006/main">
+            <a:r>
+              <a:t>讲义 §六·1；[assignments.md](../../course/assignments.md) Checkpoint 2 判断门条件——权威来源。</a:t>
             </a:r>
           </a:p>
           <a:p xmlns:a="http://schemas.openxmlformats.org/drawingml/2006/main">
@@ -1107,57 +887,7 @@
           </a:p>
           <a:p xmlns:a="http://schemas.openxmlformats.org/drawingml/2006/main">
             <a:r>
-              <a:t>来源与边界：</a:t>
-            </a:r>
-          </a:p>
-          <a:p xmlns:a="http://schemas.openxmlformats.org/drawingml/2006/main">
-            <a:r>
-              <a:t>讲义 §六·1；[assignments.md](../../course/assignments.md) Checkpoint 2 判断门条件——权威来源。</a:t>
-            </a:r>
-          </a:p>
-          <a:p xmlns:a="http://schemas.openxmlformats.org/drawingml/2006/main">
-            <a:r>
-              <a:t/>
-            </a:r>
-          </a:p>
-          <a:p xmlns:a="http://schemas.openxmlformats.org/drawingml/2006/main">
-            <a:r>
-              <a:t>---</a:t>
-            </a:r>
-          </a:p>
-          <a:p xmlns:a="http://schemas.openxmlformats.org/drawingml/2006/main">
-            <a:r>
-              <a:t/>
-            </a:r>
-          </a:p>
-          <a:p xmlns:a="http://schemas.openxmlformats.org/drawingml/2006/main">
-            <a:r>
-              <a:t>[Sources]</a:t>
-            </a:r>
-          </a:p>
-          <a:p xmlns:a="http://schemas.openxmlformats.org/drawingml/2006/main">
-            <a:r>
-              <a:t/>
-            </a:r>
-          </a:p>
-          <a:p xmlns:a="http://schemas.openxmlformats.org/drawingml/2006/main">
-            <a:r>
-              <a:t>- 本课 handout.md 与 slides.md</a:t>
-            </a:r>
-          </a:p>
-          <a:p xmlns:a="http://schemas.openxmlformats.org/drawingml/2006/main">
-            <a:r>
-              <a:t/>
-            </a:r>
-          </a:p>
-          <a:p xmlns:a="http://schemas.openxmlformats.org/drawingml/2006/main">
-            <a:r>
-              <a:t>- ../../course/reading-card-case.md</a:t>
-            </a:r>
-          </a:p>
-          <a:p xmlns:a="http://schemas.openxmlformats.org/drawingml/2006/main">
-            <a:r>
-              <a:t/>
+              <a:t>本课 handout.md、judgment-task.md；../../course/judgment-path.md。</a:t>
             </a:r>
           </a:p>
           <a:p xmlns:a="http://schemas.openxmlformats.org/drawingml/2006/main">
@@ -1232,7 +962,7 @@
           <a:lstStyle xmlns:a="http://schemas.openxmlformats.org/drawingml/2006/main"/>
           <a:p xmlns:a="http://schemas.openxmlformats.org/drawingml/2006/main">
             <a:r>
-              <a:t>页面：P13 实践：完成陈述、互查、决策与判断门预检</a:t>
+              <a:t>页面：P13 本人项目：决定、核验与回写</a:t>
             </a:r>
           </a:p>
           <a:p xmlns:a="http://schemas.openxmlformats.org/drawingml/2006/main">
@@ -1242,7 +972,12 @@
           </a:p>
           <a:p xmlns:a="http://schemas.openxmlformats.org/drawingml/2006/main">
             <a:r>
-              <a:t>讲义位置：本课讲义；见逐页母稿映射表</a:t>
+              <a:t>讲述与校准：</a:t>
+            </a:r>
+          </a:p>
+          <a:p xmlns:a="http://schemas.openxmlformats.org/drawingml/2006/main">
+            <a:r>
+              <a:t>B 对当前说明成立，并要求作者定位反馈用途。A 指出范围窄但超出预算，宜先限定范围；C 对确定性回放的要求不匹配，可澄清输入版本和散列。也可接受 A 的范围提醒而拒绝扩大规模的处方。 按本课专用90分钟流程进行，不套用普通课时间。</a:t>
             </a:r>
           </a:p>
           <a:p xmlns:a="http://schemas.openxmlformats.org/drawingml/2006/main">
@@ -1252,32 +987,12 @@
           </a:p>
           <a:p xmlns:a="http://schemas.openxmlformats.org/drawingml/2006/main">
             <a:r>
-              <a:t>屏显核对：</a:t>
-            </a:r>
-          </a:p>
-          <a:p xmlns:a="http://schemas.openxmlformats.org/drawingml/2006/main">
-            <a:r>
-              <a:t>实践任务：</a:t>
-            </a:r>
-          </a:p>
-          <a:p xmlns:a="http://schemas.openxmlformats.org/drawingml/2006/main">
-            <a:r>
-              <a:t>1. 补全限时陈述稿五段</a:t>
-            </a:r>
-          </a:p>
-          <a:p xmlns:a="http://schemas.openxmlformats.org/drawingml/2006/main">
-            <a:r>
-              <a:t>2. 同伴互查：每人一次限时陈述与反馈</a:t>
-            </a:r>
-          </a:p>
-          <a:p xmlns:a="http://schemas.openxmlformats.org/drawingml/2006/main">
-            <a:r>
-              <a:t>3. 根据真实反馈选择处理动作，处理至少 2 条</a:t>
-            </a:r>
-          </a:p>
-          <a:p xmlns:a="http://schemas.openxmlformats.org/drawingml/2006/main">
-            <a:r>
-              <a:t>4. 现场修订 1 处，并记录理由与位置</a:t>
+              <a:t>学生动作：</a:t>
+            </a:r>
+          </a:p>
+          <a:p xmlns:a="http://schemas.openxmlformats.org/drawingml/2006/main">
+            <a:r>
+              <a:t>固定 3–4 人组逐人陈述、质询；每人围绕一个关键对照或薄弱证据，实际修改预测、协议或结论范围。</a:t>
             </a:r>
           </a:p>
           <a:p xmlns:a="http://schemas.openxmlformats.org/drawingml/2006/main">
@@ -1287,12 +1002,7 @@
           </a:p>
           <a:p xmlns:a="http://schemas.openxmlformats.org/drawingml/2006/main">
             <a:r>
-              <a:t>互查分组与轮次表见投屏。</a:t>
-            </a:r>
-          </a:p>
-          <a:p xmlns:a="http://schemas.openxmlformats.org/drawingml/2006/main">
-            <a:r>
-              <a:t>分组与轮次见教师口头指令；本页只保留学生动作。</a:t>
+              <a:t>课堂安排：按 teaching-plan.md 专用课堂时段安排；换场计入对应时段。</a:t>
             </a:r>
           </a:p>
           <a:p xmlns:a="http://schemas.openxmlformats.org/drawingml/2006/main">
@@ -1302,12 +1012,12 @@
           </a:p>
           <a:p xmlns:a="http://schemas.openxmlformats.org/drawingml/2006/main">
             <a:r>
-              <a:t>教师讲述：</a:t>
-            </a:r>
-          </a:p>
-          <a:p xmlns:a="http://schemas.openxmlformats.org/drawingml/2006/main">
-            <a:r>
-              <a:t>教师内部执行：15 人分 5 个三人组，每人 3 分钟陈述 + 2 分钟合并反馈，基础轮次 15 分钟；40 分钟分组块足以完成轮次、追问、转换与补记。随后做全班诊断，再进入作者处理与现场修订。</a:t>
+              <a:t>[Sources]</a:t>
+            </a:r>
+          </a:p>
+          <a:p xmlns:a="http://schemas.openxmlformats.org/drawingml/2006/main">
+            <a:r>
+              <a:t>讲义 §八 练习 1-6；[assignments.md](../../course/assignments.md) 第 8 课段。</a:t>
             </a:r>
           </a:p>
           <a:p xmlns:a="http://schemas.openxmlformats.org/drawingml/2006/main">
@@ -1317,72 +1027,7 @@
           </a:p>
           <a:p xmlns:a="http://schemas.openxmlformats.org/drawingml/2006/main">
             <a:r>
-              <a:t>学生动作：</a:t>
-            </a:r>
-          </a:p>
-          <a:p xmlns:a="http://schemas.openxmlformats.org/drawingml/2006/main">
-            <a:r>
-              <a:t>学生补全陈述稿，进入互查。</a:t>
-            </a:r>
-          </a:p>
-          <a:p xmlns:a="http://schemas.openxmlformats.org/drawingml/2006/main">
-            <a:r>
-              <a:t/>
-            </a:r>
-          </a:p>
-          <a:p xmlns:a="http://schemas.openxmlformats.org/drawingml/2006/main">
-            <a:r>
-              <a:t>来源与边界：</a:t>
-            </a:r>
-          </a:p>
-          <a:p xmlns:a="http://schemas.openxmlformats.org/drawingml/2006/main">
-            <a:r>
-              <a:t>讲义 §八 练习 1-6；[assignments.md](../../course/assignments.md) 第 8 课段。</a:t>
-            </a:r>
-          </a:p>
-          <a:p xmlns:a="http://schemas.openxmlformats.org/drawingml/2006/main">
-            <a:r>
-              <a:t/>
-            </a:r>
-          </a:p>
-          <a:p xmlns:a="http://schemas.openxmlformats.org/drawingml/2006/main">
-            <a:r>
-              <a:t>---</a:t>
-            </a:r>
-          </a:p>
-          <a:p xmlns:a="http://schemas.openxmlformats.org/drawingml/2006/main">
-            <a:r>
-              <a:t/>
-            </a:r>
-          </a:p>
-          <a:p xmlns:a="http://schemas.openxmlformats.org/drawingml/2006/main">
-            <a:r>
-              <a:t>[Sources]</a:t>
-            </a:r>
-          </a:p>
-          <a:p xmlns:a="http://schemas.openxmlformats.org/drawingml/2006/main">
-            <a:r>
-              <a:t/>
-            </a:r>
-          </a:p>
-          <a:p xmlns:a="http://schemas.openxmlformats.org/drawingml/2006/main">
-            <a:r>
-              <a:t>- 本课 handout.md 与 slides.md</a:t>
-            </a:r>
-          </a:p>
-          <a:p xmlns:a="http://schemas.openxmlformats.org/drawingml/2006/main">
-            <a:r>
-              <a:t/>
-            </a:r>
-          </a:p>
-          <a:p xmlns:a="http://schemas.openxmlformats.org/drawingml/2006/main">
-            <a:r>
-              <a:t>- ../../course/reading-card-case.md</a:t>
-            </a:r>
-          </a:p>
-          <a:p xmlns:a="http://schemas.openxmlformats.org/drawingml/2006/main">
-            <a:r>
-              <a:t/>
+              <a:t>本课 handout.md、judgment-task.md；../../course/judgment-path.md。教学构造仅用于方法判断；本人结果以实际记录为准。</a:t>
             </a:r>
           </a:p>
           <a:p xmlns:a="http://schemas.openxmlformats.org/drawingml/2006/main">
@@ -1467,7 +1112,12 @@
           </a:p>
           <a:p xmlns:a="http://schemas.openxmlformats.org/drawingml/2006/main">
             <a:r>
-              <a:t>讲义位置：本课讲义；见逐页母稿映射表</a:t>
+              <a:t>讲述与校准：</a:t>
+            </a:r>
+          </a:p>
+          <a:p xmlns:a="http://schemas.openxmlformats.org/drawingml/2006/main">
+            <a:r>
+              <a:t>方案诊所按命题与证据内容检查，允许主文档合并。早期试探影响问题与协议的记录应保留；反馈处理引用同一判断 ID。</a:t>
             </a:r>
           </a:p>
           <a:p xmlns:a="http://schemas.openxmlformats.org/drawingml/2006/main">
@@ -1477,12 +1127,7 @@
           </a:p>
           <a:p xmlns:a="http://schemas.openxmlformats.org/drawingml/2006/main">
             <a:r>
-              <a:t>屏显核对：</a:t>
-            </a:r>
-          </a:p>
-          <a:p xmlns:a="http://schemas.openxmlformats.org/drawingml/2006/main">
-            <a:r>
-              <a:t>方案陈述 → 同伴质询 → 作者决策 → 下一步行动</a:t>
+              <a:t>回收陈述、质询、决策和行动回写，不新增正式提交。</a:t>
             </a:r>
           </a:p>
           <a:p xmlns:a="http://schemas.openxmlformats.org/drawingml/2006/main">
@@ -1492,22 +1137,12 @@
           </a:p>
           <a:p xmlns:a="http://schemas.openxmlformats.org/drawingml/2006/main">
             <a:r>
-              <a:t>- 用最小结构暴露问题、证据、机制与实验；</a:t>
-            </a:r>
-          </a:p>
-          <a:p xmlns:a="http://schemas.openxmlformats.org/drawingml/2006/main">
-            <a:r>
-              <a:t>- 同伴按诊断维度提问，不替作者决定；</a:t>
-            </a:r>
-          </a:p>
-          <a:p xmlns:a="http://schemas.openxmlformats.org/drawingml/2006/main">
-            <a:r>
-              <a:t>- 作者逐条选择采纳、澄清、补证、暂缓或保留异议，并记理由与位置；</a:t>
-            </a:r>
-          </a:p>
-          <a:p xmlns:a="http://schemas.openxmlformats.org/drawingml/2006/main">
-            <a:r>
-              <a:t>- 把反馈落到判断门工件和实验计划。</a:t>
+              <a:t>学生动作：</a:t>
+            </a:r>
+          </a:p>
+          <a:p xmlns:a="http://schemas.openxmlformats.org/drawingml/2006/main">
+            <a:r>
+              <a:t>学生说出一条已决定采纳或暂缓的反馈。</a:t>
             </a:r>
           </a:p>
           <a:p xmlns:a="http://schemas.openxmlformats.org/drawingml/2006/main">
@@ -1517,7 +1152,7 @@
           </a:p>
           <a:p xmlns:a="http://schemas.openxmlformats.org/drawingml/2006/main">
             <a:r>
-              <a:t>&gt; 反馈是诊断输入；是否采纳以及如何修改，必须由作者记录并承担。</a:t>
+              <a:t>课堂安排：按 teaching-plan.md 专用课堂时段安排；换场计入对应时段。</a:t>
             </a:r>
           </a:p>
           <a:p xmlns:a="http://schemas.openxmlformats.org/drawingml/2006/main">
@@ -1527,12 +1162,12 @@
           </a:p>
           <a:p xmlns:a="http://schemas.openxmlformats.org/drawingml/2006/main">
             <a:r>
-              <a:t>教师讲述：</a:t>
-            </a:r>
-          </a:p>
-          <a:p xmlns:a="http://schemas.openxmlformats.org/drawingml/2006/main">
-            <a:r>
-              <a:t>回收陈述、质询、决策和行动回写，不新增正式提交。</a:t>
+              <a:t>[Sources]</a:t>
+            </a:r>
+          </a:p>
+          <a:p xmlns:a="http://schemas.openxmlformats.org/drawingml/2006/main">
+            <a:r>
+              <a:t>讲义 §二-§五；[assignments.md](../../course/assignments.md) 形成性反馈边界。</a:t>
             </a:r>
           </a:p>
           <a:p xmlns:a="http://schemas.openxmlformats.org/drawingml/2006/main">
@@ -1542,72 +1177,7 @@
           </a:p>
           <a:p xmlns:a="http://schemas.openxmlformats.org/drawingml/2006/main">
             <a:r>
-              <a:t>学生动作：</a:t>
-            </a:r>
-          </a:p>
-          <a:p xmlns:a="http://schemas.openxmlformats.org/drawingml/2006/main">
-            <a:r>
-              <a:t>学生说出一条已决定采纳或暂缓的反馈。</a:t>
-            </a:r>
-          </a:p>
-          <a:p xmlns:a="http://schemas.openxmlformats.org/drawingml/2006/main">
-            <a:r>
-              <a:t/>
-            </a:r>
-          </a:p>
-          <a:p xmlns:a="http://schemas.openxmlformats.org/drawingml/2006/main">
-            <a:r>
-              <a:t>来源与边界：</a:t>
-            </a:r>
-          </a:p>
-          <a:p xmlns:a="http://schemas.openxmlformats.org/drawingml/2006/main">
-            <a:r>
-              <a:t>讲义 §二-§五；[assignments.md](../../course/assignments.md) 形成性反馈边界。</a:t>
-            </a:r>
-          </a:p>
-          <a:p xmlns:a="http://schemas.openxmlformats.org/drawingml/2006/main">
-            <a:r>
-              <a:t/>
-            </a:r>
-          </a:p>
-          <a:p xmlns:a="http://schemas.openxmlformats.org/drawingml/2006/main">
-            <a:r>
-              <a:t>---</a:t>
-            </a:r>
-          </a:p>
-          <a:p xmlns:a="http://schemas.openxmlformats.org/drawingml/2006/main">
-            <a:r>
-              <a:t/>
-            </a:r>
-          </a:p>
-          <a:p xmlns:a="http://schemas.openxmlformats.org/drawingml/2006/main">
-            <a:r>
-              <a:t>[Sources]</a:t>
-            </a:r>
-          </a:p>
-          <a:p xmlns:a="http://schemas.openxmlformats.org/drawingml/2006/main">
-            <a:r>
-              <a:t/>
-            </a:r>
-          </a:p>
-          <a:p xmlns:a="http://schemas.openxmlformats.org/drawingml/2006/main">
-            <a:r>
-              <a:t>- 本课 handout.md 与 slides.md</a:t>
-            </a:r>
-          </a:p>
-          <a:p xmlns:a="http://schemas.openxmlformats.org/drawingml/2006/main">
-            <a:r>
-              <a:t/>
-            </a:r>
-          </a:p>
-          <a:p xmlns:a="http://schemas.openxmlformats.org/drawingml/2006/main">
-            <a:r>
-              <a:t>- ../../course/reading-card-case.md</a:t>
-            </a:r>
-          </a:p>
-          <a:p xmlns:a="http://schemas.openxmlformats.org/drawingml/2006/main">
-            <a:r>
-              <a:t/>
+              <a:t>本课 handout.md、judgment-task.md；../../course/judgment-path.md。</a:t>
             </a:r>
           </a:p>
           <a:p xmlns:a="http://schemas.openxmlformats.org/drawingml/2006/main">
@@ -1682,7 +1252,7 @@
           <a:lstStyle xmlns:a="http://schemas.openxmlformats.org/drawingml/2006/main"/>
           <a:p xmlns:a="http://schemas.openxmlformats.org/drawingml/2006/main">
             <a:r>
-              <a:t>页面：P15 退出卡：把今天的反馈变成第 9 课的最小行动</a:t>
+              <a:t>页面：P15 保留本课决定，准备下一课输入</a:t>
             </a:r>
           </a:p>
           <a:p xmlns:a="http://schemas.openxmlformats.org/drawingml/2006/main">
@@ -1692,7 +1262,12 @@
           </a:p>
           <a:p xmlns:a="http://schemas.openxmlformats.org/drawingml/2006/main">
             <a:r>
-              <a:t>讲义位置：本课讲义；见逐页母稿映射表</a:t>
+              <a:t>讲述与校准：</a:t>
+            </a:r>
+          </a:p>
+          <a:p xmlns:a="http://schemas.openxmlformats.org/drawingml/2006/main">
+            <a:r>
+              <a:t>补齐诊所修订，准备可执行输入与 baseline，不另做汇报文档。 每课课外最多60分钟；详见讲义。</a:t>
             </a:r>
           </a:p>
           <a:p xmlns:a="http://schemas.openxmlformats.org/drawingml/2006/main">
@@ -1702,32 +1277,12 @@
           </a:p>
           <a:p xmlns:a="http://schemas.openxmlformats.org/drawingml/2006/main">
             <a:r>
-              <a:t>屏显核对：</a:t>
-            </a:r>
-          </a:p>
-          <a:p xmlns:a="http://schemas.openxmlformats.org/drawingml/2006/main">
-            <a:r>
-              <a:t>退出卡：</a:t>
-            </a:r>
-          </a:p>
-          <a:p xmlns:a="http://schemas.openxmlformats.org/drawingml/2006/main">
-            <a:r>
-              <a:t>- 我的方案在 rubric 哪一维度最薄弱？边界限定是否仍清楚？</a:t>
-            </a:r>
-          </a:p>
-          <a:p xmlns:a="http://schemas.openxmlformats.org/drawingml/2006/main">
-            <a:r>
-              <a:t>- 我收到的一条最可执行的反馈是什么？</a:t>
-            </a:r>
-          </a:p>
-          <a:p xmlns:a="http://schemas.openxmlformats.org/drawingml/2006/main">
-            <a:r>
-              <a:t>- 我对这条反馈采取了什么处理动作？理由与回写位置是什么？</a:t>
-            </a:r>
-          </a:p>
-          <a:p xmlns:a="http://schemas.openxmlformats.org/drawingml/2006/main">
-            <a:r>
-              <a:t>- 第 9 课判断门前我要补的最小集合是什么？</a:t>
+              <a:t>学生动作：</a:t>
+            </a:r>
+          </a:p>
+          <a:p xmlns:a="http://schemas.openxmlformats.org/drawingml/2006/main">
+            <a:r>
+              <a:t>定位实际工件与下一项动作；按既定预算收口。</a:t>
             </a:r>
           </a:p>
           <a:p xmlns:a="http://schemas.openxmlformats.org/drawingml/2006/main">
@@ -1737,27 +1292,7 @@
           </a:p>
           <a:p xmlns:a="http://schemas.openxmlformats.org/drawingml/2006/main">
             <a:r>
-              <a:t>第 9 课预告：</a:t>
-            </a:r>
-          </a:p>
-          <a:p xmlns:a="http://schemas.openxmlformats.org/drawingml/2006/main">
-            <a:r>
-              <a:t>- 运行 baseline，完善实验规格</a:t>
-            </a:r>
-          </a:p>
-          <a:p xmlns:a="http://schemas.openxmlformats.org/drawingml/2006/main">
-            <a:r>
-              <a:t>- 完成复现说明与环境记录</a:t>
-            </a:r>
-          </a:p>
-          <a:p xmlns:a="http://schemas.openxmlformats.org/drawingml/2006/main">
-            <a:r>
-              <a:t>- 把研究判断追溯到机制假设和证据地图</a:t>
-            </a:r>
-          </a:p>
-          <a:p xmlns:a="http://schemas.openxmlformats.org/drawingml/2006/main">
-            <a:r>
-              <a:t>- 提交判断门材料包</a:t>
+              <a:t>课堂安排：按 teaching-plan.md 专用课堂时段安排；换场计入对应时段。</a:t>
             </a:r>
           </a:p>
           <a:p xmlns:a="http://schemas.openxmlformats.org/drawingml/2006/main">
@@ -1767,7 +1302,12 @@
           </a:p>
           <a:p xmlns:a="http://schemas.openxmlformats.org/drawingml/2006/main">
             <a:r>
-              <a:t>&gt; 本课不新增课后正式作业。产出在第 9 课随判断门统一检查。</a:t>
+              <a:t>[Sources]</a:t>
+            </a:r>
+          </a:p>
+          <a:p xmlns:a="http://schemas.openxmlformats.org/drawingml/2006/main">
+            <a:r>
+              <a:t>讲义 §学习目标；[assignments.md](../../course/assignments.md) Checkpoint 2 与"第 8 课"段；第 9 课见 [备课规划.md](../备课规划.md) 第 9 课段。</a:t>
             </a:r>
           </a:p>
           <a:p xmlns:a="http://schemas.openxmlformats.org/drawingml/2006/main">
@@ -1777,77 +1317,7 @@
           </a:p>
           <a:p xmlns:a="http://schemas.openxmlformats.org/drawingml/2006/main">
             <a:r>
-              <a:t>教师讲述：</a:t>
-            </a:r>
-          </a:p>
-          <a:p xmlns:a="http://schemas.openxmlformats.org/drawingml/2006/main">
-            <a:r>
-              <a:t>退出卡让学生把今天的反馈和第 9 课判断门的缺口对接。第 9 课预告强调判断门材料包的迁移路径：从轻量脚手架迁移到 project-template.md，且不丢失 AI 使用记录和伦理说明。</a:t>
-            </a:r>
-          </a:p>
-          <a:p xmlns:a="http://schemas.openxmlformats.org/drawingml/2006/main">
-            <a:r>
-              <a:t/>
-            </a:r>
-          </a:p>
-          <a:p xmlns:a="http://schemas.openxmlformats.org/drawingml/2006/main">
-            <a:r>
-              <a:t>学生动作：</a:t>
-            </a:r>
-          </a:p>
-          <a:p xmlns:a="http://schemas.openxmlformats.org/drawingml/2006/main">
-            <a:r>
-              <a:t>学生填写退出卡。</a:t>
-            </a:r>
-          </a:p>
-          <a:p xmlns:a="http://schemas.openxmlformats.org/drawingml/2006/main">
-            <a:r>
-              <a:t/>
-            </a:r>
-          </a:p>
-          <a:p xmlns:a="http://schemas.openxmlformats.org/drawingml/2006/main">
-            <a:r>
-              <a:t>来源与边界：</a:t>
-            </a:r>
-          </a:p>
-          <a:p xmlns:a="http://schemas.openxmlformats.org/drawingml/2006/main">
-            <a:r>
-              <a:t>讲义 §学习目标；[assignments.md](../../course/assignments.md) Checkpoint 2 与"第 8 课"段；第 9 课见 [备课规划.md](../备课规划.md) 第 9 课段。</a:t>
-            </a:r>
-          </a:p>
-          <a:p xmlns:a="http://schemas.openxmlformats.org/drawingml/2006/main">
-            <a:r>
-              <a:t/>
-            </a:r>
-          </a:p>
-          <a:p xmlns:a="http://schemas.openxmlformats.org/drawingml/2006/main">
-            <a:r>
-              <a:t>[Sources]</a:t>
-            </a:r>
-          </a:p>
-          <a:p xmlns:a="http://schemas.openxmlformats.org/drawingml/2006/main">
-            <a:r>
-              <a:t/>
-            </a:r>
-          </a:p>
-          <a:p xmlns:a="http://schemas.openxmlformats.org/drawingml/2006/main">
-            <a:r>
-              <a:t>- 本课 handout.md 与 slides.md</a:t>
-            </a:r>
-          </a:p>
-          <a:p xmlns:a="http://schemas.openxmlformats.org/drawingml/2006/main">
-            <a:r>
-              <a:t/>
-            </a:r>
-          </a:p>
-          <a:p xmlns:a="http://schemas.openxmlformats.org/drawingml/2006/main">
-            <a:r>
-              <a:t>- ../../course/reading-card-case.md</a:t>
-            </a:r>
-          </a:p>
-          <a:p xmlns:a="http://schemas.openxmlformats.org/drawingml/2006/main">
-            <a:r>
-              <a:t/>
+              <a:t>本课 handout.md、judgment-task.md；../../course/judgment-path.md。教学构造仅用于方法判断；本人结果以实际记录为准。</a:t>
             </a:r>
           </a:p>
           <a:p xmlns:a="http://schemas.openxmlformats.org/drawingml/2006/main">
@@ -1922,7 +1392,7 @@
           <a:lstStyle xmlns:a="http://schemas.openxmlformats.org/drawingml/2006/main"/>
           <a:p xmlns:a="http://schemas.openxmlformats.org/drawingml/2006/main">
             <a:r>
-              <a:t>页面：P02 第 7 课之后，内部工件还没有经受外部质询</a:t>
+              <a:t>页面：P02 质询是否改变研究决定</a:t>
             </a:r>
           </a:p>
           <a:p xmlns:a="http://schemas.openxmlformats.org/drawingml/2006/main">
@@ -1932,7 +1402,12 @@
           </a:p>
           <a:p xmlns:a="http://schemas.openxmlformats.org/drawingml/2006/main">
             <a:r>
-              <a:t>讲义位置：本课讲义；见逐页母稿映射表</a:t>
+              <a:t>讲述与校准：</a:t>
+            </a:r>
+          </a:p>
+          <a:p xmlns:a="http://schemas.openxmlformats.org/drawingml/2006/main">
+            <a:r>
+              <a:t>先独立作答，再同伴比较；以下依据只在校准时揭示。</a:t>
             </a:r>
           </a:p>
           <a:p xmlns:a="http://schemas.openxmlformats.org/drawingml/2006/main">
@@ -1942,27 +1417,7 @@
           </a:p>
           <a:p xmlns:a="http://schemas.openxmlformats.org/drawingml/2006/main">
             <a:r>
-              <a:t>屏显核对：</a:t>
-            </a:r>
-          </a:p>
-          <a:p xmlns:a="http://schemas.openxmlformats.org/drawingml/2006/main">
-            <a:r>
-              <a:t>第 7 课已建立：</a:t>
-            </a:r>
-          </a:p>
-          <a:p xmlns:a="http://schemas.openxmlformats.org/drawingml/2006/main">
-            <a:r>
-              <a:t>- 机制假设列表（含淘汰理由）</a:t>
-            </a:r>
-          </a:p>
-          <a:p xmlns:a="http://schemas.openxmlformats.org/drawingml/2006/main">
-            <a:r>
-              <a:t>- 研究判断记录初版</a:t>
-            </a:r>
-          </a:p>
-          <a:p xmlns:a="http://schemas.openxmlformats.org/drawingml/2006/main">
-            <a:r>
-              <a:t>- 实验规格草图（变量、baseline、停止条件、失败预案）</a:t>
+              <a:t>B 对当前说明成立，并要求作者定位反馈用途。A 指出范围窄但超出预算，宜先限定范围；C 对确定性回放的要求不匹配，可澄清输入版本和散列。也可接受 A 的范围提醒而拒绝扩大规模的处方。</a:t>
             </a:r>
           </a:p>
           <a:p xmlns:a="http://schemas.openxmlformats.org/drawingml/2006/main">
@@ -1972,22 +1427,12 @@
           </a:p>
           <a:p xmlns:a="http://schemas.openxmlformats.org/drawingml/2006/main">
             <a:r>
-              <a:t>仍未做：</a:t>
-            </a:r>
-          </a:p>
-          <a:p xmlns:a="http://schemas.openxmlformats.org/drawingml/2006/main">
-            <a:r>
-              <a:t>- 让方案经受外部质询</a:t>
-            </a:r>
-          </a:p>
-          <a:p xmlns:a="http://schemas.openxmlformats.org/drawingml/2006/main">
-            <a:r>
-              <a:t>- 把反馈转为可追溯的采纳决策</a:t>
-            </a:r>
-          </a:p>
-          <a:p xmlns:a="http://schemas.openxmlformats.org/drawingml/2006/main">
-            <a:r>
-              <a:t>- 对照第 9 课判断门条件预检</a:t>
+              <a:t>学生动作：</a:t>
+            </a:r>
+          </a:p>
+          <a:p xmlns:a="http://schemas.openxmlformats.org/drawingml/2006/main">
+            <a:r>
+              <a:t>先独立写决定和证据，后同伴比较；校准后再回写。</a:t>
             </a:r>
           </a:p>
           <a:p xmlns:a="http://schemas.openxmlformats.org/drawingml/2006/main">
@@ -1997,7 +1442,7 @@
           </a:p>
           <a:p xmlns:a="http://schemas.openxmlformats.org/drawingml/2006/main">
             <a:r>
-              <a:t>&gt; 内部工件成立 ≠ 经外部质询仍成立。</a:t>
+              <a:t>课堂安排：按 teaching-plan.md 专用课堂时段安排；换场计入对应时段。</a:t>
             </a:r>
           </a:p>
           <a:p xmlns:a="http://schemas.openxmlformats.org/drawingml/2006/main">
@@ -2007,12 +1452,12 @@
           </a:p>
           <a:p xmlns:a="http://schemas.openxmlformats.org/drawingml/2006/main">
             <a:r>
-              <a:t>教师讲述：</a:t>
-            </a:r>
-          </a:p>
-          <a:p xmlns:a="http://schemas.openxmlformats.org/drawingml/2006/main">
-            <a:r>
-              <a:t>回扣第 7 课：机制假设和实验规格草图都是自己写的，自己看着成立。本课让同伴按 rubric 检查问题重要性、证据充分性、可检验性和课程周期可行性，把反馈转为采纳决策。范围、非例和适用边界仍在陈述与决策中横切检查。</a:t>
+              <a:t>[Sources]</a:t>
+            </a:r>
+          </a:p>
+          <a:p xmlns:a="http://schemas.openxmlformats.org/drawingml/2006/main">
+            <a:r>
+              <a:t>回扣第 7 课讲义与 [assignments.md](../../course/assignments.md) 第 9 课判断门条件。</a:t>
             </a:r>
           </a:p>
           <a:p xmlns:a="http://schemas.openxmlformats.org/drawingml/2006/main">
@@ -2022,127 +1467,7 @@
           </a:p>
           <a:p xmlns:a="http://schemas.openxmlformats.org/drawingml/2006/main">
             <a:r>
-              <a:t>学生动作：</a:t>
-            </a:r>
-          </a:p>
-          <a:p xmlns:a="http://schemas.openxmlformats.org/drawingml/2006/main">
-            <a:r>
-              <a:t>快问：你第 7 课的实验规格草图中，baseline 的控制变量清单列全了吗？只听回答，不评价。</a:t>
-            </a:r>
-          </a:p>
-          <a:p xmlns:a="http://schemas.openxmlformats.org/drawingml/2006/main">
-            <a:r>
-              <a:t/>
-            </a:r>
-          </a:p>
-          <a:p xmlns:a="http://schemas.openxmlformats.org/drawingml/2006/main">
-            <a:r>
-              <a:t>本课板书、诊断与串词：</a:t>
-            </a:r>
-          </a:p>
-          <a:p xmlns:a="http://schemas.openxmlformats.org/drawingml/2006/main">
-            <a:r>
-              <a:t>本节替换同类口头提示，不增加既有时段。开场诊断嵌入现有开场/回顾，后续再沿原实践时段操作。</a:t>
-            </a:r>
-          </a:p>
-          <a:p xmlns:a="http://schemas.openxmlformats.org/drawingml/2006/main">
-            <a:r>
-              <a:t/>
-            </a:r>
-          </a:p>
-          <a:p xmlns:a="http://schemas.openxmlformats.org/drawingml/2006/main">
-            <a:r>
-              <a:t>- **板书主线**：定位 → 问题 → 影响 → 动作 → 作者决定。</a:t>
-            </a:r>
-          </a:p>
-          <a:p xmlns:a="http://schemas.openxmlformats.org/drawingml/2006/main">
-            <a:r>
-              <a:t>- **诊断问题**：“再严谨一点”具体改变什么？</a:t>
-            </a:r>
-          </a:p>
-          <a:p xmlns:a="http://schemas.openxmlformats.org/drawingml/2006/main">
-            <a:r>
-              <a:t>- **预期回答**：需指出位置和缺口，如评分者可见组别，再给修订动作。</a:t>
-            </a:r>
-          </a:p>
-          <a:p xmlns:a="http://schemas.openxmlformats.org/drawingml/2006/main">
-            <a:r>
-              <a:t>- **常见误答后的追问**：若反馈不可执行，追问作者将修改哪个字段。</a:t>
-            </a:r>
-          </a:p>
-          <a:p xmlns:a="http://schemas.openxmlformats.org/drawingml/2006/main">
-            <a:r>
-              <a:t>- **过渡串词**：“反馈落到文件后，第9课再补完整规格与公平baseline。”</a:t>
-            </a:r>
-          </a:p>
-          <a:p xmlns:a="http://schemas.openxmlformats.org/drawingml/2006/main">
-            <a:r>
-              <a:t>- **当堂最小产出**：一条实际反馈、作者处理理由和一处修改。</a:t>
-            </a:r>
-          </a:p>
-          <a:p xmlns:a="http://schemas.openxmlformats.org/drawingml/2006/main">
-            <a:r>
-              <a:t>- **退出记录**：写“已完成的动作、本人项目仍缺的证据/工件、下次补齐位置”。使用教师包时标明课堂方法练习，不能据此宣称本人研究门通过；正式提交课次仍为第 6、9、13、16 课。</a:t>
-            </a:r>
-          </a:p>
-          <a:p xmlns:a="http://schemas.openxmlformats.org/drawingml/2006/main">
-            <a:r>
-              <a:t/>
-            </a:r>
-          </a:p>
-          <a:p xmlns:a="http://schemas.openxmlformats.org/drawingml/2006/main">
-            <a:r>
-              <a:t>来源与边界：</a:t>
-            </a:r>
-          </a:p>
-          <a:p xmlns:a="http://schemas.openxmlformats.org/drawingml/2006/main">
-            <a:r>
-              <a:t>回扣第 7 课讲义与 [assignments.md](../../course/assignments.md) 第 9 课判断门条件。</a:t>
-            </a:r>
-          </a:p>
-          <a:p xmlns:a="http://schemas.openxmlformats.org/drawingml/2006/main">
-            <a:r>
-              <a:t/>
-            </a:r>
-          </a:p>
-          <a:p xmlns:a="http://schemas.openxmlformats.org/drawingml/2006/main">
-            <a:r>
-              <a:t>---</a:t>
-            </a:r>
-          </a:p>
-          <a:p xmlns:a="http://schemas.openxmlformats.org/drawingml/2006/main">
-            <a:r>
-              <a:t/>
-            </a:r>
-          </a:p>
-          <a:p xmlns:a="http://schemas.openxmlformats.org/drawingml/2006/main">
-            <a:r>
-              <a:t>[Sources]</a:t>
-            </a:r>
-          </a:p>
-          <a:p xmlns:a="http://schemas.openxmlformats.org/drawingml/2006/main">
-            <a:r>
-              <a:t/>
-            </a:r>
-          </a:p>
-          <a:p xmlns:a="http://schemas.openxmlformats.org/drawingml/2006/main">
-            <a:r>
-              <a:t>- 本课 handout.md 与 slides.md</a:t>
-            </a:r>
-          </a:p>
-          <a:p xmlns:a="http://schemas.openxmlformats.org/drawingml/2006/main">
-            <a:r>
-              <a:t/>
-            </a:r>
-          </a:p>
-          <a:p xmlns:a="http://schemas.openxmlformats.org/drawingml/2006/main">
-            <a:r>
-              <a:t>- ../../course/reading-card-case.md</a:t>
-            </a:r>
-          </a:p>
-          <a:p xmlns:a="http://schemas.openxmlformats.org/drawingml/2006/main">
-            <a:r>
-              <a:t/>
+              <a:t>本课 handout.md、judgment-task.md；../../course/judgment-path.md。教学构造仅用于方法判断；本人结果以实际记录为准。</a:t>
             </a:r>
           </a:p>
           <a:p xmlns:a="http://schemas.openxmlformats.org/drawingml/2006/main">
@@ -2227,7 +1552,12 @@
           </a:p>
           <a:p xmlns:a="http://schemas.openxmlformats.org/drawingml/2006/main">
             <a:r>
-              <a:t>讲义位置：本课讲义；见逐页母稿映射表</a:t>
+              <a:t>讲述与校准：</a:t>
+            </a:r>
+          </a:p>
+          <a:p xmlns:a="http://schemas.openxmlformats.org/drawingml/2006/main">
+            <a:r>
+              <a:t>明确边界：本课建立可复盘的"陈述—反馈—决策—预检"链路，不是完成研究提案。采纳决策当场写，不课后补。本课产出在第 9 课判断门作为"第 8 课同伴反馈处理记录"和"至少 2 条研究判断"两项材料被检查。</a:t>
             </a:r>
           </a:p>
           <a:p xmlns:a="http://schemas.openxmlformats.org/drawingml/2006/main">
@@ -2237,12 +1567,12 @@
           </a:p>
           <a:p xmlns:a="http://schemas.openxmlformats.org/drawingml/2006/main">
             <a:r>
-              <a:t>屏显核对：</a:t>
-            </a:r>
-          </a:p>
-          <a:p xmlns:a="http://schemas.openxmlformats.org/drawingml/2006/main">
-            <a:r>
-              <a:t>完成本课后，你能：</a:t>
+              <a:t>学生动作：</a:t>
+            </a:r>
+          </a:p>
+          <a:p xmlns:a="http://schemas.openxmlformats.org/drawingml/2006/main">
+            <a:r>
+              <a:t>无。</a:t>
             </a:r>
           </a:p>
           <a:p xmlns:a="http://schemas.openxmlformats.org/drawingml/2006/main">
@@ -2252,32 +1582,7 @@
           </a:p>
           <a:p xmlns:a="http://schemas.openxmlformats.org/drawingml/2006/main">
             <a:r>
-              <a:t>1. 用限时五段结构表达研究方案；</a:t>
-            </a:r>
-          </a:p>
-          <a:p xmlns:a="http://schemas.openxmlformats.org/drawingml/2006/main">
-            <a:r>
-              <a:t>2. 用“四个诊断维度 + 一个行动性检查”和三问格式给出结构化反馈；</a:t>
-            </a:r>
-          </a:p>
-          <a:p xmlns:a="http://schemas.openxmlformats.org/drawingml/2006/main">
-            <a:r>
-              <a:t>3. 区分设计诊所与评分打分；</a:t>
-            </a:r>
-          </a:p>
-          <a:p xmlns:a="http://schemas.openxmlformats.org/drawingml/2006/main">
-            <a:r>
-              <a:t>4. 根据真实反馈选择采纳、澄清、补证、暂缓或保留异议；</a:t>
-            </a:r>
-          </a:p>
-          <a:p xmlns:a="http://schemas.openxmlformats.org/drawingml/2006/main">
-            <a:r>
-              <a:t>5. 对照第 9 课判断门条件预检；</a:t>
-            </a:r>
-          </a:p>
-          <a:p xmlns:a="http://schemas.openxmlformats.org/drawingml/2006/main">
-            <a:r>
-              <a:t>6. 说明 AI 只作反馈线索，不作决策。</a:t>
+              <a:t>课堂安排：按 teaching-plan.md 专用课堂时段安排；换场计入对应时段。</a:t>
             </a:r>
           </a:p>
           <a:p xmlns:a="http://schemas.openxmlformats.org/drawingml/2006/main">
@@ -2287,7 +1592,12 @@
           </a:p>
           <a:p xmlns:a="http://schemas.openxmlformats.org/drawingml/2006/main">
             <a:r>
-              <a:t>课堂最低产出：每人陈述一次、获得至少两条同伴反馈、处理至少两条反馈，并完成一处现场修订。</a:t>
+              <a:t>[Sources]</a:t>
+            </a:r>
+          </a:p>
+          <a:p xmlns:a="http://schemas.openxmlformats.org/drawingml/2006/main">
+            <a:r>
+              <a:t>[备课规划.md](../备课规划.md) 第 8 课目标段；[assignments.md](../../course/assignments.md) "第 8 课"段与 Checkpoint 2 判断门条件。</a:t>
             </a:r>
           </a:p>
           <a:p xmlns:a="http://schemas.openxmlformats.org/drawingml/2006/main">
@@ -2297,97 +1607,7 @@
           </a:p>
           <a:p xmlns:a="http://schemas.openxmlformats.org/drawingml/2006/main">
             <a:r>
-              <a:t>&gt; 本课不正式提交，产出是第 9 课判断门直接输入。</a:t>
-            </a:r>
-          </a:p>
-          <a:p xmlns:a="http://schemas.openxmlformats.org/drawingml/2006/main">
-            <a:r>
-              <a:t/>
-            </a:r>
-          </a:p>
-          <a:p xmlns:a="http://schemas.openxmlformats.org/drawingml/2006/main">
-            <a:r>
-              <a:t>教师讲述：</a:t>
-            </a:r>
-          </a:p>
-          <a:p xmlns:a="http://schemas.openxmlformats.org/drawingml/2006/main">
-            <a:r>
-              <a:t>明确边界：本课建立可复盘的"陈述—反馈—决策—预检"链路，不是完成研究提案。采纳决策当场写，不课后补。本课产出在第 9 课判断门作为"第 8 课同伴反馈处理记录"和"至少 2 条研究判断"两项材料被检查。</a:t>
-            </a:r>
-          </a:p>
-          <a:p xmlns:a="http://schemas.openxmlformats.org/drawingml/2006/main">
-            <a:r>
-              <a:t/>
-            </a:r>
-          </a:p>
-          <a:p xmlns:a="http://schemas.openxmlformats.org/drawingml/2006/main">
-            <a:r>
-              <a:t>学生动作：</a:t>
-            </a:r>
-          </a:p>
-          <a:p xmlns:a="http://schemas.openxmlformats.org/drawingml/2006/main">
-            <a:r>
-              <a:t>无。</a:t>
-            </a:r>
-          </a:p>
-          <a:p xmlns:a="http://schemas.openxmlformats.org/drawingml/2006/main">
-            <a:r>
-              <a:t/>
-            </a:r>
-          </a:p>
-          <a:p xmlns:a="http://schemas.openxmlformats.org/drawingml/2006/main">
-            <a:r>
-              <a:t>来源与边界：</a:t>
-            </a:r>
-          </a:p>
-          <a:p xmlns:a="http://schemas.openxmlformats.org/drawingml/2006/main">
-            <a:r>
-              <a:t>[备课规划.md](../备课规划.md) 第 8 课目标段；[assignments.md](../../course/assignments.md) "第 8 课"段与 Checkpoint 2 判断门条件。</a:t>
-            </a:r>
-          </a:p>
-          <a:p xmlns:a="http://schemas.openxmlformats.org/drawingml/2006/main">
-            <a:r>
-              <a:t/>
-            </a:r>
-          </a:p>
-          <a:p xmlns:a="http://schemas.openxmlformats.org/drawingml/2006/main">
-            <a:r>
-              <a:t>---</a:t>
-            </a:r>
-          </a:p>
-          <a:p xmlns:a="http://schemas.openxmlformats.org/drawingml/2006/main">
-            <a:r>
-              <a:t/>
-            </a:r>
-          </a:p>
-          <a:p xmlns:a="http://schemas.openxmlformats.org/drawingml/2006/main">
-            <a:r>
-              <a:t>[Sources]</a:t>
-            </a:r>
-          </a:p>
-          <a:p xmlns:a="http://schemas.openxmlformats.org/drawingml/2006/main">
-            <a:r>
-              <a:t/>
-            </a:r>
-          </a:p>
-          <a:p xmlns:a="http://schemas.openxmlformats.org/drawingml/2006/main">
-            <a:r>
-              <a:t>- 本课 handout.md 与 slides.md</a:t>
-            </a:r>
-          </a:p>
-          <a:p xmlns:a="http://schemas.openxmlformats.org/drawingml/2006/main">
-            <a:r>
-              <a:t/>
-            </a:r>
-          </a:p>
-          <a:p xmlns:a="http://schemas.openxmlformats.org/drawingml/2006/main">
-            <a:r>
-              <a:t>- ../../course/reading-card-case.md</a:t>
-            </a:r>
-          </a:p>
-          <a:p xmlns:a="http://schemas.openxmlformats.org/drawingml/2006/main">
-            <a:r>
-              <a:t/>
+              <a:t>本课 handout.md、judgment-task.md；../../course/judgment-path.md。</a:t>
             </a:r>
           </a:p>
           <a:p xmlns:a="http://schemas.openxmlformats.org/drawingml/2006/main">
@@ -2472,7 +1692,12 @@
           </a:p>
           <a:p xmlns:a="http://schemas.openxmlformats.org/drawingml/2006/main">
             <a:r>
-              <a:t>讲义位置：本课讲义；见逐页母稿映射表</a:t>
+              <a:t>讲述与校准：</a:t>
+            </a:r>
+          </a:p>
+          <a:p xmlns:a="http://schemas.openxmlformats.org/drawingml/2006/main">
+            <a:r>
+              <a:t>用贯穿案例展示从第 7 课输出到陈述稿的压缩。第 3 段含中间过程（生成时显式列出限定条件 → 输出保留更多条件），不是"会降低"。第 5 段风险具体指向 A2（标注假象），不是泛泛的"可能失败"。常见错误：第 1 段写成主题词复述，第 3 段写成结果预测——这两类让同伴无法检查边界和可检验性。完整贯穿案例五段在 P10 教师演示展开。</a:t>
             </a:r>
           </a:p>
           <a:p xmlns:a="http://schemas.openxmlformats.org/drawingml/2006/main">
@@ -2482,42 +1707,12 @@
           </a:p>
           <a:p xmlns:a="http://schemas.openxmlformats.org/drawingml/2006/main">
             <a:r>
-              <a:t>屏显核对：</a:t>
-            </a:r>
-          </a:p>
-          <a:p xmlns:a="http://schemas.openxmlformats.org/drawingml/2006/main">
-            <a:r>
-              <a:t>| 分享段落 | 要说清什么 |</a:t>
-            </a:r>
-          </a:p>
-          <a:p xmlns:a="http://schemas.openxmlformats.org/drawingml/2006/main">
-            <a:r>
-              <a:t>| --- | --- |</a:t>
-            </a:r>
-          </a:p>
-          <a:p xmlns:a="http://schemas.openxmlformats.org/drawingml/2006/main">
-            <a:r>
-              <a:t>| 研究问题 | 范围、非例、可证伪命题 |</a:t>
-            </a:r>
-          </a:p>
-          <a:p xmlns:a="http://schemas.openxmlformats.org/drawingml/2006/main">
-            <a:r>
-              <a:t>| 关键证据 | 直接测量了什么，边界在哪里 |</a:t>
-            </a:r>
-          </a:p>
-          <a:p xmlns:a="http://schemas.openxmlformats.org/drawingml/2006/main">
-            <a:r>
-              <a:t>| 机制假设 | H1 生成保留与 A2 评分提示 |</a:t>
-            </a:r>
-          </a:p>
-          <a:p xmlns:a="http://schemas.openxmlformats.org/drawingml/2006/main">
-            <a:r>
-              <a:t>| 最小验证 | 什么观察能区分两种解释 |</a:t>
-            </a:r>
-          </a:p>
-          <a:p xmlns:a="http://schemas.openxmlformats.org/drawingml/2006/main">
-            <a:r>
-              <a:t>| 最大风险 | 当前最可能卡住判断的一项 |</a:t>
+              <a:t>学生动作：</a:t>
+            </a:r>
+          </a:p>
+          <a:p xmlns:a="http://schemas.openxmlformats.org/drawingml/2006/main">
+            <a:r>
+              <a:t>让学生用自己的方案填第 1 段和第 3 段各一句；再对照指出第 5 段最大风险应该写什么。只听一个例子，不展开评价。</a:t>
             </a:r>
           </a:p>
           <a:p xmlns:a="http://schemas.openxmlformats.org/drawingml/2006/main">
@@ -2527,7 +1722,7 @@
           </a:p>
           <a:p xmlns:a="http://schemas.openxmlformats.org/drawingml/2006/main">
             <a:r>
-              <a:t>阅读卡案例：质量代价与材料范围另查。</a:t>
+              <a:t>课堂安排：按 teaching-plan.md 专用课堂时段安排；换场计入对应时段。</a:t>
             </a:r>
           </a:p>
           <a:p xmlns:a="http://schemas.openxmlformats.org/drawingml/2006/main">
@@ -2537,12 +1732,12 @@
           </a:p>
           <a:p xmlns:a="http://schemas.openxmlformats.org/drawingml/2006/main">
             <a:r>
-              <a:t>教师讲述：</a:t>
-            </a:r>
-          </a:p>
-          <a:p xmlns:a="http://schemas.openxmlformats.org/drawingml/2006/main">
-            <a:r>
-              <a:t>用贯穿案例展示从第 7 课输出到陈述稿的压缩。第 3 段含中间过程（生成时显式列出限定条件 → 输出保留更多条件），不是"会降低"。第 5 段风险具体指向 A2（标注假象），不是泛泛的"可能失败"。常见错误：第 1 段写成主题词复述，第 3 段写成结果预测——这两类让同伴无法检查边界和可检验性。完整贯穿案例五段在 P10 教师演示展开。</a:t>
+              <a:t>[Sources]</a:t>
+            </a:r>
+          </a:p>
+          <a:p xmlns:a="http://schemas.openxmlformats.org/drawingml/2006/main">
+            <a:r>
+              <a:t>讲义 §二 3 分钟陈述结构、§七 贯穿案例；Booth et al. *The Craft of Research* 5th ed. 5.5 与 10.2（[reading-list.md](../../course/reading-list.md) 第 8 课）；Peyton Jones "Writing a Great Research Proposal"（教学讲义，不作学术证据）。</a:t>
             </a:r>
           </a:p>
           <a:p xmlns:a="http://schemas.openxmlformats.org/drawingml/2006/main">
@@ -2552,72 +1747,7 @@
           </a:p>
           <a:p xmlns:a="http://schemas.openxmlformats.org/drawingml/2006/main">
             <a:r>
-              <a:t>学生动作：</a:t>
-            </a:r>
-          </a:p>
-          <a:p xmlns:a="http://schemas.openxmlformats.org/drawingml/2006/main">
-            <a:r>
-              <a:t>让学生用自己的方案填第 1 段和第 3 段各一句；再对照指出第 5 段最大风险应该写什么。只听一个例子，不展开评价。</a:t>
-            </a:r>
-          </a:p>
-          <a:p xmlns:a="http://schemas.openxmlformats.org/drawingml/2006/main">
-            <a:r>
-              <a:t/>
-            </a:r>
-          </a:p>
-          <a:p xmlns:a="http://schemas.openxmlformats.org/drawingml/2006/main">
-            <a:r>
-              <a:t>来源与边界：</a:t>
-            </a:r>
-          </a:p>
-          <a:p xmlns:a="http://schemas.openxmlformats.org/drawingml/2006/main">
-            <a:r>
-              <a:t>讲义 §二 3 分钟陈述结构、§七 贯穿案例；Booth et al. *The Craft of Research* 5th ed. 5.5 与 10.2（[reading-list.md](../../course/reading-list.md) 第 8 课）；Peyton Jones "Writing a Great Research Proposal"（教学讲义，不作学术证据）。</a:t>
-            </a:r>
-          </a:p>
-          <a:p xmlns:a="http://schemas.openxmlformats.org/drawingml/2006/main">
-            <a:r>
-              <a:t/>
-            </a:r>
-          </a:p>
-          <a:p xmlns:a="http://schemas.openxmlformats.org/drawingml/2006/main">
-            <a:r>
-              <a:t>---</a:t>
-            </a:r>
-          </a:p>
-          <a:p xmlns:a="http://schemas.openxmlformats.org/drawingml/2006/main">
-            <a:r>
-              <a:t/>
-            </a:r>
-          </a:p>
-          <a:p xmlns:a="http://schemas.openxmlformats.org/drawingml/2006/main">
-            <a:r>
-              <a:t>[Sources]</a:t>
-            </a:r>
-          </a:p>
-          <a:p xmlns:a="http://schemas.openxmlformats.org/drawingml/2006/main">
-            <a:r>
-              <a:t/>
-            </a:r>
-          </a:p>
-          <a:p xmlns:a="http://schemas.openxmlformats.org/drawingml/2006/main">
-            <a:r>
-              <a:t>- 本课 handout.md 与 slides.md</a:t>
-            </a:r>
-          </a:p>
-          <a:p xmlns:a="http://schemas.openxmlformats.org/drawingml/2006/main">
-            <a:r>
-              <a:t/>
-            </a:r>
-          </a:p>
-          <a:p xmlns:a="http://schemas.openxmlformats.org/drawingml/2006/main">
-            <a:r>
-              <a:t>- ../../course/reading-card-case.md</a:t>
-            </a:r>
-          </a:p>
-          <a:p xmlns:a="http://schemas.openxmlformats.org/drawingml/2006/main">
-            <a:r>
-              <a:t/>
+              <a:t>本课 handout.md、judgment-task.md；../../course/judgment-path.md。</a:t>
             </a:r>
           </a:p>
           <a:p xmlns:a="http://schemas.openxmlformats.org/drawingml/2006/main">
@@ -2702,7 +1832,12 @@
           </a:p>
           <a:p xmlns:a="http://schemas.openxmlformats.org/drawingml/2006/main">
             <a:r>
-              <a:t>讲义位置：本课讲义；见逐页母稿映射表</a:t>
+              <a:t>讲述与校准：</a:t>
+            </a:r>
+          </a:p>
+          <a:p xmlns:a="http://schemas.openxmlformats.org/drawingml/2006/main">
+            <a:r>
+              <a:t>rubric 先检查问题重要性、证据充分性、可检验性和课程周期可行性四个诊断维度，再检查下一步实验是否能改变研究判断。同伴不给分数、不排名，只指出"看到了什么"和"缺了什么"。适用范围和非例仍在陈述与采纳决策中检查。</a:t>
             </a:r>
           </a:p>
           <a:p xmlns:a="http://schemas.openxmlformats.org/drawingml/2006/main">
@@ -2712,37 +1847,12 @@
           </a:p>
           <a:p xmlns:a="http://schemas.openxmlformats.org/drawingml/2006/main">
             <a:r>
-              <a:t>屏显核对：</a:t>
-            </a:r>
-          </a:p>
-          <a:p xmlns:a="http://schemas.openxmlformats.org/drawingml/2006/main">
-            <a:r>
-              <a:t>| 维度 | 检查问题 | 对应判断门条件 |</a:t>
-            </a:r>
-          </a:p>
-          <a:p xmlns:a="http://schemas.openxmlformats.org/drawingml/2006/main">
-            <a:r>
-              <a:t>| --- | --- | --- |</a:t>
-            </a:r>
-          </a:p>
-          <a:p xmlns:a="http://schemas.openxmlformats.org/drawingml/2006/main">
-            <a:r>
-              <a:t>| 问题重要性 | 会改变什么判断或行动？ | 问题门说明 |</a:t>
-            </a:r>
-          </a:p>
-          <a:p xmlns:a="http://schemas.openxmlformats.org/drawingml/2006/main">
-            <a:r>
-              <a:t>| 证据充分性 | 可核验？强度、冲突、缺口清楚？ | 2 条判断含依据 |</a:t>
-            </a:r>
-          </a:p>
-          <a:p xmlns:a="http://schemas.openxmlformats.org/drawingml/2006/main">
-            <a:r>
-              <a:t>| 可检验性 | 能推翻？主／替代可区分？ | 规格含假设对应 |</a:t>
-            </a:r>
-          </a:p>
-          <a:p xmlns:a="http://schemas.openxmlformats.org/drawingml/2006/main">
-            <a:r>
-              <a:t>| 课程周期可行性 | baseline 公平？周期内能完成？ | 可执行 baseline／原型 |</a:t>
+              <a:t>学生动作：</a:t>
+            </a:r>
+          </a:p>
+          <a:p xmlns:a="http://schemas.openxmlformats.org/drawingml/2006/main">
+            <a:r>
+              <a:t>学生做 90 秒前置短写入：写下自己方案当前最弱的一个 rubric 维度，并用一句话说明理由。保存到分享页备忘或纸面上，后面与同伴反馈对照。</a:t>
             </a:r>
           </a:p>
           <a:p xmlns:a="http://schemas.openxmlformats.org/drawingml/2006/main">
@@ -2752,7 +1862,7 @@
           </a:p>
           <a:p xmlns:a="http://schemas.openxmlformats.org/drawingml/2006/main">
             <a:r>
-              <a:t>&gt; 行动性检查：下一步实验能否改变研究判断？</a:t>
+              <a:t>课堂安排：按 teaching-plan.md 专用课堂时段安排；换场计入对应时段。</a:t>
             </a:r>
           </a:p>
           <a:p xmlns:a="http://schemas.openxmlformats.org/drawingml/2006/main">
@@ -2762,7 +1872,12 @@
           </a:p>
           <a:p xmlns:a="http://schemas.openxmlformats.org/drawingml/2006/main">
             <a:r>
-              <a:t>rubric 是诊断工具，不是评分表。边界横切检查，不替代问题重要性。</a:t>
+              <a:t>[Sources]</a:t>
+            </a:r>
+          </a:p>
+          <a:p xmlns:a="http://schemas.openxmlformats.org/drawingml/2006/main">
+            <a:r>
+              <a:t>讲义 §三·1 与 §六·1；[assignments.md](../../course/assignments.md) Checkpoint 2 判断门条件。</a:t>
             </a:r>
           </a:p>
           <a:p xmlns:a="http://schemas.openxmlformats.org/drawingml/2006/main">
@@ -2772,87 +1887,7 @@
           </a:p>
           <a:p xmlns:a="http://schemas.openxmlformats.org/drawingml/2006/main">
             <a:r>
-              <a:t>教师讲述：</a:t>
-            </a:r>
-          </a:p>
-          <a:p xmlns:a="http://schemas.openxmlformats.org/drawingml/2006/main">
-            <a:r>
-              <a:t>rubric 先检查问题重要性、证据充分性、可检验性和课程周期可行性四个诊断维度，再检查下一步实验是否能改变研究判断。同伴不给分数、不排名，只指出"看到了什么"和"缺了什么"。适用范围和非例仍在陈述与采纳决策中检查。</a:t>
-            </a:r>
-          </a:p>
-          <a:p xmlns:a="http://schemas.openxmlformats.org/drawingml/2006/main">
-            <a:r>
-              <a:t/>
-            </a:r>
-          </a:p>
-          <a:p xmlns:a="http://schemas.openxmlformats.org/drawingml/2006/main">
-            <a:r>
-              <a:t>学生动作：</a:t>
-            </a:r>
-          </a:p>
-          <a:p xmlns:a="http://schemas.openxmlformats.org/drawingml/2006/main">
-            <a:r>
-              <a:t>学生做 90 秒前置短写入：写下自己方案当前最弱的一个 rubric 维度，并用一句话说明理由。保存到分享页备忘或纸面上，后面与同伴反馈对照。</a:t>
-            </a:r>
-          </a:p>
-          <a:p xmlns:a="http://schemas.openxmlformats.org/drawingml/2006/main">
-            <a:r>
-              <a:t/>
-            </a:r>
-          </a:p>
-          <a:p xmlns:a="http://schemas.openxmlformats.org/drawingml/2006/main">
-            <a:r>
-              <a:t>来源与边界：</a:t>
-            </a:r>
-          </a:p>
-          <a:p xmlns:a="http://schemas.openxmlformats.org/drawingml/2006/main">
-            <a:r>
-              <a:t>讲义 §三·1 与 §六·1；[assignments.md](../../course/assignments.md) Checkpoint 2 判断门条件。</a:t>
-            </a:r>
-          </a:p>
-          <a:p xmlns:a="http://schemas.openxmlformats.org/drawingml/2006/main">
-            <a:r>
-              <a:t/>
-            </a:r>
-          </a:p>
-          <a:p xmlns:a="http://schemas.openxmlformats.org/drawingml/2006/main">
-            <a:r>
-              <a:t>---</a:t>
-            </a:r>
-          </a:p>
-          <a:p xmlns:a="http://schemas.openxmlformats.org/drawingml/2006/main">
-            <a:r>
-              <a:t/>
-            </a:r>
-          </a:p>
-          <a:p xmlns:a="http://schemas.openxmlformats.org/drawingml/2006/main">
-            <a:r>
-              <a:t>[Sources]</a:t>
-            </a:r>
-          </a:p>
-          <a:p xmlns:a="http://schemas.openxmlformats.org/drawingml/2006/main">
-            <a:r>
-              <a:t/>
-            </a:r>
-          </a:p>
-          <a:p xmlns:a="http://schemas.openxmlformats.org/drawingml/2006/main">
-            <a:r>
-              <a:t>- 本课 handout.md 与 slides.md</a:t>
-            </a:r>
-          </a:p>
-          <a:p xmlns:a="http://schemas.openxmlformats.org/drawingml/2006/main">
-            <a:r>
-              <a:t/>
-            </a:r>
-          </a:p>
-          <a:p xmlns:a="http://schemas.openxmlformats.org/drawingml/2006/main">
-            <a:r>
-              <a:t>- ../../course/reading-card-case.md</a:t>
-            </a:r>
-          </a:p>
-          <a:p xmlns:a="http://schemas.openxmlformats.org/drawingml/2006/main">
-            <a:r>
-              <a:t/>
+              <a:t>本课 handout.md、judgment-task.md；../../course/judgment-path.md。</a:t>
             </a:r>
           </a:p>
           <a:p xmlns:a="http://schemas.openxmlformats.org/drawingml/2006/main">
@@ -2937,7 +1972,12 @@
           </a:p>
           <a:p xmlns:a="http://schemas.openxmlformats.org/drawingml/2006/main">
             <a:r>
-              <a:t>讲义位置：本课讲义；见逐页母稿映射表</a:t>
+              <a:t>讲述与校准：</a:t>
+            </a:r>
+          </a:p>
+          <a:p xmlns:a="http://schemas.openxmlformats.org/drawingml/2006/main">
+            <a:r>
+              <a:t>三问强制防止反馈发散成"我觉得都挺好的"。最强处和最大风险必须落到问题重要性、证据充分性、可检验性或课程周期可行性上。"建议"必须针对"最大风险"，并能说明它如何可能改变研究判断。</a:t>
             </a:r>
           </a:p>
           <a:p xmlns:a="http://schemas.openxmlformats.org/drawingml/2006/main">
@@ -2947,12 +1987,12 @@
           </a:p>
           <a:p xmlns:a="http://schemas.openxmlformats.org/drawingml/2006/main">
             <a:r>
-              <a:t>屏显核对：</a:t>
-            </a:r>
-          </a:p>
-          <a:p xmlns:a="http://schemas.openxmlformats.org/drawingml/2006/main">
-            <a:r>
-              <a:t>每位同伴对每位陈述者只用三问：</a:t>
+              <a:t>学生动作：</a:t>
+            </a:r>
+          </a:p>
+          <a:p xmlns:a="http://schemas.openxmlformats.org/drawingml/2006/main">
+            <a:r>
+              <a:t>让学生写一条"最大风险"，提示必须指向 rubric 维度。</a:t>
             </a:r>
           </a:p>
           <a:p xmlns:a="http://schemas.openxmlformats.org/drawingml/2006/main">
@@ -2962,17 +2002,7 @@
           </a:p>
           <a:p xmlns:a="http://schemas.openxmlformats.org/drawingml/2006/main">
             <a:r>
-              <a:t>1. **一项最强处**：方案在四维度上当前最扎实的一点（重要性不等于题目有趣）</a:t>
-            </a:r>
-          </a:p>
-          <a:p xmlns:a="http://schemas.openxmlformats.org/drawingml/2006/main">
-            <a:r>
-              <a:t>2. **一项最大风险**：方案在四维度上当前最可能不通过判断门的一点</a:t>
-            </a:r>
-          </a:p>
-          <a:p xmlns:a="http://schemas.openxmlformats.org/drawingml/2006/main">
-            <a:r>
-              <a:t>3. **一条可执行建议**：针对最大风险，下周能做的最小改进</a:t>
+              <a:t>课堂安排：按 teaching-plan.md 专用课堂时段安排；换场计入对应时段。</a:t>
             </a:r>
           </a:p>
           <a:p xmlns:a="http://schemas.openxmlformats.org/drawingml/2006/main">
@@ -2982,7 +2012,12 @@
           </a:p>
           <a:p xmlns:a="http://schemas.openxmlformats.org/drawingml/2006/main">
             <a:r>
-              <a:t>&gt; 最强处和最大风险必须落在 rubric 四维度上，不能落在"题目时髦度"或"陈述流畅度"；建议要说明下一步实验如何改变研究判断。</a:t>
+              <a:t>[Sources]</a:t>
+            </a:r>
+          </a:p>
+          <a:p xmlns:a="http://schemas.openxmlformats.org/drawingml/2006/main">
+            <a:r>
+              <a:t>讲义 §三·2。</a:t>
             </a:r>
           </a:p>
           <a:p xmlns:a="http://schemas.openxmlformats.org/drawingml/2006/main">
@@ -2992,87 +2027,7 @@
           </a:p>
           <a:p xmlns:a="http://schemas.openxmlformats.org/drawingml/2006/main">
             <a:r>
-              <a:t>教师讲述：</a:t>
-            </a:r>
-          </a:p>
-          <a:p xmlns:a="http://schemas.openxmlformats.org/drawingml/2006/main">
-            <a:r>
-              <a:t>三问强制防止反馈发散成"我觉得都挺好的"。最强处和最大风险必须落到问题重要性、证据充分性、可检验性或课程周期可行性上。"建议"必须针对"最大风险"，并能说明它如何可能改变研究判断。</a:t>
-            </a:r>
-          </a:p>
-          <a:p xmlns:a="http://schemas.openxmlformats.org/drawingml/2006/main">
-            <a:r>
-              <a:t/>
-            </a:r>
-          </a:p>
-          <a:p xmlns:a="http://schemas.openxmlformats.org/drawingml/2006/main">
-            <a:r>
-              <a:t>学生动作：</a:t>
-            </a:r>
-          </a:p>
-          <a:p xmlns:a="http://schemas.openxmlformats.org/drawingml/2006/main">
-            <a:r>
-              <a:t>让学生写一条"最大风险"，提示必须指向 rubric 维度。</a:t>
-            </a:r>
-          </a:p>
-          <a:p xmlns:a="http://schemas.openxmlformats.org/drawingml/2006/main">
-            <a:r>
-              <a:t/>
-            </a:r>
-          </a:p>
-          <a:p xmlns:a="http://schemas.openxmlformats.org/drawingml/2006/main">
-            <a:r>
-              <a:t>来源与边界：</a:t>
-            </a:r>
-          </a:p>
-          <a:p xmlns:a="http://schemas.openxmlformats.org/drawingml/2006/main">
-            <a:r>
-              <a:t>讲义 §三·2。</a:t>
-            </a:r>
-          </a:p>
-          <a:p xmlns:a="http://schemas.openxmlformats.org/drawingml/2006/main">
-            <a:r>
-              <a:t/>
-            </a:r>
-          </a:p>
-          <a:p xmlns:a="http://schemas.openxmlformats.org/drawingml/2006/main">
-            <a:r>
-              <a:t>---</a:t>
-            </a:r>
-          </a:p>
-          <a:p xmlns:a="http://schemas.openxmlformats.org/drawingml/2006/main">
-            <a:r>
-              <a:t/>
-            </a:r>
-          </a:p>
-          <a:p xmlns:a="http://schemas.openxmlformats.org/drawingml/2006/main">
-            <a:r>
-              <a:t>[Sources]</a:t>
-            </a:r>
-          </a:p>
-          <a:p xmlns:a="http://schemas.openxmlformats.org/drawingml/2006/main">
-            <a:r>
-              <a:t/>
-            </a:r>
-          </a:p>
-          <a:p xmlns:a="http://schemas.openxmlformats.org/drawingml/2006/main">
-            <a:r>
-              <a:t>- 本课 handout.md 与 slides.md</a:t>
-            </a:r>
-          </a:p>
-          <a:p xmlns:a="http://schemas.openxmlformats.org/drawingml/2006/main">
-            <a:r>
-              <a:t/>
-            </a:r>
-          </a:p>
-          <a:p xmlns:a="http://schemas.openxmlformats.org/drawingml/2006/main">
-            <a:r>
-              <a:t>- ../../course/reading-card-case.md</a:t>
-            </a:r>
-          </a:p>
-          <a:p xmlns:a="http://schemas.openxmlformats.org/drawingml/2006/main">
-            <a:r>
-              <a:t/>
+              <a:t>本课 handout.md、judgment-task.md；../../course/judgment-path.md。</a:t>
             </a:r>
           </a:p>
           <a:p xmlns:a="http://schemas.openxmlformats.org/drawingml/2006/main">
@@ -3157,7 +2112,12 @@
           </a:p>
           <a:p xmlns:a="http://schemas.openxmlformats.org/drawingml/2006/main">
             <a:r>
-              <a:t>讲义位置：本课讲义；见逐页母稿映射表</a:t>
+              <a:t>讲述与校准：</a:t>
+            </a:r>
+          </a:p>
+          <a:p xmlns:a="http://schemas.openxmlformats.org/drawingml/2006/main">
+            <a:r>
+              <a:t>反馈者不是评委，是合作诊断者。陈述者先完整记录，再按真实需要选择采纳、澄清、补证、暂缓或保留异议；每条都记理由与回写位置，不要求出现“拒绝”。</a:t>
             </a:r>
           </a:p>
           <a:p xmlns:a="http://schemas.openxmlformats.org/drawingml/2006/main">
@@ -3167,32 +2127,12 @@
           </a:p>
           <a:p xmlns:a="http://schemas.openxmlformats.org/drawingml/2006/main">
             <a:r>
-              <a:t>屏显核对：</a:t>
-            </a:r>
-          </a:p>
-          <a:p xmlns:a="http://schemas.openxmlformats.org/drawingml/2006/main">
-            <a:r>
-              <a:t>反馈者责任：</a:t>
-            </a:r>
-          </a:p>
-          <a:p xmlns:a="http://schemas.openxmlformats.org/drawingml/2006/main">
-            <a:r>
-              <a:t>- 指向方案，不指向人</a:t>
-            </a:r>
-          </a:p>
-          <a:p xmlns:a="http://schemas.openxmlformats.org/drawingml/2006/main">
-            <a:r>
-              <a:t>- 引用陈述中具体内容，不用泛化判断</a:t>
-            </a:r>
-          </a:p>
-          <a:p xmlns:a="http://schemas.openxmlformats.org/drawingml/2006/main">
-            <a:r>
-              <a:t>- 区分"我看到的缺陷"和"我会怎么改"</a:t>
-            </a:r>
-          </a:p>
-          <a:p xmlns:a="http://schemas.openxmlformats.org/drawingml/2006/main">
-            <a:r>
-              <a:t>- 不替作者决定采纳什么</a:t>
+              <a:t>学生动作：</a:t>
+            </a:r>
+          </a:p>
+          <a:p xmlns:a="http://schemas.openxmlformats.org/drawingml/2006/main">
+            <a:r>
+              <a:t>确认同伴组分组与轮次；让学生判断：如果同伴只说"听起来挺好"，缺了三问中的哪几问？</a:t>
             </a:r>
           </a:p>
           <a:p xmlns:a="http://schemas.openxmlformats.org/drawingml/2006/main">
@@ -3202,22 +2142,7 @@
           </a:p>
           <a:p xmlns:a="http://schemas.openxmlformats.org/drawingml/2006/main">
             <a:r>
-              <a:t>设计诊所三纪律：</a:t>
-            </a:r>
-          </a:p>
-          <a:p xmlns:a="http://schemas.openxmlformats.org/drawingml/2006/main">
-            <a:r>
-              <a:t>1. 诊断对象是方案，不是陈述者</a:t>
-            </a:r>
-          </a:p>
-          <a:p xmlns:a="http://schemas.openxmlformats.org/drawingml/2006/main">
-            <a:r>
-              <a:t>2. 不作共同决策</a:t>
-            </a:r>
-          </a:p>
-          <a:p xmlns:a="http://schemas.openxmlformats.org/drawingml/2006/main">
-            <a:r>
-              <a:t>3. 失败暴露优先</a:t>
+              <a:t>课堂安排：按 teaching-plan.md 专用课堂时段安排；换场计入对应时段。</a:t>
             </a:r>
           </a:p>
           <a:p xmlns:a="http://schemas.openxmlformats.org/drawingml/2006/main">
@@ -3227,7 +2152,12 @@
           </a:p>
           <a:p xmlns:a="http://schemas.openxmlformats.org/drawingml/2006/main">
             <a:r>
-              <a:t>一次诊所轮次：</a:t>
+              <a:t>[Sources]</a:t>
+            </a:r>
+          </a:p>
+          <a:p xmlns:a="http://schemas.openxmlformats.org/drawingml/2006/main">
+            <a:r>
+              <a:t>讲义 §三·3、§四·1、§四·2、§四·3。</a:t>
             </a:r>
           </a:p>
           <a:p xmlns:a="http://schemas.openxmlformats.org/drawingml/2006/main">
@@ -3237,132 +2167,7 @@
           </a:p>
           <a:p xmlns:a="http://schemas.openxmlformats.org/drawingml/2006/main">
             <a:r>
-              <a:t>| 阶段 | 动作 |</a:t>
-            </a:r>
-          </a:p>
-          <a:p xmlns:a="http://schemas.openxmlformats.org/drawingml/2006/main">
-            <a:r>
-              <a:t>| --- | --- |</a:t>
-            </a:r>
-          </a:p>
-          <a:p xmlns:a="http://schemas.openxmlformats.org/drawingml/2006/main">
-            <a:r>
-              <a:t>| 限时陈述 | 陈述者按五段结构陈述，同伴只听不插话 |</a:t>
-            </a:r>
-          </a:p>
-          <a:p xmlns:a="http://schemas.openxmlformats.org/drawingml/2006/main">
-            <a:r>
-              <a:t>| 限时反馈 | 每位同伴给出三问；陈述者只记录 |</a:t>
-            </a:r>
-          </a:p>
-          <a:p xmlns:a="http://schemas.openxmlformats.org/drawingml/2006/main">
-            <a:r>
-              <a:t/>
-            </a:r>
-          </a:p>
-          <a:p xmlns:a="http://schemas.openxmlformats.org/drawingml/2006/main">
-            <a:r>
-              <a:t>&gt; "baseline 不公平"未指明具体条目，不算合格反馈。</a:t>
-            </a:r>
-          </a:p>
-          <a:p xmlns:a="http://schemas.openxmlformats.org/drawingml/2006/main">
-            <a:r>
-              <a:t/>
-            </a:r>
-          </a:p>
-          <a:p xmlns:a="http://schemas.openxmlformats.org/drawingml/2006/main">
-            <a:r>
-              <a:t>反馈记录表字段：反馈来源 / 维度 / 最强处·最大风险·建议 / 处理动作 / 理由 / 回写位置。</a:t>
-            </a:r>
-          </a:p>
-          <a:p xmlns:a="http://schemas.openxmlformats.org/drawingml/2006/main">
-            <a:r>
-              <a:t/>
-            </a:r>
-          </a:p>
-          <a:p xmlns:a="http://schemas.openxmlformats.org/drawingml/2006/main">
-            <a:r>
-              <a:t>教师讲述：</a:t>
-            </a:r>
-          </a:p>
-          <a:p xmlns:a="http://schemas.openxmlformats.org/drawingml/2006/main">
-            <a:r>
-              <a:t>反馈者不是评委，是合作诊断者。陈述者先完整记录，再按真实需要选择采纳、澄清、补证、暂缓或保留异议；每条都记理由与回写位置，不要求出现“拒绝”。</a:t>
-            </a:r>
-          </a:p>
-          <a:p xmlns:a="http://schemas.openxmlformats.org/drawingml/2006/main">
-            <a:r>
-              <a:t/>
-            </a:r>
-          </a:p>
-          <a:p xmlns:a="http://schemas.openxmlformats.org/drawingml/2006/main">
-            <a:r>
-              <a:t>学生动作：</a:t>
-            </a:r>
-          </a:p>
-          <a:p xmlns:a="http://schemas.openxmlformats.org/drawingml/2006/main">
-            <a:r>
-              <a:t>确认同伴组分组与轮次；让学生判断：如果同伴只说"听起来挺好"，缺了三问中的哪几问？</a:t>
-            </a:r>
-          </a:p>
-          <a:p xmlns:a="http://schemas.openxmlformats.org/drawingml/2006/main">
-            <a:r>
-              <a:t/>
-            </a:r>
-          </a:p>
-          <a:p xmlns:a="http://schemas.openxmlformats.org/drawingml/2006/main">
-            <a:r>
-              <a:t>来源与边界：</a:t>
-            </a:r>
-          </a:p>
-          <a:p xmlns:a="http://schemas.openxmlformats.org/drawingml/2006/main">
-            <a:r>
-              <a:t>讲义 §三·3、§四·1、§四·2、§四·3。</a:t>
-            </a:r>
-          </a:p>
-          <a:p xmlns:a="http://schemas.openxmlformats.org/drawingml/2006/main">
-            <a:r>
-              <a:t/>
-            </a:r>
-          </a:p>
-          <a:p xmlns:a="http://schemas.openxmlformats.org/drawingml/2006/main">
-            <a:r>
-              <a:t>---</a:t>
-            </a:r>
-          </a:p>
-          <a:p xmlns:a="http://schemas.openxmlformats.org/drawingml/2006/main">
-            <a:r>
-              <a:t/>
-            </a:r>
-          </a:p>
-          <a:p xmlns:a="http://schemas.openxmlformats.org/drawingml/2006/main">
-            <a:r>
-              <a:t>[Sources]</a:t>
-            </a:r>
-          </a:p>
-          <a:p xmlns:a="http://schemas.openxmlformats.org/drawingml/2006/main">
-            <a:r>
-              <a:t/>
-            </a:r>
-          </a:p>
-          <a:p xmlns:a="http://schemas.openxmlformats.org/drawingml/2006/main">
-            <a:r>
-              <a:t>- 本课 handout.md 与 slides.md</a:t>
-            </a:r>
-          </a:p>
-          <a:p xmlns:a="http://schemas.openxmlformats.org/drawingml/2006/main">
-            <a:r>
-              <a:t/>
-            </a:r>
-          </a:p>
-          <a:p xmlns:a="http://schemas.openxmlformats.org/drawingml/2006/main">
-            <a:r>
-              <a:t>- ../../course/reading-card-case.md</a:t>
-            </a:r>
-          </a:p>
-          <a:p xmlns:a="http://schemas.openxmlformats.org/drawingml/2006/main">
-            <a:r>
-              <a:t/>
+              <a:t>本课 handout.md、judgment-task.md；../../course/judgment-path.md。</a:t>
             </a:r>
           </a:p>
           <a:p xmlns:a="http://schemas.openxmlformats.org/drawingml/2006/main">
@@ -3447,7 +2252,12 @@
           </a:p>
           <a:p xmlns:a="http://schemas.openxmlformats.org/drawingml/2006/main">
             <a:r>
-              <a:t>讲义位置：本课讲义；见逐页母稿映射表</a:t>
+              <a:t>讲述与校准：</a:t>
+            </a:r>
+          </a:p>
+          <a:p xmlns:a="http://schemas.openxmlformats.org/drawingml/2006/main">
+            <a:r>
+              <a:t>本课要求处理至少两条真实反馈，动作可相同，不强制覆盖类别。暂缓必须写明后续触发条件，保留异议必须写明证据或约束依据。</a:t>
             </a:r>
           </a:p>
           <a:p xmlns:a="http://schemas.openxmlformats.org/drawingml/2006/main">
@@ -3457,12 +2267,12 @@
           </a:p>
           <a:p xmlns:a="http://schemas.openxmlformats.org/drawingml/2006/main">
             <a:r>
-              <a:t>屏显核对：</a:t>
-            </a:r>
-          </a:p>
-          <a:p xmlns:a="http://schemas.openxmlformats.org/drawingml/2006/main">
-            <a:r>
-              <a:t>处理动作：采纳、澄清、补证、暂缓、保留异议。</a:t>
+              <a:t>学生动作：</a:t>
+            </a:r>
+          </a:p>
+          <a:p xmlns:a="http://schemas.openxmlformats.org/drawingml/2006/main">
+            <a:r>
+              <a:t>让学生用自己的反馈草写一行决策表；想：如果同伴说"baseline 不公平"但没指明，应该归入哪类？</a:t>
             </a:r>
           </a:p>
           <a:p xmlns:a="http://schemas.openxmlformats.org/drawingml/2006/main">
@@ -3472,27 +2282,7 @@
           </a:p>
           <a:p xmlns:a="http://schemas.openxmlformats.org/drawingml/2006/main">
             <a:r>
-              <a:t>示例回应：</a:t>
-            </a:r>
-          </a:p>
-          <a:p xmlns:a="http://schemas.openxmlformats.org/drawingml/2006/main">
-            <a:r>
-              <a:t>补证：H1 与 A2 仍不能区分。</a:t>
-            </a:r>
-          </a:p>
-          <a:p xmlns:a="http://schemas.openxmlformats.org/drawingml/2006/main">
-            <a:r>
-              <a:t>理由与依据：同伴指出评分者可见组别，见方案评价协议。</a:t>
-            </a:r>
-          </a:p>
-          <a:p xmlns:a="http://schemas.openxmlformats.org/drawingml/2006/main">
-            <a:r>
-              <a:t>边界与状态：当前构造包；盲化效果待验证。</a:t>
-            </a:r>
-          </a:p>
-          <a:p xmlns:a="http://schemas.openxmlformats.org/drawingml/2006/main">
-            <a:r>
-              <a:t>实际修改：第 9 课规格补入匿名顺序、统一规则与复核办法。</a:t>
+              <a:t>课堂安排：按 teaching-plan.md 专用课堂时段安排；换场计入对应时段。</a:t>
             </a:r>
           </a:p>
           <a:p xmlns:a="http://schemas.openxmlformats.org/drawingml/2006/main">
@@ -3502,7 +2292,12 @@
           </a:p>
           <a:p xmlns:a="http://schemas.openxmlformats.org/drawingml/2006/main">
             <a:r>
-              <a:t>每条回应都写明影响工件与回写位置。</a:t>
+              <a:t>[Sources]</a:t>
+            </a:r>
+          </a:p>
+          <a:p xmlns:a="http://schemas.openxmlformats.org/drawingml/2006/main">
+            <a:r>
+              <a:t>讲义 §五·1、§五·2；第 1 课 §2.6 与第 7 课 §三·2 研究判断六字段。</a:t>
             </a:r>
           </a:p>
           <a:p xmlns:a="http://schemas.openxmlformats.org/drawingml/2006/main">
@@ -3512,87 +2307,7 @@
           </a:p>
           <a:p xmlns:a="http://schemas.openxmlformats.org/drawingml/2006/main">
             <a:r>
-              <a:t>教师讲述：</a:t>
-            </a:r>
-          </a:p>
-          <a:p xmlns:a="http://schemas.openxmlformats.org/drawingml/2006/main">
-            <a:r>
-              <a:t>本课要求处理至少两条真实反馈，动作可相同，不强制覆盖类别。暂缓必须写明后续触发条件，保留异议必须写明证据或约束依据。</a:t>
-            </a:r>
-          </a:p>
-          <a:p xmlns:a="http://schemas.openxmlformats.org/drawingml/2006/main">
-            <a:r>
-              <a:t/>
-            </a:r>
-          </a:p>
-          <a:p xmlns:a="http://schemas.openxmlformats.org/drawingml/2006/main">
-            <a:r>
-              <a:t>学生动作：</a:t>
-            </a:r>
-          </a:p>
-          <a:p xmlns:a="http://schemas.openxmlformats.org/drawingml/2006/main">
-            <a:r>
-              <a:t>让学生用自己的反馈草写一行决策表；想：如果同伴说"baseline 不公平"但没指明，应该归入哪类？</a:t>
-            </a:r>
-          </a:p>
-          <a:p xmlns:a="http://schemas.openxmlformats.org/drawingml/2006/main">
-            <a:r>
-              <a:t/>
-            </a:r>
-          </a:p>
-          <a:p xmlns:a="http://schemas.openxmlformats.org/drawingml/2006/main">
-            <a:r>
-              <a:t>来源与边界：</a:t>
-            </a:r>
-          </a:p>
-          <a:p xmlns:a="http://schemas.openxmlformats.org/drawingml/2006/main">
-            <a:r>
-              <a:t>讲义 §五·1、§五·2；第 1 课 §2.6 与第 7 课 §三·2 研究判断六字段。</a:t>
-            </a:r>
-          </a:p>
-          <a:p xmlns:a="http://schemas.openxmlformats.org/drawingml/2006/main">
-            <a:r>
-              <a:t/>
-            </a:r>
-          </a:p>
-          <a:p xmlns:a="http://schemas.openxmlformats.org/drawingml/2006/main">
-            <a:r>
-              <a:t>---</a:t>
-            </a:r>
-          </a:p>
-          <a:p xmlns:a="http://schemas.openxmlformats.org/drawingml/2006/main">
-            <a:r>
-              <a:t/>
-            </a:r>
-          </a:p>
-          <a:p xmlns:a="http://schemas.openxmlformats.org/drawingml/2006/main">
-            <a:r>
-              <a:t>[Sources]</a:t>
-            </a:r>
-          </a:p>
-          <a:p xmlns:a="http://schemas.openxmlformats.org/drawingml/2006/main">
-            <a:r>
-              <a:t/>
-            </a:r>
-          </a:p>
-          <a:p xmlns:a="http://schemas.openxmlformats.org/drawingml/2006/main">
-            <a:r>
-              <a:t>- 本课 handout.md 与 slides.md</a:t>
-            </a:r>
-          </a:p>
-          <a:p xmlns:a="http://schemas.openxmlformats.org/drawingml/2006/main">
-            <a:r>
-              <a:t/>
-            </a:r>
-          </a:p>
-          <a:p xmlns:a="http://schemas.openxmlformats.org/drawingml/2006/main">
-            <a:r>
-              <a:t>- ../../course/reading-card-case.md</a:t>
-            </a:r>
-          </a:p>
-          <a:p xmlns:a="http://schemas.openxmlformats.org/drawingml/2006/main">
-            <a:r>
-              <a:t/>
+              <a:t>本课 handout.md、judgment-task.md；../../course/judgment-path.md。</a:t>
             </a:r>
           </a:p>
           <a:p xmlns:a="http://schemas.openxmlformats.org/drawingml/2006/main">
@@ -3677,7 +2392,12 @@
           </a:p>
           <a:p xmlns:a="http://schemas.openxmlformats.org/drawingml/2006/main">
             <a:r>
-              <a:t>讲义位置：本课讲义；见逐页母稿映射表</a:t>
+              <a:t>讲述与校准：</a:t>
+            </a:r>
+          </a:p>
+          <a:p xmlns:a="http://schemas.openxmlformats.org/drawingml/2006/main">
+            <a:r>
+              <a:t>AI 可以在反馈处理阶段辅助，但反馈是否成立、采纳什么、写出取舍理由，必须学生本人完成。AI 没有对方案证据、机制和约束的整体上下文。把 AI 草拟决策直接搬入研究判断主格，等于把研究判断外包给模型。</a:t>
             </a:r>
           </a:p>
           <a:p xmlns:a="http://schemas.openxmlformats.org/drawingml/2006/main">
@@ -3687,27 +2407,12 @@
           </a:p>
           <a:p xmlns:a="http://schemas.openxmlformats.org/drawingml/2006/main">
             <a:r>
-              <a:t>屏显核对：</a:t>
-            </a:r>
-          </a:p>
-          <a:p xmlns:a="http://schemas.openxmlformats.org/drawingml/2006/main">
-            <a:r>
-              <a:t>AI 可以：</a:t>
-            </a:r>
-          </a:p>
-          <a:p xmlns:a="http://schemas.openxmlformats.org/drawingml/2006/main">
-            <a:r>
-              <a:t>- 把同伴口述反馈转写为结构化条目</a:t>
-            </a:r>
-          </a:p>
-          <a:p xmlns:a="http://schemas.openxmlformats.org/drawingml/2006/main">
-            <a:r>
-              <a:t>- 提示反馈可能对应的 rubric 维度</a:t>
-            </a:r>
-          </a:p>
-          <a:p xmlns:a="http://schemas.openxmlformats.org/drawingml/2006/main">
-            <a:r>
-              <a:t>- 草拟可能的处理理由或修改方向</a:t>
+              <a:t>学生动作：</a:t>
+            </a:r>
+          </a:p>
+          <a:p xmlns:a="http://schemas.openxmlformats.org/drawingml/2006/main">
+            <a:r>
+              <a:t>让学生说出一条 AI 可以做、一条 AI 不可以做的反馈处理动作。</a:t>
             </a:r>
           </a:p>
           <a:p xmlns:a="http://schemas.openxmlformats.org/drawingml/2006/main">
@@ -3717,22 +2422,7 @@
           </a:p>
           <a:p xmlns:a="http://schemas.openxmlformats.org/drawingml/2006/main">
             <a:r>
-              <a:t>AI 不可以：</a:t>
-            </a:r>
-          </a:p>
-          <a:p xmlns:a="http://schemas.openxmlformats.org/drawingml/2006/main">
-            <a:r>
-              <a:t>- 判断反馈是否成立</a:t>
-            </a:r>
-          </a:p>
-          <a:p xmlns:a="http://schemas.openxmlformats.org/drawingml/2006/main">
-            <a:r>
-              <a:t>- 决定采纳、澄清、补证、暂缓或保留异议</a:t>
-            </a:r>
-          </a:p>
-          <a:p xmlns:a="http://schemas.openxmlformats.org/drawingml/2006/main">
-            <a:r>
-              <a:t>- 写出取舍理由、适用边界和影响工件</a:t>
+              <a:t>课堂安排：按 teaching-plan.md 专用课堂时段安排；换场计入对应时段。</a:t>
             </a:r>
           </a:p>
           <a:p xmlns:a="http://schemas.openxmlformats.org/drawingml/2006/main">
@@ -3742,7 +2432,12 @@
           </a:p>
           <a:p xmlns:a="http://schemas.openxmlformats.org/drawingml/2006/main">
             <a:r>
-              <a:t>&gt; 未完成核验前，AI 草拟决策表只能保留在探索线索区。</a:t>
+              <a:t>[Sources]</a:t>
+            </a:r>
+          </a:p>
+          <a:p xmlns:a="http://schemas.openxmlformats.org/drawingml/2006/main">
+            <a:r>
+              <a:t>讲义 §五·3；[AGENTS.md](../../AGENTS.md) 证据标准。</a:t>
             </a:r>
           </a:p>
           <a:p xmlns:a="http://schemas.openxmlformats.org/drawingml/2006/main">
@@ -3752,87 +2447,7 @@
           </a:p>
           <a:p xmlns:a="http://schemas.openxmlformats.org/drawingml/2006/main">
             <a:r>
-              <a:t>教师讲述：</a:t>
-            </a:r>
-          </a:p>
-          <a:p xmlns:a="http://schemas.openxmlformats.org/drawingml/2006/main">
-            <a:r>
-              <a:t>AI 可以在反馈处理阶段辅助，但反馈是否成立、采纳什么、写出取舍理由，必须学生本人完成。AI 没有对方案证据、机制和约束的整体上下文。把 AI 草拟决策直接搬入研究判断主格，等于把研究判断外包给模型。</a:t>
-            </a:r>
-          </a:p>
-          <a:p xmlns:a="http://schemas.openxmlformats.org/drawingml/2006/main">
-            <a:r>
-              <a:t/>
-            </a:r>
-          </a:p>
-          <a:p xmlns:a="http://schemas.openxmlformats.org/drawingml/2006/main">
-            <a:r>
-              <a:t>学生动作：</a:t>
-            </a:r>
-          </a:p>
-          <a:p xmlns:a="http://schemas.openxmlformats.org/drawingml/2006/main">
-            <a:r>
-              <a:t>让学生说出一条 AI 可以做、一条 AI 不可以做的反馈处理动作。</a:t>
-            </a:r>
-          </a:p>
-          <a:p xmlns:a="http://schemas.openxmlformats.org/drawingml/2006/main">
-            <a:r>
-              <a:t/>
-            </a:r>
-          </a:p>
-          <a:p xmlns:a="http://schemas.openxmlformats.org/drawingml/2006/main">
-            <a:r>
-              <a:t>来源与边界：</a:t>
-            </a:r>
-          </a:p>
-          <a:p xmlns:a="http://schemas.openxmlformats.org/drawingml/2006/main">
-            <a:r>
-              <a:t>讲义 §五·3；[AGENTS.md](../../AGENTS.md) 证据标准。</a:t>
-            </a:r>
-          </a:p>
-          <a:p xmlns:a="http://schemas.openxmlformats.org/drawingml/2006/main">
-            <a:r>
-              <a:t/>
-            </a:r>
-          </a:p>
-          <a:p xmlns:a="http://schemas.openxmlformats.org/drawingml/2006/main">
-            <a:r>
-              <a:t>---</a:t>
-            </a:r>
-          </a:p>
-          <a:p xmlns:a="http://schemas.openxmlformats.org/drawingml/2006/main">
-            <a:r>
-              <a:t/>
-            </a:r>
-          </a:p>
-          <a:p xmlns:a="http://schemas.openxmlformats.org/drawingml/2006/main">
-            <a:r>
-              <a:t>[Sources]</a:t>
-            </a:r>
-          </a:p>
-          <a:p xmlns:a="http://schemas.openxmlformats.org/drawingml/2006/main">
-            <a:r>
-              <a:t/>
-            </a:r>
-          </a:p>
-          <a:p xmlns:a="http://schemas.openxmlformats.org/drawingml/2006/main">
-            <a:r>
-              <a:t>- 本课 handout.md 与 slides.md</a:t>
-            </a:r>
-          </a:p>
-          <a:p xmlns:a="http://schemas.openxmlformats.org/drawingml/2006/main">
-            <a:r>
-              <a:t/>
-            </a:r>
-          </a:p>
-          <a:p xmlns:a="http://schemas.openxmlformats.org/drawingml/2006/main">
-            <a:r>
-              <a:t>- ../../course/reading-card-case.md</a:t>
-            </a:r>
-          </a:p>
-          <a:p xmlns:a="http://schemas.openxmlformats.org/drawingml/2006/main">
-            <a:r>
-              <a:t/>
+              <a:t>本课 handout.md、judgment-task.md；../../course/judgment-path.md。</a:t>
             </a:r>
           </a:p>
           <a:p xmlns:a="http://schemas.openxmlformats.org/drawingml/2006/main">
@@ -8308,35 +6923,55 @@
       </p:grpSpPr>
       <p:sp>
         <p:nvSpPr>
-          <p:cNvPr id="4" name="Text Placeholder 3">
-            <a:extLst xmlns:a="http://schemas.openxmlformats.org/drawingml/2006/main">
-              <a:ext uri="{FF2B5EF4-FFF2-40B4-BE49-F238E27FC236}">
-                <a16:creationId xmlns:a16="http://schemas.microsoft.com/office/drawing/2014/main" id="{4D941B40-7A0A-534E-3563-CA11753C8E3F}"/>
-              </a:ext>
-            </a:extLst>
-          </p:cNvPr>
-          <p:cNvSpPr>
-            <a:spLocks xmlns:a="http://schemas.openxmlformats.org/drawingml/2006/main" noGrp="1"/>
-          </p:cNvSpPr>
-          <p:nvPr>
-            <p:ph type="body" idx="14"/>
-          </p:nvPr>
-        </p:nvSpPr>
-        <p:spPr>
-          <a:xfrm xmlns:a="http://schemas.openxmlformats.org/drawingml/2006/main">
-            <a:off x="1028700" y="57150"/>
-            <a:ext cx="10668000" cy="571500"/>
-          </a:xfrm>
-        </p:spPr>
-        <p:txBody>
-          <a:bodyPr xmlns:a="http://schemas.openxmlformats.org/drawingml/2006/main" lIns="0" tIns="0" rIns="0" bIns="0" anchor="ctr"/>
-          <a:lstStyle xmlns:a="http://schemas.openxmlformats.org/drawingml/2006/main"/>
+          <p:cNvPr id="7" name="judgment-title">
+            <a:extLst xmlns:a="http://schemas.openxmlformats.org/drawingml/2006/main">
+              <a:ext uri="{FF2B5EF4-FFF2-40B4-BE49-F238E27FC236}">
+                <a16:creationId xmlns:a16="http://schemas.microsoft.com/office/drawing/2014/main" id="{FFF3654D-F904-455A-B98E-A12980EE0146}"/>
+              </a:ext>
+            </a:extLst>
+          </p:cNvPr>
+          <p:cNvSpPr>
+            <a:spLocks xmlns:a="http://schemas.openxmlformats.org/drawingml/2006/main" noGrp="1"/>
+          </p:cNvSpPr>
+          <p:nvPr/>
+        </p:nvSpPr>
+        <p:spPr>
+          <a:xfrm xmlns:a="http://schemas.openxmlformats.org/drawingml/2006/main">
+            <a:off x="1028700" y="76200"/>
+            <a:ext cx="10687050" cy="514350"/>
+          </a:xfrm>
+          <a:prstGeom xmlns:a="http://schemas.openxmlformats.org/drawingml/2006/main" prst="rect">
+            <a:avLst/>
+          </a:prstGeom>
+          <a:noFill xmlns:a="http://schemas.openxmlformats.org/drawingml/2006/main"/>
+          <a:ln xmlns:a="http://schemas.openxmlformats.org/drawingml/2006/main" w="0">
+            <a:noFill/>
+          </a:ln>
+        </p:spPr>
+        <p:txBody>
+          <a:bodyPr xmlns:a="http://schemas.openxmlformats.org/drawingml/2006/main" lIns="0" tIns="0" rIns="0" bIns="0" anchor="t"/>
+          <a:lstStyle xmlns:a="http://schemas.openxmlformats.org/drawingml/2006/main">
+            <a:defPPr algn="l">
+              <a:defRPr sz="3000" b="1">
+                <a:solidFill>
+                  <a:srgbClr val="FFFFFF"/>
+                </a:solidFill>
+                <a:latin typeface="微软雅黑"/>
+                <a:ea typeface="微软雅黑"/>
+                <a:cs typeface="微软雅黑"/>
+              </a:defRPr>
+            </a:defPPr>
+          </a:lstStyle>
           <a:p xmlns:a="http://schemas.openxmlformats.org/drawingml/2006/main">
             <a:pPr algn="l">
-              <a:lnSpc>
-                <a:spcPct val="118000"/>
-              </a:lnSpc>
-              <a:buNone/>
+              <a:defRPr sz="3000" b="1">
+                <a:solidFill>
+                  <a:srgbClr val="FFFFFF"/>
+                </a:solidFill>
+                <a:latin typeface="微软雅黑"/>
+                <a:ea typeface="微软雅黑"/>
+                <a:cs typeface="微软雅黑"/>
+              </a:defRPr>
             </a:pPr>
             <a:r>
               <a:rPr sz="3000" b="1">
@@ -8347,776 +6982,337 @@
                 <a:ea typeface="微软雅黑"/>
                 <a:cs typeface="微软雅黑"/>
               </a:rPr>
-              <a:t>实践：完成陈述、互查、决策与判断门预检</a:t>
-            </a:r>
-            <a:endParaRPr/>
-          </a:p>
-        </p:txBody>
-      </p:sp>
-      <p:sp>
-        <p:nvSpPr>
-          <p:cNvPr id="5" name="Slide Number Placeholder 4">
-            <a:extLst xmlns:a="http://schemas.openxmlformats.org/drawingml/2006/main">
-              <a:ext uri="{FF2B5EF4-FFF2-40B4-BE49-F238E27FC236}">
-                <a16:creationId xmlns:a16="http://schemas.microsoft.com/office/drawing/2014/main" id="{EBA5909F-738E-F60C-BE8C-B3F1D94548E5}"/>
-              </a:ext>
-            </a:extLst>
-          </p:cNvPr>
-          <p:cNvSpPr>
-            <a:spLocks xmlns:a="http://schemas.openxmlformats.org/drawingml/2006/main" noGrp="1"/>
-          </p:cNvSpPr>
-          <p:nvPr>
-            <p:ph type="sldNum" idx="10"/>
-          </p:nvPr>
-        </p:nvSpPr>
-        <p:spPr/>
-        <p:txBody>
-          <a:bodyPr xmlns:a="http://schemas.openxmlformats.org/drawingml/2006/main"/>
-          <a:lstStyle xmlns:a="http://schemas.openxmlformats.org/drawingml/2006/main"/>
-          <a:p xmlns:a="http://schemas.openxmlformats.org/drawingml/2006/main">
-            <a:fld id="{2DD23107-4986-8758-3A93-3D74F35908CC}" type="slidenum">
+              <a:t>本人项目：决定、核验与回写</a:t>
+            </a:r>
+          </a:p>
+        </p:txBody>
+      </p:sp>
+      <p:sp>
+        <p:nvSpPr>
+          <p:cNvPr id="2" name="judgment-body-0">
+            <a:extLst xmlns:a="http://schemas.openxmlformats.org/drawingml/2006/main">
+              <a:ext uri="{FF2B5EF4-FFF2-40B4-BE49-F238E27FC236}">
+                <a16:creationId xmlns:a16="http://schemas.microsoft.com/office/drawing/2014/main" id="{9BFCE9E3-5D84-4C39-AF1B-28C8C62EE323}"/>
+              </a:ext>
+            </a:extLst>
+          </p:cNvPr>
+          <p:cNvSpPr>
+            <a:spLocks xmlns:a="http://schemas.openxmlformats.org/drawingml/2006/main" noGrp="1"/>
+          </p:cNvSpPr>
+          <p:nvPr/>
+        </p:nvSpPr>
+        <p:spPr>
+          <a:xfrm xmlns:a="http://schemas.openxmlformats.org/drawingml/2006/main">
+            <a:off x="666750" y="1066800"/>
+            <a:ext cx="10858500" cy="1476375"/>
+          </a:xfrm>
+          <a:prstGeom xmlns:a="http://schemas.openxmlformats.org/drawingml/2006/main" prst="rect">
+            <a:avLst/>
+          </a:prstGeom>
+          <a:noFill xmlns:a="http://schemas.openxmlformats.org/drawingml/2006/main"/>
+          <a:ln xmlns:a="http://schemas.openxmlformats.org/drawingml/2006/main" w="0">
+            <a:noFill/>
+          </a:ln>
+        </p:spPr>
+        <p:txBody>
+          <a:bodyPr xmlns:a="http://schemas.openxmlformats.org/drawingml/2006/main" lIns="0" tIns="0" rIns="0" bIns="0" anchor="t"/>
+          <a:lstStyle xmlns:a="http://schemas.openxmlformats.org/drawingml/2006/main">
+            <a:defPPr algn="l">
+              <a:defRPr sz="2400" b="0">
+                <a:solidFill>
+                  <a:srgbClr val="263746"/>
+                </a:solidFill>
+                <a:latin typeface="微软雅黑"/>
+                <a:ea typeface="微软雅黑"/>
+                <a:cs typeface="微软雅黑"/>
+              </a:defRPr>
+            </a:defPPr>
+          </a:lstStyle>
+          <a:p xmlns:a="http://schemas.openxmlformats.org/drawingml/2006/main">
+            <a:pPr algn="l">
+              <a:defRPr sz="2400" b="0">
+                <a:solidFill>
+                  <a:srgbClr val="263746"/>
+                </a:solidFill>
+                <a:latin typeface="微软雅黑"/>
+                <a:ea typeface="微软雅黑"/>
+                <a:cs typeface="微软雅黑"/>
+              </a:defRPr>
+            </a:pPr>
+            <a:r>
+              <a:rPr sz="2400" b="0">
+                <a:solidFill>
+                  <a:srgbClr val="263746"/>
+                </a:solidFill>
+                <a:latin typeface="微软雅黑"/>
+                <a:ea typeface="微软雅黑"/>
+                <a:cs typeface="微软雅黑"/>
+              </a:rPr>
+              <a:t>固定 3–4 人组逐人陈述、质询；每人围绕一个关键对照或薄弱证据，实际修改预测、协议或结论范围。</a:t>
+            </a:r>
+          </a:p>
+        </p:txBody>
+      </p:sp>
+      <p:sp>
+        <p:nvSpPr>
+          <p:cNvPr id="3" name="judgment-body-1">
+            <a:extLst xmlns:a="http://schemas.openxmlformats.org/drawingml/2006/main">
+              <a:ext uri="{FF2B5EF4-FFF2-40B4-BE49-F238E27FC236}">
+                <a16:creationId xmlns:a16="http://schemas.microsoft.com/office/drawing/2014/main" id="{527538BA-28F8-45C0-B40E-8EB05C388C6B}"/>
+              </a:ext>
+            </a:extLst>
+          </p:cNvPr>
+          <p:cNvSpPr>
+            <a:spLocks xmlns:a="http://schemas.openxmlformats.org/drawingml/2006/main" noGrp="1"/>
+          </p:cNvSpPr>
+          <p:nvPr/>
+        </p:nvSpPr>
+        <p:spPr>
+          <a:xfrm xmlns:a="http://schemas.openxmlformats.org/drawingml/2006/main">
+            <a:off x="666750" y="2724150"/>
+            <a:ext cx="10858500" cy="1524000"/>
+          </a:xfrm>
+          <a:prstGeom xmlns:a="http://schemas.openxmlformats.org/drawingml/2006/main" prst="rect">
+            <a:avLst/>
+          </a:prstGeom>
+          <a:noFill xmlns:a="http://schemas.openxmlformats.org/drawingml/2006/main"/>
+          <a:ln xmlns:a="http://schemas.openxmlformats.org/drawingml/2006/main" w="0">
+            <a:noFill/>
+          </a:ln>
+        </p:spPr>
+        <p:txBody>
+          <a:bodyPr xmlns:a="http://schemas.openxmlformats.org/drawingml/2006/main" lIns="0" tIns="0" rIns="0" bIns="0" anchor="t"/>
+          <a:lstStyle xmlns:a="http://schemas.openxmlformats.org/drawingml/2006/main">
+            <a:defPPr algn="l">
+              <a:defRPr sz="2400" b="0">
+                <a:solidFill>
+                  <a:srgbClr val="263746"/>
+                </a:solidFill>
+                <a:latin typeface="微软雅黑"/>
+                <a:ea typeface="微软雅黑"/>
+                <a:cs typeface="微软雅黑"/>
+              </a:defRPr>
+            </a:defPPr>
+          </a:lstStyle>
+          <a:p xmlns:a="http://schemas.openxmlformats.org/drawingml/2006/main">
+            <a:pPr algn="l">
+              <a:defRPr sz="2400" b="0">
+                <a:solidFill>
+                  <a:srgbClr val="263746"/>
+                </a:solidFill>
+                <a:latin typeface="微软雅黑"/>
+                <a:ea typeface="微软雅黑"/>
+                <a:cs typeface="微软雅黑"/>
+              </a:defRPr>
+            </a:pPr>
+            <a:r>
+              <a:rPr sz="2400" b="0">
+                <a:solidFill>
+                  <a:srgbClr val="263746"/>
+                </a:solidFill>
+                <a:latin typeface="微软雅黑"/>
+                <a:ea typeface="微软雅黑"/>
+                <a:cs typeface="微软雅黑"/>
+              </a:rPr>
+              <a:t>将意见、定位、处理理由和实际修改放在同一条记录；不要求拒绝意见，也不把 AI 模拟反馈算真实同伴意见。</a:t>
+            </a:r>
+          </a:p>
+        </p:txBody>
+      </p:sp>
+      <p:sp>
+        <p:nvSpPr>
+          <p:cNvPr id="4" name="judgment-body-2">
+            <a:extLst xmlns:a="http://schemas.openxmlformats.org/drawingml/2006/main">
+              <a:ext uri="{FF2B5EF4-FFF2-40B4-BE49-F238E27FC236}">
+                <a16:creationId xmlns:a16="http://schemas.microsoft.com/office/drawing/2014/main" id="{797D3F22-7B22-43E9-9CA4-716F387A969A}"/>
+              </a:ext>
+            </a:extLst>
+          </p:cNvPr>
+          <p:cNvSpPr>
+            <a:spLocks xmlns:a="http://schemas.openxmlformats.org/drawingml/2006/main" noGrp="1"/>
+          </p:cNvSpPr>
+          <p:nvPr/>
+        </p:nvSpPr>
+        <p:spPr>
+          <a:xfrm xmlns:a="http://schemas.openxmlformats.org/drawingml/2006/main">
+            <a:off x="666750" y="4457700"/>
+            <a:ext cx="10858500" cy="1466850"/>
+          </a:xfrm>
+          <a:prstGeom xmlns:a="http://schemas.openxmlformats.org/drawingml/2006/main" prst="rect">
+            <a:avLst/>
+          </a:prstGeom>
+          <a:noFill xmlns:a="http://schemas.openxmlformats.org/drawingml/2006/main"/>
+          <a:ln xmlns:a="http://schemas.openxmlformats.org/drawingml/2006/main" w="0">
+            <a:noFill/>
+          </a:ln>
+        </p:spPr>
+        <p:txBody>
+          <a:bodyPr xmlns:a="http://schemas.openxmlformats.org/drawingml/2006/main" lIns="0" tIns="0" rIns="0" bIns="0" anchor="t"/>
+          <a:lstStyle xmlns:a="http://schemas.openxmlformats.org/drawingml/2006/main">
+            <a:defPPr algn="l">
+              <a:defRPr sz="2200" b="0">
+                <a:solidFill>
+                  <a:srgbClr val="1F4D78"/>
+                </a:solidFill>
+                <a:latin typeface="微软雅黑"/>
+                <a:ea typeface="微软雅黑"/>
+                <a:cs typeface="微软雅黑"/>
+              </a:defRPr>
+            </a:defPPr>
+          </a:lstStyle>
+          <a:p xmlns:a="http://schemas.openxmlformats.org/drawingml/2006/main">
+            <a:pPr algn="l">
+              <a:defRPr sz="2200" b="0">
+                <a:solidFill>
+                  <a:srgbClr val="1F4D78"/>
+                </a:solidFill>
+                <a:latin typeface="微软雅黑"/>
+                <a:ea typeface="微软雅黑"/>
+                <a:cs typeface="微软雅黑"/>
+              </a:defRPr>
+            </a:pPr>
+            <a:r>
+              <a:rPr sz="2200" b="0">
+                <a:solidFill>
+                  <a:srgbClr val="1F4D78"/>
+                </a:solidFill>
+                <a:latin typeface="微软雅黑"/>
+                <a:ea typeface="微软雅黑"/>
+                <a:cs typeface="微软雅黑"/>
+              </a:rPr>
+              <a:t>保存：真实同伴反馈＋作者决定＋一项实际修订</a:t>
+            </a:r>
+          </a:p>
+        </p:txBody>
+      </p:sp>
+      <p:sp>
+        <p:nvSpPr>
+          <p:cNvPr id="5" name="judgment-source">
+            <a:extLst xmlns:a="http://schemas.openxmlformats.org/drawingml/2006/main">
+              <a:ext uri="{FF2B5EF4-FFF2-40B4-BE49-F238E27FC236}">
+                <a16:creationId xmlns:a16="http://schemas.microsoft.com/office/drawing/2014/main" id="{3133BC97-D369-46D2-8F0E-BC9F92DBABBE}"/>
+              </a:ext>
+            </a:extLst>
+          </p:cNvPr>
+          <p:cNvSpPr>
+            <a:spLocks xmlns:a="http://schemas.openxmlformats.org/drawingml/2006/main" noGrp="1"/>
+          </p:cNvSpPr>
+          <p:nvPr/>
+        </p:nvSpPr>
+        <p:spPr>
+          <a:xfrm xmlns:a="http://schemas.openxmlformats.org/drawingml/2006/main">
+            <a:off x="666750" y="6276975"/>
+            <a:ext cx="10572750" cy="209550"/>
+          </a:xfrm>
+          <a:prstGeom xmlns:a="http://schemas.openxmlformats.org/drawingml/2006/main" prst="rect">
+            <a:avLst/>
+          </a:prstGeom>
+          <a:noFill xmlns:a="http://schemas.openxmlformats.org/drawingml/2006/main"/>
+          <a:ln xmlns:a="http://schemas.openxmlformats.org/drawingml/2006/main" w="0">
+            <a:noFill/>
+          </a:ln>
+        </p:spPr>
+        <p:txBody>
+          <a:bodyPr xmlns:a="http://schemas.openxmlformats.org/drawingml/2006/main" lIns="0" tIns="0" rIns="0" bIns="0" anchor="t"/>
+          <a:lstStyle xmlns:a="http://schemas.openxmlformats.org/drawingml/2006/main">
+            <a:defPPr algn="l">
+              <a:defRPr sz="1100" b="0">
+                <a:solidFill>
+                  <a:srgbClr val="667684"/>
+                </a:solidFill>
+                <a:latin typeface="微软雅黑"/>
+                <a:ea typeface="微软雅黑"/>
+                <a:cs typeface="微软雅黑"/>
+              </a:defRPr>
+            </a:defPPr>
+          </a:lstStyle>
+          <a:p xmlns:a="http://schemas.openxmlformats.org/drawingml/2006/main">
+            <a:pPr algn="l">
+              <a:defRPr sz="1100" b="0">
+                <a:solidFill>
+                  <a:srgbClr val="667684"/>
+                </a:solidFill>
+                <a:latin typeface="微软雅黑"/>
+                <a:ea typeface="微软雅黑"/>
+                <a:cs typeface="微软雅黑"/>
+              </a:defRPr>
+            </a:pPr>
+            <a:r>
+              <a:rPr sz="1100" b="0">
+                <a:solidFill>
+                  <a:srgbClr val="667684"/>
+                </a:solidFill>
+                <a:latin typeface="微软雅黑"/>
+                <a:ea typeface="微软雅黑"/>
+                <a:cs typeface="微软雅黑"/>
+              </a:rPr>
+              <a:t>来源：本课判断任务与讲义；构造材料及真实来源按材料包标识</a:t>
+            </a:r>
+          </a:p>
+        </p:txBody>
+      </p:sp>
+      <p:sp>
+        <p:nvSpPr>
+          <p:cNvPr id="6" name="judgment-page">
+            <a:extLst xmlns:a="http://schemas.openxmlformats.org/drawingml/2006/main">
+              <a:ext uri="{FF2B5EF4-FFF2-40B4-BE49-F238E27FC236}">
+                <a16:creationId xmlns:a16="http://schemas.microsoft.com/office/drawing/2014/main" id="{8BC3C487-1BC3-477E-A00D-7D3444B68980}"/>
+              </a:ext>
+            </a:extLst>
+          </p:cNvPr>
+          <p:cNvSpPr>
+            <a:spLocks xmlns:a="http://schemas.openxmlformats.org/drawingml/2006/main" noGrp="1"/>
+          </p:cNvSpPr>
+          <p:nvPr/>
+        </p:nvSpPr>
+        <p:spPr>
+          <a:xfrm xmlns:a="http://schemas.openxmlformats.org/drawingml/2006/main">
+            <a:off x="11715750" y="6562725"/>
+            <a:ext cx="238125" cy="171450"/>
+          </a:xfrm>
+          <a:prstGeom xmlns:a="http://schemas.openxmlformats.org/drawingml/2006/main" prst="rect">
+            <a:avLst/>
+          </a:prstGeom>
+          <a:noFill xmlns:a="http://schemas.openxmlformats.org/drawingml/2006/main"/>
+          <a:ln xmlns:a="http://schemas.openxmlformats.org/drawingml/2006/main" w="0">
+            <a:noFill/>
+          </a:ln>
+        </p:spPr>
+        <p:txBody>
+          <a:bodyPr xmlns:a="http://schemas.openxmlformats.org/drawingml/2006/main" lIns="0" tIns="0" rIns="0" bIns="0" anchor="t"/>
+          <a:lstStyle xmlns:a="http://schemas.openxmlformats.org/drawingml/2006/main">
+            <a:defPPr algn="l">
+              <a:defRPr sz="900" b="0">
+                <a:solidFill>
+                  <a:srgbClr val="A5A5A5"/>
+                </a:solidFill>
+                <a:latin typeface="微软雅黑"/>
+                <a:ea typeface="微软雅黑"/>
+                <a:cs typeface="微软雅黑"/>
+              </a:defRPr>
+            </a:defPPr>
+          </a:lstStyle>
+          <a:p xmlns:a="http://schemas.openxmlformats.org/drawingml/2006/main">
+            <a:pPr algn="l">
+              <a:defRPr sz="900" b="0">
+                <a:solidFill>
+                  <a:srgbClr val="A5A5A5"/>
+                </a:solidFill>
+                <a:latin typeface="微软雅黑"/>
+                <a:ea typeface="微软雅黑"/>
+                <a:cs typeface="微软雅黑"/>
+              </a:defRPr>
+            </a:pPr>
+            <a:r>
+              <a:rPr sz="900" b="0">
+                <a:solidFill>
+                  <a:srgbClr val="A5A5A5"/>
+                </a:solidFill>
+                <a:latin typeface="微软雅黑"/>
+                <a:ea typeface="微软雅黑"/>
+                <a:cs typeface="微软雅黑"/>
+              </a:rPr>
               <a:t>13</a:t>
-            </a:fld>
-            <a:endParaRPr/>
-          </a:p>
-        </p:txBody>
-      </p:sp>
-      <p:sp>
-        <p:nvSpPr>
-          <p:cNvPr id="6" name="worksheet-bg">
-            <a:extLst xmlns:a="http://schemas.openxmlformats.org/drawingml/2006/main">
-              <a:ext uri="{FF2B5EF4-FFF2-40B4-BE49-F238E27FC236}">
-                <a16:creationId xmlns:a16="http://schemas.microsoft.com/office/drawing/2014/main" id="{0917B885-94E7-4B5E-940F-9913FABFD4DD}"/>
-              </a:ext>
-            </a:extLst>
-          </p:cNvPr>
-          <p:cNvSpPr>
-            <a:spLocks xmlns:a="http://schemas.openxmlformats.org/drawingml/2006/main" noGrp="1"/>
-          </p:cNvSpPr>
-          <p:nvPr/>
-        </p:nvSpPr>
-        <p:spPr>
-          <a:xfrm xmlns:a="http://schemas.openxmlformats.org/drawingml/2006/main">
-            <a:off x="609600" y="1381125"/>
-            <a:ext cx="2095500" cy="685800"/>
-          </a:xfrm>
-          <a:prstGeom xmlns:a="http://schemas.openxmlformats.org/drawingml/2006/main" prst="rect">
-            <a:avLst/>
-          </a:prstGeom>
-          <a:solidFill xmlns:a="http://schemas.openxmlformats.org/drawingml/2006/main">
-            <a:srgbClr val="1F4D78"/>
-          </a:solidFill>
-          <a:ln xmlns:a="http://schemas.openxmlformats.org/drawingml/2006/main" w="0">
-            <a:noFill/>
-          </a:ln>
-        </p:spPr>
-      </p:sp>
-      <p:sp>
-        <p:nvSpPr>
-          <p:cNvPr id="7" name="worksheet">
-            <a:extLst xmlns:a="http://schemas.openxmlformats.org/drawingml/2006/main">
-              <a:ext uri="{FF2B5EF4-FFF2-40B4-BE49-F238E27FC236}">
-                <a16:creationId xmlns:a16="http://schemas.microsoft.com/office/drawing/2014/main" id="{6932FD61-01F9-4A37-BB87-5CEBA13CEE34}"/>
-              </a:ext>
-            </a:extLst>
-          </p:cNvPr>
-          <p:cNvSpPr>
-            <a:spLocks xmlns:a="http://schemas.openxmlformats.org/drawingml/2006/main" noGrp="1"/>
-          </p:cNvSpPr>
-          <p:nvPr/>
-        </p:nvSpPr>
-        <p:spPr>
-          <a:xfrm xmlns:a="http://schemas.openxmlformats.org/drawingml/2006/main">
-            <a:off x="762000" y="1476375"/>
-            <a:ext cx="1790700" cy="495300"/>
-          </a:xfrm>
-          <a:prstGeom xmlns:a="http://schemas.openxmlformats.org/drawingml/2006/main" prst="rect">
-            <a:avLst/>
-          </a:prstGeom>
-          <a:noFill xmlns:a="http://schemas.openxmlformats.org/drawingml/2006/main"/>
-          <a:ln xmlns:a="http://schemas.openxmlformats.org/drawingml/2006/main" w="0">
-            <a:noFill/>
-          </a:ln>
-        </p:spPr>
-        <p:txBody>
-          <a:bodyPr xmlns:a="http://schemas.openxmlformats.org/drawingml/2006/main" lIns="0" tIns="0" rIns="0" bIns="0" anchor="ctr"/>
-          <a:lstStyle xmlns:a="http://schemas.openxmlformats.org/drawingml/2006/main"/>
-          <a:p xmlns:a="http://schemas.openxmlformats.org/drawingml/2006/main">
-            <a:pPr algn="ctr">
-              <a:lnSpc>
-                <a:spcPct val="118000"/>
-              </a:lnSpc>
-              <a:buNone/>
-              <a:defRPr sz="2300" b="1">
-                <a:solidFill>
-                  <a:srgbClr val="FFFFFF"/>
-                </a:solidFill>
-                <a:latin typeface="微软雅黑"/>
-                <a:ea typeface="微软雅黑"/>
-                <a:cs typeface="微软雅黑"/>
-              </a:defRPr>
-            </a:pPr>
-            <a:r>
-              <a:rPr sz="2300" b="1">
-                <a:solidFill>
-                  <a:srgbClr val="FFFFFF"/>
-                </a:solidFill>
-                <a:latin typeface="微软雅黑"/>
-                <a:ea typeface="微软雅黑"/>
-                <a:cs typeface="微软雅黑"/>
-              </a:rPr>
-              <a:t>诊所工作表</a:t>
-            </a:r>
-          </a:p>
-        </p:txBody>
-      </p:sp>
-      <p:sp>
-        <p:nvSpPr>
-          <p:cNvPr id="8" name="work-n0">
-            <a:extLst xmlns:a="http://schemas.openxmlformats.org/drawingml/2006/main">
-              <a:ext uri="{FF2B5EF4-FFF2-40B4-BE49-F238E27FC236}">
-                <a16:creationId xmlns:a16="http://schemas.microsoft.com/office/drawing/2014/main" id="{308A33F7-5F48-4E5E-BECF-47FB199070AC}"/>
-              </a:ext>
-            </a:extLst>
-          </p:cNvPr>
-          <p:cNvSpPr>
-            <a:spLocks xmlns:a="http://schemas.openxmlformats.org/drawingml/2006/main" noGrp="1"/>
-          </p:cNvSpPr>
-          <p:nvPr/>
-        </p:nvSpPr>
-        <p:spPr>
-          <a:xfrm xmlns:a="http://schemas.openxmlformats.org/drawingml/2006/main">
-            <a:off x="3143250" y="1333500"/>
-            <a:ext cx="476250" cy="381000"/>
-          </a:xfrm>
-          <a:prstGeom xmlns:a="http://schemas.openxmlformats.org/drawingml/2006/main" prst="rect">
-            <a:avLst/>
-          </a:prstGeom>
-          <a:noFill xmlns:a="http://schemas.openxmlformats.org/drawingml/2006/main"/>
-          <a:ln xmlns:a="http://schemas.openxmlformats.org/drawingml/2006/main" w="0">
-            <a:noFill/>
-          </a:ln>
-        </p:spPr>
-        <p:txBody>
-          <a:bodyPr xmlns:a="http://schemas.openxmlformats.org/drawingml/2006/main" lIns="0" tIns="0" rIns="0" bIns="0" anchor="ctr"/>
-          <a:lstStyle xmlns:a="http://schemas.openxmlformats.org/drawingml/2006/main"/>
-          <a:p xmlns:a="http://schemas.openxmlformats.org/drawingml/2006/main">
-            <a:pPr algn="l">
-              <a:lnSpc>
-                <a:spcPct val="118000"/>
-              </a:lnSpc>
-              <a:buNone/>
-              <a:defRPr sz="1800" b="1">
-                <a:solidFill>
-                  <a:srgbClr val="66727D"/>
-                </a:solidFill>
-                <a:latin typeface="微软雅黑"/>
-                <a:ea typeface="微软雅黑"/>
-                <a:cs typeface="微软雅黑"/>
-              </a:defRPr>
-            </a:pPr>
-            <a:r>
-              <a:rPr sz="1800" b="1">
-                <a:solidFill>
-                  <a:srgbClr val="66727D"/>
-                </a:solidFill>
-                <a:latin typeface="微软雅黑"/>
-                <a:ea typeface="微软雅黑"/>
-                <a:cs typeface="微软雅黑"/>
-              </a:rPr>
-              <a:t>01</a:t>
-            </a:r>
-          </a:p>
-        </p:txBody>
-      </p:sp>
-      <p:sp>
-        <p:nvSpPr>
-          <p:cNvPr id="9" name="work-t0">
-            <a:extLst xmlns:a="http://schemas.openxmlformats.org/drawingml/2006/main">
-              <a:ext uri="{FF2B5EF4-FFF2-40B4-BE49-F238E27FC236}">
-                <a16:creationId xmlns:a16="http://schemas.microsoft.com/office/drawing/2014/main" id="{0B2BE8A2-2F5F-4E66-8EC2-79031B450A2D}"/>
-              </a:ext>
-            </a:extLst>
-          </p:cNvPr>
-          <p:cNvSpPr>
-            <a:spLocks xmlns:a="http://schemas.openxmlformats.org/drawingml/2006/main" noGrp="1"/>
-          </p:cNvSpPr>
-          <p:nvPr/>
-        </p:nvSpPr>
-        <p:spPr>
-          <a:xfrm xmlns:a="http://schemas.openxmlformats.org/drawingml/2006/main">
-            <a:off x="3695700" y="1333500"/>
-            <a:ext cx="7258050" cy="495300"/>
-          </a:xfrm>
-          <a:prstGeom xmlns:a="http://schemas.openxmlformats.org/drawingml/2006/main" prst="rect">
-            <a:avLst/>
-          </a:prstGeom>
-          <a:noFill xmlns:a="http://schemas.openxmlformats.org/drawingml/2006/main"/>
-          <a:ln xmlns:a="http://schemas.openxmlformats.org/drawingml/2006/main" w="0">
-            <a:noFill/>
-          </a:ln>
-        </p:spPr>
-        <p:txBody>
-          <a:bodyPr xmlns:a="http://schemas.openxmlformats.org/drawingml/2006/main" lIns="0" tIns="0" rIns="0" bIns="0" anchor="ctr"/>
-          <a:lstStyle xmlns:a="http://schemas.openxmlformats.org/drawingml/2006/main"/>
-          <a:p xmlns:a="http://schemas.openxmlformats.org/drawingml/2006/main">
-            <a:pPr algn="l">
-              <a:lnSpc>
-                <a:spcPct val="118000"/>
-              </a:lnSpc>
-              <a:buNone/>
-              <a:defRPr sz="2200" b="0">
-                <a:solidFill>
-                  <a:srgbClr val="27333D"/>
-                </a:solidFill>
-                <a:latin typeface="微软雅黑"/>
-                <a:ea typeface="微软雅黑"/>
-                <a:cs typeface="微软雅黑"/>
-              </a:defRPr>
-            </a:pPr>
-            <a:r>
-              <a:rPr sz="2200" b="0">
-                <a:solidFill>
-                  <a:srgbClr val="27333D"/>
-                </a:solidFill>
-                <a:latin typeface="微软雅黑"/>
-                <a:ea typeface="微软雅黑"/>
-                <a:cs typeface="微软雅黑"/>
-              </a:rPr>
-              <a:t>补全五段陈述</a:t>
-            </a:r>
-          </a:p>
-        </p:txBody>
-      </p:sp>
-      <p:sp>
-        <p:nvSpPr>
-          <p:cNvPr id="10" name="work-r0">
-            <a:extLst xmlns:a="http://schemas.openxmlformats.org/drawingml/2006/main">
-              <a:ext uri="{FF2B5EF4-FFF2-40B4-BE49-F238E27FC236}">
-                <a16:creationId xmlns:a16="http://schemas.microsoft.com/office/drawing/2014/main" id="{B3E45CF1-5FBC-4F08-9976-8DB9DB630B0F}"/>
-              </a:ext>
-            </a:extLst>
-          </p:cNvPr>
-          <p:cNvSpPr>
-            <a:spLocks xmlns:a="http://schemas.openxmlformats.org/drawingml/2006/main" noGrp="1"/>
-          </p:cNvSpPr>
-          <p:nvPr/>
-        </p:nvSpPr>
-        <p:spPr>
-          <a:xfrm xmlns:a="http://schemas.openxmlformats.org/drawingml/2006/main">
-            <a:off x="3143250" y="1866900"/>
-            <a:ext cx="7810500" cy="14288"/>
-          </a:xfrm>
-          <a:prstGeom xmlns:a="http://schemas.openxmlformats.org/drawingml/2006/main" prst="rect">
-            <a:avLst/>
-          </a:prstGeom>
-          <a:solidFill xmlns:a="http://schemas.openxmlformats.org/drawingml/2006/main">
-            <a:srgbClr val="CDD5DB"/>
-          </a:solidFill>
-          <a:ln xmlns:a="http://schemas.openxmlformats.org/drawingml/2006/main" w="0">
-            <a:noFill/>
-          </a:ln>
-        </p:spPr>
-      </p:sp>
-      <p:sp>
-        <p:nvSpPr>
-          <p:cNvPr id="11" name="work-n1">
-            <a:extLst xmlns:a="http://schemas.openxmlformats.org/drawingml/2006/main">
-              <a:ext uri="{FF2B5EF4-FFF2-40B4-BE49-F238E27FC236}">
-                <a16:creationId xmlns:a16="http://schemas.microsoft.com/office/drawing/2014/main" id="{3A7DB18E-B8C2-46F8-9C76-E0552DF4EA7B}"/>
-              </a:ext>
-            </a:extLst>
-          </p:cNvPr>
-          <p:cNvSpPr>
-            <a:spLocks xmlns:a="http://schemas.openxmlformats.org/drawingml/2006/main" noGrp="1"/>
-          </p:cNvSpPr>
-          <p:nvPr/>
-        </p:nvSpPr>
-        <p:spPr>
-          <a:xfrm xmlns:a="http://schemas.openxmlformats.org/drawingml/2006/main">
-            <a:off x="3143250" y="2114550"/>
-            <a:ext cx="476250" cy="381000"/>
-          </a:xfrm>
-          <a:prstGeom xmlns:a="http://schemas.openxmlformats.org/drawingml/2006/main" prst="rect">
-            <a:avLst/>
-          </a:prstGeom>
-          <a:noFill xmlns:a="http://schemas.openxmlformats.org/drawingml/2006/main"/>
-          <a:ln xmlns:a="http://schemas.openxmlformats.org/drawingml/2006/main" w="0">
-            <a:noFill/>
-          </a:ln>
-        </p:spPr>
-        <p:txBody>
-          <a:bodyPr xmlns:a="http://schemas.openxmlformats.org/drawingml/2006/main" lIns="0" tIns="0" rIns="0" bIns="0" anchor="ctr"/>
-          <a:lstStyle xmlns:a="http://schemas.openxmlformats.org/drawingml/2006/main"/>
-          <a:p xmlns:a="http://schemas.openxmlformats.org/drawingml/2006/main">
-            <a:pPr algn="l">
-              <a:lnSpc>
-                <a:spcPct val="118000"/>
-              </a:lnSpc>
-              <a:buNone/>
-              <a:defRPr sz="1800" b="1">
-                <a:solidFill>
-                  <a:srgbClr val="66727D"/>
-                </a:solidFill>
-                <a:latin typeface="微软雅黑"/>
-                <a:ea typeface="微软雅黑"/>
-                <a:cs typeface="微软雅黑"/>
-              </a:defRPr>
-            </a:pPr>
-            <a:r>
-              <a:rPr sz="1800" b="1">
-                <a:solidFill>
-                  <a:srgbClr val="66727D"/>
-                </a:solidFill>
-                <a:latin typeface="微软雅黑"/>
-                <a:ea typeface="微软雅黑"/>
-                <a:cs typeface="微软雅黑"/>
-              </a:rPr>
-              <a:t>02</a:t>
-            </a:r>
-          </a:p>
-        </p:txBody>
-      </p:sp>
-      <p:sp>
-        <p:nvSpPr>
-          <p:cNvPr id="12" name="work-t1">
-            <a:extLst xmlns:a="http://schemas.openxmlformats.org/drawingml/2006/main">
-              <a:ext uri="{FF2B5EF4-FFF2-40B4-BE49-F238E27FC236}">
-                <a16:creationId xmlns:a16="http://schemas.microsoft.com/office/drawing/2014/main" id="{B6F5C9F4-F4D6-49AD-A131-E2F4A71C9433}"/>
-              </a:ext>
-            </a:extLst>
-          </p:cNvPr>
-          <p:cNvSpPr>
-            <a:spLocks xmlns:a="http://schemas.openxmlformats.org/drawingml/2006/main" noGrp="1"/>
-          </p:cNvSpPr>
-          <p:nvPr/>
-        </p:nvSpPr>
-        <p:spPr>
-          <a:xfrm xmlns:a="http://schemas.openxmlformats.org/drawingml/2006/main">
-            <a:off x="3695700" y="2114550"/>
-            <a:ext cx="7258050" cy="495300"/>
-          </a:xfrm>
-          <a:prstGeom xmlns:a="http://schemas.openxmlformats.org/drawingml/2006/main" prst="rect">
-            <a:avLst/>
-          </a:prstGeom>
-          <a:noFill xmlns:a="http://schemas.openxmlformats.org/drawingml/2006/main"/>
-          <a:ln xmlns:a="http://schemas.openxmlformats.org/drawingml/2006/main" w="0">
-            <a:noFill/>
-          </a:ln>
-        </p:spPr>
-        <p:txBody>
-          <a:bodyPr xmlns:a="http://schemas.openxmlformats.org/drawingml/2006/main" lIns="0" tIns="0" rIns="0" bIns="0" anchor="ctr"/>
-          <a:lstStyle xmlns:a="http://schemas.openxmlformats.org/drawingml/2006/main"/>
-          <a:p xmlns:a="http://schemas.openxmlformats.org/drawingml/2006/main">
-            <a:pPr algn="l">
-              <a:lnSpc>
-                <a:spcPct val="118000"/>
-              </a:lnSpc>
-              <a:buNone/>
-              <a:defRPr sz="2200" b="0">
-                <a:solidFill>
-                  <a:srgbClr val="27333D"/>
-                </a:solidFill>
-                <a:latin typeface="微软雅黑"/>
-                <a:ea typeface="微软雅黑"/>
-                <a:cs typeface="微软雅黑"/>
-              </a:defRPr>
-            </a:pPr>
-            <a:r>
-              <a:rPr sz="2200" b="0">
-                <a:solidFill>
-                  <a:srgbClr val="27333D"/>
-                </a:solidFill>
-                <a:latin typeface="微软雅黑"/>
-                <a:ea typeface="微软雅黑"/>
-                <a:cs typeface="微软雅黑"/>
-              </a:rPr>
-              <a:t>完成一次陈述与反馈</a:t>
-            </a:r>
-          </a:p>
-        </p:txBody>
-      </p:sp>
-      <p:sp>
-        <p:nvSpPr>
-          <p:cNvPr id="13" name="work-r1">
-            <a:extLst xmlns:a="http://schemas.openxmlformats.org/drawingml/2006/main">
-              <a:ext uri="{FF2B5EF4-FFF2-40B4-BE49-F238E27FC236}">
-                <a16:creationId xmlns:a16="http://schemas.microsoft.com/office/drawing/2014/main" id="{9B9E858E-121D-43FD-A960-1C7686CB3E49}"/>
-              </a:ext>
-            </a:extLst>
-          </p:cNvPr>
-          <p:cNvSpPr>
-            <a:spLocks xmlns:a="http://schemas.openxmlformats.org/drawingml/2006/main" noGrp="1"/>
-          </p:cNvSpPr>
-          <p:nvPr/>
-        </p:nvSpPr>
-        <p:spPr>
-          <a:xfrm xmlns:a="http://schemas.openxmlformats.org/drawingml/2006/main">
-            <a:off x="3143250" y="2647950"/>
-            <a:ext cx="7810500" cy="14288"/>
-          </a:xfrm>
-          <a:prstGeom xmlns:a="http://schemas.openxmlformats.org/drawingml/2006/main" prst="rect">
-            <a:avLst/>
-          </a:prstGeom>
-          <a:solidFill xmlns:a="http://schemas.openxmlformats.org/drawingml/2006/main">
-            <a:srgbClr val="CDD5DB"/>
-          </a:solidFill>
-          <a:ln xmlns:a="http://schemas.openxmlformats.org/drawingml/2006/main" w="0">
-            <a:noFill/>
-          </a:ln>
-        </p:spPr>
-      </p:sp>
-      <p:sp>
-        <p:nvSpPr>
-          <p:cNvPr id="14" name="work-n2">
-            <a:extLst xmlns:a="http://schemas.openxmlformats.org/drawingml/2006/main">
-              <a:ext uri="{FF2B5EF4-FFF2-40B4-BE49-F238E27FC236}">
-                <a16:creationId xmlns:a16="http://schemas.microsoft.com/office/drawing/2014/main" id="{DB6C8550-8FF9-4395-A01F-AF779D140412}"/>
-              </a:ext>
-            </a:extLst>
-          </p:cNvPr>
-          <p:cNvSpPr>
-            <a:spLocks xmlns:a="http://schemas.openxmlformats.org/drawingml/2006/main" noGrp="1"/>
-          </p:cNvSpPr>
-          <p:nvPr/>
-        </p:nvSpPr>
-        <p:spPr>
-          <a:xfrm xmlns:a="http://schemas.openxmlformats.org/drawingml/2006/main">
-            <a:off x="3143250" y="2895600"/>
-            <a:ext cx="476250" cy="381000"/>
-          </a:xfrm>
-          <a:prstGeom xmlns:a="http://schemas.openxmlformats.org/drawingml/2006/main" prst="rect">
-            <a:avLst/>
-          </a:prstGeom>
-          <a:noFill xmlns:a="http://schemas.openxmlformats.org/drawingml/2006/main"/>
-          <a:ln xmlns:a="http://schemas.openxmlformats.org/drawingml/2006/main" w="0">
-            <a:noFill/>
-          </a:ln>
-        </p:spPr>
-        <p:txBody>
-          <a:bodyPr xmlns:a="http://schemas.openxmlformats.org/drawingml/2006/main" lIns="0" tIns="0" rIns="0" bIns="0" anchor="ctr"/>
-          <a:lstStyle xmlns:a="http://schemas.openxmlformats.org/drawingml/2006/main"/>
-          <a:p xmlns:a="http://schemas.openxmlformats.org/drawingml/2006/main">
-            <a:pPr algn="l">
-              <a:lnSpc>
-                <a:spcPct val="118000"/>
-              </a:lnSpc>
-              <a:buNone/>
-              <a:defRPr sz="1800" b="1">
-                <a:solidFill>
-                  <a:srgbClr val="66727D"/>
-                </a:solidFill>
-                <a:latin typeface="微软雅黑"/>
-                <a:ea typeface="微软雅黑"/>
-                <a:cs typeface="微软雅黑"/>
-              </a:defRPr>
-            </a:pPr>
-            <a:r>
-              <a:rPr sz="1800" b="1">
-                <a:solidFill>
-                  <a:srgbClr val="66727D"/>
-                </a:solidFill>
-                <a:latin typeface="微软雅黑"/>
-                <a:ea typeface="微软雅黑"/>
-                <a:cs typeface="微软雅黑"/>
-              </a:rPr>
-              <a:t>03</a:t>
-            </a:r>
-          </a:p>
-        </p:txBody>
-      </p:sp>
-      <p:sp>
-        <p:nvSpPr>
-          <p:cNvPr id="15" name="work-t2">
-            <a:extLst xmlns:a="http://schemas.openxmlformats.org/drawingml/2006/main">
-              <a:ext uri="{FF2B5EF4-FFF2-40B4-BE49-F238E27FC236}">
-                <a16:creationId xmlns:a16="http://schemas.microsoft.com/office/drawing/2014/main" id="{6FD3CBA8-B2F6-4E9F-829C-F42D7B3AC8BF}"/>
-              </a:ext>
-            </a:extLst>
-          </p:cNvPr>
-          <p:cNvSpPr>
-            <a:spLocks xmlns:a="http://schemas.openxmlformats.org/drawingml/2006/main" noGrp="1"/>
-          </p:cNvSpPr>
-          <p:nvPr/>
-        </p:nvSpPr>
-        <p:spPr>
-          <a:xfrm xmlns:a="http://schemas.openxmlformats.org/drawingml/2006/main">
-            <a:off x="3695700" y="2895600"/>
-            <a:ext cx="7258050" cy="495300"/>
-          </a:xfrm>
-          <a:prstGeom xmlns:a="http://schemas.openxmlformats.org/drawingml/2006/main" prst="rect">
-            <a:avLst/>
-          </a:prstGeom>
-          <a:noFill xmlns:a="http://schemas.openxmlformats.org/drawingml/2006/main"/>
-          <a:ln xmlns:a="http://schemas.openxmlformats.org/drawingml/2006/main" w="0">
-            <a:noFill/>
-          </a:ln>
-        </p:spPr>
-        <p:txBody>
-          <a:bodyPr xmlns:a="http://schemas.openxmlformats.org/drawingml/2006/main" lIns="0" tIns="0" rIns="0" bIns="0" anchor="ctr"/>
-          <a:lstStyle xmlns:a="http://schemas.openxmlformats.org/drawingml/2006/main"/>
-          <a:p xmlns:a="http://schemas.openxmlformats.org/drawingml/2006/main">
-            <a:pPr algn="l">
-              <a:lnSpc>
-                <a:spcPct val="118000"/>
-              </a:lnSpc>
-              <a:buNone/>
-              <a:defRPr sz="2200" b="0">
-                <a:solidFill>
-                  <a:srgbClr val="27333D"/>
-                </a:solidFill>
-                <a:latin typeface="微软雅黑"/>
-                <a:ea typeface="微软雅黑"/>
-                <a:cs typeface="微软雅黑"/>
-              </a:defRPr>
-            </a:pPr>
-            <a:r>
-              <a:rPr sz="2200" b="0">
-                <a:solidFill>
-                  <a:srgbClr val="27333D"/>
-                </a:solidFill>
-                <a:latin typeface="微软雅黑"/>
-                <a:ea typeface="微软雅黑"/>
-                <a:cs typeface="微软雅黑"/>
-              </a:rPr>
-              <a:t>处理至少 2 条反馈</a:t>
-            </a:r>
-          </a:p>
-        </p:txBody>
-      </p:sp>
-      <p:sp>
-        <p:nvSpPr>
-          <p:cNvPr id="16" name="work-r2">
-            <a:extLst xmlns:a="http://schemas.openxmlformats.org/drawingml/2006/main">
-              <a:ext uri="{FF2B5EF4-FFF2-40B4-BE49-F238E27FC236}">
-                <a16:creationId xmlns:a16="http://schemas.microsoft.com/office/drawing/2014/main" id="{0466CCC6-2D98-42D1-8622-C392FC37201B}"/>
-              </a:ext>
-            </a:extLst>
-          </p:cNvPr>
-          <p:cNvSpPr>
-            <a:spLocks xmlns:a="http://schemas.openxmlformats.org/drawingml/2006/main" noGrp="1"/>
-          </p:cNvSpPr>
-          <p:nvPr/>
-        </p:nvSpPr>
-        <p:spPr>
-          <a:xfrm xmlns:a="http://schemas.openxmlformats.org/drawingml/2006/main">
-            <a:off x="3143250" y="3429000"/>
-            <a:ext cx="7810500" cy="14288"/>
-          </a:xfrm>
-          <a:prstGeom xmlns:a="http://schemas.openxmlformats.org/drawingml/2006/main" prst="rect">
-            <a:avLst/>
-          </a:prstGeom>
-          <a:solidFill xmlns:a="http://schemas.openxmlformats.org/drawingml/2006/main">
-            <a:srgbClr val="CDD5DB"/>
-          </a:solidFill>
-          <a:ln xmlns:a="http://schemas.openxmlformats.org/drawingml/2006/main" w="0">
-            <a:noFill/>
-          </a:ln>
-        </p:spPr>
-      </p:sp>
-      <p:sp>
-        <p:nvSpPr>
-          <p:cNvPr id="17" name="work-n3">
-            <a:extLst xmlns:a="http://schemas.openxmlformats.org/drawingml/2006/main">
-              <a:ext uri="{FF2B5EF4-FFF2-40B4-BE49-F238E27FC236}">
-                <a16:creationId xmlns:a16="http://schemas.microsoft.com/office/drawing/2014/main" id="{3D8E08C1-A582-4F2A-809A-F3F375215EEE}"/>
-              </a:ext>
-            </a:extLst>
-          </p:cNvPr>
-          <p:cNvSpPr>
-            <a:spLocks xmlns:a="http://schemas.openxmlformats.org/drawingml/2006/main" noGrp="1"/>
-          </p:cNvSpPr>
-          <p:nvPr/>
-        </p:nvSpPr>
-        <p:spPr>
-          <a:xfrm xmlns:a="http://schemas.openxmlformats.org/drawingml/2006/main">
-            <a:off x="3143250" y="3676650"/>
-            <a:ext cx="476250" cy="381000"/>
-          </a:xfrm>
-          <a:prstGeom xmlns:a="http://schemas.openxmlformats.org/drawingml/2006/main" prst="rect">
-            <a:avLst/>
-          </a:prstGeom>
-          <a:noFill xmlns:a="http://schemas.openxmlformats.org/drawingml/2006/main"/>
-          <a:ln xmlns:a="http://schemas.openxmlformats.org/drawingml/2006/main" w="0">
-            <a:noFill/>
-          </a:ln>
-        </p:spPr>
-        <p:txBody>
-          <a:bodyPr xmlns:a="http://schemas.openxmlformats.org/drawingml/2006/main" lIns="0" tIns="0" rIns="0" bIns="0" anchor="ctr"/>
-          <a:lstStyle xmlns:a="http://schemas.openxmlformats.org/drawingml/2006/main"/>
-          <a:p xmlns:a="http://schemas.openxmlformats.org/drawingml/2006/main">
-            <a:pPr algn="l">
-              <a:lnSpc>
-                <a:spcPct val="118000"/>
-              </a:lnSpc>
-              <a:buNone/>
-              <a:defRPr sz="1800" b="1">
-                <a:solidFill>
-                  <a:srgbClr val="66727D"/>
-                </a:solidFill>
-                <a:latin typeface="微软雅黑"/>
-                <a:ea typeface="微软雅黑"/>
-                <a:cs typeface="微软雅黑"/>
-              </a:defRPr>
-            </a:pPr>
-            <a:r>
-              <a:rPr sz="1800" b="1">
-                <a:solidFill>
-                  <a:srgbClr val="66727D"/>
-                </a:solidFill>
-                <a:latin typeface="微软雅黑"/>
-                <a:ea typeface="微软雅黑"/>
-                <a:cs typeface="微软雅黑"/>
-              </a:rPr>
-              <a:t>04</a:t>
-            </a:r>
-          </a:p>
-        </p:txBody>
-      </p:sp>
-      <p:sp>
-        <p:nvSpPr>
-          <p:cNvPr id="18" name="work-t3">
-            <a:extLst xmlns:a="http://schemas.openxmlformats.org/drawingml/2006/main">
-              <a:ext uri="{FF2B5EF4-FFF2-40B4-BE49-F238E27FC236}">
-                <a16:creationId xmlns:a16="http://schemas.microsoft.com/office/drawing/2014/main" id="{B1D43B7E-6C97-4C1F-B995-974421404E50}"/>
-              </a:ext>
-            </a:extLst>
-          </p:cNvPr>
-          <p:cNvSpPr>
-            <a:spLocks xmlns:a="http://schemas.openxmlformats.org/drawingml/2006/main" noGrp="1"/>
-          </p:cNvSpPr>
-          <p:nvPr/>
-        </p:nvSpPr>
-        <p:spPr>
-          <a:xfrm xmlns:a="http://schemas.openxmlformats.org/drawingml/2006/main">
-            <a:off x="3695700" y="3676650"/>
-            <a:ext cx="7258050" cy="495300"/>
-          </a:xfrm>
-          <a:prstGeom xmlns:a="http://schemas.openxmlformats.org/drawingml/2006/main" prst="rect">
-            <a:avLst/>
-          </a:prstGeom>
-          <a:noFill xmlns:a="http://schemas.openxmlformats.org/drawingml/2006/main"/>
-          <a:ln xmlns:a="http://schemas.openxmlformats.org/drawingml/2006/main" w="0">
-            <a:noFill/>
-          </a:ln>
-        </p:spPr>
-        <p:txBody>
-          <a:bodyPr xmlns:a="http://schemas.openxmlformats.org/drawingml/2006/main" lIns="0" tIns="0" rIns="0" bIns="0" anchor="ctr"/>
-          <a:lstStyle xmlns:a="http://schemas.openxmlformats.org/drawingml/2006/main"/>
-          <a:p xmlns:a="http://schemas.openxmlformats.org/drawingml/2006/main">
-            <a:pPr algn="l">
-              <a:lnSpc>
-                <a:spcPct val="118000"/>
-              </a:lnSpc>
-              <a:buNone/>
-              <a:defRPr sz="2200" b="0">
-                <a:solidFill>
-                  <a:srgbClr val="27333D"/>
-                </a:solidFill>
-                <a:latin typeface="微软雅黑"/>
-                <a:ea typeface="微软雅黑"/>
-                <a:cs typeface="微软雅黑"/>
-              </a:defRPr>
-            </a:pPr>
-            <a:r>
-              <a:rPr sz="2200" b="0">
-                <a:solidFill>
-                  <a:srgbClr val="27333D"/>
-                </a:solidFill>
-                <a:latin typeface="微软雅黑"/>
-                <a:ea typeface="微软雅黑"/>
-                <a:cs typeface="微软雅黑"/>
-              </a:rPr>
-              <a:t>现场修订 1 处并定位</a:t>
-            </a:r>
-          </a:p>
-        </p:txBody>
-      </p:sp>
-      <p:sp>
-        <p:nvSpPr>
-          <p:cNvPr id="19" name="work-r3">
-            <a:extLst xmlns:a="http://schemas.openxmlformats.org/drawingml/2006/main">
-              <a:ext uri="{FF2B5EF4-FFF2-40B4-BE49-F238E27FC236}">
-                <a16:creationId xmlns:a16="http://schemas.microsoft.com/office/drawing/2014/main" id="{D3F4E0BD-A2C1-420C-BA5E-61A8121A36A3}"/>
-              </a:ext>
-            </a:extLst>
-          </p:cNvPr>
-          <p:cNvSpPr>
-            <a:spLocks xmlns:a="http://schemas.openxmlformats.org/drawingml/2006/main" noGrp="1"/>
-          </p:cNvSpPr>
-          <p:nvPr/>
-        </p:nvSpPr>
-        <p:spPr>
-          <a:xfrm xmlns:a="http://schemas.openxmlformats.org/drawingml/2006/main">
-            <a:off x="3143250" y="4210050"/>
-            <a:ext cx="7810500" cy="14288"/>
-          </a:xfrm>
-          <a:prstGeom xmlns:a="http://schemas.openxmlformats.org/drawingml/2006/main" prst="rect">
-            <a:avLst/>
-          </a:prstGeom>
-          <a:solidFill xmlns:a="http://schemas.openxmlformats.org/drawingml/2006/main">
-            <a:srgbClr val="CDD5DB"/>
-          </a:solidFill>
-          <a:ln xmlns:a="http://schemas.openxmlformats.org/drawingml/2006/main" w="0">
-            <a:noFill/>
-          </a:ln>
-        </p:spPr>
-      </p:sp>
-      <p:sp>
-        <p:nvSpPr>
-          <p:cNvPr id="20" name="done">
-            <a:extLst xmlns:a="http://schemas.openxmlformats.org/drawingml/2006/main">
-              <a:ext uri="{FF2B5EF4-FFF2-40B4-BE49-F238E27FC236}">
-                <a16:creationId xmlns:a16="http://schemas.microsoft.com/office/drawing/2014/main" id="{6EBD7C25-0CB4-4FD1-AD80-4465A552C1A9}"/>
-              </a:ext>
-            </a:extLst>
-          </p:cNvPr>
-          <p:cNvSpPr>
-            <a:spLocks xmlns:a="http://schemas.openxmlformats.org/drawingml/2006/main" noGrp="1"/>
-          </p:cNvSpPr>
-          <p:nvPr/>
-        </p:nvSpPr>
-        <p:spPr>
-          <a:xfrm xmlns:a="http://schemas.openxmlformats.org/drawingml/2006/main">
-            <a:off x="2476500" y="5000625"/>
-            <a:ext cx="7239000" cy="419100"/>
-          </a:xfrm>
-          <a:prstGeom xmlns:a="http://schemas.openxmlformats.org/drawingml/2006/main" prst="rect">
-            <a:avLst/>
-          </a:prstGeom>
-          <a:noFill xmlns:a="http://schemas.openxmlformats.org/drawingml/2006/main"/>
-          <a:ln xmlns:a="http://schemas.openxmlformats.org/drawingml/2006/main" w="0">
-            <a:noFill/>
-          </a:ln>
-        </p:spPr>
-        <p:txBody>
-          <a:bodyPr xmlns:a="http://schemas.openxmlformats.org/drawingml/2006/main" lIns="0" tIns="0" rIns="0" bIns="0" anchor="t"/>
-          <a:lstStyle xmlns:a="http://schemas.openxmlformats.org/drawingml/2006/main"/>
-          <a:p xmlns:a="http://schemas.openxmlformats.org/drawingml/2006/main">
-            <a:pPr algn="ctr">
-              <a:lnSpc>
-                <a:spcPct val="118000"/>
-              </a:lnSpc>
-              <a:buNone/>
-              <a:defRPr sz="2200" b="1">
-                <a:solidFill>
-                  <a:srgbClr val="2E7D5B"/>
-                </a:solidFill>
-                <a:latin typeface="微软雅黑"/>
-                <a:ea typeface="微软雅黑"/>
-                <a:cs typeface="微软雅黑"/>
-              </a:defRPr>
-            </a:pPr>
-            <a:r>
-              <a:rPr sz="2200" b="1">
-                <a:solidFill>
-                  <a:srgbClr val="2E7D5B"/>
-                </a:solidFill>
-                <a:latin typeface="微软雅黑"/>
-                <a:ea typeface="微软雅黑"/>
-                <a:cs typeface="微软雅黑"/>
-              </a:rPr>
-              <a:t>完成标志：工件中出现“动作 + 理由 + 回写位置”</a:t>
             </a:r>
           </a:p>
         </p:txBody>
@@ -9834,35 +8030,55 @@
       </p:grpSpPr>
       <p:sp>
         <p:nvSpPr>
-          <p:cNvPr id="4" name="Text Placeholder 3">
-            <a:extLst xmlns:a="http://schemas.openxmlformats.org/drawingml/2006/main">
-              <a:ext uri="{FF2B5EF4-FFF2-40B4-BE49-F238E27FC236}">
-                <a16:creationId xmlns:a16="http://schemas.microsoft.com/office/drawing/2014/main" id="{4D941B40-7A0A-534E-3563-CA11753C8E3F}"/>
-              </a:ext>
-            </a:extLst>
-          </p:cNvPr>
-          <p:cNvSpPr>
-            <a:spLocks xmlns:a="http://schemas.openxmlformats.org/drawingml/2006/main" noGrp="1"/>
-          </p:cNvSpPr>
-          <p:nvPr>
-            <p:ph type="body" idx="14"/>
-          </p:nvPr>
-        </p:nvSpPr>
-        <p:spPr>
-          <a:xfrm xmlns:a="http://schemas.openxmlformats.org/drawingml/2006/main">
-            <a:off x="1028700" y="57150"/>
-            <a:ext cx="10668000" cy="571500"/>
-          </a:xfrm>
-        </p:spPr>
-        <p:txBody>
-          <a:bodyPr xmlns:a="http://schemas.openxmlformats.org/drawingml/2006/main" lIns="0" tIns="0" rIns="0" bIns="0" anchor="ctr"/>
-          <a:lstStyle xmlns:a="http://schemas.openxmlformats.org/drawingml/2006/main"/>
+          <p:cNvPr id="7" name="judgment-title">
+            <a:extLst xmlns:a="http://schemas.openxmlformats.org/drawingml/2006/main">
+              <a:ext uri="{FF2B5EF4-FFF2-40B4-BE49-F238E27FC236}">
+                <a16:creationId xmlns:a16="http://schemas.microsoft.com/office/drawing/2014/main" id="{7DCBD8C9-B92A-4C38-B444-581E6C8B5AEA}"/>
+              </a:ext>
+            </a:extLst>
+          </p:cNvPr>
+          <p:cNvSpPr>
+            <a:spLocks xmlns:a="http://schemas.openxmlformats.org/drawingml/2006/main" noGrp="1"/>
+          </p:cNvSpPr>
+          <p:nvPr/>
+        </p:nvSpPr>
+        <p:spPr>
+          <a:xfrm xmlns:a="http://schemas.openxmlformats.org/drawingml/2006/main">
+            <a:off x="1028700" y="76200"/>
+            <a:ext cx="10687050" cy="514350"/>
+          </a:xfrm>
+          <a:prstGeom xmlns:a="http://schemas.openxmlformats.org/drawingml/2006/main" prst="rect">
+            <a:avLst/>
+          </a:prstGeom>
+          <a:noFill xmlns:a="http://schemas.openxmlformats.org/drawingml/2006/main"/>
+          <a:ln xmlns:a="http://schemas.openxmlformats.org/drawingml/2006/main" w="0">
+            <a:noFill/>
+          </a:ln>
+        </p:spPr>
+        <p:txBody>
+          <a:bodyPr xmlns:a="http://schemas.openxmlformats.org/drawingml/2006/main" lIns="0" tIns="0" rIns="0" bIns="0" anchor="t"/>
+          <a:lstStyle xmlns:a="http://schemas.openxmlformats.org/drawingml/2006/main">
+            <a:defPPr algn="l">
+              <a:defRPr sz="3000" b="1">
+                <a:solidFill>
+                  <a:srgbClr val="FFFFFF"/>
+                </a:solidFill>
+                <a:latin typeface="微软雅黑"/>
+                <a:ea typeface="微软雅黑"/>
+                <a:cs typeface="微软雅黑"/>
+              </a:defRPr>
+            </a:defPPr>
+          </a:lstStyle>
           <a:p xmlns:a="http://schemas.openxmlformats.org/drawingml/2006/main">
             <a:pPr algn="l">
-              <a:lnSpc>
-                <a:spcPct val="118000"/>
-              </a:lnSpc>
-              <a:buNone/>
+              <a:defRPr sz="3000" b="1">
+                <a:solidFill>
+                  <a:srgbClr val="FFFFFF"/>
+                </a:solidFill>
+                <a:latin typeface="微软雅黑"/>
+                <a:ea typeface="微软雅黑"/>
+                <a:cs typeface="微软雅黑"/>
+              </a:defRPr>
             </a:pPr>
             <a:r>
               <a:rPr sz="3000" b="1">
@@ -9873,858 +8089,337 @@
                 <a:ea typeface="微软雅黑"/>
                 <a:cs typeface="微软雅黑"/>
               </a:rPr>
-              <a:t>退出卡：把今天的反馈变成第 9 课的最小行动</a:t>
-            </a:r>
-            <a:endParaRPr/>
-          </a:p>
-        </p:txBody>
-      </p:sp>
-      <p:sp>
-        <p:nvSpPr>
-          <p:cNvPr id="5" name="Slide Number Placeholder 4">
-            <a:extLst xmlns:a="http://schemas.openxmlformats.org/drawingml/2006/main">
-              <a:ext uri="{FF2B5EF4-FFF2-40B4-BE49-F238E27FC236}">
-                <a16:creationId xmlns:a16="http://schemas.microsoft.com/office/drawing/2014/main" id="{EBA5909F-738E-F60C-BE8C-B3F1D94548E5}"/>
-              </a:ext>
-            </a:extLst>
-          </p:cNvPr>
-          <p:cNvSpPr>
-            <a:spLocks xmlns:a="http://schemas.openxmlformats.org/drawingml/2006/main" noGrp="1"/>
-          </p:cNvSpPr>
-          <p:nvPr>
-            <p:ph type="sldNum" idx="10"/>
-          </p:nvPr>
-        </p:nvSpPr>
-        <p:spPr/>
-        <p:txBody>
-          <a:bodyPr xmlns:a="http://schemas.openxmlformats.org/drawingml/2006/main"/>
-          <a:lstStyle xmlns:a="http://schemas.openxmlformats.org/drawingml/2006/main"/>
-          <a:p xmlns:a="http://schemas.openxmlformats.org/drawingml/2006/main">
-            <a:fld id="{EA83FA91-883A-0168-8075-96CEB9DCA3C2}" type="slidenum">
+              <a:t>保留本课决定，准备下一课输入</a:t>
+            </a:r>
+          </a:p>
+        </p:txBody>
+      </p:sp>
+      <p:sp>
+        <p:nvSpPr>
+          <p:cNvPr id="2" name="judgment-body-0">
+            <a:extLst xmlns:a="http://schemas.openxmlformats.org/drawingml/2006/main">
+              <a:ext uri="{FF2B5EF4-FFF2-40B4-BE49-F238E27FC236}">
+                <a16:creationId xmlns:a16="http://schemas.microsoft.com/office/drawing/2014/main" id="{2DFC2F46-EC17-4B72-86DC-099E584C9232}"/>
+              </a:ext>
+            </a:extLst>
+          </p:cNvPr>
+          <p:cNvSpPr>
+            <a:spLocks xmlns:a="http://schemas.openxmlformats.org/drawingml/2006/main" noGrp="1"/>
+          </p:cNvSpPr>
+          <p:nvPr/>
+        </p:nvSpPr>
+        <p:spPr>
+          <a:xfrm xmlns:a="http://schemas.openxmlformats.org/drawingml/2006/main">
+            <a:off x="666750" y="1066800"/>
+            <a:ext cx="10858500" cy="1009650"/>
+          </a:xfrm>
+          <a:prstGeom xmlns:a="http://schemas.openxmlformats.org/drawingml/2006/main" prst="rect">
+            <a:avLst/>
+          </a:prstGeom>
+          <a:noFill xmlns:a="http://schemas.openxmlformats.org/drawingml/2006/main"/>
+          <a:ln xmlns:a="http://schemas.openxmlformats.org/drawingml/2006/main" w="0">
+            <a:noFill/>
+          </a:ln>
+        </p:spPr>
+        <p:txBody>
+          <a:bodyPr xmlns:a="http://schemas.openxmlformats.org/drawingml/2006/main" lIns="0" tIns="0" rIns="0" bIns="0" anchor="t"/>
+          <a:lstStyle xmlns:a="http://schemas.openxmlformats.org/drawingml/2006/main">
+            <a:defPPr algn="l">
+              <a:defRPr sz="2400" b="0">
+                <a:solidFill>
+                  <a:srgbClr val="263746"/>
+                </a:solidFill>
+                <a:latin typeface="微软雅黑"/>
+                <a:ea typeface="微软雅黑"/>
+                <a:cs typeface="微软雅黑"/>
+              </a:defRPr>
+            </a:defPPr>
+          </a:lstStyle>
+          <a:p xmlns:a="http://schemas.openxmlformats.org/drawingml/2006/main">
+            <a:pPr algn="l">
+              <a:defRPr sz="2400" b="0">
+                <a:solidFill>
+                  <a:srgbClr val="263746"/>
+                </a:solidFill>
+                <a:latin typeface="微软雅黑"/>
+                <a:ea typeface="微软雅黑"/>
+                <a:cs typeface="微软雅黑"/>
+              </a:defRPr>
+            </a:pPr>
+            <a:r>
+              <a:rPr sz="2400" b="0">
+                <a:solidFill>
+                  <a:srgbClr val="263746"/>
+                </a:solidFill>
+                <a:latin typeface="微软雅黑"/>
+                <a:ea typeface="微软雅黑"/>
+                <a:cs typeface="微软雅黑"/>
+              </a:rPr>
+              <a:t>L9 使用修订后的实验规格建立公平 baseline。</a:t>
+            </a:r>
+          </a:p>
+        </p:txBody>
+      </p:sp>
+      <p:sp>
+        <p:nvSpPr>
+          <p:cNvPr id="3" name="judgment-body-1">
+            <a:extLst xmlns:a="http://schemas.openxmlformats.org/drawingml/2006/main">
+              <a:ext uri="{FF2B5EF4-FFF2-40B4-BE49-F238E27FC236}">
+                <a16:creationId xmlns:a16="http://schemas.microsoft.com/office/drawing/2014/main" id="{4251BE9C-D160-4699-9231-27F5B5B7548C}"/>
+              </a:ext>
+            </a:extLst>
+          </p:cNvPr>
+          <p:cNvSpPr>
+            <a:spLocks xmlns:a="http://schemas.openxmlformats.org/drawingml/2006/main" noGrp="1"/>
+          </p:cNvSpPr>
+          <p:nvPr/>
+        </p:nvSpPr>
+        <p:spPr>
+          <a:xfrm xmlns:a="http://schemas.openxmlformats.org/drawingml/2006/main">
+            <a:off x="666750" y="2238375"/>
+            <a:ext cx="10858500" cy="2076450"/>
+          </a:xfrm>
+          <a:prstGeom xmlns:a="http://schemas.openxmlformats.org/drawingml/2006/main" prst="rect">
+            <a:avLst/>
+          </a:prstGeom>
+          <a:noFill xmlns:a="http://schemas.openxmlformats.org/drawingml/2006/main"/>
+          <a:ln xmlns:a="http://schemas.openxmlformats.org/drawingml/2006/main" w="0">
+            <a:noFill/>
+          </a:ln>
+        </p:spPr>
+        <p:txBody>
+          <a:bodyPr xmlns:a="http://schemas.openxmlformats.org/drawingml/2006/main" lIns="0" tIns="0" rIns="0" bIns="0" anchor="t"/>
+          <a:lstStyle xmlns:a="http://schemas.openxmlformats.org/drawingml/2006/main">
+            <a:defPPr algn="l">
+              <a:defRPr sz="2400" b="0">
+                <a:solidFill>
+                  <a:srgbClr val="263746"/>
+                </a:solidFill>
+                <a:latin typeface="微软雅黑"/>
+                <a:ea typeface="微软雅黑"/>
+                <a:cs typeface="微软雅黑"/>
+              </a:defRPr>
+            </a:defPPr>
+          </a:lstStyle>
+          <a:p xmlns:a="http://schemas.openxmlformats.org/drawingml/2006/main">
+            <a:pPr algn="l">
+              <a:defRPr sz="2400" b="0">
+                <a:solidFill>
+                  <a:srgbClr val="263746"/>
+                </a:solidFill>
+                <a:latin typeface="微软雅黑"/>
+                <a:ea typeface="微软雅黑"/>
+                <a:cs typeface="微软雅黑"/>
+              </a:defRPr>
+            </a:pPr>
+            <a:r>
+              <a:rPr sz="2400" b="0">
+                <a:solidFill>
+                  <a:srgbClr val="263746"/>
+                </a:solidFill>
+                <a:latin typeface="微软雅黑"/>
+                <a:ea typeface="微软雅黑"/>
+                <a:cs typeface="微软雅黑"/>
+              </a:rPr>
+              <a:t>回写已有项目：真实同伴反馈＋作者决定＋一项实际修订</a:t>
+            </a:r>
+          </a:p>
+        </p:txBody>
+      </p:sp>
+      <p:sp>
+        <p:nvSpPr>
+          <p:cNvPr id="4" name="judgment-body-2">
+            <a:extLst xmlns:a="http://schemas.openxmlformats.org/drawingml/2006/main">
+              <a:ext uri="{FF2B5EF4-FFF2-40B4-BE49-F238E27FC236}">
+                <a16:creationId xmlns:a16="http://schemas.microsoft.com/office/drawing/2014/main" id="{28A4D06E-8970-4E8C-BB2F-5B0D8AB5E8C1}"/>
+              </a:ext>
+            </a:extLst>
+          </p:cNvPr>
+          <p:cNvSpPr>
+            <a:spLocks xmlns:a="http://schemas.openxmlformats.org/drawingml/2006/main" noGrp="1"/>
+          </p:cNvSpPr>
+          <p:nvPr/>
+        </p:nvSpPr>
+        <p:spPr>
+          <a:xfrm xmlns:a="http://schemas.openxmlformats.org/drawingml/2006/main">
+            <a:off x="666750" y="4495800"/>
+            <a:ext cx="10858500" cy="1409700"/>
+          </a:xfrm>
+          <a:prstGeom xmlns:a="http://schemas.openxmlformats.org/drawingml/2006/main" prst="rect">
+            <a:avLst/>
+          </a:prstGeom>
+          <a:noFill xmlns:a="http://schemas.openxmlformats.org/drawingml/2006/main"/>
+          <a:ln xmlns:a="http://schemas.openxmlformats.org/drawingml/2006/main" w="0">
+            <a:noFill/>
+          </a:ln>
+        </p:spPr>
+        <p:txBody>
+          <a:bodyPr xmlns:a="http://schemas.openxmlformats.org/drawingml/2006/main" lIns="0" tIns="0" rIns="0" bIns="0" anchor="t"/>
+          <a:lstStyle xmlns:a="http://schemas.openxmlformats.org/drawingml/2006/main">
+            <a:defPPr algn="l">
+              <a:defRPr sz="2200" b="0">
+                <a:solidFill>
+                  <a:srgbClr val="1F4D78"/>
+                </a:solidFill>
+                <a:latin typeface="微软雅黑"/>
+                <a:ea typeface="微软雅黑"/>
+                <a:cs typeface="微软雅黑"/>
+              </a:defRPr>
+            </a:defPPr>
+          </a:lstStyle>
+          <a:p xmlns:a="http://schemas.openxmlformats.org/drawingml/2006/main">
+            <a:pPr algn="l">
+              <a:defRPr sz="2200" b="0">
+                <a:solidFill>
+                  <a:srgbClr val="1F4D78"/>
+                </a:solidFill>
+                <a:latin typeface="微软雅黑"/>
+                <a:ea typeface="微软雅黑"/>
+                <a:cs typeface="微软雅黑"/>
+              </a:defRPr>
+            </a:pPr>
+            <a:r>
+              <a:rPr sz="2200" b="0">
+                <a:solidFill>
+                  <a:srgbClr val="1F4D78"/>
+                </a:solidFill>
+                <a:latin typeface="微软雅黑"/>
+                <a:ea typeface="微软雅黑"/>
+                <a:cs typeface="微软雅黑"/>
+              </a:rPr>
+              <a:t>只读指定段落，补课堂留下的真实缺口。安装与排障计入课外总预算。</a:t>
+            </a:r>
+          </a:p>
+        </p:txBody>
+      </p:sp>
+      <p:sp>
+        <p:nvSpPr>
+          <p:cNvPr id="5" name="judgment-source">
+            <a:extLst xmlns:a="http://schemas.openxmlformats.org/drawingml/2006/main">
+              <a:ext uri="{FF2B5EF4-FFF2-40B4-BE49-F238E27FC236}">
+                <a16:creationId xmlns:a16="http://schemas.microsoft.com/office/drawing/2014/main" id="{5328ADCA-ED44-47B4-89D9-06C11ED6E598}"/>
+              </a:ext>
+            </a:extLst>
+          </p:cNvPr>
+          <p:cNvSpPr>
+            <a:spLocks xmlns:a="http://schemas.openxmlformats.org/drawingml/2006/main" noGrp="1"/>
+          </p:cNvSpPr>
+          <p:nvPr/>
+        </p:nvSpPr>
+        <p:spPr>
+          <a:xfrm xmlns:a="http://schemas.openxmlformats.org/drawingml/2006/main">
+            <a:off x="666750" y="6276975"/>
+            <a:ext cx="10572750" cy="209550"/>
+          </a:xfrm>
+          <a:prstGeom xmlns:a="http://schemas.openxmlformats.org/drawingml/2006/main" prst="rect">
+            <a:avLst/>
+          </a:prstGeom>
+          <a:noFill xmlns:a="http://schemas.openxmlformats.org/drawingml/2006/main"/>
+          <a:ln xmlns:a="http://schemas.openxmlformats.org/drawingml/2006/main" w="0">
+            <a:noFill/>
+          </a:ln>
+        </p:spPr>
+        <p:txBody>
+          <a:bodyPr xmlns:a="http://schemas.openxmlformats.org/drawingml/2006/main" lIns="0" tIns="0" rIns="0" bIns="0" anchor="t"/>
+          <a:lstStyle xmlns:a="http://schemas.openxmlformats.org/drawingml/2006/main">
+            <a:defPPr algn="l">
+              <a:defRPr sz="1100" b="0">
+                <a:solidFill>
+                  <a:srgbClr val="667684"/>
+                </a:solidFill>
+                <a:latin typeface="微软雅黑"/>
+                <a:ea typeface="微软雅黑"/>
+                <a:cs typeface="微软雅黑"/>
+              </a:defRPr>
+            </a:defPPr>
+          </a:lstStyle>
+          <a:p xmlns:a="http://schemas.openxmlformats.org/drawingml/2006/main">
+            <a:pPr algn="l">
+              <a:defRPr sz="1100" b="0">
+                <a:solidFill>
+                  <a:srgbClr val="667684"/>
+                </a:solidFill>
+                <a:latin typeface="微软雅黑"/>
+                <a:ea typeface="微软雅黑"/>
+                <a:cs typeface="微软雅黑"/>
+              </a:defRPr>
+            </a:pPr>
+            <a:r>
+              <a:rPr sz="1100" b="0">
+                <a:solidFill>
+                  <a:srgbClr val="667684"/>
+                </a:solidFill>
+                <a:latin typeface="微软雅黑"/>
+                <a:ea typeface="微软雅黑"/>
+                <a:cs typeface="微软雅黑"/>
+              </a:rPr>
+              <a:t>来源：本课判断任务与讲义；构造材料及真实来源按材料包标识</a:t>
+            </a:r>
+          </a:p>
+        </p:txBody>
+      </p:sp>
+      <p:sp>
+        <p:nvSpPr>
+          <p:cNvPr id="6" name="judgment-page">
+            <a:extLst xmlns:a="http://schemas.openxmlformats.org/drawingml/2006/main">
+              <a:ext uri="{FF2B5EF4-FFF2-40B4-BE49-F238E27FC236}">
+                <a16:creationId xmlns:a16="http://schemas.microsoft.com/office/drawing/2014/main" id="{6143E79D-61AD-4BD6-BD70-97B1F704E5FB}"/>
+              </a:ext>
+            </a:extLst>
+          </p:cNvPr>
+          <p:cNvSpPr>
+            <a:spLocks xmlns:a="http://schemas.openxmlformats.org/drawingml/2006/main" noGrp="1"/>
+          </p:cNvSpPr>
+          <p:nvPr/>
+        </p:nvSpPr>
+        <p:spPr>
+          <a:xfrm xmlns:a="http://schemas.openxmlformats.org/drawingml/2006/main">
+            <a:off x="11715750" y="6562725"/>
+            <a:ext cx="238125" cy="171450"/>
+          </a:xfrm>
+          <a:prstGeom xmlns:a="http://schemas.openxmlformats.org/drawingml/2006/main" prst="rect">
+            <a:avLst/>
+          </a:prstGeom>
+          <a:noFill xmlns:a="http://schemas.openxmlformats.org/drawingml/2006/main"/>
+          <a:ln xmlns:a="http://schemas.openxmlformats.org/drawingml/2006/main" w="0">
+            <a:noFill/>
+          </a:ln>
+        </p:spPr>
+        <p:txBody>
+          <a:bodyPr xmlns:a="http://schemas.openxmlformats.org/drawingml/2006/main" lIns="0" tIns="0" rIns="0" bIns="0" anchor="t"/>
+          <a:lstStyle xmlns:a="http://schemas.openxmlformats.org/drawingml/2006/main">
+            <a:defPPr algn="l">
+              <a:defRPr sz="900" b="0">
+                <a:solidFill>
+                  <a:srgbClr val="A5A5A5"/>
+                </a:solidFill>
+                <a:latin typeface="微软雅黑"/>
+                <a:ea typeface="微软雅黑"/>
+                <a:cs typeface="微软雅黑"/>
+              </a:defRPr>
+            </a:defPPr>
+          </a:lstStyle>
+          <a:p xmlns:a="http://schemas.openxmlformats.org/drawingml/2006/main">
+            <a:pPr algn="l">
+              <a:defRPr sz="900" b="0">
+                <a:solidFill>
+                  <a:srgbClr val="A5A5A5"/>
+                </a:solidFill>
+                <a:latin typeface="微软雅黑"/>
+                <a:ea typeface="微软雅黑"/>
+                <a:cs typeface="微软雅黑"/>
+              </a:defRPr>
+            </a:pPr>
+            <a:r>
+              <a:rPr sz="900" b="0">
+                <a:solidFill>
+                  <a:srgbClr val="A5A5A5"/>
+                </a:solidFill>
+                <a:latin typeface="微软雅黑"/>
+                <a:ea typeface="微软雅黑"/>
+                <a:cs typeface="微软雅黑"/>
+              </a:rPr>
               <a:t>15</a:t>
-            </a:fld>
-            <a:endParaRPr/>
-          </a:p>
-        </p:txBody>
-      </p:sp>
-      <p:sp>
-        <p:nvSpPr>
-          <p:cNvPr id="6" name="exit-l">
-            <a:extLst xmlns:a="http://schemas.openxmlformats.org/drawingml/2006/main">
-              <a:ext uri="{FF2B5EF4-FFF2-40B4-BE49-F238E27FC236}">
-                <a16:creationId xmlns:a16="http://schemas.microsoft.com/office/drawing/2014/main" id="{4ECD63E4-BA30-4557-9160-D2779FC56E3F}"/>
-              </a:ext>
-            </a:extLst>
-          </p:cNvPr>
-          <p:cNvSpPr>
-            <a:spLocks xmlns:a="http://schemas.openxmlformats.org/drawingml/2006/main" noGrp="1"/>
-          </p:cNvSpPr>
-          <p:nvPr/>
-        </p:nvSpPr>
-        <p:spPr>
-          <a:xfrm xmlns:a="http://schemas.openxmlformats.org/drawingml/2006/main">
-            <a:off x="609600" y="1143000"/>
-            <a:ext cx="2857500" cy="266700"/>
-          </a:xfrm>
-          <a:prstGeom xmlns:a="http://schemas.openxmlformats.org/drawingml/2006/main" prst="rect">
-            <a:avLst/>
-          </a:prstGeom>
-          <a:noFill xmlns:a="http://schemas.openxmlformats.org/drawingml/2006/main"/>
-          <a:ln xmlns:a="http://schemas.openxmlformats.org/drawingml/2006/main" w="0">
-            <a:noFill/>
-          </a:ln>
-        </p:spPr>
-        <p:txBody>
-          <a:bodyPr xmlns:a="http://schemas.openxmlformats.org/drawingml/2006/main" lIns="0" tIns="0" rIns="0" bIns="0" anchor="ctr"/>
-          <a:lstStyle xmlns:a="http://schemas.openxmlformats.org/drawingml/2006/main"/>
-          <a:p xmlns:a="http://schemas.openxmlformats.org/drawingml/2006/main">
-            <a:pPr algn="l">
-              <a:lnSpc>
-                <a:spcPct val="118000"/>
-              </a:lnSpc>
-              <a:buNone/>
-              <a:defRPr sz="2000" b="1">
-                <a:solidFill>
-                  <a:srgbClr val="1F4D78"/>
-                </a:solidFill>
-                <a:latin typeface="微软雅黑"/>
-                <a:ea typeface="微软雅黑"/>
-                <a:cs typeface="微软雅黑"/>
-              </a:defRPr>
-            </a:pPr>
-            <a:r>
-              <a:rPr sz="2000" b="1">
-                <a:solidFill>
-                  <a:srgbClr val="1F4D78"/>
-                </a:solidFill>
-                <a:latin typeface="微软雅黑"/>
-                <a:ea typeface="微软雅黑"/>
-                <a:cs typeface="微软雅黑"/>
-              </a:rPr>
-              <a:t>退出记录</a:t>
-            </a:r>
-          </a:p>
-        </p:txBody>
-      </p:sp>
-      <p:sp>
-        <p:nvSpPr>
-          <p:cNvPr id="7" name="exit-shade0">
-            <a:extLst xmlns:a="http://schemas.openxmlformats.org/drawingml/2006/main">
-              <a:ext uri="{FF2B5EF4-FFF2-40B4-BE49-F238E27FC236}">
-                <a16:creationId xmlns:a16="http://schemas.microsoft.com/office/drawing/2014/main" id="{3412D425-945A-4979-8A93-8B6351599869}"/>
-              </a:ext>
-            </a:extLst>
-          </p:cNvPr>
-          <p:cNvSpPr>
-            <a:spLocks xmlns:a="http://schemas.openxmlformats.org/drawingml/2006/main" noGrp="1"/>
-          </p:cNvSpPr>
-          <p:nvPr/>
-        </p:nvSpPr>
-        <p:spPr>
-          <a:xfrm xmlns:a="http://schemas.openxmlformats.org/drawingml/2006/main">
-            <a:off x="609600" y="1571625"/>
-            <a:ext cx="7143750" cy="838200"/>
-          </a:xfrm>
-          <a:prstGeom xmlns:a="http://schemas.openxmlformats.org/drawingml/2006/main" prst="rect">
-            <a:avLst/>
-          </a:prstGeom>
-          <a:solidFill xmlns:a="http://schemas.openxmlformats.org/drawingml/2006/main">
-            <a:srgbClr val="F4F6F8"/>
-          </a:solidFill>
-          <a:ln xmlns:a="http://schemas.openxmlformats.org/drawingml/2006/main" w="0">
-            <a:noFill/>
-          </a:ln>
-        </p:spPr>
-      </p:sp>
-      <p:sp>
-        <p:nvSpPr>
-          <p:cNvPr id="8" name="exit-l0">
-            <a:extLst xmlns:a="http://schemas.openxmlformats.org/drawingml/2006/main">
-              <a:ext uri="{FF2B5EF4-FFF2-40B4-BE49-F238E27FC236}">
-                <a16:creationId xmlns:a16="http://schemas.microsoft.com/office/drawing/2014/main" id="{C09E1762-CFF7-4083-BA83-98A61F529491}"/>
-              </a:ext>
-            </a:extLst>
-          </p:cNvPr>
-          <p:cNvSpPr>
-            <a:spLocks xmlns:a="http://schemas.openxmlformats.org/drawingml/2006/main" noGrp="1"/>
-          </p:cNvSpPr>
-          <p:nvPr/>
-        </p:nvSpPr>
-        <p:spPr>
-          <a:xfrm xmlns:a="http://schemas.openxmlformats.org/drawingml/2006/main">
-            <a:off x="704850" y="1647825"/>
-            <a:ext cx="2190750" cy="685800"/>
-          </a:xfrm>
-          <a:prstGeom xmlns:a="http://schemas.openxmlformats.org/drawingml/2006/main" prst="rect">
-            <a:avLst/>
-          </a:prstGeom>
-          <a:noFill xmlns:a="http://schemas.openxmlformats.org/drawingml/2006/main"/>
-          <a:ln xmlns:a="http://schemas.openxmlformats.org/drawingml/2006/main" w="0">
-            <a:noFill/>
-          </a:ln>
-        </p:spPr>
-        <p:txBody>
-          <a:bodyPr xmlns:a="http://schemas.openxmlformats.org/drawingml/2006/main" lIns="0" tIns="0" rIns="0" bIns="0" anchor="ctr"/>
-          <a:lstStyle xmlns:a="http://schemas.openxmlformats.org/drawingml/2006/main"/>
-          <a:p xmlns:a="http://schemas.openxmlformats.org/drawingml/2006/main">
-            <a:pPr algn="l">
-              <a:lnSpc>
-                <a:spcPct val="118000"/>
-              </a:lnSpc>
-              <a:buNone/>
-              <a:defRPr sz="2200" b="1">
-                <a:solidFill>
-                  <a:srgbClr val="1F4D78"/>
-                </a:solidFill>
-                <a:latin typeface="微软雅黑"/>
-                <a:ea typeface="微软雅黑"/>
-                <a:cs typeface="微软雅黑"/>
-              </a:defRPr>
-            </a:pPr>
-            <a:r>
-              <a:rPr sz="2200" b="1">
-                <a:solidFill>
-                  <a:srgbClr val="1F4D78"/>
-                </a:solidFill>
-                <a:latin typeface="微软雅黑"/>
-                <a:ea typeface="微软雅黑"/>
-                <a:cs typeface="微软雅黑"/>
-              </a:rPr>
-              <a:t>薄弱维度</a:t>
-            </a:r>
-          </a:p>
-        </p:txBody>
-      </p:sp>
-      <p:sp>
-        <p:nvSpPr>
-          <p:cNvPr id="9" name="exit-v0">
-            <a:extLst xmlns:a="http://schemas.openxmlformats.org/drawingml/2006/main">
-              <a:ext uri="{FF2B5EF4-FFF2-40B4-BE49-F238E27FC236}">
-                <a16:creationId xmlns:a16="http://schemas.microsoft.com/office/drawing/2014/main" id="{A9D13FDB-4A15-4C93-93E5-3B7A2C5CC663}"/>
-              </a:ext>
-            </a:extLst>
-          </p:cNvPr>
-          <p:cNvSpPr>
-            <a:spLocks xmlns:a="http://schemas.openxmlformats.org/drawingml/2006/main" noGrp="1"/>
-          </p:cNvSpPr>
-          <p:nvPr/>
-        </p:nvSpPr>
-        <p:spPr>
-          <a:xfrm xmlns:a="http://schemas.openxmlformats.org/drawingml/2006/main">
-            <a:off x="2990850" y="1647825"/>
-            <a:ext cx="4667250" cy="685800"/>
-          </a:xfrm>
-          <a:prstGeom xmlns:a="http://schemas.openxmlformats.org/drawingml/2006/main" prst="rect">
-            <a:avLst/>
-          </a:prstGeom>
-          <a:noFill xmlns:a="http://schemas.openxmlformats.org/drawingml/2006/main"/>
-          <a:ln xmlns:a="http://schemas.openxmlformats.org/drawingml/2006/main" w="0">
-            <a:noFill/>
-          </a:ln>
-        </p:spPr>
-        <p:txBody>
-          <a:bodyPr xmlns:a="http://schemas.openxmlformats.org/drawingml/2006/main" lIns="0" tIns="0" rIns="0" bIns="0" anchor="ctr"/>
-          <a:lstStyle xmlns:a="http://schemas.openxmlformats.org/drawingml/2006/main"/>
-          <a:p xmlns:a="http://schemas.openxmlformats.org/drawingml/2006/main">
-            <a:r>
-              <a:t/>
-            </a:r>
-          </a:p>
-        </p:txBody>
-      </p:sp>
-      <p:sp>
-        <p:nvSpPr>
-          <p:cNvPr id="10" name="exit-r0">
-            <a:extLst xmlns:a="http://schemas.openxmlformats.org/drawingml/2006/main">
-              <a:ext uri="{FF2B5EF4-FFF2-40B4-BE49-F238E27FC236}">
-                <a16:creationId xmlns:a16="http://schemas.microsoft.com/office/drawing/2014/main" id="{12295995-8632-4884-ADBB-7FCBCEABD545}"/>
-              </a:ext>
-            </a:extLst>
-          </p:cNvPr>
-          <p:cNvSpPr>
-            <a:spLocks xmlns:a="http://schemas.openxmlformats.org/drawingml/2006/main" noGrp="1"/>
-          </p:cNvSpPr>
-          <p:nvPr/>
-        </p:nvSpPr>
-        <p:spPr>
-          <a:xfrm xmlns:a="http://schemas.openxmlformats.org/drawingml/2006/main">
-            <a:off x="609600" y="2409825"/>
-            <a:ext cx="7143750" cy="14288"/>
-          </a:xfrm>
-          <a:prstGeom xmlns:a="http://schemas.openxmlformats.org/drawingml/2006/main" prst="rect">
-            <a:avLst/>
-          </a:prstGeom>
-          <a:solidFill xmlns:a="http://schemas.openxmlformats.org/drawingml/2006/main">
-            <a:srgbClr val="CDD5DB"/>
-          </a:solidFill>
-          <a:ln xmlns:a="http://schemas.openxmlformats.org/drawingml/2006/main" w="0">
-            <a:noFill/>
-          </a:ln>
-        </p:spPr>
-      </p:sp>
-      <p:sp>
-        <p:nvSpPr>
-          <p:cNvPr id="11" name="exit-l1">
-            <a:extLst xmlns:a="http://schemas.openxmlformats.org/drawingml/2006/main">
-              <a:ext uri="{FF2B5EF4-FFF2-40B4-BE49-F238E27FC236}">
-                <a16:creationId xmlns:a16="http://schemas.microsoft.com/office/drawing/2014/main" id="{93F7A66B-BCAB-415F-9A6F-41E787C09A89}"/>
-              </a:ext>
-            </a:extLst>
-          </p:cNvPr>
-          <p:cNvSpPr>
-            <a:spLocks xmlns:a="http://schemas.openxmlformats.org/drawingml/2006/main" noGrp="1"/>
-          </p:cNvSpPr>
-          <p:nvPr/>
-        </p:nvSpPr>
-        <p:spPr>
-          <a:xfrm xmlns:a="http://schemas.openxmlformats.org/drawingml/2006/main">
-            <a:off x="704850" y="2486025"/>
-            <a:ext cx="2190750" cy="685800"/>
-          </a:xfrm>
-          <a:prstGeom xmlns:a="http://schemas.openxmlformats.org/drawingml/2006/main" prst="rect">
-            <a:avLst/>
-          </a:prstGeom>
-          <a:noFill xmlns:a="http://schemas.openxmlformats.org/drawingml/2006/main"/>
-          <a:ln xmlns:a="http://schemas.openxmlformats.org/drawingml/2006/main" w="0">
-            <a:noFill/>
-          </a:ln>
-        </p:spPr>
-        <p:txBody>
-          <a:bodyPr xmlns:a="http://schemas.openxmlformats.org/drawingml/2006/main" lIns="0" tIns="0" rIns="0" bIns="0" anchor="ctr"/>
-          <a:lstStyle xmlns:a="http://schemas.openxmlformats.org/drawingml/2006/main"/>
-          <a:p xmlns:a="http://schemas.openxmlformats.org/drawingml/2006/main">
-            <a:pPr algn="l">
-              <a:lnSpc>
-                <a:spcPct val="118000"/>
-              </a:lnSpc>
-              <a:buNone/>
-              <a:defRPr sz="2200" b="1">
-                <a:solidFill>
-                  <a:srgbClr val="1F4D78"/>
-                </a:solidFill>
-                <a:latin typeface="微软雅黑"/>
-                <a:ea typeface="微软雅黑"/>
-                <a:cs typeface="微软雅黑"/>
-              </a:defRPr>
-            </a:pPr>
-            <a:r>
-              <a:rPr sz="2200" b="1">
-                <a:solidFill>
-                  <a:srgbClr val="1F4D78"/>
-                </a:solidFill>
-                <a:latin typeface="微软雅黑"/>
-                <a:ea typeface="微软雅黑"/>
-                <a:cs typeface="微软雅黑"/>
-              </a:rPr>
-              <a:t>最可执行反馈</a:t>
-            </a:r>
-          </a:p>
-        </p:txBody>
-      </p:sp>
-      <p:sp>
-        <p:nvSpPr>
-          <p:cNvPr id="12" name="exit-v1">
-            <a:extLst xmlns:a="http://schemas.openxmlformats.org/drawingml/2006/main">
-              <a:ext uri="{FF2B5EF4-FFF2-40B4-BE49-F238E27FC236}">
-                <a16:creationId xmlns:a16="http://schemas.microsoft.com/office/drawing/2014/main" id="{D2F2D295-1FB6-4A0C-B1E8-5BAAB610B0F6}"/>
-              </a:ext>
-            </a:extLst>
-          </p:cNvPr>
-          <p:cNvSpPr>
-            <a:spLocks xmlns:a="http://schemas.openxmlformats.org/drawingml/2006/main" noGrp="1"/>
-          </p:cNvSpPr>
-          <p:nvPr/>
-        </p:nvSpPr>
-        <p:spPr>
-          <a:xfrm xmlns:a="http://schemas.openxmlformats.org/drawingml/2006/main">
-            <a:off x="2990850" y="2486025"/>
-            <a:ext cx="4667250" cy="685800"/>
-          </a:xfrm>
-          <a:prstGeom xmlns:a="http://schemas.openxmlformats.org/drawingml/2006/main" prst="rect">
-            <a:avLst/>
-          </a:prstGeom>
-          <a:noFill xmlns:a="http://schemas.openxmlformats.org/drawingml/2006/main"/>
-          <a:ln xmlns:a="http://schemas.openxmlformats.org/drawingml/2006/main" w="0">
-            <a:noFill/>
-          </a:ln>
-        </p:spPr>
-        <p:txBody>
-          <a:bodyPr xmlns:a="http://schemas.openxmlformats.org/drawingml/2006/main" lIns="0" tIns="0" rIns="0" bIns="0" anchor="ctr"/>
-          <a:lstStyle xmlns:a="http://schemas.openxmlformats.org/drawingml/2006/main"/>
-          <a:p xmlns:a="http://schemas.openxmlformats.org/drawingml/2006/main">
-            <a:r>
-              <a:t/>
-            </a:r>
-          </a:p>
-        </p:txBody>
-      </p:sp>
-      <p:sp>
-        <p:nvSpPr>
-          <p:cNvPr id="13" name="exit-r1">
-            <a:extLst xmlns:a="http://schemas.openxmlformats.org/drawingml/2006/main">
-              <a:ext uri="{FF2B5EF4-FFF2-40B4-BE49-F238E27FC236}">
-                <a16:creationId xmlns:a16="http://schemas.microsoft.com/office/drawing/2014/main" id="{BD8D9C6E-A927-4C08-A65D-329D59FB4E2E}"/>
-              </a:ext>
-            </a:extLst>
-          </p:cNvPr>
-          <p:cNvSpPr>
-            <a:spLocks xmlns:a="http://schemas.openxmlformats.org/drawingml/2006/main" noGrp="1"/>
-          </p:cNvSpPr>
-          <p:nvPr/>
-        </p:nvSpPr>
-        <p:spPr>
-          <a:xfrm xmlns:a="http://schemas.openxmlformats.org/drawingml/2006/main">
-            <a:off x="609600" y="3248025"/>
-            <a:ext cx="7143750" cy="14288"/>
-          </a:xfrm>
-          <a:prstGeom xmlns:a="http://schemas.openxmlformats.org/drawingml/2006/main" prst="rect">
-            <a:avLst/>
-          </a:prstGeom>
-          <a:solidFill xmlns:a="http://schemas.openxmlformats.org/drawingml/2006/main">
-            <a:srgbClr val="CDD5DB"/>
-          </a:solidFill>
-          <a:ln xmlns:a="http://schemas.openxmlformats.org/drawingml/2006/main" w="0">
-            <a:noFill/>
-          </a:ln>
-        </p:spPr>
-      </p:sp>
-      <p:sp>
-        <p:nvSpPr>
-          <p:cNvPr id="14" name="exit-shade2">
-            <a:extLst xmlns:a="http://schemas.openxmlformats.org/drawingml/2006/main">
-              <a:ext uri="{FF2B5EF4-FFF2-40B4-BE49-F238E27FC236}">
-                <a16:creationId xmlns:a16="http://schemas.microsoft.com/office/drawing/2014/main" id="{4FB4FDEF-9075-441C-A80F-98F937A86B2B}"/>
-              </a:ext>
-            </a:extLst>
-          </p:cNvPr>
-          <p:cNvSpPr>
-            <a:spLocks xmlns:a="http://schemas.openxmlformats.org/drawingml/2006/main" noGrp="1"/>
-          </p:cNvSpPr>
-          <p:nvPr/>
-        </p:nvSpPr>
-        <p:spPr>
-          <a:xfrm xmlns:a="http://schemas.openxmlformats.org/drawingml/2006/main">
-            <a:off x="609600" y="3248025"/>
-            <a:ext cx="7143750" cy="838200"/>
-          </a:xfrm>
-          <a:prstGeom xmlns:a="http://schemas.openxmlformats.org/drawingml/2006/main" prst="rect">
-            <a:avLst/>
-          </a:prstGeom>
-          <a:solidFill xmlns:a="http://schemas.openxmlformats.org/drawingml/2006/main">
-            <a:srgbClr val="F4F6F8"/>
-          </a:solidFill>
-          <a:ln xmlns:a="http://schemas.openxmlformats.org/drawingml/2006/main" w="0">
-            <a:noFill/>
-          </a:ln>
-        </p:spPr>
-      </p:sp>
-      <p:sp>
-        <p:nvSpPr>
-          <p:cNvPr id="15" name="exit-l2">
-            <a:extLst xmlns:a="http://schemas.openxmlformats.org/drawingml/2006/main">
-              <a:ext uri="{FF2B5EF4-FFF2-40B4-BE49-F238E27FC236}">
-                <a16:creationId xmlns:a16="http://schemas.microsoft.com/office/drawing/2014/main" id="{EFE37E49-3D7E-40D2-8CAB-5EFC0ABC0EA8}"/>
-              </a:ext>
-            </a:extLst>
-          </p:cNvPr>
-          <p:cNvSpPr>
-            <a:spLocks xmlns:a="http://schemas.openxmlformats.org/drawingml/2006/main" noGrp="1"/>
-          </p:cNvSpPr>
-          <p:nvPr/>
-        </p:nvSpPr>
-        <p:spPr>
-          <a:xfrm xmlns:a="http://schemas.openxmlformats.org/drawingml/2006/main">
-            <a:off x="704850" y="3324225"/>
-            <a:ext cx="2190750" cy="685800"/>
-          </a:xfrm>
-          <a:prstGeom xmlns:a="http://schemas.openxmlformats.org/drawingml/2006/main" prst="rect">
-            <a:avLst/>
-          </a:prstGeom>
-          <a:noFill xmlns:a="http://schemas.openxmlformats.org/drawingml/2006/main"/>
-          <a:ln xmlns:a="http://schemas.openxmlformats.org/drawingml/2006/main" w="0">
-            <a:noFill/>
-          </a:ln>
-        </p:spPr>
-        <p:txBody>
-          <a:bodyPr xmlns:a="http://schemas.openxmlformats.org/drawingml/2006/main" lIns="0" tIns="0" rIns="0" bIns="0" anchor="ctr"/>
-          <a:lstStyle xmlns:a="http://schemas.openxmlformats.org/drawingml/2006/main"/>
-          <a:p xmlns:a="http://schemas.openxmlformats.org/drawingml/2006/main">
-            <a:pPr algn="l">
-              <a:lnSpc>
-                <a:spcPct val="118000"/>
-              </a:lnSpc>
-              <a:buNone/>
-              <a:defRPr sz="2200" b="1">
-                <a:solidFill>
-                  <a:srgbClr val="1F4D78"/>
-                </a:solidFill>
-                <a:latin typeface="微软雅黑"/>
-                <a:ea typeface="微软雅黑"/>
-                <a:cs typeface="微软雅黑"/>
-              </a:defRPr>
-            </a:pPr>
-            <a:r>
-              <a:rPr sz="2200" b="1">
-                <a:solidFill>
-                  <a:srgbClr val="1F4D78"/>
-                </a:solidFill>
-                <a:latin typeface="微软雅黑"/>
-                <a:ea typeface="微软雅黑"/>
-                <a:cs typeface="微软雅黑"/>
-              </a:rPr>
-              <a:t>处理动作与理由</a:t>
-            </a:r>
-          </a:p>
-        </p:txBody>
-      </p:sp>
-      <p:sp>
-        <p:nvSpPr>
-          <p:cNvPr id="16" name="exit-v2">
-            <a:extLst xmlns:a="http://schemas.openxmlformats.org/drawingml/2006/main">
-              <a:ext uri="{FF2B5EF4-FFF2-40B4-BE49-F238E27FC236}">
-                <a16:creationId xmlns:a16="http://schemas.microsoft.com/office/drawing/2014/main" id="{10E99E32-B782-4AC4-8FA2-DD11F33758D5}"/>
-              </a:ext>
-            </a:extLst>
-          </p:cNvPr>
-          <p:cNvSpPr>
-            <a:spLocks xmlns:a="http://schemas.openxmlformats.org/drawingml/2006/main" noGrp="1"/>
-          </p:cNvSpPr>
-          <p:nvPr/>
-        </p:nvSpPr>
-        <p:spPr>
-          <a:xfrm xmlns:a="http://schemas.openxmlformats.org/drawingml/2006/main">
-            <a:off x="2990850" y="3324225"/>
-            <a:ext cx="4667250" cy="685800"/>
-          </a:xfrm>
-          <a:prstGeom xmlns:a="http://schemas.openxmlformats.org/drawingml/2006/main" prst="rect">
-            <a:avLst/>
-          </a:prstGeom>
-          <a:noFill xmlns:a="http://schemas.openxmlformats.org/drawingml/2006/main"/>
-          <a:ln xmlns:a="http://schemas.openxmlformats.org/drawingml/2006/main" w="0">
-            <a:noFill/>
-          </a:ln>
-        </p:spPr>
-        <p:txBody>
-          <a:bodyPr xmlns:a="http://schemas.openxmlformats.org/drawingml/2006/main" lIns="0" tIns="0" rIns="0" bIns="0" anchor="ctr"/>
-          <a:lstStyle xmlns:a="http://schemas.openxmlformats.org/drawingml/2006/main"/>
-          <a:p xmlns:a="http://schemas.openxmlformats.org/drawingml/2006/main">
-            <a:r>
-              <a:t/>
-            </a:r>
-          </a:p>
-        </p:txBody>
-      </p:sp>
-      <p:sp>
-        <p:nvSpPr>
-          <p:cNvPr id="17" name="exit-r2">
-            <a:extLst xmlns:a="http://schemas.openxmlformats.org/drawingml/2006/main">
-              <a:ext uri="{FF2B5EF4-FFF2-40B4-BE49-F238E27FC236}">
-                <a16:creationId xmlns:a16="http://schemas.microsoft.com/office/drawing/2014/main" id="{D4E4CD39-CCFC-47EE-82DF-46AA2B076106}"/>
-              </a:ext>
-            </a:extLst>
-          </p:cNvPr>
-          <p:cNvSpPr>
-            <a:spLocks xmlns:a="http://schemas.openxmlformats.org/drawingml/2006/main" noGrp="1"/>
-          </p:cNvSpPr>
-          <p:nvPr/>
-        </p:nvSpPr>
-        <p:spPr>
-          <a:xfrm xmlns:a="http://schemas.openxmlformats.org/drawingml/2006/main">
-            <a:off x="609600" y="4086225"/>
-            <a:ext cx="7143750" cy="14288"/>
-          </a:xfrm>
-          <a:prstGeom xmlns:a="http://schemas.openxmlformats.org/drawingml/2006/main" prst="rect">
-            <a:avLst/>
-          </a:prstGeom>
-          <a:solidFill xmlns:a="http://schemas.openxmlformats.org/drawingml/2006/main">
-            <a:srgbClr val="CDD5DB"/>
-          </a:solidFill>
-          <a:ln xmlns:a="http://schemas.openxmlformats.org/drawingml/2006/main" w="0">
-            <a:noFill/>
-          </a:ln>
-        </p:spPr>
-      </p:sp>
-      <p:sp>
-        <p:nvSpPr>
-          <p:cNvPr id="18" name="exit-l3">
-            <a:extLst xmlns:a="http://schemas.openxmlformats.org/drawingml/2006/main">
-              <a:ext uri="{FF2B5EF4-FFF2-40B4-BE49-F238E27FC236}">
-                <a16:creationId xmlns:a16="http://schemas.microsoft.com/office/drawing/2014/main" id="{C1CC4329-6A05-4C74-BADF-9CCCF3B8948D}"/>
-              </a:ext>
-            </a:extLst>
-          </p:cNvPr>
-          <p:cNvSpPr>
-            <a:spLocks xmlns:a="http://schemas.openxmlformats.org/drawingml/2006/main" noGrp="1"/>
-          </p:cNvSpPr>
-          <p:nvPr/>
-        </p:nvSpPr>
-        <p:spPr>
-          <a:xfrm xmlns:a="http://schemas.openxmlformats.org/drawingml/2006/main">
-            <a:off x="704850" y="4162425"/>
-            <a:ext cx="2190750" cy="685800"/>
-          </a:xfrm>
-          <a:prstGeom xmlns:a="http://schemas.openxmlformats.org/drawingml/2006/main" prst="rect">
-            <a:avLst/>
-          </a:prstGeom>
-          <a:noFill xmlns:a="http://schemas.openxmlformats.org/drawingml/2006/main"/>
-          <a:ln xmlns:a="http://schemas.openxmlformats.org/drawingml/2006/main" w="0">
-            <a:noFill/>
-          </a:ln>
-        </p:spPr>
-        <p:txBody>
-          <a:bodyPr xmlns:a="http://schemas.openxmlformats.org/drawingml/2006/main" lIns="0" tIns="0" rIns="0" bIns="0" anchor="ctr"/>
-          <a:lstStyle xmlns:a="http://schemas.openxmlformats.org/drawingml/2006/main"/>
-          <a:p xmlns:a="http://schemas.openxmlformats.org/drawingml/2006/main">
-            <a:pPr algn="l">
-              <a:lnSpc>
-                <a:spcPct val="118000"/>
-              </a:lnSpc>
-              <a:buNone/>
-              <a:defRPr sz="2200" b="1">
-                <a:solidFill>
-                  <a:srgbClr val="1F4D78"/>
-                </a:solidFill>
-                <a:latin typeface="微软雅黑"/>
-                <a:ea typeface="微软雅黑"/>
-                <a:cs typeface="微软雅黑"/>
-              </a:defRPr>
-            </a:pPr>
-            <a:r>
-              <a:rPr sz="2200" b="1">
-                <a:solidFill>
-                  <a:srgbClr val="1F4D78"/>
-                </a:solidFill>
-                <a:latin typeface="微软雅黑"/>
-                <a:ea typeface="微软雅黑"/>
-                <a:cs typeface="微软雅黑"/>
-              </a:rPr>
-              <a:t>第 9 课最小动作</a:t>
-            </a:r>
-          </a:p>
-        </p:txBody>
-      </p:sp>
-      <p:sp>
-        <p:nvSpPr>
-          <p:cNvPr id="19" name="exit-v3">
-            <a:extLst xmlns:a="http://schemas.openxmlformats.org/drawingml/2006/main">
-              <a:ext uri="{FF2B5EF4-FFF2-40B4-BE49-F238E27FC236}">
-                <a16:creationId xmlns:a16="http://schemas.microsoft.com/office/drawing/2014/main" id="{28C7672C-8D61-49B5-A1D6-DE12463ABD70}"/>
-              </a:ext>
-            </a:extLst>
-          </p:cNvPr>
-          <p:cNvSpPr>
-            <a:spLocks xmlns:a="http://schemas.openxmlformats.org/drawingml/2006/main" noGrp="1"/>
-          </p:cNvSpPr>
-          <p:nvPr/>
-        </p:nvSpPr>
-        <p:spPr>
-          <a:xfrm xmlns:a="http://schemas.openxmlformats.org/drawingml/2006/main">
-            <a:off x="2990850" y="4162425"/>
-            <a:ext cx="4667250" cy="685800"/>
-          </a:xfrm>
-          <a:prstGeom xmlns:a="http://schemas.openxmlformats.org/drawingml/2006/main" prst="rect">
-            <a:avLst/>
-          </a:prstGeom>
-          <a:noFill xmlns:a="http://schemas.openxmlformats.org/drawingml/2006/main"/>
-          <a:ln xmlns:a="http://schemas.openxmlformats.org/drawingml/2006/main" w="0">
-            <a:noFill/>
-          </a:ln>
-        </p:spPr>
-        <p:txBody>
-          <a:bodyPr xmlns:a="http://schemas.openxmlformats.org/drawingml/2006/main" lIns="0" tIns="0" rIns="0" bIns="0" anchor="ctr"/>
-          <a:lstStyle xmlns:a="http://schemas.openxmlformats.org/drawingml/2006/main"/>
-          <a:p xmlns:a="http://schemas.openxmlformats.org/drawingml/2006/main">
-            <a:r>
-              <a:t/>
-            </a:r>
-          </a:p>
-        </p:txBody>
-      </p:sp>
-      <p:sp>
-        <p:nvSpPr>
-          <p:cNvPr id="20" name="next-bg">
-            <a:extLst xmlns:a="http://schemas.openxmlformats.org/drawingml/2006/main">
-              <a:ext uri="{FF2B5EF4-FFF2-40B4-BE49-F238E27FC236}">
-                <a16:creationId xmlns:a16="http://schemas.microsoft.com/office/drawing/2014/main" id="{FEB99151-CBAB-4016-89C0-0C12ABAFDF65}"/>
-              </a:ext>
-            </a:extLst>
-          </p:cNvPr>
-          <p:cNvSpPr>
-            <a:spLocks xmlns:a="http://schemas.openxmlformats.org/drawingml/2006/main" noGrp="1"/>
-          </p:cNvSpPr>
-          <p:nvPr/>
-        </p:nvSpPr>
-        <p:spPr>
-          <a:xfrm xmlns:a="http://schemas.openxmlformats.org/drawingml/2006/main">
-            <a:off x="8334375" y="1857375"/>
-            <a:ext cx="2714625" cy="2000250"/>
-          </a:xfrm>
-          <a:prstGeom xmlns:a="http://schemas.openxmlformats.org/drawingml/2006/main" prst="rect">
-            <a:avLst/>
-          </a:prstGeom>
-          <a:solidFill xmlns:a="http://schemas.openxmlformats.org/drawingml/2006/main">
-            <a:srgbClr val="F4F6F8"/>
-          </a:solidFill>
-          <a:ln xmlns:a="http://schemas.openxmlformats.org/drawingml/2006/main" w="0">
-            <a:noFill/>
-          </a:ln>
-        </p:spPr>
-      </p:sp>
-      <p:sp>
-        <p:nvSpPr>
-          <p:cNvPr id="21" name="next">
-            <a:extLst xmlns:a="http://schemas.openxmlformats.org/drawingml/2006/main">
-              <a:ext uri="{FF2B5EF4-FFF2-40B4-BE49-F238E27FC236}">
-                <a16:creationId xmlns:a16="http://schemas.microsoft.com/office/drawing/2014/main" id="{2C804C90-5657-45E0-8F2C-281A205353C6}"/>
-              </a:ext>
-            </a:extLst>
-          </p:cNvPr>
-          <p:cNvSpPr>
-            <a:spLocks xmlns:a="http://schemas.openxmlformats.org/drawingml/2006/main" noGrp="1"/>
-          </p:cNvSpPr>
-          <p:nvPr/>
-        </p:nvSpPr>
-        <p:spPr>
-          <a:xfrm xmlns:a="http://schemas.openxmlformats.org/drawingml/2006/main">
-            <a:off x="8486775" y="1952625"/>
-            <a:ext cx="2409825" cy="1809750"/>
-          </a:xfrm>
-          <a:prstGeom xmlns:a="http://schemas.openxmlformats.org/drawingml/2006/main" prst="rect">
-            <a:avLst/>
-          </a:prstGeom>
-          <a:noFill xmlns:a="http://schemas.openxmlformats.org/drawingml/2006/main"/>
-          <a:ln xmlns:a="http://schemas.openxmlformats.org/drawingml/2006/main" w="0">
-            <a:noFill/>
-          </a:ln>
-        </p:spPr>
-        <p:txBody>
-          <a:bodyPr xmlns:a="http://schemas.openxmlformats.org/drawingml/2006/main" lIns="0" tIns="0" rIns="0" bIns="0" anchor="ctr"/>
-          <a:lstStyle xmlns:a="http://schemas.openxmlformats.org/drawingml/2006/main"/>
-          <a:p xmlns:a="http://schemas.openxmlformats.org/drawingml/2006/main">
-            <a:pPr algn="ctr">
-              <a:lnSpc>
-                <a:spcPct val="118000"/>
-              </a:lnSpc>
-              <a:buNone/>
-              <a:defRPr sz="2200" b="0">
-                <a:solidFill>
-                  <a:srgbClr val="1F4D78"/>
-                </a:solidFill>
-                <a:latin typeface="微软雅黑"/>
-                <a:ea typeface="微软雅黑"/>
-                <a:cs typeface="微软雅黑"/>
-              </a:defRPr>
-            </a:pPr>
-            <a:r>
-              <a:rPr sz="2200" b="0">
-                <a:solidFill>
-                  <a:srgbClr val="1F4D78"/>
-                </a:solidFill>
-                <a:latin typeface="微软雅黑"/>
-                <a:ea typeface="微软雅黑"/>
-                <a:cs typeface="微软雅黑"/>
-              </a:rPr>
-              <a:t>第 9 课输入</a:t>
-            </a:r>
-          </a:p>
-          <a:p xmlns:a="http://schemas.openxmlformats.org/drawingml/2006/main">
-            <a:pPr algn="ctr">
-              <a:lnSpc>
-                <a:spcPct val="118000"/>
-              </a:lnSpc>
-              <a:buNone/>
-              <a:defRPr sz="2200" b="0">
-                <a:solidFill>
-                  <a:srgbClr val="1F4D78"/>
-                </a:solidFill>
-                <a:latin typeface="微软雅黑"/>
-                <a:ea typeface="微软雅黑"/>
-                <a:cs typeface="微软雅黑"/>
-              </a:defRPr>
-            </a:pPr>
-            <a:r>
-              <a:rPr sz="2200" b="0">
-                <a:solidFill>
-                  <a:srgbClr val="1F4D78"/>
-                </a:solidFill>
-                <a:latin typeface="微软雅黑"/>
-                <a:ea typeface="微软雅黑"/>
-                <a:cs typeface="微软雅黑"/>
-              </a:rPr>
-              <a:t>公平 baseline</a:t>
-            </a:r>
-          </a:p>
-          <a:p xmlns:a="http://schemas.openxmlformats.org/drawingml/2006/main">
-            <a:pPr algn="ctr">
-              <a:lnSpc>
-                <a:spcPct val="118000"/>
-              </a:lnSpc>
-              <a:buNone/>
-              <a:defRPr sz="2200" b="0">
-                <a:solidFill>
-                  <a:srgbClr val="1F4D78"/>
-                </a:solidFill>
-                <a:latin typeface="微软雅黑"/>
-                <a:ea typeface="微软雅黑"/>
-                <a:cs typeface="微软雅黑"/>
-              </a:defRPr>
-            </a:pPr>
-            <a:r>
-              <a:rPr sz="2200" b="0">
-                <a:solidFill>
-                  <a:srgbClr val="1F4D78"/>
-                </a:solidFill>
-                <a:latin typeface="微软雅黑"/>
-                <a:ea typeface="微软雅黑"/>
-                <a:cs typeface="微软雅黑"/>
-              </a:rPr>
-              <a:t>复现记录</a:t>
-            </a:r>
-          </a:p>
-          <a:p xmlns:a="http://schemas.openxmlformats.org/drawingml/2006/main">
-            <a:pPr algn="ctr">
-              <a:lnSpc>
-                <a:spcPct val="118000"/>
-              </a:lnSpc>
-              <a:buNone/>
-              <a:defRPr sz="2200" b="0">
-                <a:solidFill>
-                  <a:srgbClr val="1F4D78"/>
-                </a:solidFill>
-                <a:latin typeface="微软雅黑"/>
-                <a:ea typeface="微软雅黑"/>
-                <a:cs typeface="微软雅黑"/>
-              </a:defRPr>
-            </a:pPr>
-            <a:r>
-              <a:rPr sz="2200" b="0">
-                <a:solidFill>
-                  <a:srgbClr val="1F4D78"/>
-                </a:solidFill>
-                <a:latin typeface="微软雅黑"/>
-                <a:ea typeface="微软雅黑"/>
-                <a:cs typeface="微软雅黑"/>
-              </a:rPr>
-              <a:t>判断门材料包</a:t>
-            </a:r>
-          </a:p>
-        </p:txBody>
-      </p:sp>
-      <p:sp>
-        <p:nvSpPr>
-          <p:cNvPr id="22" name="nohomework">
-            <a:extLst xmlns:a="http://schemas.openxmlformats.org/drawingml/2006/main">
-              <a:ext uri="{FF2B5EF4-FFF2-40B4-BE49-F238E27FC236}">
-                <a16:creationId xmlns:a16="http://schemas.microsoft.com/office/drawing/2014/main" id="{42DC8149-5708-459E-8836-2B83A7935915}"/>
-              </a:ext>
-            </a:extLst>
-          </p:cNvPr>
-          <p:cNvSpPr>
-            <a:spLocks xmlns:a="http://schemas.openxmlformats.org/drawingml/2006/main" noGrp="1"/>
-          </p:cNvSpPr>
-          <p:nvPr/>
-        </p:nvSpPr>
-        <p:spPr>
-          <a:xfrm xmlns:a="http://schemas.openxmlformats.org/drawingml/2006/main">
-            <a:off x="2000250" y="5286375"/>
-            <a:ext cx="8191500" cy="361950"/>
-          </a:xfrm>
-          <a:prstGeom xmlns:a="http://schemas.openxmlformats.org/drawingml/2006/main" prst="rect">
-            <a:avLst/>
-          </a:prstGeom>
-          <a:noFill xmlns:a="http://schemas.openxmlformats.org/drawingml/2006/main"/>
-          <a:ln xmlns:a="http://schemas.openxmlformats.org/drawingml/2006/main" w="0">
-            <a:noFill/>
-          </a:ln>
-        </p:spPr>
-        <p:txBody>
-          <a:bodyPr xmlns:a="http://schemas.openxmlformats.org/drawingml/2006/main" lIns="0" tIns="0" rIns="0" bIns="0" anchor="t"/>
-          <a:lstStyle xmlns:a="http://schemas.openxmlformats.org/drawingml/2006/main"/>
-          <a:p xmlns:a="http://schemas.openxmlformats.org/drawingml/2006/main">
-            <a:pPr algn="ctr">
-              <a:lnSpc>
-                <a:spcPct val="118000"/>
-              </a:lnSpc>
-              <a:buNone/>
-              <a:defRPr sz="2000" b="1">
-                <a:solidFill>
-                  <a:srgbClr val="2E7D5B"/>
-                </a:solidFill>
-                <a:latin typeface="微软雅黑"/>
-                <a:ea typeface="微软雅黑"/>
-                <a:cs typeface="微软雅黑"/>
-              </a:defRPr>
-            </a:pPr>
-            <a:r>
-              <a:rPr sz="2000" b="1">
-                <a:solidFill>
-                  <a:srgbClr val="2E7D5B"/>
-                </a:solidFill>
-                <a:latin typeface="微软雅黑"/>
-                <a:ea typeface="微软雅黑"/>
-                <a:cs typeface="微软雅黑"/>
-              </a:rPr>
-              <a:t>不新增正式作业；今天的记录随第 9 课判断门统一检查</a:t>
             </a:r>
           </a:p>
         </p:txBody>
@@ -10753,35 +8448,55 @@
       </p:grpSpPr>
       <p:sp>
         <p:nvSpPr>
-          <p:cNvPr id="4" name="Text Placeholder 3">
-            <a:extLst xmlns:a="http://schemas.openxmlformats.org/drawingml/2006/main">
-              <a:ext uri="{FF2B5EF4-FFF2-40B4-BE49-F238E27FC236}">
-                <a16:creationId xmlns:a16="http://schemas.microsoft.com/office/drawing/2014/main" id="{4D941B40-7A0A-534E-3563-CA11753C8E3F}"/>
-              </a:ext>
-            </a:extLst>
-          </p:cNvPr>
-          <p:cNvSpPr>
-            <a:spLocks xmlns:a="http://schemas.openxmlformats.org/drawingml/2006/main" noGrp="1"/>
-          </p:cNvSpPr>
-          <p:nvPr>
-            <p:ph type="body" idx="14"/>
-          </p:nvPr>
-        </p:nvSpPr>
-        <p:spPr>
-          <a:xfrm xmlns:a="http://schemas.openxmlformats.org/drawingml/2006/main">
-            <a:off x="1028700" y="57150"/>
-            <a:ext cx="10668000" cy="571500"/>
-          </a:xfrm>
-        </p:spPr>
-        <p:txBody>
-          <a:bodyPr xmlns:a="http://schemas.openxmlformats.org/drawingml/2006/main" lIns="0" tIns="0" rIns="0" bIns="0" anchor="ctr"/>
-          <a:lstStyle xmlns:a="http://schemas.openxmlformats.org/drawingml/2006/main"/>
+          <p:cNvPr id="7" name="judgment-title">
+            <a:extLst xmlns:a="http://schemas.openxmlformats.org/drawingml/2006/main">
+              <a:ext uri="{FF2B5EF4-FFF2-40B4-BE49-F238E27FC236}">
+                <a16:creationId xmlns:a16="http://schemas.microsoft.com/office/drawing/2014/main" id="{5A51155B-D3DF-4A74-AEF0-4E2640E51288}"/>
+              </a:ext>
+            </a:extLst>
+          </p:cNvPr>
+          <p:cNvSpPr>
+            <a:spLocks xmlns:a="http://schemas.openxmlformats.org/drawingml/2006/main" noGrp="1"/>
+          </p:cNvSpPr>
+          <p:nvPr/>
+        </p:nvSpPr>
+        <p:spPr>
+          <a:xfrm xmlns:a="http://schemas.openxmlformats.org/drawingml/2006/main">
+            <a:off x="1028700" y="76200"/>
+            <a:ext cx="10687050" cy="514350"/>
+          </a:xfrm>
+          <a:prstGeom xmlns:a="http://schemas.openxmlformats.org/drawingml/2006/main" prst="rect">
+            <a:avLst/>
+          </a:prstGeom>
+          <a:noFill xmlns:a="http://schemas.openxmlformats.org/drawingml/2006/main"/>
+          <a:ln xmlns:a="http://schemas.openxmlformats.org/drawingml/2006/main" w="0">
+            <a:noFill/>
+          </a:ln>
+        </p:spPr>
+        <p:txBody>
+          <a:bodyPr xmlns:a="http://schemas.openxmlformats.org/drawingml/2006/main" lIns="0" tIns="0" rIns="0" bIns="0" anchor="t"/>
+          <a:lstStyle xmlns:a="http://schemas.openxmlformats.org/drawingml/2006/main">
+            <a:defPPr algn="l">
+              <a:defRPr sz="3000" b="1">
+                <a:solidFill>
+                  <a:srgbClr val="FFFFFF"/>
+                </a:solidFill>
+                <a:latin typeface="微软雅黑"/>
+                <a:ea typeface="微软雅黑"/>
+                <a:cs typeface="微软雅黑"/>
+              </a:defRPr>
+            </a:defPPr>
+          </a:lstStyle>
           <a:p xmlns:a="http://schemas.openxmlformats.org/drawingml/2006/main">
             <a:pPr algn="l">
-              <a:lnSpc>
-                <a:spcPct val="118000"/>
-              </a:lnSpc>
-              <a:buNone/>
+              <a:defRPr sz="3000" b="1">
+                <a:solidFill>
+                  <a:srgbClr val="FFFFFF"/>
+                </a:solidFill>
+                <a:latin typeface="微软雅黑"/>
+                <a:ea typeface="微软雅黑"/>
+                <a:cs typeface="微软雅黑"/>
+              </a:defRPr>
             </a:pPr>
             <a:r>
               <a:rPr sz="3000" b="1">
@@ -10792,597 +8507,383 @@
                 <a:ea typeface="微软雅黑"/>
                 <a:cs typeface="微软雅黑"/>
               </a:rPr>
-              <a:t>第 7 课之后，内部工件还没有经受外部质询</a:t>
-            </a:r>
-            <a:endParaRPr/>
-          </a:p>
-        </p:txBody>
-      </p:sp>
-      <p:sp>
-        <p:nvSpPr>
-          <p:cNvPr id="5" name="Slide Number Placeholder 4">
-            <a:extLst xmlns:a="http://schemas.openxmlformats.org/drawingml/2006/main">
-              <a:ext uri="{FF2B5EF4-FFF2-40B4-BE49-F238E27FC236}">
-                <a16:creationId xmlns:a16="http://schemas.microsoft.com/office/drawing/2014/main" id="{EBA5909F-738E-F60C-BE8C-B3F1D94548E5}"/>
-              </a:ext>
-            </a:extLst>
-          </p:cNvPr>
-          <p:cNvSpPr>
-            <a:spLocks xmlns:a="http://schemas.openxmlformats.org/drawingml/2006/main" noGrp="1"/>
-          </p:cNvSpPr>
-          <p:nvPr>
-            <p:ph type="sldNum" idx="10"/>
-          </p:nvPr>
-        </p:nvSpPr>
-        <p:spPr/>
-        <p:txBody>
-          <a:bodyPr xmlns:a="http://schemas.openxmlformats.org/drawingml/2006/main"/>
-          <a:lstStyle xmlns:a="http://schemas.openxmlformats.org/drawingml/2006/main"/>
-          <a:p xmlns:a="http://schemas.openxmlformats.org/drawingml/2006/main">
-            <a:fld id="{E2598689-54C9-18A7-3A19-ED76AA08988F}" type="slidenum">
+              <a:t>质询是否改变研究决定</a:t>
+            </a:r>
+          </a:p>
+        </p:txBody>
+      </p:sp>
+      <p:sp>
+        <p:nvSpPr>
+          <p:cNvPr id="2" name="judgment-body-0">
+            <a:extLst xmlns:a="http://schemas.openxmlformats.org/drawingml/2006/main">
+              <a:ext uri="{FF2B5EF4-FFF2-40B4-BE49-F238E27FC236}">
+                <a16:creationId xmlns:a16="http://schemas.microsoft.com/office/drawing/2014/main" id="{CCC55493-83E8-41A6-BD8C-F8C766CC34C5}"/>
+              </a:ext>
+            </a:extLst>
+          </p:cNvPr>
+          <p:cNvSpPr>
+            <a:spLocks xmlns:a="http://schemas.openxmlformats.org/drawingml/2006/main" noGrp="1"/>
+          </p:cNvSpPr>
+          <p:nvPr/>
+        </p:nvSpPr>
+        <p:spPr>
+          <a:xfrm xmlns:a="http://schemas.openxmlformats.org/drawingml/2006/main">
+            <a:off x="666750" y="1066800"/>
+            <a:ext cx="10858500" cy="1009650"/>
+          </a:xfrm>
+          <a:prstGeom xmlns:a="http://schemas.openxmlformats.org/drawingml/2006/main" prst="rect">
+            <a:avLst/>
+          </a:prstGeom>
+          <a:noFill xmlns:a="http://schemas.openxmlformats.org/drawingml/2006/main"/>
+          <a:ln xmlns:a="http://schemas.openxmlformats.org/drawingml/2006/main" w="0">
+            <a:noFill/>
+          </a:ln>
+        </p:spPr>
+        <p:txBody>
+          <a:bodyPr xmlns:a="http://schemas.openxmlformats.org/drawingml/2006/main" lIns="0" tIns="0" rIns="0" bIns="0" anchor="t"/>
+          <a:lstStyle xmlns:a="http://schemas.openxmlformats.org/drawingml/2006/main">
+            <a:defPPr algn="l">
+              <a:defRPr sz="2400" b="0">
+                <a:solidFill>
+                  <a:srgbClr val="263746"/>
+                </a:solidFill>
+                <a:latin typeface="微软雅黑"/>
+                <a:ea typeface="微软雅黑"/>
+                <a:cs typeface="微软雅黑"/>
+              </a:defRPr>
+            </a:defPPr>
+          </a:lstStyle>
+          <a:p xmlns:a="http://schemas.openxmlformats.org/drawingml/2006/main">
+            <a:pPr algn="l">
+              <a:defRPr sz="2400" b="0">
+                <a:solidFill>
+                  <a:srgbClr val="263746"/>
+                </a:solidFill>
+                <a:latin typeface="微软雅黑"/>
+                <a:ea typeface="微软雅黑"/>
+                <a:cs typeface="微软雅黑"/>
+              </a:defRPr>
+            </a:pPr>
+            <a:r>
+              <a:rPr sz="2400" b="0">
+                <a:solidFill>
+                  <a:srgbClr val="263746"/>
+                </a:solidFill>
+                <a:latin typeface="微软雅黑"/>
+                <a:ea typeface="微软雅黑"/>
+                <a:cs typeface="微软雅黑"/>
+              </a:rPr>
+              <a:t>方案：公开 gold 已参与选择；最终仍用相同 gold</a:t>
+            </a:r>
+          </a:p>
+        </p:txBody>
+      </p:sp>
+      <p:sp>
+        <p:nvSpPr>
+          <p:cNvPr id="3" name="judgment-body-1">
+            <a:extLst xmlns:a="http://schemas.openxmlformats.org/drawingml/2006/main">
+              <a:ext uri="{FF2B5EF4-FFF2-40B4-BE49-F238E27FC236}">
+                <a16:creationId xmlns:a16="http://schemas.microsoft.com/office/drawing/2014/main" id="{B66F14A4-1F9B-45C4-B6FE-917BDDD74B85}"/>
+              </a:ext>
+            </a:extLst>
+          </p:cNvPr>
+          <p:cNvSpPr>
+            <a:spLocks xmlns:a="http://schemas.openxmlformats.org/drawingml/2006/main" noGrp="1"/>
+          </p:cNvSpPr>
+          <p:nvPr/>
+        </p:nvSpPr>
+        <p:spPr>
+          <a:xfrm xmlns:a="http://schemas.openxmlformats.org/drawingml/2006/main">
+            <a:off x="666750" y="2238375"/>
+            <a:ext cx="10858500" cy="2076450"/>
+          </a:xfrm>
+          <a:prstGeom xmlns:a="http://schemas.openxmlformats.org/drawingml/2006/main" prst="rect">
+            <a:avLst/>
+          </a:prstGeom>
+          <a:noFill xmlns:a="http://schemas.openxmlformats.org/drawingml/2006/main"/>
+          <a:ln xmlns:a="http://schemas.openxmlformats.org/drawingml/2006/main" w="0">
+            <a:noFill/>
+          </a:ln>
+        </p:spPr>
+        <p:txBody>
+          <a:bodyPr xmlns:a="http://schemas.openxmlformats.org/drawingml/2006/main" lIns="0" tIns="0" rIns="0" bIns="0" anchor="t"/>
+          <a:lstStyle xmlns:a="http://schemas.openxmlformats.org/drawingml/2006/main">
+            <a:defPPr algn="l">
+              <a:defRPr sz="2400" b="0">
+                <a:solidFill>
+                  <a:srgbClr val="263746"/>
+                </a:solidFill>
+                <a:latin typeface="微软雅黑"/>
+                <a:ea typeface="微软雅黑"/>
+                <a:cs typeface="微软雅黑"/>
+              </a:defRPr>
+            </a:defPPr>
+          </a:lstStyle>
+          <a:p xmlns:a="http://schemas.openxmlformats.org/drawingml/2006/main">
+            <a:pPr algn="l">
+              <a:defRPr sz="2400" b="0">
+                <a:solidFill>
+                  <a:srgbClr val="263746"/>
+                </a:solidFill>
+                <a:latin typeface="微软雅黑"/>
+                <a:ea typeface="微软雅黑"/>
+                <a:cs typeface="微软雅黑"/>
+              </a:defRPr>
+            </a:pPr>
+            <a:r>
+              <a:rPr sz="2400" b="0">
+                <a:solidFill>
+                  <a:srgbClr val="263746"/>
+                </a:solidFill>
+                <a:latin typeface="微软雅黑"/>
+                <a:ea typeface="微软雅黑"/>
+                <a:cs typeface="微软雅黑"/>
+              </a:rPr>
+              <a:t>A｜样本扩大到一千篇</a:t>
+            </a:r>
+          </a:p>
+          <a:p xmlns:a="http://schemas.openxmlformats.org/drawingml/2006/main">
+            <a:pPr algn="l">
+              <a:defRPr sz="2400" b="0">
+                <a:solidFill>
+                  <a:srgbClr val="263746"/>
+                </a:solidFill>
+                <a:latin typeface="微软雅黑"/>
+                <a:ea typeface="微软雅黑"/>
+                <a:cs typeface="微软雅黑"/>
+              </a:defRPr>
+            </a:pPr>
+            <a:r>
+              <a:rPr sz="2400" b="0">
+                <a:solidFill>
+                  <a:srgbClr val="263746"/>
+                </a:solidFill>
+                <a:latin typeface="微软雅黑"/>
+                <a:ea typeface="微软雅黑"/>
+                <a:cs typeface="微软雅黑"/>
+              </a:rPr>
+              <a:t>B｜说明哪些判断已看过 gold，修订评价与范围</a:t>
+            </a:r>
+          </a:p>
+          <a:p xmlns:a="http://schemas.openxmlformats.org/drawingml/2006/main">
+            <a:pPr algn="l">
+              <a:defRPr sz="2400" b="0">
+                <a:solidFill>
+                  <a:srgbClr val="263746"/>
+                </a:solidFill>
+                <a:latin typeface="微软雅黑"/>
+                <a:ea typeface="微软雅黑"/>
+                <a:cs typeface="微软雅黑"/>
+              </a:defRPr>
+            </a:pPr>
+            <a:r>
+              <a:rPr sz="2400" b="0">
+                <a:solidFill>
+                  <a:srgbClr val="263746"/>
+                </a:solidFill>
+                <a:latin typeface="微软雅黑"/>
+                <a:ea typeface="微软雅黑"/>
+                <a:cs typeface="微软雅黑"/>
+              </a:rPr>
+              <a:t>C｜固定输出回放必须设置随机种子</a:t>
+            </a:r>
+          </a:p>
+        </p:txBody>
+      </p:sp>
+      <p:sp>
+        <p:nvSpPr>
+          <p:cNvPr id="4" name="judgment-body-2">
+            <a:extLst xmlns:a="http://schemas.openxmlformats.org/drawingml/2006/main">
+              <a:ext uri="{FF2B5EF4-FFF2-40B4-BE49-F238E27FC236}">
+                <a16:creationId xmlns:a16="http://schemas.microsoft.com/office/drawing/2014/main" id="{ECC3A4C4-BFCA-4A7B-9E0D-7E3E68C6ADEA}"/>
+              </a:ext>
+            </a:extLst>
+          </p:cNvPr>
+          <p:cNvSpPr>
+            <a:spLocks xmlns:a="http://schemas.openxmlformats.org/drawingml/2006/main" noGrp="1"/>
+          </p:cNvSpPr>
+          <p:nvPr/>
+        </p:nvSpPr>
+        <p:spPr>
+          <a:xfrm xmlns:a="http://schemas.openxmlformats.org/drawingml/2006/main">
+            <a:off x="666750" y="4495800"/>
+            <a:ext cx="10858500" cy="1409700"/>
+          </a:xfrm>
+          <a:prstGeom xmlns:a="http://schemas.openxmlformats.org/drawingml/2006/main" prst="rect">
+            <a:avLst/>
+          </a:prstGeom>
+          <a:noFill xmlns:a="http://schemas.openxmlformats.org/drawingml/2006/main"/>
+          <a:ln xmlns:a="http://schemas.openxmlformats.org/drawingml/2006/main" w="0">
+            <a:noFill/>
+          </a:ln>
+        </p:spPr>
+        <p:txBody>
+          <a:bodyPr xmlns:a="http://schemas.openxmlformats.org/drawingml/2006/main" lIns="0" tIns="0" rIns="0" bIns="0" anchor="t"/>
+          <a:lstStyle xmlns:a="http://schemas.openxmlformats.org/drawingml/2006/main">
+            <a:defPPr algn="l">
+              <a:defRPr sz="2200" b="0">
+                <a:solidFill>
+                  <a:srgbClr val="1F4D78"/>
+                </a:solidFill>
+                <a:latin typeface="微软雅黑"/>
+                <a:ea typeface="微软雅黑"/>
+                <a:cs typeface="微软雅黑"/>
+              </a:defRPr>
+            </a:defPPr>
+          </a:lstStyle>
+          <a:p xmlns:a="http://schemas.openxmlformats.org/drawingml/2006/main">
+            <a:pPr algn="l">
+              <a:defRPr sz="2200" b="0">
+                <a:solidFill>
+                  <a:srgbClr val="1F4D78"/>
+                </a:solidFill>
+                <a:latin typeface="微软雅黑"/>
+                <a:ea typeface="微软雅黑"/>
+                <a:cs typeface="微软雅黑"/>
+              </a:defRPr>
+            </a:pPr>
+            <a:r>
+              <a:rPr sz="2200" b="0">
+                <a:solidFill>
+                  <a:srgbClr val="1F4D78"/>
+                </a:solidFill>
+                <a:latin typeface="微软雅黑"/>
+                <a:ea typeface="微软雅黑"/>
+                <a:cs typeface="微软雅黑"/>
+              </a:rPr>
+              <a:t>逐条判断事实依据与最小改动；接受、澄清或保留异议都要有理由。</a:t>
+            </a:r>
+          </a:p>
+        </p:txBody>
+      </p:sp>
+      <p:sp>
+        <p:nvSpPr>
+          <p:cNvPr id="5" name="judgment-source">
+            <a:extLst xmlns:a="http://schemas.openxmlformats.org/drawingml/2006/main">
+              <a:ext uri="{FF2B5EF4-FFF2-40B4-BE49-F238E27FC236}">
+                <a16:creationId xmlns:a16="http://schemas.microsoft.com/office/drawing/2014/main" id="{BE2AF80C-4B4E-47B8-8E23-E62608106831}"/>
+              </a:ext>
+            </a:extLst>
+          </p:cNvPr>
+          <p:cNvSpPr>
+            <a:spLocks xmlns:a="http://schemas.openxmlformats.org/drawingml/2006/main" noGrp="1"/>
+          </p:cNvSpPr>
+          <p:nvPr/>
+        </p:nvSpPr>
+        <p:spPr>
+          <a:xfrm xmlns:a="http://schemas.openxmlformats.org/drawingml/2006/main">
+            <a:off x="666750" y="6276975"/>
+            <a:ext cx="10572750" cy="209550"/>
+          </a:xfrm>
+          <a:prstGeom xmlns:a="http://schemas.openxmlformats.org/drawingml/2006/main" prst="rect">
+            <a:avLst/>
+          </a:prstGeom>
+          <a:noFill xmlns:a="http://schemas.openxmlformats.org/drawingml/2006/main"/>
+          <a:ln xmlns:a="http://schemas.openxmlformats.org/drawingml/2006/main" w="0">
+            <a:noFill/>
+          </a:ln>
+        </p:spPr>
+        <p:txBody>
+          <a:bodyPr xmlns:a="http://schemas.openxmlformats.org/drawingml/2006/main" lIns="0" tIns="0" rIns="0" bIns="0" anchor="t"/>
+          <a:lstStyle xmlns:a="http://schemas.openxmlformats.org/drawingml/2006/main">
+            <a:defPPr algn="l">
+              <a:defRPr sz="1100" b="0">
+                <a:solidFill>
+                  <a:srgbClr val="667684"/>
+                </a:solidFill>
+                <a:latin typeface="微软雅黑"/>
+                <a:ea typeface="微软雅黑"/>
+                <a:cs typeface="微软雅黑"/>
+              </a:defRPr>
+            </a:defPPr>
+          </a:lstStyle>
+          <a:p xmlns:a="http://schemas.openxmlformats.org/drawingml/2006/main">
+            <a:pPr algn="l">
+              <a:defRPr sz="1100" b="0">
+                <a:solidFill>
+                  <a:srgbClr val="667684"/>
+                </a:solidFill>
+                <a:latin typeface="微软雅黑"/>
+                <a:ea typeface="微软雅黑"/>
+                <a:cs typeface="微软雅黑"/>
+              </a:defRPr>
+            </a:pPr>
+            <a:r>
+              <a:rPr sz="1100" b="0">
+                <a:solidFill>
+                  <a:srgbClr val="667684"/>
+                </a:solidFill>
+                <a:latin typeface="微软雅黑"/>
+                <a:ea typeface="微软雅黑"/>
+                <a:cs typeface="微软雅黑"/>
+              </a:rPr>
+              <a:t>来源：本课判断任务与讲义；构造材料及真实来源按材料包标识</a:t>
+            </a:r>
+          </a:p>
+        </p:txBody>
+      </p:sp>
+      <p:sp>
+        <p:nvSpPr>
+          <p:cNvPr id="6" name="judgment-page">
+            <a:extLst xmlns:a="http://schemas.openxmlformats.org/drawingml/2006/main">
+              <a:ext uri="{FF2B5EF4-FFF2-40B4-BE49-F238E27FC236}">
+                <a16:creationId xmlns:a16="http://schemas.microsoft.com/office/drawing/2014/main" id="{F15F5A3F-4D91-4D04-AAD6-EC97E8F563A4}"/>
+              </a:ext>
+            </a:extLst>
+          </p:cNvPr>
+          <p:cNvSpPr>
+            <a:spLocks xmlns:a="http://schemas.openxmlformats.org/drawingml/2006/main" noGrp="1"/>
+          </p:cNvSpPr>
+          <p:nvPr/>
+        </p:nvSpPr>
+        <p:spPr>
+          <a:xfrm xmlns:a="http://schemas.openxmlformats.org/drawingml/2006/main">
+            <a:off x="11715750" y="6562725"/>
+            <a:ext cx="238125" cy="171450"/>
+          </a:xfrm>
+          <a:prstGeom xmlns:a="http://schemas.openxmlformats.org/drawingml/2006/main" prst="rect">
+            <a:avLst/>
+          </a:prstGeom>
+          <a:noFill xmlns:a="http://schemas.openxmlformats.org/drawingml/2006/main"/>
+          <a:ln xmlns:a="http://schemas.openxmlformats.org/drawingml/2006/main" w="0">
+            <a:noFill/>
+          </a:ln>
+        </p:spPr>
+        <p:txBody>
+          <a:bodyPr xmlns:a="http://schemas.openxmlformats.org/drawingml/2006/main" lIns="0" tIns="0" rIns="0" bIns="0" anchor="t"/>
+          <a:lstStyle xmlns:a="http://schemas.openxmlformats.org/drawingml/2006/main">
+            <a:defPPr algn="l">
+              <a:defRPr sz="900" b="0">
+                <a:solidFill>
+                  <a:srgbClr val="A5A5A5"/>
+                </a:solidFill>
+                <a:latin typeface="微软雅黑"/>
+                <a:ea typeface="微软雅黑"/>
+                <a:cs typeface="微软雅黑"/>
+              </a:defRPr>
+            </a:defPPr>
+          </a:lstStyle>
+          <a:p xmlns:a="http://schemas.openxmlformats.org/drawingml/2006/main">
+            <a:pPr algn="l">
+              <a:defRPr sz="900" b="0">
+                <a:solidFill>
+                  <a:srgbClr val="A5A5A5"/>
+                </a:solidFill>
+                <a:latin typeface="微软雅黑"/>
+                <a:ea typeface="微软雅黑"/>
+                <a:cs typeface="微软雅黑"/>
+              </a:defRPr>
+            </a:pPr>
+            <a:r>
+              <a:rPr sz="900" b="0">
+                <a:solidFill>
+                  <a:srgbClr val="A5A5A5"/>
+                </a:solidFill>
+                <a:latin typeface="微软雅黑"/>
+                <a:ea typeface="微软雅黑"/>
+                <a:cs typeface="微软雅黑"/>
+              </a:rPr>
               <a:t>2</a:t>
-            </a:fld>
-            <a:endParaRPr/>
-          </a:p>
-        </p:txBody>
-      </p:sp>
-      <p:sp>
-        <p:nvSpPr>
-          <p:cNvPr id="6" name="left-title">
-            <a:extLst xmlns:a="http://schemas.openxmlformats.org/drawingml/2006/main">
-              <a:ext uri="{FF2B5EF4-FFF2-40B4-BE49-F238E27FC236}">
-                <a16:creationId xmlns:a16="http://schemas.microsoft.com/office/drawing/2014/main" id="{A3E6A0CB-8715-407F-B0BF-C94E5F755363}"/>
-              </a:ext>
-            </a:extLst>
-          </p:cNvPr>
-          <p:cNvSpPr>
-            <a:spLocks xmlns:a="http://schemas.openxmlformats.org/drawingml/2006/main" noGrp="1"/>
-          </p:cNvSpPr>
-          <p:nvPr/>
-        </p:nvSpPr>
-        <p:spPr>
-          <a:xfrm xmlns:a="http://schemas.openxmlformats.org/drawingml/2006/main">
-            <a:off x="609600" y="1428750"/>
-            <a:ext cx="4762500" cy="266700"/>
-          </a:xfrm>
-          <a:prstGeom xmlns:a="http://schemas.openxmlformats.org/drawingml/2006/main" prst="rect">
-            <a:avLst/>
-          </a:prstGeom>
-          <a:noFill xmlns:a="http://schemas.openxmlformats.org/drawingml/2006/main"/>
-          <a:ln xmlns:a="http://schemas.openxmlformats.org/drawingml/2006/main" w="0">
-            <a:noFill/>
-          </a:ln>
-        </p:spPr>
-        <p:txBody>
-          <a:bodyPr xmlns:a="http://schemas.openxmlformats.org/drawingml/2006/main" lIns="0" tIns="0" rIns="0" bIns="0" anchor="ctr"/>
-          <a:lstStyle xmlns:a="http://schemas.openxmlformats.org/drawingml/2006/main"/>
-          <a:p xmlns:a="http://schemas.openxmlformats.org/drawingml/2006/main">
-            <a:pPr algn="l">
-              <a:lnSpc>
-                <a:spcPct val="118000"/>
-              </a:lnSpc>
-              <a:buNone/>
-              <a:defRPr sz="2000" b="1">
-                <a:solidFill>
-                  <a:srgbClr val="2E7D5B"/>
-                </a:solidFill>
-                <a:latin typeface="微软雅黑"/>
-                <a:ea typeface="微软雅黑"/>
-                <a:cs typeface="微软雅黑"/>
-              </a:defRPr>
-            </a:pPr>
-            <a:r>
-              <a:rPr sz="2000" b="1">
-                <a:solidFill>
-                  <a:srgbClr val="2E7D5B"/>
-                </a:solidFill>
-                <a:latin typeface="微软雅黑"/>
-                <a:ea typeface="微软雅黑"/>
-                <a:cs typeface="微软雅黑"/>
-              </a:rPr>
-              <a:t>第 7 课已有</a:t>
-            </a:r>
-          </a:p>
-        </p:txBody>
-      </p:sp>
-      <p:sp>
-        <p:nvSpPr>
-          <p:cNvPr id="7" name="right-title">
-            <a:extLst xmlns:a="http://schemas.openxmlformats.org/drawingml/2006/main">
-              <a:ext uri="{FF2B5EF4-FFF2-40B4-BE49-F238E27FC236}">
-                <a16:creationId xmlns:a16="http://schemas.microsoft.com/office/drawing/2014/main" id="{0DA74E1B-1BC5-4E5F-BD65-BE43391F5D2D}"/>
-              </a:ext>
-            </a:extLst>
-          </p:cNvPr>
-          <p:cNvSpPr>
-            <a:spLocks xmlns:a="http://schemas.openxmlformats.org/drawingml/2006/main" noGrp="1"/>
-          </p:cNvSpPr>
-          <p:nvPr/>
-        </p:nvSpPr>
-        <p:spPr>
-          <a:xfrm xmlns:a="http://schemas.openxmlformats.org/drawingml/2006/main">
-            <a:off x="6477000" y="1428750"/>
-            <a:ext cx="4762500" cy="266700"/>
-          </a:xfrm>
-          <a:prstGeom xmlns:a="http://schemas.openxmlformats.org/drawingml/2006/main" prst="rect">
-            <a:avLst/>
-          </a:prstGeom>
-          <a:noFill xmlns:a="http://schemas.openxmlformats.org/drawingml/2006/main"/>
-          <a:ln xmlns:a="http://schemas.openxmlformats.org/drawingml/2006/main" w="0">
-            <a:noFill/>
-          </a:ln>
-        </p:spPr>
-        <p:txBody>
-          <a:bodyPr xmlns:a="http://schemas.openxmlformats.org/drawingml/2006/main" lIns="0" tIns="0" rIns="0" bIns="0" anchor="ctr"/>
-          <a:lstStyle xmlns:a="http://schemas.openxmlformats.org/drawingml/2006/main"/>
-          <a:p xmlns:a="http://schemas.openxmlformats.org/drawingml/2006/main">
-            <a:pPr algn="l">
-              <a:lnSpc>
-                <a:spcPct val="118000"/>
-              </a:lnSpc>
-              <a:buNone/>
-              <a:defRPr sz="2000" b="1">
-                <a:solidFill>
-                  <a:srgbClr val="A96510"/>
-                </a:solidFill>
-                <a:latin typeface="微软雅黑"/>
-                <a:ea typeface="微软雅黑"/>
-                <a:cs typeface="微软雅黑"/>
-              </a:defRPr>
-            </a:pPr>
-            <a:r>
-              <a:rPr sz="2000" b="1">
-                <a:solidFill>
-                  <a:srgbClr val="A96510"/>
-                </a:solidFill>
-                <a:latin typeface="微软雅黑"/>
-                <a:ea typeface="微软雅黑"/>
-                <a:cs typeface="微软雅黑"/>
-              </a:rPr>
-              <a:t>仍需完成</a:t>
-            </a:r>
-          </a:p>
-        </p:txBody>
-      </p:sp>
-      <p:sp>
-        <p:nvSpPr>
-          <p:cNvPr id="8" name="split-top">
-            <a:extLst xmlns:a="http://schemas.openxmlformats.org/drawingml/2006/main">
-              <a:ext uri="{FF2B5EF4-FFF2-40B4-BE49-F238E27FC236}">
-                <a16:creationId xmlns:a16="http://schemas.microsoft.com/office/drawing/2014/main" id="{827DFFF8-4FDE-484E-BAED-ECF32CB44CE5}"/>
-              </a:ext>
-            </a:extLst>
-          </p:cNvPr>
-          <p:cNvSpPr>
-            <a:spLocks xmlns:a="http://schemas.openxmlformats.org/drawingml/2006/main" noGrp="1"/>
-          </p:cNvSpPr>
-          <p:nvPr/>
-        </p:nvSpPr>
-        <p:spPr>
-          <a:xfrm xmlns:a="http://schemas.openxmlformats.org/drawingml/2006/main">
-            <a:off x="609600" y="1790700"/>
-            <a:ext cx="10858500" cy="14288"/>
-          </a:xfrm>
-          <a:prstGeom xmlns:a="http://schemas.openxmlformats.org/drawingml/2006/main" prst="rect">
-            <a:avLst/>
-          </a:prstGeom>
-          <a:solidFill xmlns:a="http://schemas.openxmlformats.org/drawingml/2006/main">
-            <a:srgbClr val="CDD5DB"/>
-          </a:solidFill>
-          <a:ln xmlns:a="http://schemas.openxmlformats.org/drawingml/2006/main" w="0">
-            <a:noFill/>
-          </a:ln>
-        </p:spPr>
-      </p:sp>
-      <p:sp>
-        <p:nvSpPr>
-          <p:cNvPr id="9" name="left-lines-0">
-            <a:extLst xmlns:a="http://schemas.openxmlformats.org/drawingml/2006/main">
-              <a:ext uri="{FF2B5EF4-FFF2-40B4-BE49-F238E27FC236}">
-                <a16:creationId xmlns:a16="http://schemas.microsoft.com/office/drawing/2014/main" id="{5AEDFC95-D5FE-41D5-8428-58EEB2BDD13D}"/>
-              </a:ext>
-            </a:extLst>
-          </p:cNvPr>
-          <p:cNvSpPr>
-            <a:spLocks xmlns:a="http://schemas.openxmlformats.org/drawingml/2006/main" noGrp="1"/>
-          </p:cNvSpPr>
-          <p:nvPr/>
-        </p:nvSpPr>
-        <p:spPr>
-          <a:xfrm xmlns:a="http://schemas.openxmlformats.org/drawingml/2006/main">
-            <a:off x="609600" y="1981200"/>
-            <a:ext cx="4953000" cy="466725"/>
-          </a:xfrm>
-          <a:prstGeom xmlns:a="http://schemas.openxmlformats.org/drawingml/2006/main" prst="rect">
-            <a:avLst/>
-          </a:prstGeom>
-          <a:noFill xmlns:a="http://schemas.openxmlformats.org/drawingml/2006/main"/>
-          <a:ln xmlns:a="http://schemas.openxmlformats.org/drawingml/2006/main" w="0">
-            <a:noFill/>
-          </a:ln>
-        </p:spPr>
-        <p:txBody>
-          <a:bodyPr xmlns:a="http://schemas.openxmlformats.org/drawingml/2006/main" lIns="0" tIns="0" rIns="0" bIns="0" anchor="ctr"/>
-          <a:lstStyle xmlns:a="http://schemas.openxmlformats.org/drawingml/2006/main"/>
-          <a:p xmlns:a="http://schemas.openxmlformats.org/drawingml/2006/main">
-            <a:pPr algn="l">
-              <a:lnSpc>
-                <a:spcPct val="118000"/>
-              </a:lnSpc>
-              <a:buNone/>
-              <a:defRPr sz="2200" b="0">
-                <a:solidFill>
-                  <a:srgbClr val="27333D"/>
-                </a:solidFill>
-                <a:latin typeface="微软雅黑"/>
-                <a:ea typeface="微软雅黑"/>
-                <a:cs typeface="微软雅黑"/>
-              </a:defRPr>
-            </a:pPr>
-            <a:r>
-              <a:rPr sz="2200" b="0">
-                <a:solidFill>
-                  <a:srgbClr val="27333D"/>
-                </a:solidFill>
-                <a:latin typeface="微软雅黑"/>
-                <a:ea typeface="微软雅黑"/>
-                <a:cs typeface="微软雅黑"/>
-              </a:rPr>
-              <a:t>•  机制假设列表</a:t>
-            </a:r>
-          </a:p>
-        </p:txBody>
-      </p:sp>
-      <p:sp>
-        <p:nvSpPr>
-          <p:cNvPr id="10" name="left-lines-1">
-            <a:extLst xmlns:a="http://schemas.openxmlformats.org/drawingml/2006/main">
-              <a:ext uri="{FF2B5EF4-FFF2-40B4-BE49-F238E27FC236}">
-                <a16:creationId xmlns:a16="http://schemas.microsoft.com/office/drawing/2014/main" id="{30A45418-4BB6-48DB-BE07-A1A31A0E2C3B}"/>
-              </a:ext>
-            </a:extLst>
-          </p:cNvPr>
-          <p:cNvSpPr>
-            <a:spLocks xmlns:a="http://schemas.openxmlformats.org/drawingml/2006/main" noGrp="1"/>
-          </p:cNvSpPr>
-          <p:nvPr/>
-        </p:nvSpPr>
-        <p:spPr>
-          <a:xfrm xmlns:a="http://schemas.openxmlformats.org/drawingml/2006/main">
-            <a:off x="609600" y="2476500"/>
-            <a:ext cx="4953000" cy="466725"/>
-          </a:xfrm>
-          <a:prstGeom xmlns:a="http://schemas.openxmlformats.org/drawingml/2006/main" prst="rect">
-            <a:avLst/>
-          </a:prstGeom>
-          <a:noFill xmlns:a="http://schemas.openxmlformats.org/drawingml/2006/main"/>
-          <a:ln xmlns:a="http://schemas.openxmlformats.org/drawingml/2006/main" w="0">
-            <a:noFill/>
-          </a:ln>
-        </p:spPr>
-        <p:txBody>
-          <a:bodyPr xmlns:a="http://schemas.openxmlformats.org/drawingml/2006/main" lIns="0" tIns="0" rIns="0" bIns="0" anchor="ctr"/>
-          <a:lstStyle xmlns:a="http://schemas.openxmlformats.org/drawingml/2006/main"/>
-          <a:p xmlns:a="http://schemas.openxmlformats.org/drawingml/2006/main">
-            <a:pPr algn="l">
-              <a:lnSpc>
-                <a:spcPct val="118000"/>
-              </a:lnSpc>
-              <a:buNone/>
-              <a:defRPr sz="2200" b="0">
-                <a:solidFill>
-                  <a:srgbClr val="27333D"/>
-                </a:solidFill>
-                <a:latin typeface="微软雅黑"/>
-                <a:ea typeface="微软雅黑"/>
-                <a:cs typeface="微软雅黑"/>
-              </a:defRPr>
-            </a:pPr>
-            <a:r>
-              <a:rPr sz="2200" b="0">
-                <a:solidFill>
-                  <a:srgbClr val="27333D"/>
-                </a:solidFill>
-                <a:latin typeface="微软雅黑"/>
-                <a:ea typeface="微软雅黑"/>
-                <a:cs typeface="微软雅黑"/>
-              </a:rPr>
-              <a:t>•  研究判断记录</a:t>
-            </a:r>
-          </a:p>
-        </p:txBody>
-      </p:sp>
-      <p:sp>
-        <p:nvSpPr>
-          <p:cNvPr id="11" name="left-lines-2">
-            <a:extLst xmlns:a="http://schemas.openxmlformats.org/drawingml/2006/main">
-              <a:ext uri="{FF2B5EF4-FFF2-40B4-BE49-F238E27FC236}">
-                <a16:creationId xmlns:a16="http://schemas.microsoft.com/office/drawing/2014/main" id="{8B3418BF-F121-434C-9C49-187BACDEB3A5}"/>
-              </a:ext>
-            </a:extLst>
-          </p:cNvPr>
-          <p:cNvSpPr>
-            <a:spLocks xmlns:a="http://schemas.openxmlformats.org/drawingml/2006/main" noGrp="1"/>
-          </p:cNvSpPr>
-          <p:nvPr/>
-        </p:nvSpPr>
-        <p:spPr>
-          <a:xfrm xmlns:a="http://schemas.openxmlformats.org/drawingml/2006/main">
-            <a:off x="609600" y="2971800"/>
-            <a:ext cx="4953000" cy="466725"/>
-          </a:xfrm>
-          <a:prstGeom xmlns:a="http://schemas.openxmlformats.org/drawingml/2006/main" prst="rect">
-            <a:avLst/>
-          </a:prstGeom>
-          <a:noFill xmlns:a="http://schemas.openxmlformats.org/drawingml/2006/main"/>
-          <a:ln xmlns:a="http://schemas.openxmlformats.org/drawingml/2006/main" w="0">
-            <a:noFill/>
-          </a:ln>
-        </p:spPr>
-        <p:txBody>
-          <a:bodyPr xmlns:a="http://schemas.openxmlformats.org/drawingml/2006/main" lIns="0" tIns="0" rIns="0" bIns="0" anchor="ctr"/>
-          <a:lstStyle xmlns:a="http://schemas.openxmlformats.org/drawingml/2006/main"/>
-          <a:p xmlns:a="http://schemas.openxmlformats.org/drawingml/2006/main">
-            <a:pPr algn="l">
-              <a:lnSpc>
-                <a:spcPct val="118000"/>
-              </a:lnSpc>
-              <a:buNone/>
-              <a:defRPr sz="2200" b="0">
-                <a:solidFill>
-                  <a:srgbClr val="27333D"/>
-                </a:solidFill>
-                <a:latin typeface="微软雅黑"/>
-                <a:ea typeface="微软雅黑"/>
-                <a:cs typeface="微软雅黑"/>
-              </a:defRPr>
-            </a:pPr>
-            <a:r>
-              <a:rPr sz="2200" b="0">
-                <a:solidFill>
-                  <a:srgbClr val="27333D"/>
-                </a:solidFill>
-                <a:latin typeface="微软雅黑"/>
-                <a:ea typeface="微软雅黑"/>
-                <a:cs typeface="微软雅黑"/>
-              </a:rPr>
-              <a:t>•  实验规格草图</a:t>
-            </a:r>
-          </a:p>
-        </p:txBody>
-      </p:sp>
-      <p:sp>
-        <p:nvSpPr>
-          <p:cNvPr id="12" name="right-lines-0">
-            <a:extLst xmlns:a="http://schemas.openxmlformats.org/drawingml/2006/main">
-              <a:ext uri="{FF2B5EF4-FFF2-40B4-BE49-F238E27FC236}">
-                <a16:creationId xmlns:a16="http://schemas.microsoft.com/office/drawing/2014/main" id="{512F402A-8A40-4481-B828-505C3EBCD153}"/>
-              </a:ext>
-            </a:extLst>
-          </p:cNvPr>
-          <p:cNvSpPr>
-            <a:spLocks xmlns:a="http://schemas.openxmlformats.org/drawingml/2006/main" noGrp="1"/>
-          </p:cNvSpPr>
-          <p:nvPr/>
-        </p:nvSpPr>
-        <p:spPr>
-          <a:xfrm xmlns:a="http://schemas.openxmlformats.org/drawingml/2006/main">
-            <a:off x="6477000" y="1981200"/>
-            <a:ext cx="4953000" cy="466725"/>
-          </a:xfrm>
-          <a:prstGeom xmlns:a="http://schemas.openxmlformats.org/drawingml/2006/main" prst="rect">
-            <a:avLst/>
-          </a:prstGeom>
-          <a:noFill xmlns:a="http://schemas.openxmlformats.org/drawingml/2006/main"/>
-          <a:ln xmlns:a="http://schemas.openxmlformats.org/drawingml/2006/main" w="0">
-            <a:noFill/>
-          </a:ln>
-        </p:spPr>
-        <p:txBody>
-          <a:bodyPr xmlns:a="http://schemas.openxmlformats.org/drawingml/2006/main" lIns="0" tIns="0" rIns="0" bIns="0" anchor="ctr"/>
-          <a:lstStyle xmlns:a="http://schemas.openxmlformats.org/drawingml/2006/main"/>
-          <a:p xmlns:a="http://schemas.openxmlformats.org/drawingml/2006/main">
-            <a:pPr algn="l">
-              <a:lnSpc>
-                <a:spcPct val="118000"/>
-              </a:lnSpc>
-              <a:buNone/>
-              <a:defRPr sz="2200" b="0">
-                <a:solidFill>
-                  <a:srgbClr val="27333D"/>
-                </a:solidFill>
-                <a:latin typeface="微软雅黑"/>
-                <a:ea typeface="微软雅黑"/>
-                <a:cs typeface="微软雅黑"/>
-              </a:defRPr>
-            </a:pPr>
-            <a:r>
-              <a:rPr sz="2200" b="0">
-                <a:solidFill>
-                  <a:srgbClr val="27333D"/>
-                </a:solidFill>
-                <a:latin typeface="微软雅黑"/>
-                <a:ea typeface="微软雅黑"/>
-                <a:cs typeface="微软雅黑"/>
-              </a:rPr>
-              <a:t>•  让方案经受外部质询</a:t>
-            </a:r>
-          </a:p>
-        </p:txBody>
-      </p:sp>
-      <p:sp>
-        <p:nvSpPr>
-          <p:cNvPr id="13" name="right-lines-1">
-            <a:extLst xmlns:a="http://schemas.openxmlformats.org/drawingml/2006/main">
-              <a:ext uri="{FF2B5EF4-FFF2-40B4-BE49-F238E27FC236}">
-                <a16:creationId xmlns:a16="http://schemas.microsoft.com/office/drawing/2014/main" id="{4DF7A9D7-A344-4AE2-82A2-3002D90CCA6C}"/>
-              </a:ext>
-            </a:extLst>
-          </p:cNvPr>
-          <p:cNvSpPr>
-            <a:spLocks xmlns:a="http://schemas.openxmlformats.org/drawingml/2006/main" noGrp="1"/>
-          </p:cNvSpPr>
-          <p:nvPr/>
-        </p:nvSpPr>
-        <p:spPr>
-          <a:xfrm xmlns:a="http://schemas.openxmlformats.org/drawingml/2006/main">
-            <a:off x="6477000" y="2476500"/>
-            <a:ext cx="4953000" cy="466725"/>
-          </a:xfrm>
-          <a:prstGeom xmlns:a="http://schemas.openxmlformats.org/drawingml/2006/main" prst="rect">
-            <a:avLst/>
-          </a:prstGeom>
-          <a:noFill xmlns:a="http://schemas.openxmlformats.org/drawingml/2006/main"/>
-          <a:ln xmlns:a="http://schemas.openxmlformats.org/drawingml/2006/main" w="0">
-            <a:noFill/>
-          </a:ln>
-        </p:spPr>
-        <p:txBody>
-          <a:bodyPr xmlns:a="http://schemas.openxmlformats.org/drawingml/2006/main" lIns="0" tIns="0" rIns="0" bIns="0" anchor="ctr"/>
-          <a:lstStyle xmlns:a="http://schemas.openxmlformats.org/drawingml/2006/main"/>
-          <a:p xmlns:a="http://schemas.openxmlformats.org/drawingml/2006/main">
-            <a:pPr algn="l">
-              <a:lnSpc>
-                <a:spcPct val="118000"/>
-              </a:lnSpc>
-              <a:buNone/>
-              <a:defRPr sz="2200" b="0">
-                <a:solidFill>
-                  <a:srgbClr val="27333D"/>
-                </a:solidFill>
-                <a:latin typeface="微软雅黑"/>
-                <a:ea typeface="微软雅黑"/>
-                <a:cs typeface="微软雅黑"/>
-              </a:defRPr>
-            </a:pPr>
-            <a:r>
-              <a:rPr sz="2200" b="0">
-                <a:solidFill>
-                  <a:srgbClr val="27333D"/>
-                </a:solidFill>
-                <a:latin typeface="微软雅黑"/>
-                <a:ea typeface="微软雅黑"/>
-                <a:cs typeface="微软雅黑"/>
-              </a:rPr>
-              <a:t>•  把反馈转成可追溯处理</a:t>
-            </a:r>
-          </a:p>
-        </p:txBody>
-      </p:sp>
-      <p:sp>
-        <p:nvSpPr>
-          <p:cNvPr id="14" name="right-lines-2">
-            <a:extLst xmlns:a="http://schemas.openxmlformats.org/drawingml/2006/main">
-              <a:ext uri="{FF2B5EF4-FFF2-40B4-BE49-F238E27FC236}">
-                <a16:creationId xmlns:a16="http://schemas.microsoft.com/office/drawing/2014/main" id="{208F906D-D75A-493C-8D3A-A6CBF093AA66}"/>
-              </a:ext>
-            </a:extLst>
-          </p:cNvPr>
-          <p:cNvSpPr>
-            <a:spLocks xmlns:a="http://schemas.openxmlformats.org/drawingml/2006/main" noGrp="1"/>
-          </p:cNvSpPr>
-          <p:nvPr/>
-        </p:nvSpPr>
-        <p:spPr>
-          <a:xfrm xmlns:a="http://schemas.openxmlformats.org/drawingml/2006/main">
-            <a:off x="6477000" y="2971800"/>
-            <a:ext cx="4953000" cy="466725"/>
-          </a:xfrm>
-          <a:prstGeom xmlns:a="http://schemas.openxmlformats.org/drawingml/2006/main" prst="rect">
-            <a:avLst/>
-          </a:prstGeom>
-          <a:noFill xmlns:a="http://schemas.openxmlformats.org/drawingml/2006/main"/>
-          <a:ln xmlns:a="http://schemas.openxmlformats.org/drawingml/2006/main" w="0">
-            <a:noFill/>
-          </a:ln>
-        </p:spPr>
-        <p:txBody>
-          <a:bodyPr xmlns:a="http://schemas.openxmlformats.org/drawingml/2006/main" lIns="0" tIns="0" rIns="0" bIns="0" anchor="ctr"/>
-          <a:lstStyle xmlns:a="http://schemas.openxmlformats.org/drawingml/2006/main"/>
-          <a:p xmlns:a="http://schemas.openxmlformats.org/drawingml/2006/main">
-            <a:pPr algn="l">
-              <a:lnSpc>
-                <a:spcPct val="118000"/>
-              </a:lnSpc>
-              <a:buNone/>
-              <a:defRPr sz="2200" b="0">
-                <a:solidFill>
-                  <a:srgbClr val="27333D"/>
-                </a:solidFill>
-                <a:latin typeface="微软雅黑"/>
-                <a:ea typeface="微软雅黑"/>
-                <a:cs typeface="微软雅黑"/>
-              </a:defRPr>
-            </a:pPr>
-            <a:r>
-              <a:rPr sz="2200" b="0">
-                <a:solidFill>
-                  <a:srgbClr val="27333D"/>
-                </a:solidFill>
-                <a:latin typeface="微软雅黑"/>
-                <a:ea typeface="微软雅黑"/>
-                <a:cs typeface="微软雅黑"/>
-              </a:rPr>
-              <a:t>•  对照第 9 课门条件预检</a:t>
-            </a:r>
-          </a:p>
-        </p:txBody>
-      </p:sp>
-      <p:sp>
-        <p:nvSpPr>
-          <p:cNvPr id="15" name="gap">
-            <a:extLst xmlns:a="http://schemas.openxmlformats.org/drawingml/2006/main">
-              <a:ext uri="{FF2B5EF4-FFF2-40B4-BE49-F238E27FC236}">
-                <a16:creationId xmlns:a16="http://schemas.microsoft.com/office/drawing/2014/main" id="{CB58C449-0CDC-4F98-A56A-371AB34B007B}"/>
-              </a:ext>
-            </a:extLst>
-          </p:cNvPr>
-          <p:cNvSpPr>
-            <a:spLocks xmlns:a="http://schemas.openxmlformats.org/drawingml/2006/main" noGrp="1"/>
-          </p:cNvSpPr>
-          <p:nvPr/>
-        </p:nvSpPr>
-        <p:spPr>
-          <a:xfrm xmlns:a="http://schemas.openxmlformats.org/drawingml/2006/main">
-            <a:off x="3000375" y="4953000"/>
-            <a:ext cx="6191250" cy="457200"/>
-          </a:xfrm>
-          <a:prstGeom xmlns:a="http://schemas.openxmlformats.org/drawingml/2006/main" prst="rect">
-            <a:avLst/>
-          </a:prstGeom>
-          <a:noFill xmlns:a="http://schemas.openxmlformats.org/drawingml/2006/main"/>
-          <a:ln xmlns:a="http://schemas.openxmlformats.org/drawingml/2006/main" w="0">
-            <a:noFill/>
-          </a:ln>
-        </p:spPr>
-        <p:txBody>
-          <a:bodyPr xmlns:a="http://schemas.openxmlformats.org/drawingml/2006/main" lIns="0" tIns="0" rIns="0" bIns="0" anchor="t"/>
-          <a:lstStyle xmlns:a="http://schemas.openxmlformats.org/drawingml/2006/main"/>
-          <a:p xmlns:a="http://schemas.openxmlformats.org/drawingml/2006/main">
-            <a:pPr algn="ctr">
-              <a:lnSpc>
-                <a:spcPct val="118000"/>
-              </a:lnSpc>
-              <a:buNone/>
-              <a:defRPr sz="2400" b="1">
-                <a:solidFill>
-                  <a:srgbClr val="C8161E"/>
-                </a:solidFill>
-                <a:latin typeface="微软雅黑"/>
-                <a:ea typeface="微软雅黑"/>
-                <a:cs typeface="微软雅黑"/>
-              </a:defRPr>
-            </a:pPr>
-            <a:r>
-              <a:rPr sz="2400" b="1">
-                <a:solidFill>
-                  <a:srgbClr val="C8161E"/>
-                </a:solidFill>
-                <a:latin typeface="微软雅黑"/>
-                <a:ea typeface="微软雅黑"/>
-                <a:cs typeface="微软雅黑"/>
-              </a:rPr>
-              <a:t>内部工件成立  ≠  经外部质询仍成立</a:t>
             </a:r>
           </a:p>
         </p:txBody>
